--- a/docs/memos/adaptive-spec-project-proposal-v3.pptx
+++ b/docs/memos/adaptive-spec-project-proposal-v3.pptx
@@ -12,6 +12,7 @@
     <p:sldId id="260" r:id="rId11"/>
     <p:sldId id="261" r:id="rId12"/>
     <p:sldId id="262" r:id="rId13"/>
+    <p:sldId id="263" r:id="rId14"/>
   </p:sldIdLst>
   <p:sldSz cx="12191695" cy="6858000" type="screen4x3"/>
   <p:notesSz cx="6858000" cy="9144000"/>
@@ -3239,6 +3240,3683 @@
         </p:nvSpPr>
         <p:spPr>
           <a:xfrm>
+            <a:off x="292608" y="128016"/>
+            <a:ext cx="11612880" cy="457200"/>
+          </a:xfrm>
+          <a:prstGeom prst="rect">
+            <a:avLst/>
+          </a:prstGeom>
+          <a:noFill/>
+        </p:spPr>
+        <p:txBody>
+          <a:bodyPr wrap="square">
+            <a:spAutoFit/>
+          </a:bodyPr>
+          <a:lstStyle/>
+          <a:p>
+            <a:pPr algn="l">
+              <a:spcBef>
+                <a:spcPts val="0"/>
+              </a:spcBef>
+              <a:spcAft>
+                <a:spcPts val="0"/>
+              </a:spcAft>
+            </a:pPr>
+            <a:r>
+              <a:rPr sz="2300" b="1">
+                <a:solidFill>
+                  <a:srgbClr val="C00000"/>
+                </a:solidFill>
+                <a:latin typeface="微软雅黑"/>
+                <a:ea typeface="微软雅黑"/>
+              </a:rPr>
+              <a:t>技术点:昇腾 NPU 自适应投机解码 —— 按置信度分配验证预算</a:t>
+            </a:r>
+          </a:p>
+        </p:txBody>
+      </p:sp>
+      <p:sp>
+        <p:nvSpPr>
+          <p:cNvPr id="3" name="Rectangle 2"/>
+          <p:cNvSpPr/>
+          <p:nvPr/>
+        </p:nvSpPr>
+        <p:spPr>
+          <a:xfrm>
+            <a:off x="292608" y="640080"/>
+            <a:ext cx="384048" cy="896112"/>
+          </a:xfrm>
+          <a:prstGeom prst="rect">
+            <a:avLst/>
+          </a:prstGeom>
+          <a:solidFill>
+            <a:srgbClr val="C00000"/>
+          </a:solidFill>
+          <a:ln>
+            <a:noFill/>
+          </a:ln>
+          <a:effectLst/>
+        </p:spPr>
+        <p:style>
+          <a:lnRef idx="1">
+            <a:schemeClr val="accent1"/>
+          </a:lnRef>
+          <a:fillRef idx="3">
+            <a:schemeClr val="accent1"/>
+          </a:fillRef>
+          <a:effectRef idx="2">
+            <a:schemeClr val="accent1"/>
+          </a:effectRef>
+          <a:fontRef idx="minor">
+            <a:schemeClr val="lt1"/>
+          </a:fontRef>
+        </p:style>
+        <p:txBody>
+          <a:bodyPr rtlCol="0" anchor="ctr" wrap="square" lIns="45720" rIns="45720" tIns="18288" bIns="18288"/>
+          <a:lstStyle/>
+          <a:p>
+            <a:pPr algn="ctr">
+              <a:spcBef>
+                <a:spcPts val="0"/>
+              </a:spcBef>
+              <a:spcAft>
+                <a:spcPts val="0"/>
+              </a:spcAft>
+            </a:pPr>
+            <a:r>
+              <a:rPr sz="1200" b="0">
+                <a:solidFill>
+                  <a:srgbClr val="FFFFFF"/>
+                </a:solidFill>
+                <a:latin typeface="微软雅黑"/>
+                <a:ea typeface="微软雅黑"/>
+              </a:rPr>
+              <a:t>挑</a:t>
+            </a:r>
+          </a:p>
+          <a:p>
+            <a:pPr algn="ctr">
+              <a:spcBef>
+                <a:spcPts val="0"/>
+              </a:spcBef>
+              <a:spcAft>
+                <a:spcPts val="0"/>
+              </a:spcAft>
+            </a:pPr>
+            <a:r>
+              <a:rPr sz="1200" b="0">
+                <a:solidFill>
+                  <a:srgbClr val="FFFFFF"/>
+                </a:solidFill>
+                <a:latin typeface="微软雅黑"/>
+                <a:ea typeface="微软雅黑"/>
+              </a:rPr>
+              <a:t>战</a:t>
+            </a:r>
+          </a:p>
+        </p:txBody>
+      </p:sp>
+      <p:sp>
+        <p:nvSpPr>
+          <p:cNvPr id="4" name="Rectangle 3"/>
+          <p:cNvSpPr/>
+          <p:nvPr/>
+        </p:nvSpPr>
+        <p:spPr>
+          <a:xfrm>
+            <a:off x="676656" y="640080"/>
+            <a:ext cx="5138928" cy="896112"/>
+          </a:xfrm>
+          <a:prstGeom prst="rect">
+            <a:avLst/>
+          </a:prstGeom>
+          <a:solidFill>
+            <a:srgbClr val="F2F2F2"/>
+          </a:solidFill>
+          <a:ln>
+            <a:noFill/>
+          </a:ln>
+          <a:effectLst/>
+        </p:spPr>
+        <p:style>
+          <a:lnRef idx="1">
+            <a:schemeClr val="accent1"/>
+          </a:lnRef>
+          <a:fillRef idx="3">
+            <a:schemeClr val="accent1"/>
+          </a:fillRef>
+          <a:effectRef idx="2">
+            <a:schemeClr val="accent1"/>
+          </a:effectRef>
+          <a:fontRef idx="minor">
+            <a:schemeClr val="lt1"/>
+          </a:fontRef>
+        </p:style>
+        <p:txBody>
+          <a:bodyPr rtlCol="0" anchor="ctr" wrap="square" lIns="45720" rIns="45720" tIns="18288" bIns="18288"/>
+          <a:lstStyle/>
+          <a:p>
+            <a:pPr algn="l">
+              <a:spcBef>
+                <a:spcPts val="100"/>
+              </a:spcBef>
+              <a:spcAft>
+                <a:spcPts val="100"/>
+              </a:spcAft>
+            </a:pPr>
+            <a:r>
+              <a:rPr sz="1050" b="0">
+                <a:solidFill>
+                  <a:srgbClr val="1B222E"/>
+                </a:solidFill>
+                <a:latin typeface="微软雅黑"/>
+                <a:ea typeface="微软雅黑"/>
+              </a:rPr>
+              <a:t>· 固定 K 对全 batch 一视同仁 —— 高置信请求本可多验,低置信请求白耗 target 算力</a:t>
+            </a:r>
+          </a:p>
+          <a:p>
+            <a:pPr algn="l">
+              <a:spcBef>
+                <a:spcPts val="100"/>
+              </a:spcBef>
+              <a:spcAft>
+                <a:spcPts val="100"/>
+              </a:spcAft>
+            </a:pPr>
+            <a:r>
+              <a:rPr sz="1050" b="0">
+                <a:solidFill>
+                  <a:srgbClr val="1B222E"/>
+                </a:solidFill>
+                <a:latin typeface="微软雅黑"/>
+                <a:ea typeface="微软雅黑"/>
+              </a:rPr>
+              <a:t>· 变长 K_i 与设备图「形状固定」天然冲突,昇腾当前按固定形状捕获</a:t>
+            </a:r>
+          </a:p>
+          <a:p>
+            <a:pPr algn="l">
+              <a:spcBef>
+                <a:spcPts val="100"/>
+              </a:spcBef>
+              <a:spcAft>
+                <a:spcPts val="100"/>
+              </a:spcAft>
+            </a:pPr>
+            <a:r>
+              <a:rPr sz="1050" b="0">
+                <a:solidFill>
+                  <a:srgbClr val="C00000"/>
+                </a:solidFill>
+                <a:latin typeface="微软雅黑"/>
+                <a:ea typeface="微软雅黑"/>
+              </a:rPr>
+              <a:t>· 昇腾侧 confidence head 根本未被加载,调度所需的信号拿不到</a:t>
+            </a:r>
+          </a:p>
+        </p:txBody>
+      </p:sp>
+      <p:sp>
+        <p:nvSpPr>
+          <p:cNvPr id="5" name="Rectangle 4"/>
+          <p:cNvSpPr/>
+          <p:nvPr/>
+        </p:nvSpPr>
+        <p:spPr>
+          <a:xfrm>
+            <a:off x="6053328" y="640080"/>
+            <a:ext cx="384048" cy="896112"/>
+          </a:xfrm>
+          <a:prstGeom prst="rect">
+            <a:avLst/>
+          </a:prstGeom>
+          <a:solidFill>
+            <a:srgbClr val="C00000"/>
+          </a:solidFill>
+          <a:ln>
+            <a:noFill/>
+          </a:ln>
+          <a:effectLst/>
+        </p:spPr>
+        <p:style>
+          <a:lnRef idx="1">
+            <a:schemeClr val="accent1"/>
+          </a:lnRef>
+          <a:fillRef idx="3">
+            <a:schemeClr val="accent1"/>
+          </a:fillRef>
+          <a:effectRef idx="2">
+            <a:schemeClr val="accent1"/>
+          </a:effectRef>
+          <a:fontRef idx="minor">
+            <a:schemeClr val="lt1"/>
+          </a:fontRef>
+        </p:style>
+        <p:txBody>
+          <a:bodyPr rtlCol="0" anchor="ctr" wrap="square" lIns="45720" rIns="45720" tIns="18288" bIns="18288"/>
+          <a:lstStyle/>
+          <a:p>
+            <a:pPr algn="ctr">
+              <a:spcBef>
+                <a:spcPts val="0"/>
+              </a:spcBef>
+              <a:spcAft>
+                <a:spcPts val="0"/>
+              </a:spcAft>
+            </a:pPr>
+            <a:r>
+              <a:rPr sz="1200" b="0">
+                <a:solidFill>
+                  <a:srgbClr val="FFFFFF"/>
+                </a:solidFill>
+                <a:latin typeface="微软雅黑"/>
+                <a:ea typeface="微软雅黑"/>
+              </a:rPr>
+              <a:t>目</a:t>
+            </a:r>
+          </a:p>
+          <a:p>
+            <a:pPr algn="ctr">
+              <a:spcBef>
+                <a:spcPts val="0"/>
+              </a:spcBef>
+              <a:spcAft>
+                <a:spcPts val="0"/>
+              </a:spcAft>
+            </a:pPr>
+            <a:r>
+              <a:rPr sz="1200" b="0">
+                <a:solidFill>
+                  <a:srgbClr val="FFFFFF"/>
+                </a:solidFill>
+                <a:latin typeface="微软雅黑"/>
+                <a:ea typeface="微软雅黑"/>
+              </a:rPr>
+              <a:t>标</a:t>
+            </a:r>
+          </a:p>
+        </p:txBody>
+      </p:sp>
+      <p:sp>
+        <p:nvSpPr>
+          <p:cNvPr id="6" name="Rectangle 5"/>
+          <p:cNvSpPr/>
+          <p:nvPr/>
+        </p:nvSpPr>
+        <p:spPr>
+          <a:xfrm>
+            <a:off x="6437376" y="640080"/>
+            <a:ext cx="5431536" cy="896112"/>
+          </a:xfrm>
+          <a:prstGeom prst="rect">
+            <a:avLst/>
+          </a:prstGeom>
+          <a:solidFill>
+            <a:srgbClr val="F2F2F2"/>
+          </a:solidFill>
+          <a:ln>
+            <a:noFill/>
+          </a:ln>
+          <a:effectLst/>
+        </p:spPr>
+        <p:style>
+          <a:lnRef idx="1">
+            <a:schemeClr val="accent1"/>
+          </a:lnRef>
+          <a:fillRef idx="3">
+            <a:schemeClr val="accent1"/>
+          </a:fillRef>
+          <a:effectRef idx="2">
+            <a:schemeClr val="accent1"/>
+          </a:effectRef>
+          <a:fontRef idx="minor">
+            <a:schemeClr val="lt1"/>
+          </a:fontRef>
+        </p:style>
+        <p:txBody>
+          <a:bodyPr rtlCol="0" anchor="ctr" wrap="square" lIns="45720" rIns="45720" tIns="18288" bIns="18288"/>
+          <a:lstStyle/>
+          <a:p>
+            <a:pPr algn="l">
+              <a:spcBef>
+                <a:spcPts val="100"/>
+              </a:spcBef>
+              <a:spcAft>
+                <a:spcPts val="100"/>
+              </a:spcAft>
+            </a:pPr>
+            <a:r>
+              <a:rPr sz="1050" b="0">
+                <a:solidFill>
+                  <a:srgbClr val="1B222E"/>
+                </a:solidFill>
+                <a:latin typeface="微软雅黑"/>
+                <a:ea typeface="微软雅黑"/>
+              </a:rPr>
+              <a:t>· 对齐上游 vLLM #47808 机制,在昇腾实现按置信度的验证预算分配</a:t>
+            </a:r>
+          </a:p>
+          <a:p>
+            <a:pPr algn="l">
+              <a:spcBef>
+                <a:spcPts val="100"/>
+              </a:spcBef>
+              <a:spcAft>
+                <a:spcPts val="100"/>
+              </a:spcAft>
+            </a:pPr>
+            <a:r>
+              <a:rPr sz="1050" b="0">
+                <a:solidFill>
+                  <a:srgbClr val="C00000"/>
+                </a:solidFill>
+                <a:latin typeface="微软雅黑"/>
+                <a:ea typeface="微软雅黑"/>
+              </a:rPr>
+              <a:t>· 同等验证预算下提升接受长度 —— 上游实测 +7.6%,收益随 target 变贵而放大</a:t>
+            </a:r>
+          </a:p>
+          <a:p>
+            <a:pPr algn="l">
+              <a:spcBef>
+                <a:spcPts val="100"/>
+              </a:spcBef>
+              <a:spcAft>
+                <a:spcPts val="100"/>
+              </a:spcAft>
+            </a:pPr>
+            <a:r>
+              <a:rPr sz="1050" b="0">
+                <a:solidFill>
+                  <a:srgbClr val="1B222E"/>
+                </a:solidFill>
+                <a:latin typeface="微软雅黑"/>
+                <a:ea typeface="微软雅黑"/>
+              </a:rPr>
+              <a:t>· 动态 K 在图模式下端到端不劣于同预算的固定 K</a:t>
+            </a:r>
+          </a:p>
+        </p:txBody>
+      </p:sp>
+      <p:sp>
+        <p:nvSpPr>
+          <p:cNvPr id="7" name="Rounded Rectangle 6"/>
+          <p:cNvSpPr/>
+          <p:nvPr/>
+        </p:nvSpPr>
+        <p:spPr>
+          <a:xfrm>
+            <a:off x="292608" y="1700784"/>
+            <a:ext cx="2304288" cy="310896"/>
+          </a:xfrm>
+          <a:prstGeom prst="roundRect">
+            <a:avLst/>
+          </a:prstGeom>
+          <a:solidFill>
+            <a:srgbClr val="1F3050"/>
+          </a:solidFill>
+          <a:ln>
+            <a:noFill/>
+          </a:ln>
+          <a:effectLst/>
+        </p:spPr>
+        <p:style>
+          <a:lnRef idx="1">
+            <a:schemeClr val="accent1"/>
+          </a:lnRef>
+          <a:fillRef idx="3">
+            <a:schemeClr val="accent1"/>
+          </a:fillRef>
+          <a:effectRef idx="2">
+            <a:schemeClr val="accent1"/>
+          </a:effectRef>
+          <a:fontRef idx="minor">
+            <a:schemeClr val="lt1"/>
+          </a:fontRef>
+        </p:style>
+        <p:txBody>
+          <a:bodyPr rtlCol="0" anchor="ctr" wrap="square" lIns="45720" rIns="45720" tIns="18288" bIns="18288"/>
+          <a:lstStyle/>
+          <a:p>
+            <a:pPr algn="ctr">
+              <a:spcBef>
+                <a:spcPts val="0"/>
+              </a:spcBef>
+              <a:spcAft>
+                <a:spcPts val="0"/>
+              </a:spcAft>
+            </a:pPr>
+            <a:r>
+              <a:rPr sz="1150" b="0">
+                <a:solidFill>
+                  <a:srgbClr val="FFFFFF"/>
+                </a:solidFill>
+                <a:latin typeface="微软雅黑"/>
+                <a:ea typeface="微软雅黑"/>
+              </a:rPr>
+              <a:t>自适应验证运行闭环</a:t>
+            </a:r>
+          </a:p>
+        </p:txBody>
+      </p:sp>
+      <p:sp>
+        <p:nvSpPr>
+          <p:cNvPr id="8" name="Rectangle 7"/>
+          <p:cNvSpPr/>
+          <p:nvPr/>
+        </p:nvSpPr>
+        <p:spPr>
+          <a:xfrm>
+            <a:off x="292608" y="2084831"/>
+            <a:ext cx="2304288" cy="310896"/>
+          </a:xfrm>
+          <a:prstGeom prst="rect">
+            <a:avLst/>
+          </a:prstGeom>
+          <a:solidFill>
+            <a:srgbClr val="E9EEF5"/>
+          </a:solidFill>
+          <a:ln>
+            <a:noFill/>
+          </a:ln>
+          <a:effectLst/>
+        </p:spPr>
+        <p:style>
+          <a:lnRef idx="1">
+            <a:schemeClr val="accent1"/>
+          </a:lnRef>
+          <a:fillRef idx="3">
+            <a:schemeClr val="accent1"/>
+          </a:fillRef>
+          <a:effectRef idx="2">
+            <a:schemeClr val="accent1"/>
+          </a:effectRef>
+          <a:fontRef idx="minor">
+            <a:schemeClr val="lt1"/>
+          </a:fontRef>
+        </p:style>
+        <p:txBody>
+          <a:bodyPr rtlCol="0" anchor="ctr" wrap="square" lIns="45720" rIns="45720" tIns="18288" bIns="18288"/>
+          <a:lstStyle/>
+          <a:p>
+            <a:pPr algn="ctr">
+              <a:spcBef>
+                <a:spcPts val="0"/>
+              </a:spcBef>
+              <a:spcAft>
+                <a:spcPts val="0"/>
+              </a:spcAft>
+            </a:pPr>
+            <a:r>
+              <a:rPr sz="850" b="0">
+                <a:solidFill>
+                  <a:srgbClr val="1B222E"/>
+                </a:solidFill>
+                <a:latin typeface="微软雅黑"/>
+                <a:ea typeface="微软雅黑"/>
+              </a:rPr>
+              <a:t>输入:草稿 block + 逐位 confidence</a:t>
+            </a:r>
+          </a:p>
+        </p:txBody>
+      </p:sp>
+      <p:sp>
+        <p:nvSpPr>
+          <p:cNvPr id="9" name="Rectangle 8"/>
+          <p:cNvSpPr/>
+          <p:nvPr/>
+        </p:nvSpPr>
+        <p:spPr>
+          <a:xfrm>
+            <a:off x="292608" y="2487168"/>
+            <a:ext cx="2304288" cy="1572768"/>
+          </a:xfrm>
+          <a:prstGeom prst="rect">
+            <a:avLst/>
+          </a:prstGeom>
+          <a:noFill/>
+          <a:ln w="15875">
+            <a:solidFill>
+              <a:srgbClr val="1F5FA8"/>
+            </a:solidFill>
+          </a:ln>
+          <a:effectLst/>
+        </p:spPr>
+        <p:style>
+          <a:lnRef idx="1">
+            <a:schemeClr val="accent1"/>
+          </a:lnRef>
+          <a:fillRef idx="3">
+            <a:schemeClr val="accent1"/>
+          </a:fillRef>
+          <a:effectRef idx="2">
+            <a:schemeClr val="accent1"/>
+          </a:effectRef>
+          <a:fontRef idx="minor">
+            <a:schemeClr val="lt1"/>
+          </a:fontRef>
+        </p:style>
+        <p:txBody>
+          <a:bodyPr rtlCol="0" anchor="ctr"/>
+          <a:lstStyle/>
+          <a:p>
+            <a:pPr algn="ctr"/>
+          </a:p>
+        </p:txBody>
+      </p:sp>
+      <p:sp>
+        <p:nvSpPr>
+          <p:cNvPr id="10" name="Rectangle 9"/>
+          <p:cNvSpPr/>
+          <p:nvPr/>
+        </p:nvSpPr>
+        <p:spPr>
+          <a:xfrm>
+            <a:off x="347472" y="2542032"/>
+            <a:ext cx="2194560" cy="256032"/>
+          </a:xfrm>
+          <a:prstGeom prst="rect">
+            <a:avLst/>
+          </a:prstGeom>
+          <a:noFill/>
+          <a:ln>
+            <a:noFill/>
+          </a:ln>
+          <a:effectLst/>
+        </p:spPr>
+        <p:style>
+          <a:lnRef idx="1">
+            <a:schemeClr val="accent1"/>
+          </a:lnRef>
+          <a:fillRef idx="3">
+            <a:schemeClr val="accent1"/>
+          </a:fillRef>
+          <a:effectRef idx="2">
+            <a:schemeClr val="accent1"/>
+          </a:effectRef>
+          <a:fontRef idx="minor">
+            <a:schemeClr val="lt1"/>
+          </a:fontRef>
+        </p:style>
+        <p:txBody>
+          <a:bodyPr rtlCol="0" anchor="ctr" wrap="square" lIns="45720" rIns="45720" tIns="18288" bIns="18288"/>
+          <a:lstStyle/>
+          <a:p>
+            <a:pPr algn="l">
+              <a:spcBef>
+                <a:spcPts val="0"/>
+              </a:spcBef>
+              <a:spcAft>
+                <a:spcPts val="0"/>
+              </a:spcAft>
+            </a:pPr>
+            <a:r>
+              <a:rPr sz="1000" b="1">
+                <a:solidFill>
+                  <a:srgbClr val="1F5FA8"/>
+                </a:solidFill>
+                <a:latin typeface="微软雅黑"/>
+                <a:ea typeface="微软雅黑"/>
+              </a:rPr>
+              <a:t>① 置信度调度闭环</a:t>
+            </a:r>
+          </a:p>
+        </p:txBody>
+      </p:sp>
+      <p:sp>
+        <p:nvSpPr>
+          <p:cNvPr id="11" name="Rectangle 10"/>
+          <p:cNvSpPr/>
+          <p:nvPr/>
+        </p:nvSpPr>
+        <p:spPr>
+          <a:xfrm>
+            <a:off x="420624" y="2834640"/>
+            <a:ext cx="2048256" cy="292608"/>
+          </a:xfrm>
+          <a:prstGeom prst="rect">
+            <a:avLst/>
+          </a:prstGeom>
+          <a:solidFill>
+            <a:srgbClr val="FFFFFF"/>
+          </a:solidFill>
+          <a:ln w="9525">
+            <a:solidFill>
+              <a:srgbClr val="1F5FA8"/>
+            </a:solidFill>
+          </a:ln>
+          <a:effectLst/>
+        </p:spPr>
+        <p:style>
+          <a:lnRef idx="1">
+            <a:schemeClr val="accent1"/>
+          </a:lnRef>
+          <a:fillRef idx="3">
+            <a:schemeClr val="accent1"/>
+          </a:fillRef>
+          <a:effectRef idx="2">
+            <a:schemeClr val="accent1"/>
+          </a:effectRef>
+          <a:fontRef idx="minor">
+            <a:schemeClr val="lt1"/>
+          </a:fontRef>
+        </p:style>
+        <p:txBody>
+          <a:bodyPr rtlCol="0" anchor="ctr" wrap="square" lIns="45720" rIns="45720" tIns="18288" bIns="18288"/>
+          <a:lstStyle/>
+          <a:p>
+            <a:pPr algn="ctr">
+              <a:spcBef>
+                <a:spcPts val="0"/>
+              </a:spcBef>
+              <a:spcAft>
+                <a:spcPts val="0"/>
+              </a:spcAft>
+            </a:pPr>
+            <a:r>
+              <a:rPr sz="900" b="0">
+                <a:solidFill>
+                  <a:srgbClr val="1B222E"/>
+                </a:solidFill>
+                <a:latin typeface="微软雅黑"/>
+                <a:ea typeface="微软雅黑"/>
+              </a:rPr>
+              <a:t>生存概率打分</a:t>
+            </a:r>
+          </a:p>
+        </p:txBody>
+      </p:sp>
+      <p:sp>
+        <p:nvSpPr>
+          <p:cNvPr id="12" name="Down Arrow 11"/>
+          <p:cNvSpPr/>
+          <p:nvPr/>
+        </p:nvSpPr>
+        <p:spPr>
+          <a:xfrm>
+            <a:off x="1399032" y="3136392"/>
+            <a:ext cx="91440" cy="73152"/>
+          </a:xfrm>
+          <a:prstGeom prst="downArrow">
+            <a:avLst/>
+          </a:prstGeom>
+          <a:solidFill>
+            <a:srgbClr val="1F5FA8"/>
+          </a:solidFill>
+          <a:ln>
+            <a:noFill/>
+          </a:ln>
+          <a:effectLst/>
+        </p:spPr>
+        <p:style>
+          <a:lnRef idx="1">
+            <a:schemeClr val="accent1"/>
+          </a:lnRef>
+          <a:fillRef idx="3">
+            <a:schemeClr val="accent1"/>
+          </a:fillRef>
+          <a:effectRef idx="2">
+            <a:schemeClr val="accent1"/>
+          </a:effectRef>
+          <a:fontRef idx="minor">
+            <a:schemeClr val="lt1"/>
+          </a:fontRef>
+        </p:style>
+        <p:txBody>
+          <a:bodyPr rtlCol="0" anchor="ctr"/>
+          <a:lstStyle/>
+          <a:p>
+            <a:pPr algn="ctr"/>
+          </a:p>
+        </p:txBody>
+      </p:sp>
+      <p:sp>
+        <p:nvSpPr>
+          <p:cNvPr id="13" name="Rectangle 12"/>
+          <p:cNvSpPr/>
+          <p:nvPr/>
+        </p:nvSpPr>
+        <p:spPr>
+          <a:xfrm>
+            <a:off x="420624" y="3218688"/>
+            <a:ext cx="2048256" cy="292608"/>
+          </a:xfrm>
+          <a:prstGeom prst="rect">
+            <a:avLst/>
+          </a:prstGeom>
+          <a:solidFill>
+            <a:srgbClr val="FFFFFF"/>
+          </a:solidFill>
+          <a:ln w="9525">
+            <a:solidFill>
+              <a:srgbClr val="1F5FA8"/>
+            </a:solidFill>
+          </a:ln>
+          <a:effectLst/>
+        </p:spPr>
+        <p:style>
+          <a:lnRef idx="1">
+            <a:schemeClr val="accent1"/>
+          </a:lnRef>
+          <a:fillRef idx="3">
+            <a:schemeClr val="accent1"/>
+          </a:fillRef>
+          <a:effectRef idx="2">
+            <a:schemeClr val="accent1"/>
+          </a:effectRef>
+          <a:fontRef idx="minor">
+            <a:schemeClr val="lt1"/>
+          </a:fontRef>
+        </p:style>
+        <p:txBody>
+          <a:bodyPr rtlCol="0" anchor="ctr" wrap="square" lIns="45720" rIns="45720" tIns="18288" bIns="18288"/>
+          <a:lstStyle/>
+          <a:p>
+            <a:pPr algn="ctr">
+              <a:spcBef>
+                <a:spcPts val="0"/>
+              </a:spcBef>
+              <a:spcAft>
+                <a:spcPts val="0"/>
+              </a:spcAft>
+            </a:pPr>
+            <a:r>
+              <a:rPr sz="900" b="0">
+                <a:solidFill>
+                  <a:srgbClr val="1B222E"/>
+                </a:solidFill>
+                <a:latin typeface="微软雅黑"/>
+                <a:ea typeface="微软雅黑"/>
+              </a:rPr>
+              <a:t>全局预算择优</a:t>
+            </a:r>
+          </a:p>
+        </p:txBody>
+      </p:sp>
+      <p:sp>
+        <p:nvSpPr>
+          <p:cNvPr id="14" name="Down Arrow 13"/>
+          <p:cNvSpPr/>
+          <p:nvPr/>
+        </p:nvSpPr>
+        <p:spPr>
+          <a:xfrm>
+            <a:off x="1399032" y="3520440"/>
+            <a:ext cx="91440" cy="73152"/>
+          </a:xfrm>
+          <a:prstGeom prst="downArrow">
+            <a:avLst/>
+          </a:prstGeom>
+          <a:solidFill>
+            <a:srgbClr val="1F5FA8"/>
+          </a:solidFill>
+          <a:ln>
+            <a:noFill/>
+          </a:ln>
+          <a:effectLst/>
+        </p:spPr>
+        <p:style>
+          <a:lnRef idx="1">
+            <a:schemeClr val="accent1"/>
+          </a:lnRef>
+          <a:fillRef idx="3">
+            <a:schemeClr val="accent1"/>
+          </a:fillRef>
+          <a:effectRef idx="2">
+            <a:schemeClr val="accent1"/>
+          </a:effectRef>
+          <a:fontRef idx="minor">
+            <a:schemeClr val="lt1"/>
+          </a:fontRef>
+        </p:style>
+        <p:txBody>
+          <a:bodyPr rtlCol="0" anchor="ctr"/>
+          <a:lstStyle/>
+          <a:p>
+            <a:pPr algn="ctr"/>
+          </a:p>
+        </p:txBody>
+      </p:sp>
+      <p:sp>
+        <p:nvSpPr>
+          <p:cNvPr id="15" name="Rectangle 14"/>
+          <p:cNvSpPr/>
+          <p:nvPr/>
+        </p:nvSpPr>
+        <p:spPr>
+          <a:xfrm>
+            <a:off x="420624" y="3602736"/>
+            <a:ext cx="2048256" cy="292608"/>
+          </a:xfrm>
+          <a:prstGeom prst="rect">
+            <a:avLst/>
+          </a:prstGeom>
+          <a:solidFill>
+            <a:srgbClr val="FFFFFF"/>
+          </a:solidFill>
+          <a:ln w="9525">
+            <a:solidFill>
+              <a:srgbClr val="1F5FA8"/>
+            </a:solidFill>
+          </a:ln>
+          <a:effectLst/>
+        </p:spPr>
+        <p:style>
+          <a:lnRef idx="1">
+            <a:schemeClr val="accent1"/>
+          </a:lnRef>
+          <a:fillRef idx="3">
+            <a:schemeClr val="accent1"/>
+          </a:fillRef>
+          <a:effectRef idx="2">
+            <a:schemeClr val="accent1"/>
+          </a:effectRef>
+          <a:fontRef idx="minor">
+            <a:schemeClr val="lt1"/>
+          </a:fontRef>
+        </p:style>
+        <p:txBody>
+          <a:bodyPr rtlCol="0" anchor="ctr" wrap="square" lIns="45720" rIns="45720" tIns="18288" bIns="18288"/>
+          <a:lstStyle/>
+          <a:p>
+            <a:pPr algn="ctr">
+              <a:spcBef>
+                <a:spcPts val="0"/>
+              </a:spcBef>
+              <a:spcAft>
+                <a:spcPts val="0"/>
+              </a:spcAft>
+            </a:pPr>
+            <a:r>
+              <a:rPr sz="900" b="0">
+                <a:solidFill>
+                  <a:srgbClr val="1B222E"/>
+                </a:solidFill>
+                <a:latin typeface="微软雅黑"/>
+                <a:ea typeface="微软雅黑"/>
+              </a:rPr>
+              <a:t>每请求 K_i</a:t>
+            </a:r>
+          </a:p>
+        </p:txBody>
+      </p:sp>
+      <p:sp>
+        <p:nvSpPr>
+          <p:cNvPr id="16" name="Down Arrow 15"/>
+          <p:cNvSpPr/>
+          <p:nvPr/>
+        </p:nvSpPr>
+        <p:spPr>
+          <a:xfrm>
+            <a:off x="1399032" y="4087368"/>
+            <a:ext cx="91440" cy="91440"/>
+          </a:xfrm>
+          <a:prstGeom prst="downArrow">
+            <a:avLst/>
+          </a:prstGeom>
+          <a:solidFill>
+            <a:srgbClr val="1B222E"/>
+          </a:solidFill>
+          <a:ln>
+            <a:noFill/>
+          </a:ln>
+          <a:effectLst/>
+        </p:spPr>
+        <p:style>
+          <a:lnRef idx="1">
+            <a:schemeClr val="accent1"/>
+          </a:lnRef>
+          <a:fillRef idx="3">
+            <a:schemeClr val="accent1"/>
+          </a:fillRef>
+          <a:effectRef idx="2">
+            <a:schemeClr val="accent1"/>
+          </a:effectRef>
+          <a:fontRef idx="minor">
+            <a:schemeClr val="lt1"/>
+          </a:fontRef>
+        </p:style>
+        <p:txBody>
+          <a:bodyPr rtlCol="0" anchor="ctr"/>
+          <a:lstStyle/>
+          <a:p>
+            <a:pPr algn="ctr"/>
+          </a:p>
+        </p:txBody>
+      </p:sp>
+      <p:sp>
+        <p:nvSpPr>
+          <p:cNvPr id="17" name="Rectangle 16"/>
+          <p:cNvSpPr/>
+          <p:nvPr/>
+        </p:nvSpPr>
+        <p:spPr>
+          <a:xfrm>
+            <a:off x="292608" y="4224528"/>
+            <a:ext cx="2304288" cy="1572768"/>
+          </a:xfrm>
+          <a:prstGeom prst="rect">
+            <a:avLst/>
+          </a:prstGeom>
+          <a:noFill/>
+          <a:ln w="15875">
+            <a:solidFill>
+              <a:srgbClr val="D3620B"/>
+            </a:solidFill>
+          </a:ln>
+          <a:effectLst/>
+        </p:spPr>
+        <p:style>
+          <a:lnRef idx="1">
+            <a:schemeClr val="accent1"/>
+          </a:lnRef>
+          <a:fillRef idx="3">
+            <a:schemeClr val="accent1"/>
+          </a:fillRef>
+          <a:effectRef idx="2">
+            <a:schemeClr val="accent1"/>
+          </a:effectRef>
+          <a:fontRef idx="minor">
+            <a:schemeClr val="lt1"/>
+          </a:fontRef>
+        </p:style>
+        <p:txBody>
+          <a:bodyPr rtlCol="0" anchor="ctr"/>
+          <a:lstStyle/>
+          <a:p>
+            <a:pPr algn="ctr"/>
+          </a:p>
+        </p:txBody>
+      </p:sp>
+      <p:sp>
+        <p:nvSpPr>
+          <p:cNvPr id="18" name="Rectangle 17"/>
+          <p:cNvSpPr/>
+          <p:nvPr/>
+        </p:nvSpPr>
+        <p:spPr>
+          <a:xfrm>
+            <a:off x="347472" y="4279392"/>
+            <a:ext cx="2194560" cy="256032"/>
+          </a:xfrm>
+          <a:prstGeom prst="rect">
+            <a:avLst/>
+          </a:prstGeom>
+          <a:noFill/>
+          <a:ln>
+            <a:noFill/>
+          </a:ln>
+          <a:effectLst/>
+        </p:spPr>
+        <p:style>
+          <a:lnRef idx="1">
+            <a:schemeClr val="accent1"/>
+          </a:lnRef>
+          <a:fillRef idx="3">
+            <a:schemeClr val="accent1"/>
+          </a:fillRef>
+          <a:effectRef idx="2">
+            <a:schemeClr val="accent1"/>
+          </a:effectRef>
+          <a:fontRef idx="minor">
+            <a:schemeClr val="lt1"/>
+          </a:fontRef>
+        </p:style>
+        <p:txBody>
+          <a:bodyPr rtlCol="0" anchor="ctr" wrap="square" lIns="45720" rIns="45720" tIns="18288" bIns="18288"/>
+          <a:lstStyle/>
+          <a:p>
+            <a:pPr algn="l">
+              <a:spcBef>
+                <a:spcPts val="0"/>
+              </a:spcBef>
+              <a:spcAft>
+                <a:spcPts val="0"/>
+              </a:spcAft>
+            </a:pPr>
+            <a:r>
+              <a:rPr sz="1000" b="1">
+                <a:solidFill>
+                  <a:srgbClr val="D3620B"/>
+                </a:solidFill>
+                <a:latin typeface="微软雅黑"/>
+                <a:ea typeface="微软雅黑"/>
+              </a:rPr>
+              <a:t>② 变长图执行闭环</a:t>
+            </a:r>
+          </a:p>
+        </p:txBody>
+      </p:sp>
+      <p:sp>
+        <p:nvSpPr>
+          <p:cNvPr id="19" name="Rectangle 18"/>
+          <p:cNvSpPr/>
+          <p:nvPr/>
+        </p:nvSpPr>
+        <p:spPr>
+          <a:xfrm>
+            <a:off x="420624" y="4572000"/>
+            <a:ext cx="2048256" cy="292608"/>
+          </a:xfrm>
+          <a:prstGeom prst="rect">
+            <a:avLst/>
+          </a:prstGeom>
+          <a:solidFill>
+            <a:srgbClr val="FFFFFF"/>
+          </a:solidFill>
+          <a:ln w="9525">
+            <a:solidFill>
+              <a:srgbClr val="D3620B"/>
+            </a:solidFill>
+          </a:ln>
+          <a:effectLst/>
+        </p:spPr>
+        <p:style>
+          <a:lnRef idx="1">
+            <a:schemeClr val="accent1"/>
+          </a:lnRef>
+          <a:fillRef idx="3">
+            <a:schemeClr val="accent1"/>
+          </a:fillRef>
+          <a:effectRef idx="2">
+            <a:schemeClr val="accent1"/>
+          </a:effectRef>
+          <a:fontRef idx="minor">
+            <a:schemeClr val="lt1"/>
+          </a:fontRef>
+        </p:style>
+        <p:txBody>
+          <a:bodyPr rtlCol="0" anchor="ctr" wrap="square" lIns="45720" rIns="45720" tIns="18288" bIns="18288"/>
+          <a:lstStyle/>
+          <a:p>
+            <a:pPr algn="ctr">
+              <a:spcBef>
+                <a:spcPts val="0"/>
+              </a:spcBef>
+              <a:spcAft>
+                <a:spcPts val="0"/>
+              </a:spcAft>
+            </a:pPr>
+            <a:r>
+              <a:rPr sz="900" b="0">
+                <a:solidFill>
+                  <a:srgbClr val="1B222E"/>
+                </a:solidFill>
+                <a:latin typeface="微软雅黑"/>
+                <a:ea typeface="微软雅黑"/>
+              </a:rPr>
+              <a:t>变长 decode 图捕获</a:t>
+            </a:r>
+          </a:p>
+        </p:txBody>
+      </p:sp>
+      <p:sp>
+        <p:nvSpPr>
+          <p:cNvPr id="20" name="Down Arrow 19"/>
+          <p:cNvSpPr/>
+          <p:nvPr/>
+        </p:nvSpPr>
+        <p:spPr>
+          <a:xfrm>
+            <a:off x="1399032" y="4873752"/>
+            <a:ext cx="91440" cy="73152"/>
+          </a:xfrm>
+          <a:prstGeom prst="downArrow">
+            <a:avLst/>
+          </a:prstGeom>
+          <a:solidFill>
+            <a:srgbClr val="D3620B"/>
+          </a:solidFill>
+          <a:ln>
+            <a:noFill/>
+          </a:ln>
+          <a:effectLst/>
+        </p:spPr>
+        <p:style>
+          <a:lnRef idx="1">
+            <a:schemeClr val="accent1"/>
+          </a:lnRef>
+          <a:fillRef idx="3">
+            <a:schemeClr val="accent1"/>
+          </a:fillRef>
+          <a:effectRef idx="2">
+            <a:schemeClr val="accent1"/>
+          </a:effectRef>
+          <a:fontRef idx="minor">
+            <a:schemeClr val="lt1"/>
+          </a:fontRef>
+        </p:style>
+        <p:txBody>
+          <a:bodyPr rtlCol="0" anchor="ctr"/>
+          <a:lstStyle/>
+          <a:p>
+            <a:pPr algn="ctr"/>
+          </a:p>
+        </p:txBody>
+      </p:sp>
+      <p:sp>
+        <p:nvSpPr>
+          <p:cNvPr id="21" name="Rectangle 20"/>
+          <p:cNvSpPr/>
+          <p:nvPr/>
+        </p:nvSpPr>
+        <p:spPr>
+          <a:xfrm>
+            <a:off x="420624" y="4956048"/>
+            <a:ext cx="2048256" cy="292608"/>
+          </a:xfrm>
+          <a:prstGeom prst="rect">
+            <a:avLst/>
+          </a:prstGeom>
+          <a:solidFill>
+            <a:srgbClr val="FFFFFF"/>
+          </a:solidFill>
+          <a:ln w="9525">
+            <a:solidFill>
+              <a:srgbClr val="D3620B"/>
+            </a:solidFill>
+          </a:ln>
+          <a:effectLst/>
+        </p:spPr>
+        <p:style>
+          <a:lnRef idx="1">
+            <a:schemeClr val="accent1"/>
+          </a:lnRef>
+          <a:fillRef idx="3">
+            <a:schemeClr val="accent1"/>
+          </a:fillRef>
+          <a:effectRef idx="2">
+            <a:schemeClr val="accent1"/>
+          </a:effectRef>
+          <a:fontRef idx="minor">
+            <a:schemeClr val="lt1"/>
+          </a:fontRef>
+        </p:style>
+        <p:txBody>
+          <a:bodyPr rtlCol="0" anchor="ctr" wrap="square" lIns="45720" rIns="45720" tIns="18288" bIns="18288"/>
+          <a:lstStyle/>
+          <a:p>
+            <a:pPr algn="ctr">
+              <a:spcBef>
+                <a:spcPts val="0"/>
+              </a:spcBef>
+              <a:spcAft>
+                <a:spcPts val="0"/>
+              </a:spcAft>
+            </a:pPr>
+            <a:r>
+              <a:rPr sz="900" b="0">
+                <a:solidFill>
+                  <a:srgbClr val="1B222E"/>
+                </a:solidFill>
+                <a:latin typeface="微软雅黑"/>
+                <a:ea typeface="微软雅黑"/>
+              </a:rPr>
+              <a:t>真机成本曲线标定</a:t>
+            </a:r>
+          </a:p>
+        </p:txBody>
+      </p:sp>
+      <p:sp>
+        <p:nvSpPr>
+          <p:cNvPr id="22" name="Down Arrow 21"/>
+          <p:cNvSpPr/>
+          <p:nvPr/>
+        </p:nvSpPr>
+        <p:spPr>
+          <a:xfrm>
+            <a:off x="1399032" y="5257800"/>
+            <a:ext cx="91440" cy="73152"/>
+          </a:xfrm>
+          <a:prstGeom prst="downArrow">
+            <a:avLst/>
+          </a:prstGeom>
+          <a:solidFill>
+            <a:srgbClr val="D3620B"/>
+          </a:solidFill>
+          <a:ln>
+            <a:noFill/>
+          </a:ln>
+          <a:effectLst/>
+        </p:spPr>
+        <p:style>
+          <a:lnRef idx="1">
+            <a:schemeClr val="accent1"/>
+          </a:lnRef>
+          <a:fillRef idx="3">
+            <a:schemeClr val="accent1"/>
+          </a:fillRef>
+          <a:effectRef idx="2">
+            <a:schemeClr val="accent1"/>
+          </a:effectRef>
+          <a:fontRef idx="minor">
+            <a:schemeClr val="lt1"/>
+          </a:fontRef>
+        </p:style>
+        <p:txBody>
+          <a:bodyPr rtlCol="0" anchor="ctr"/>
+          <a:lstStyle/>
+          <a:p>
+            <a:pPr algn="ctr"/>
+          </a:p>
+        </p:txBody>
+      </p:sp>
+      <p:sp>
+        <p:nvSpPr>
+          <p:cNvPr id="23" name="Rectangle 22"/>
+          <p:cNvSpPr/>
+          <p:nvPr/>
+        </p:nvSpPr>
+        <p:spPr>
+          <a:xfrm>
+            <a:off x="420624" y="5340096"/>
+            <a:ext cx="2048256" cy="292608"/>
+          </a:xfrm>
+          <a:prstGeom prst="rect">
+            <a:avLst/>
+          </a:prstGeom>
+          <a:solidFill>
+            <a:srgbClr val="FFFFFF"/>
+          </a:solidFill>
+          <a:ln w="9525">
+            <a:solidFill>
+              <a:srgbClr val="D3620B"/>
+            </a:solidFill>
+          </a:ln>
+          <a:effectLst/>
+        </p:spPr>
+        <p:style>
+          <a:lnRef idx="1">
+            <a:schemeClr val="accent1"/>
+          </a:lnRef>
+          <a:fillRef idx="3">
+            <a:schemeClr val="accent1"/>
+          </a:fillRef>
+          <a:effectRef idx="2">
+            <a:schemeClr val="accent1"/>
+          </a:effectRef>
+          <a:fontRef idx="minor">
+            <a:schemeClr val="lt1"/>
+          </a:fontRef>
+        </p:style>
+        <p:txBody>
+          <a:bodyPr rtlCol="0" anchor="ctr" wrap="square" lIns="45720" rIns="45720" tIns="18288" bIns="18288"/>
+          <a:lstStyle/>
+          <a:p>
+            <a:pPr algn="ctr">
+              <a:spcBef>
+                <a:spcPts val="0"/>
+              </a:spcBef>
+              <a:spcAft>
+                <a:spcPts val="0"/>
+              </a:spcAft>
+            </a:pPr>
+            <a:r>
+              <a:rPr sz="900" b="0">
+                <a:solidFill>
+                  <a:srgbClr val="1B222E"/>
+                </a:solidFill>
+                <a:latin typeface="微软雅黑"/>
+                <a:ea typeface="微软雅黑"/>
+              </a:rPr>
+              <a:t>场景配置</a:t>
+            </a:r>
+          </a:p>
+        </p:txBody>
+      </p:sp>
+      <p:sp>
+        <p:nvSpPr>
+          <p:cNvPr id="24" name="Rectangle 23"/>
+          <p:cNvSpPr/>
+          <p:nvPr/>
+        </p:nvSpPr>
+        <p:spPr>
+          <a:xfrm>
+            <a:off x="292608" y="5907024"/>
+            <a:ext cx="2304288" cy="329184"/>
+          </a:xfrm>
+          <a:prstGeom prst="rect">
+            <a:avLst/>
+          </a:prstGeom>
+          <a:solidFill>
+            <a:srgbClr val="E9EEF5"/>
+          </a:solidFill>
+          <a:ln>
+            <a:noFill/>
+          </a:ln>
+          <a:effectLst/>
+        </p:spPr>
+        <p:style>
+          <a:lnRef idx="1">
+            <a:schemeClr val="accent1"/>
+          </a:lnRef>
+          <a:fillRef idx="3">
+            <a:schemeClr val="accent1"/>
+          </a:fillRef>
+          <a:effectRef idx="2">
+            <a:schemeClr val="accent1"/>
+          </a:effectRef>
+          <a:fontRef idx="minor">
+            <a:schemeClr val="lt1"/>
+          </a:fontRef>
+        </p:style>
+        <p:txBody>
+          <a:bodyPr rtlCol="0" anchor="ctr" wrap="square" lIns="45720" rIns="45720" tIns="18288" bIns="18288"/>
+          <a:lstStyle/>
+          <a:p>
+            <a:pPr algn="ctr">
+              <a:spcBef>
+                <a:spcPts val="0"/>
+              </a:spcBef>
+              <a:spcAft>
+                <a:spcPts val="0"/>
+              </a:spcAft>
+            </a:pPr>
+            <a:r>
+              <a:rPr sz="950" b="1">
+                <a:solidFill>
+                  <a:srgbClr val="1B222E"/>
+                </a:solidFill>
+                <a:latin typeface="微软雅黑"/>
+                <a:ea typeface="微软雅黑"/>
+              </a:rPr>
+              <a:t>可部署:动态 K 投机解码</a:t>
+            </a:r>
+          </a:p>
+        </p:txBody>
+      </p:sp>
+      <p:sp>
+        <p:nvSpPr>
+          <p:cNvPr id="25" name="TextBox 24"/>
+          <p:cNvSpPr txBox="1"/>
+          <p:nvPr/>
+        </p:nvSpPr>
+        <p:spPr>
+          <a:xfrm>
+            <a:off x="274320" y="6291072"/>
+            <a:ext cx="2395728" cy="457200"/>
+          </a:xfrm>
+          <a:prstGeom prst="rect">
+            <a:avLst/>
+          </a:prstGeom>
+          <a:noFill/>
+        </p:spPr>
+        <p:txBody>
+          <a:bodyPr wrap="square">
+            <a:spAutoFit/>
+          </a:bodyPr>
+          <a:lstStyle/>
+          <a:p>
+            <a:pPr algn="l">
+              <a:spcBef>
+                <a:spcPts val="0"/>
+              </a:spcBef>
+              <a:spcAft>
+                <a:spcPts val="0"/>
+              </a:spcAft>
+            </a:pPr>
+            <a:r>
+              <a:rPr sz="800" b="0">
+                <a:solidFill>
+                  <a:srgbClr val="C00000"/>
+                </a:solidFill>
+                <a:latin typeface="微软雅黑"/>
+                <a:ea typeface="微软雅黑"/>
+              </a:rPr>
+              <a:t>信号不可用 → 回草稿侧重拟合置信度头</a:t>
+            </a:r>
+          </a:p>
+        </p:txBody>
+      </p:sp>
+      <p:sp>
+        <p:nvSpPr>
+          <p:cNvPr id="26" name="Rectangle 25"/>
+          <p:cNvSpPr/>
+          <p:nvPr/>
+        </p:nvSpPr>
+        <p:spPr>
+          <a:xfrm>
+            <a:off x="2724912" y="1700784"/>
+            <a:ext cx="6784848" cy="2359152"/>
+          </a:xfrm>
+          <a:prstGeom prst="rect">
+            <a:avLst/>
+          </a:prstGeom>
+          <a:noFill/>
+          <a:ln w="19050">
+            <a:solidFill>
+              <a:srgbClr val="1F5FA8"/>
+            </a:solidFill>
+          </a:ln>
+          <a:effectLst/>
+        </p:spPr>
+        <p:style>
+          <a:lnRef idx="1">
+            <a:schemeClr val="accent1"/>
+          </a:lnRef>
+          <a:fillRef idx="3">
+            <a:schemeClr val="accent1"/>
+          </a:fillRef>
+          <a:effectRef idx="2">
+            <a:schemeClr val="accent1"/>
+          </a:effectRef>
+          <a:fontRef idx="minor">
+            <a:schemeClr val="lt1"/>
+          </a:fontRef>
+        </p:style>
+        <p:txBody>
+          <a:bodyPr rtlCol="0" anchor="ctr"/>
+          <a:lstStyle/>
+          <a:p>
+            <a:pPr algn="ctr"/>
+          </a:p>
+        </p:txBody>
+      </p:sp>
+      <p:sp>
+        <p:nvSpPr>
+          <p:cNvPr id="27" name="TextBox 26"/>
+          <p:cNvSpPr txBox="1"/>
+          <p:nvPr/>
+        </p:nvSpPr>
+        <p:spPr>
+          <a:xfrm>
+            <a:off x="2834640" y="1773936"/>
+            <a:ext cx="3566160" cy="310896"/>
+          </a:xfrm>
+          <a:prstGeom prst="rect">
+            <a:avLst/>
+          </a:prstGeom>
+          <a:noFill/>
+        </p:spPr>
+        <p:txBody>
+          <a:bodyPr wrap="square">
+            <a:spAutoFit/>
+          </a:bodyPr>
+          <a:lstStyle/>
+          <a:p>
+            <a:pPr algn="l">
+              <a:spcBef>
+                <a:spcPts val="0"/>
+              </a:spcBef>
+              <a:spcAft>
+                <a:spcPts val="0"/>
+              </a:spcAft>
+            </a:pPr>
+            <a:r>
+              <a:rPr sz="1300" b="1">
+                <a:solidFill>
+                  <a:srgbClr val="1F5FA8"/>
+                </a:solidFill>
+                <a:latin typeface="微软雅黑"/>
+                <a:ea typeface="微软雅黑"/>
+              </a:rPr>
+              <a:t>① 置信度调度(算法侧,对标 #47808)</a:t>
+            </a:r>
+          </a:p>
+        </p:txBody>
+      </p:sp>
+      <p:sp>
+        <p:nvSpPr>
+          <p:cNvPr id="28" name="TextBox 27"/>
+          <p:cNvSpPr txBox="1"/>
+          <p:nvPr/>
+        </p:nvSpPr>
+        <p:spPr>
+          <a:xfrm>
+            <a:off x="2834640" y="2139696"/>
+            <a:ext cx="3520440" cy="1737360"/>
+          </a:xfrm>
+          <a:prstGeom prst="rect">
+            <a:avLst/>
+          </a:prstGeom>
+          <a:noFill/>
+        </p:spPr>
+        <p:txBody>
+          <a:bodyPr wrap="square">
+            <a:spAutoFit/>
+          </a:bodyPr>
+          <a:lstStyle/>
+          <a:p>
+            <a:pPr algn="l">
+              <a:spcBef>
+                <a:spcPts val="0"/>
+              </a:spcBef>
+              <a:spcAft>
+                <a:spcPts val="0"/>
+              </a:spcAft>
+            </a:pPr>
+            <a:r>
+              <a:rPr sz="1000" b="1">
+                <a:solidFill>
+                  <a:srgbClr val="1B222E"/>
+                </a:solidFill>
+                <a:latin typeface="微软雅黑"/>
+                <a:ea typeface="微软雅黑"/>
+              </a:rPr>
+              <a:t>A. 生存概率打分</a:t>
+            </a:r>
+          </a:p>
+          <a:p>
+            <a:pPr algn="l">
+              <a:spcBef>
+                <a:spcPts val="200"/>
+              </a:spcBef>
+              <a:spcAft>
+                <a:spcPts val="0"/>
+              </a:spcAft>
+            </a:pPr>
+            <a:r>
+              <a:rPr sz="900" b="0">
+                <a:solidFill>
+                  <a:srgbClr val="1B222E"/>
+                </a:solidFill>
+                <a:latin typeface="微软雅黑"/>
+                <a:ea typeface="微软雅黑"/>
+              </a:rPr>
+              <a:t>每个 (请求, 位置) 的 draft slot 以该请求逐位 confidence 的累积乘积打分。</a:t>
+            </a:r>
+          </a:p>
+          <a:p>
+            <a:pPr algn="l">
+              <a:spcBef>
+                <a:spcPts val="200"/>
+              </a:spcBef>
+              <a:spcAft>
+                <a:spcPts val="0"/>
+              </a:spcAft>
+            </a:pPr>
+            <a:r>
+              <a:rPr sz="1000" b="1">
+                <a:solidFill>
+                  <a:srgbClr val="1B222E"/>
+                </a:solidFill>
+                <a:latin typeface="微软雅黑"/>
+                <a:ea typeface="微软雅黑"/>
+              </a:rPr>
+              <a:t>B. 跨请求竞争的全局预算</a:t>
+            </a:r>
+          </a:p>
+          <a:p>
+            <a:pPr algn="l">
+              <a:spcBef>
+                <a:spcPts val="200"/>
+              </a:spcBef>
+              <a:spcAft>
+                <a:spcPts val="0"/>
+              </a:spcAft>
+            </a:pPr>
+            <a:r>
+              <a:rPr sz="900" b="0">
+                <a:solidFill>
+                  <a:srgbClr val="1B222E"/>
+                </a:solidFill>
+                <a:latin typeface="微软雅黑"/>
+                <a:ea typeface="微软雅黑"/>
+              </a:rPr>
+              <a:t>所有 slot 统一排序、择优录取直至预算耗尽 —— 自信请求的第 5 位可压过犹豫请求的第 1 位。</a:t>
+            </a:r>
+          </a:p>
+          <a:p>
+            <a:pPr algn="l">
+              <a:spcBef>
+                <a:spcPts val="200"/>
+              </a:spcBef>
+              <a:spcAft>
+                <a:spcPts val="0"/>
+              </a:spcAft>
+            </a:pPr>
+            <a:r>
+              <a:rPr sz="1000" b="1">
+                <a:solidFill>
+                  <a:srgbClr val="1B222E"/>
+                </a:solidFill>
+                <a:latin typeface="微软雅黑"/>
+                <a:ea typeface="微软雅黑"/>
+              </a:rPr>
+              <a:t>C. 成本曲线标定</a:t>
+            </a:r>
+          </a:p>
+          <a:p>
+            <a:pPr algn="l">
+              <a:spcBef>
+                <a:spcPts val="200"/>
+              </a:spcBef>
+              <a:spcAft>
+                <a:spcPts val="0"/>
+              </a:spcAft>
+            </a:pPr>
+            <a:r>
+              <a:rPr sz="900" b="0">
+                <a:solidFill>
+                  <a:srgbClr val="1B222E"/>
+                </a:solidFill>
+                <a:latin typeface="微软雅黑"/>
+                <a:ea typeface="微软雅黑"/>
+              </a:rPr>
+              <a:t>启动期 dummy step 测出步开销;batch 预算用 CPU 侧陈旧值(不同步),per-request 用 GPU 实时值。</a:t>
+            </a:r>
+          </a:p>
+        </p:txBody>
+      </p:sp>
+      <p:sp>
+        <p:nvSpPr>
+          <p:cNvPr id="29" name="Rectangle 28"/>
+          <p:cNvSpPr/>
+          <p:nvPr/>
+        </p:nvSpPr>
+        <p:spPr>
+          <a:xfrm>
+            <a:off x="6492240" y="2395728"/>
+            <a:ext cx="841248" cy="786384"/>
+          </a:xfrm>
+          <a:prstGeom prst="rect">
+            <a:avLst/>
+          </a:prstGeom>
+          <a:solidFill>
+            <a:srgbClr val="FFFFFF"/>
+          </a:solidFill>
+          <a:ln w="9525">
+            <a:solidFill>
+              <a:srgbClr val="1F5FA8"/>
+            </a:solidFill>
+          </a:ln>
+          <a:effectLst/>
+        </p:spPr>
+        <p:style>
+          <a:lnRef idx="1">
+            <a:schemeClr val="accent1"/>
+          </a:lnRef>
+          <a:fillRef idx="3">
+            <a:schemeClr val="accent1"/>
+          </a:fillRef>
+          <a:effectRef idx="2">
+            <a:schemeClr val="accent1"/>
+          </a:effectRef>
+          <a:fontRef idx="minor">
+            <a:schemeClr val="lt1"/>
+          </a:fontRef>
+        </p:style>
+        <p:txBody>
+          <a:bodyPr rtlCol="0" anchor="ctr" wrap="square" lIns="45720" rIns="45720" tIns="18288" bIns="18288"/>
+          <a:lstStyle/>
+          <a:p>
+            <a:pPr algn="ctr">
+              <a:spcBef>
+                <a:spcPts val="100"/>
+              </a:spcBef>
+              <a:spcAft>
+                <a:spcPts val="100"/>
+              </a:spcAft>
+            </a:pPr>
+            <a:r>
+              <a:rPr sz="900" b="1">
+                <a:solidFill>
+                  <a:srgbClr val="1F5FA8"/>
+                </a:solidFill>
+                <a:latin typeface="微软雅黑"/>
+                <a:ea typeface="微软雅黑"/>
+              </a:rPr>
+              <a:t>draft slot</a:t>
+            </a:r>
+          </a:p>
+          <a:p>
+            <a:pPr algn="ctr">
+              <a:spcBef>
+                <a:spcPts val="100"/>
+              </a:spcBef>
+              <a:spcAft>
+                <a:spcPts val="100"/>
+              </a:spcAft>
+            </a:pPr>
+            <a:r>
+              <a:rPr sz="800" b="0">
+                <a:solidFill>
+                  <a:srgbClr val="5B6677"/>
+                </a:solidFill>
+                <a:latin typeface="微软雅黑"/>
+                <a:ea typeface="微软雅黑"/>
+              </a:rPr>
+              <a:t>逐位置信度</a:t>
+            </a:r>
+          </a:p>
+        </p:txBody>
+      </p:sp>
+      <p:sp>
+        <p:nvSpPr>
+          <p:cNvPr id="30" name="Right Arrow 29"/>
+          <p:cNvSpPr/>
+          <p:nvPr/>
+        </p:nvSpPr>
+        <p:spPr>
+          <a:xfrm>
+            <a:off x="7351775" y="2715768"/>
+            <a:ext cx="109728" cy="128016"/>
+          </a:xfrm>
+          <a:prstGeom prst="rightArrow">
+            <a:avLst/>
+          </a:prstGeom>
+          <a:solidFill>
+            <a:srgbClr val="1F5FA8"/>
+          </a:solidFill>
+          <a:ln>
+            <a:noFill/>
+          </a:ln>
+          <a:effectLst/>
+        </p:spPr>
+        <p:style>
+          <a:lnRef idx="1">
+            <a:schemeClr val="accent1"/>
+          </a:lnRef>
+          <a:fillRef idx="3">
+            <a:schemeClr val="accent1"/>
+          </a:fillRef>
+          <a:effectRef idx="2">
+            <a:schemeClr val="accent1"/>
+          </a:effectRef>
+          <a:fontRef idx="minor">
+            <a:schemeClr val="lt1"/>
+          </a:fontRef>
+        </p:style>
+        <p:txBody>
+          <a:bodyPr rtlCol="0" anchor="ctr"/>
+          <a:lstStyle/>
+          <a:p>
+            <a:pPr algn="ctr"/>
+          </a:p>
+        </p:txBody>
+      </p:sp>
+      <p:sp>
+        <p:nvSpPr>
+          <p:cNvPr id="31" name="Rectangle 30"/>
+          <p:cNvSpPr/>
+          <p:nvPr/>
+        </p:nvSpPr>
+        <p:spPr>
+          <a:xfrm>
+            <a:off x="7479792" y="2395728"/>
+            <a:ext cx="841248" cy="786384"/>
+          </a:xfrm>
+          <a:prstGeom prst="rect">
+            <a:avLst/>
+          </a:prstGeom>
+          <a:solidFill>
+            <a:srgbClr val="FFFFFF"/>
+          </a:solidFill>
+          <a:ln w="9525">
+            <a:solidFill>
+              <a:srgbClr val="1F5FA8"/>
+            </a:solidFill>
+          </a:ln>
+          <a:effectLst/>
+        </p:spPr>
+        <p:style>
+          <a:lnRef idx="1">
+            <a:schemeClr val="accent1"/>
+          </a:lnRef>
+          <a:fillRef idx="3">
+            <a:schemeClr val="accent1"/>
+          </a:fillRef>
+          <a:effectRef idx="2">
+            <a:schemeClr val="accent1"/>
+          </a:effectRef>
+          <a:fontRef idx="minor">
+            <a:schemeClr val="lt1"/>
+          </a:fontRef>
+        </p:style>
+        <p:txBody>
+          <a:bodyPr rtlCol="0" anchor="ctr" wrap="square" lIns="45720" rIns="45720" tIns="18288" bIns="18288"/>
+          <a:lstStyle/>
+          <a:p>
+            <a:pPr algn="ctr">
+              <a:spcBef>
+                <a:spcPts val="100"/>
+              </a:spcBef>
+              <a:spcAft>
+                <a:spcPts val="100"/>
+              </a:spcAft>
+            </a:pPr>
+            <a:r>
+              <a:rPr sz="900" b="1">
+                <a:solidFill>
+                  <a:srgbClr val="1F5FA8"/>
+                </a:solidFill>
+                <a:latin typeface="微软雅黑"/>
+                <a:ea typeface="微软雅黑"/>
+              </a:rPr>
+              <a:t>排序 / 打分</a:t>
+            </a:r>
+          </a:p>
+          <a:p>
+            <a:pPr algn="ctr">
+              <a:spcBef>
+                <a:spcPts val="100"/>
+              </a:spcBef>
+              <a:spcAft>
+                <a:spcPts val="100"/>
+              </a:spcAft>
+            </a:pPr>
+            <a:r>
+              <a:rPr sz="800" b="0">
+                <a:solidFill>
+                  <a:srgbClr val="5B6677"/>
+                </a:solidFill>
+                <a:latin typeface="微软雅黑"/>
+                <a:ea typeface="微软雅黑"/>
+              </a:rPr>
+              <a:t>累积乘积</a:t>
+            </a:r>
+          </a:p>
+        </p:txBody>
+      </p:sp>
+      <p:sp>
+        <p:nvSpPr>
+          <p:cNvPr id="32" name="Right Arrow 31"/>
+          <p:cNvSpPr/>
+          <p:nvPr/>
+        </p:nvSpPr>
+        <p:spPr>
+          <a:xfrm>
+            <a:off x="8339327" y="2715768"/>
+            <a:ext cx="109728" cy="128016"/>
+          </a:xfrm>
+          <a:prstGeom prst="rightArrow">
+            <a:avLst/>
+          </a:prstGeom>
+          <a:solidFill>
+            <a:srgbClr val="1F5FA8"/>
+          </a:solidFill>
+          <a:ln>
+            <a:noFill/>
+          </a:ln>
+          <a:effectLst/>
+        </p:spPr>
+        <p:style>
+          <a:lnRef idx="1">
+            <a:schemeClr val="accent1"/>
+          </a:lnRef>
+          <a:fillRef idx="3">
+            <a:schemeClr val="accent1"/>
+          </a:fillRef>
+          <a:effectRef idx="2">
+            <a:schemeClr val="accent1"/>
+          </a:effectRef>
+          <a:fontRef idx="minor">
+            <a:schemeClr val="lt1"/>
+          </a:fontRef>
+        </p:style>
+        <p:txBody>
+          <a:bodyPr rtlCol="0" anchor="ctr"/>
+          <a:lstStyle/>
+          <a:p>
+            <a:pPr algn="ctr"/>
+          </a:p>
+        </p:txBody>
+      </p:sp>
+      <p:sp>
+        <p:nvSpPr>
+          <p:cNvPr id="33" name="Rectangle 32"/>
+          <p:cNvSpPr/>
+          <p:nvPr/>
+        </p:nvSpPr>
+        <p:spPr>
+          <a:xfrm>
+            <a:off x="8467344" y="2395728"/>
+            <a:ext cx="841248" cy="786384"/>
+          </a:xfrm>
+          <a:prstGeom prst="rect">
+            <a:avLst/>
+          </a:prstGeom>
+          <a:solidFill>
+            <a:srgbClr val="FFFFFF"/>
+          </a:solidFill>
+          <a:ln w="9525">
+            <a:solidFill>
+              <a:srgbClr val="1F5FA8"/>
+            </a:solidFill>
+          </a:ln>
+          <a:effectLst/>
+        </p:spPr>
+        <p:style>
+          <a:lnRef idx="1">
+            <a:schemeClr val="accent1"/>
+          </a:lnRef>
+          <a:fillRef idx="3">
+            <a:schemeClr val="accent1"/>
+          </a:fillRef>
+          <a:effectRef idx="2">
+            <a:schemeClr val="accent1"/>
+          </a:effectRef>
+          <a:fontRef idx="minor">
+            <a:schemeClr val="lt1"/>
+          </a:fontRef>
+        </p:style>
+        <p:txBody>
+          <a:bodyPr rtlCol="0" anchor="ctr" wrap="square" lIns="45720" rIns="45720" tIns="18288" bIns="18288"/>
+          <a:lstStyle/>
+          <a:p>
+            <a:pPr algn="ctr">
+              <a:spcBef>
+                <a:spcPts val="100"/>
+              </a:spcBef>
+              <a:spcAft>
+                <a:spcPts val="100"/>
+              </a:spcAft>
+            </a:pPr>
+            <a:r>
+              <a:rPr sz="900" b="1">
+                <a:solidFill>
+                  <a:srgbClr val="1F5FA8"/>
+                </a:solidFill>
+                <a:latin typeface="微软雅黑"/>
+                <a:ea typeface="微软雅黑"/>
+              </a:rPr>
+              <a:t>录取前缀</a:t>
+            </a:r>
+          </a:p>
+          <a:p>
+            <a:pPr algn="ctr">
+              <a:spcBef>
+                <a:spcPts val="100"/>
+              </a:spcBef>
+              <a:spcAft>
+                <a:spcPts val="100"/>
+              </a:spcAft>
+            </a:pPr>
+            <a:r>
+              <a:rPr sz="800" b="0">
+                <a:solidFill>
+                  <a:srgbClr val="5B6677"/>
+                </a:solidFill>
+                <a:latin typeface="微软雅黑"/>
+                <a:ea typeface="微软雅黑"/>
+              </a:rPr>
+              <a:t>预算内择优</a:t>
+            </a:r>
+          </a:p>
+        </p:txBody>
+      </p:sp>
+      <p:sp>
+        <p:nvSpPr>
+          <p:cNvPr id="34" name="TextBox 33"/>
+          <p:cNvSpPr txBox="1"/>
+          <p:nvPr/>
+        </p:nvSpPr>
+        <p:spPr>
+          <a:xfrm>
+            <a:off x="6492240" y="3291840"/>
+            <a:ext cx="2889504" cy="457200"/>
+          </a:xfrm>
+          <a:prstGeom prst="rect">
+            <a:avLst/>
+          </a:prstGeom>
+          <a:noFill/>
+        </p:spPr>
+        <p:txBody>
+          <a:bodyPr wrap="square">
+            <a:spAutoFit/>
+          </a:bodyPr>
+          <a:lstStyle/>
+          <a:p>
+            <a:pPr algn="l">
+              <a:spcBef>
+                <a:spcPts val="0"/>
+              </a:spcBef>
+              <a:spcAft>
+                <a:spcPts val="0"/>
+              </a:spcAft>
+            </a:pPr>
+            <a:r>
+              <a:rPr sz="850" b="0">
+                <a:solidFill>
+                  <a:srgbClr val="5B6677"/>
+                </a:solidFill>
+                <a:latin typeface="微软雅黑"/>
+                <a:ea typeface="微软雅黑"/>
+              </a:rPr>
+              <a:t>机制示意:同预算下把验证 token 挪给最可能被接受的位置</a:t>
+            </a:r>
+          </a:p>
+        </p:txBody>
+      </p:sp>
+      <p:sp>
+        <p:nvSpPr>
+          <p:cNvPr id="35" name="Rectangle 34"/>
+          <p:cNvSpPr/>
+          <p:nvPr/>
+        </p:nvSpPr>
+        <p:spPr>
+          <a:xfrm>
+            <a:off x="2834640" y="3675887"/>
+            <a:ext cx="6565392" cy="274320"/>
+          </a:xfrm>
+          <a:prstGeom prst="rect">
+            <a:avLst/>
+          </a:prstGeom>
+          <a:solidFill>
+            <a:srgbClr val="E9EEF5"/>
+          </a:solidFill>
+          <a:ln>
+            <a:noFill/>
+          </a:ln>
+          <a:effectLst/>
+        </p:spPr>
+        <p:style>
+          <a:lnRef idx="1">
+            <a:schemeClr val="accent1"/>
+          </a:lnRef>
+          <a:fillRef idx="3">
+            <a:schemeClr val="accent1"/>
+          </a:fillRef>
+          <a:effectRef idx="2">
+            <a:schemeClr val="accent1"/>
+          </a:effectRef>
+          <a:fontRef idx="minor">
+            <a:schemeClr val="lt1"/>
+          </a:fontRef>
+        </p:style>
+        <p:txBody>
+          <a:bodyPr rtlCol="0" anchor="ctr" wrap="square" lIns="45720" rIns="45720" tIns="18288" bIns="18288"/>
+          <a:lstStyle/>
+          <a:p>
+            <a:pPr algn="ctr">
+              <a:spcBef>
+                <a:spcPts val="0"/>
+              </a:spcBef>
+              <a:spcAft>
+                <a:spcPts val="0"/>
+              </a:spcAft>
+            </a:pPr>
+            <a:r>
+              <a:rPr sz="950" b="1">
+                <a:solidFill>
+                  <a:srgbClr val="1F5FA8"/>
+                </a:solidFill>
+                <a:latin typeface="微软雅黑"/>
+                <a:ea typeface="微软雅黑"/>
+              </a:rPr>
+              <a:t>交付:昇腾预算调度 kernel  |  成本曲线标定脚本  |  置信度-接受率相关性报告</a:t>
+            </a:r>
+          </a:p>
+        </p:txBody>
+      </p:sp>
+      <p:sp>
+        <p:nvSpPr>
+          <p:cNvPr id="36" name="Rectangle 35"/>
+          <p:cNvSpPr/>
+          <p:nvPr/>
+        </p:nvSpPr>
+        <p:spPr>
+          <a:xfrm>
+            <a:off x="2724912" y="4206240"/>
+            <a:ext cx="6784848" cy="2487168"/>
+          </a:xfrm>
+          <a:prstGeom prst="rect">
+            <a:avLst/>
+          </a:prstGeom>
+          <a:noFill/>
+          <a:ln w="19050">
+            <a:solidFill>
+              <a:srgbClr val="D3620B"/>
+            </a:solidFill>
+          </a:ln>
+          <a:effectLst/>
+        </p:spPr>
+        <p:style>
+          <a:lnRef idx="1">
+            <a:schemeClr val="accent1"/>
+          </a:lnRef>
+          <a:fillRef idx="3">
+            <a:schemeClr val="accent1"/>
+          </a:fillRef>
+          <a:effectRef idx="2">
+            <a:schemeClr val="accent1"/>
+          </a:effectRef>
+          <a:fontRef idx="minor">
+            <a:schemeClr val="lt1"/>
+          </a:fontRef>
+        </p:style>
+        <p:txBody>
+          <a:bodyPr rtlCol="0" anchor="ctr"/>
+          <a:lstStyle/>
+          <a:p>
+            <a:pPr algn="ctr"/>
+          </a:p>
+        </p:txBody>
+      </p:sp>
+      <p:sp>
+        <p:nvSpPr>
+          <p:cNvPr id="37" name="TextBox 36"/>
+          <p:cNvSpPr txBox="1"/>
+          <p:nvPr/>
+        </p:nvSpPr>
+        <p:spPr>
+          <a:xfrm>
+            <a:off x="2834640" y="4279392"/>
+            <a:ext cx="3840480" cy="310896"/>
+          </a:xfrm>
+          <a:prstGeom prst="rect">
+            <a:avLst/>
+          </a:prstGeom>
+          <a:noFill/>
+        </p:spPr>
+        <p:txBody>
+          <a:bodyPr wrap="square">
+            <a:spAutoFit/>
+          </a:bodyPr>
+          <a:lstStyle/>
+          <a:p>
+            <a:pPr algn="l">
+              <a:spcBef>
+                <a:spcPts val="0"/>
+              </a:spcBef>
+              <a:spcAft>
+                <a:spcPts val="0"/>
+              </a:spcAft>
+            </a:pPr>
+            <a:r>
+              <a:rPr sz="1300" b="1">
+                <a:solidFill>
+                  <a:srgbClr val="D3620B"/>
+                </a:solidFill>
+                <a:latin typeface="微软雅黑"/>
+                <a:ea typeface="微软雅黑"/>
+              </a:rPr>
+              <a:t>② 变长 decode 图(工程侧,★ 主要投入)</a:t>
+            </a:r>
+          </a:p>
+        </p:txBody>
+      </p:sp>
+      <p:sp>
+        <p:nvSpPr>
+          <p:cNvPr id="38" name="Rectangle 37"/>
+          <p:cNvSpPr/>
+          <p:nvPr/>
+        </p:nvSpPr>
+        <p:spPr>
+          <a:xfrm>
+            <a:off x="2871216" y="4663440"/>
+            <a:ext cx="987552" cy="731520"/>
+          </a:xfrm>
+          <a:prstGeom prst="rect">
+            <a:avLst/>
+          </a:prstGeom>
+          <a:solidFill>
+            <a:srgbClr val="FFFFFF"/>
+          </a:solidFill>
+          <a:ln w="9525">
+            <a:solidFill>
+              <a:srgbClr val="D3620B"/>
+            </a:solidFill>
+          </a:ln>
+          <a:effectLst/>
+        </p:spPr>
+        <p:style>
+          <a:lnRef idx="1">
+            <a:schemeClr val="accent1"/>
+          </a:lnRef>
+          <a:fillRef idx="3">
+            <a:schemeClr val="accent1"/>
+          </a:fillRef>
+          <a:effectRef idx="2">
+            <a:schemeClr val="accent1"/>
+          </a:effectRef>
+          <a:fontRef idx="minor">
+            <a:schemeClr val="lt1"/>
+          </a:fontRef>
+        </p:style>
+        <p:txBody>
+          <a:bodyPr rtlCol="0" anchor="ctr" wrap="square" lIns="45720" rIns="45720" tIns="18288" bIns="18288"/>
+          <a:lstStyle/>
+          <a:p>
+            <a:pPr algn="ctr">
+              <a:spcBef>
+                <a:spcPts val="100"/>
+              </a:spcBef>
+              <a:spcAft>
+                <a:spcPts val="100"/>
+              </a:spcAft>
+            </a:pPr>
+            <a:r>
+              <a:rPr sz="900" b="1">
+                <a:solidFill>
+                  <a:srgbClr val="D3620B"/>
+                </a:solidFill>
+                <a:latin typeface="微软雅黑"/>
+                <a:ea typeface="微软雅黑"/>
+              </a:rPr>
+              <a:t>固定形状捕获</a:t>
+            </a:r>
+          </a:p>
+          <a:p>
+            <a:pPr algn="ctr">
+              <a:spcBef>
+                <a:spcPts val="100"/>
+              </a:spcBef>
+              <a:spcAft>
+                <a:spcPts val="100"/>
+              </a:spcAft>
+            </a:pPr>
+            <a:r>
+              <a:rPr sz="800" b="0">
+                <a:solidFill>
+                  <a:srgbClr val="5B6677"/>
+                </a:solidFill>
+                <a:latin typeface="微软雅黑"/>
+                <a:ea typeface="微软雅黑"/>
+              </a:rPr>
+              <a:t>现状</a:t>
+            </a:r>
+          </a:p>
+        </p:txBody>
+      </p:sp>
+      <p:sp>
+        <p:nvSpPr>
+          <p:cNvPr id="39" name="Right Arrow 38"/>
+          <p:cNvSpPr/>
+          <p:nvPr/>
+        </p:nvSpPr>
+        <p:spPr>
+          <a:xfrm>
+            <a:off x="3877056" y="4965192"/>
+            <a:ext cx="109728" cy="128016"/>
+          </a:xfrm>
+          <a:prstGeom prst="rightArrow">
+            <a:avLst/>
+          </a:prstGeom>
+          <a:solidFill>
+            <a:srgbClr val="D3620B"/>
+          </a:solidFill>
+          <a:ln>
+            <a:noFill/>
+          </a:ln>
+          <a:effectLst/>
+        </p:spPr>
+        <p:style>
+          <a:lnRef idx="1">
+            <a:schemeClr val="accent1"/>
+          </a:lnRef>
+          <a:fillRef idx="3">
+            <a:schemeClr val="accent1"/>
+          </a:fillRef>
+          <a:effectRef idx="2">
+            <a:schemeClr val="accent1"/>
+          </a:effectRef>
+          <a:fontRef idx="minor">
+            <a:schemeClr val="lt1"/>
+          </a:fontRef>
+        </p:style>
+        <p:txBody>
+          <a:bodyPr rtlCol="0" anchor="ctr"/>
+          <a:lstStyle/>
+          <a:p>
+            <a:pPr algn="ctr"/>
+          </a:p>
+        </p:txBody>
+      </p:sp>
+      <p:sp>
+        <p:nvSpPr>
+          <p:cNvPr id="40" name="Rectangle 39"/>
+          <p:cNvSpPr/>
+          <p:nvPr/>
+        </p:nvSpPr>
+        <p:spPr>
+          <a:xfrm>
+            <a:off x="4005072" y="4663440"/>
+            <a:ext cx="987552" cy="731520"/>
+          </a:xfrm>
+          <a:prstGeom prst="rect">
+            <a:avLst/>
+          </a:prstGeom>
+          <a:solidFill>
+            <a:srgbClr val="FFFFFF"/>
+          </a:solidFill>
+          <a:ln w="9525">
+            <a:solidFill>
+              <a:srgbClr val="D3620B"/>
+            </a:solidFill>
+          </a:ln>
+          <a:effectLst/>
+        </p:spPr>
+        <p:style>
+          <a:lnRef idx="1">
+            <a:schemeClr val="accent1"/>
+          </a:lnRef>
+          <a:fillRef idx="3">
+            <a:schemeClr val="accent1"/>
+          </a:fillRef>
+          <a:effectRef idx="2">
+            <a:schemeClr val="accent1"/>
+          </a:effectRef>
+          <a:fontRef idx="minor">
+            <a:schemeClr val="lt1"/>
+          </a:fontRef>
+        </p:style>
+        <p:txBody>
+          <a:bodyPr rtlCol="0" anchor="ctr" wrap="square" lIns="45720" rIns="45720" tIns="18288" bIns="18288"/>
+          <a:lstStyle/>
+          <a:p>
+            <a:pPr algn="ctr">
+              <a:spcBef>
+                <a:spcPts val="100"/>
+              </a:spcBef>
+              <a:spcAft>
+                <a:spcPts val="100"/>
+              </a:spcAft>
+            </a:pPr>
+            <a:r>
+              <a:rPr sz="900" b="1">
+                <a:solidFill>
+                  <a:srgbClr val="D3620B"/>
+                </a:solidFill>
+                <a:latin typeface="微软雅黑"/>
+                <a:ea typeface="微软雅黑"/>
+              </a:rPr>
+              <a:t>变长图</a:t>
+            </a:r>
+          </a:p>
+          <a:p>
+            <a:pPr algn="ctr">
+              <a:spcBef>
+                <a:spcPts val="100"/>
+              </a:spcBef>
+              <a:spcAft>
+                <a:spcPts val="100"/>
+              </a:spcAft>
+            </a:pPr>
+            <a:r>
+              <a:rPr sz="800" b="0">
+                <a:solidFill>
+                  <a:srgbClr val="5B6677"/>
+                </a:solidFill>
+                <a:latin typeface="微软雅黑"/>
+                <a:ea typeface="微软雅黑"/>
+              </a:rPr>
+              <a:t>按 token 网格</a:t>
+            </a:r>
+          </a:p>
+        </p:txBody>
+      </p:sp>
+      <p:sp>
+        <p:nvSpPr>
+          <p:cNvPr id="41" name="Right Arrow 40"/>
+          <p:cNvSpPr/>
+          <p:nvPr/>
+        </p:nvSpPr>
+        <p:spPr>
+          <a:xfrm>
+            <a:off x="5010912" y="4965192"/>
+            <a:ext cx="109728" cy="128016"/>
+          </a:xfrm>
+          <a:prstGeom prst="rightArrow">
+            <a:avLst/>
+          </a:prstGeom>
+          <a:solidFill>
+            <a:srgbClr val="D3620B"/>
+          </a:solidFill>
+          <a:ln>
+            <a:noFill/>
+          </a:ln>
+          <a:effectLst/>
+        </p:spPr>
+        <p:style>
+          <a:lnRef idx="1">
+            <a:schemeClr val="accent1"/>
+          </a:lnRef>
+          <a:fillRef idx="3">
+            <a:schemeClr val="accent1"/>
+          </a:fillRef>
+          <a:effectRef idx="2">
+            <a:schemeClr val="accent1"/>
+          </a:effectRef>
+          <a:fontRef idx="minor">
+            <a:schemeClr val="lt1"/>
+          </a:fontRef>
+        </p:style>
+        <p:txBody>
+          <a:bodyPr rtlCol="0" anchor="ctr"/>
+          <a:lstStyle/>
+          <a:p>
+            <a:pPr algn="ctr"/>
+          </a:p>
+        </p:txBody>
+      </p:sp>
+      <p:sp>
+        <p:nvSpPr>
+          <p:cNvPr id="42" name="Rectangle 41"/>
+          <p:cNvSpPr/>
+          <p:nvPr/>
+        </p:nvSpPr>
+        <p:spPr>
+          <a:xfrm>
+            <a:off x="5138928" y="4663440"/>
+            <a:ext cx="987552" cy="731520"/>
+          </a:xfrm>
+          <a:prstGeom prst="rect">
+            <a:avLst/>
+          </a:prstGeom>
+          <a:solidFill>
+            <a:srgbClr val="FFFFFF"/>
+          </a:solidFill>
+          <a:ln w="9525">
+            <a:solidFill>
+              <a:srgbClr val="D3620B"/>
+            </a:solidFill>
+          </a:ln>
+          <a:effectLst/>
+        </p:spPr>
+        <p:style>
+          <a:lnRef idx="1">
+            <a:schemeClr val="accent1"/>
+          </a:lnRef>
+          <a:fillRef idx="3">
+            <a:schemeClr val="accent1"/>
+          </a:fillRef>
+          <a:effectRef idx="2">
+            <a:schemeClr val="accent1"/>
+          </a:effectRef>
+          <a:fontRef idx="minor">
+            <a:schemeClr val="lt1"/>
+          </a:fontRef>
+        </p:style>
+        <p:txBody>
+          <a:bodyPr rtlCol="0" anchor="ctr" wrap="square" lIns="45720" rIns="45720" tIns="18288" bIns="18288"/>
+          <a:lstStyle/>
+          <a:p>
+            <a:pPr algn="ctr">
+              <a:spcBef>
+                <a:spcPts val="100"/>
+              </a:spcBef>
+              <a:spcAft>
+                <a:spcPts val="100"/>
+              </a:spcAft>
+            </a:pPr>
+            <a:r>
+              <a:rPr sz="900" b="1">
+                <a:solidFill>
+                  <a:srgbClr val="D3620B"/>
+                </a:solidFill>
+                <a:latin typeface="微软雅黑"/>
+                <a:ea typeface="微软雅黑"/>
+              </a:rPr>
+              <a:t>真机测量</a:t>
+            </a:r>
+          </a:p>
+          <a:p>
+            <a:pPr algn="ctr">
+              <a:spcBef>
+                <a:spcPts val="100"/>
+              </a:spcBef>
+              <a:spcAft>
+                <a:spcPts val="100"/>
+              </a:spcAft>
+            </a:pPr>
+            <a:r>
+              <a:rPr sz="800" b="0">
+                <a:solidFill>
+                  <a:srgbClr val="5B6677"/>
+                </a:solidFill>
+                <a:latin typeface="微软雅黑"/>
+                <a:ea typeface="微软雅黑"/>
+              </a:rPr>
+              <a:t>开销 / padding</a:t>
+            </a:r>
+          </a:p>
+        </p:txBody>
+      </p:sp>
+      <p:sp>
+        <p:nvSpPr>
+          <p:cNvPr id="43" name="TextBox 42"/>
+          <p:cNvSpPr txBox="1"/>
+          <p:nvPr/>
+        </p:nvSpPr>
+        <p:spPr>
+          <a:xfrm>
+            <a:off x="2871216" y="5504688"/>
+            <a:ext cx="3383280" cy="822960"/>
+          </a:xfrm>
+          <a:prstGeom prst="rect">
+            <a:avLst/>
+          </a:prstGeom>
+          <a:noFill/>
+        </p:spPr>
+        <p:txBody>
+          <a:bodyPr wrap="square">
+            <a:spAutoFit/>
+          </a:bodyPr>
+          <a:lstStyle/>
+          <a:p>
+            <a:pPr algn="l">
+              <a:spcBef>
+                <a:spcPts val="0"/>
+              </a:spcBef>
+              <a:spcAft>
+                <a:spcPts val="0"/>
+              </a:spcAft>
+            </a:pPr>
+            <a:r>
+              <a:rPr sz="900" b="1">
+                <a:solidFill>
+                  <a:srgbClr val="1B222E"/>
+                </a:solidFill>
+                <a:latin typeface="微软雅黑"/>
+                <a:ea typeface="微软雅黑"/>
+              </a:rPr>
+              <a:t>两条候选路线,阶段 2 先验证可行性再投入:</a:t>
+            </a:r>
+          </a:p>
+          <a:p>
+            <a:pPr algn="l">
+              <a:spcBef>
+                <a:spcPts val="150"/>
+              </a:spcBef>
+              <a:spcAft>
+                <a:spcPts val="0"/>
+              </a:spcAft>
+            </a:pPr>
+            <a:r>
+              <a:rPr sz="850" b="0">
+                <a:solidFill>
+                  <a:srgbClr val="1B222E"/>
+                </a:solidFill>
+                <a:latin typeface="微软雅黑"/>
+                <a:ea typeface="微软雅黑"/>
+              </a:rPr>
+              <a:t>· 对齐上游语义 —— 后端上报 ALWAYS,按 max_query_len 派发;</a:t>
+            </a:r>
+          </a:p>
+          <a:p>
+            <a:pPr algn="l">
+              <a:spcBef>
+                <a:spcPts val="150"/>
+              </a:spcBef>
+              <a:spcAft>
+                <a:spcPts val="0"/>
+              </a:spcAft>
+            </a:pPr>
+            <a:r>
+              <a:rPr sz="850" b="0">
+                <a:solidFill>
+                  <a:srgbClr val="1B222E"/>
+                </a:solidFill>
+                <a:latin typeface="微软雅黑"/>
+                <a:ea typeface="微软雅黑"/>
+              </a:rPr>
+              <a:t>· SGLang 式 packed varlen —— graph key 只按总 token 数,padding 更省。</a:t>
+            </a:r>
+          </a:p>
+        </p:txBody>
+      </p:sp>
+      <p:sp>
+        <p:nvSpPr>
+          <p:cNvPr id="44" name="TextBox 43"/>
+          <p:cNvSpPr txBox="1"/>
+          <p:nvPr/>
+        </p:nvSpPr>
+        <p:spPr>
+          <a:xfrm>
+            <a:off x="6437375" y="4626864"/>
+            <a:ext cx="2962656" cy="1737360"/>
+          </a:xfrm>
+          <a:prstGeom prst="rect">
+            <a:avLst/>
+          </a:prstGeom>
+          <a:noFill/>
+        </p:spPr>
+        <p:txBody>
+          <a:bodyPr wrap="square">
+            <a:spAutoFit/>
+          </a:bodyPr>
+          <a:lstStyle/>
+          <a:p>
+            <a:pPr algn="l">
+              <a:spcBef>
+                <a:spcPts val="0"/>
+              </a:spcBef>
+              <a:spcAft>
+                <a:spcPts val="0"/>
+              </a:spcAft>
+            </a:pPr>
+            <a:r>
+              <a:rPr sz="850" b="0">
+                <a:solidFill>
+                  <a:srgbClr val="1B222E"/>
+                </a:solidFill>
+                <a:latin typeface="微软雅黑"/>
+                <a:ea typeface="微软雅黑"/>
+              </a:rPr>
+              <a:t>· 昇腾无对应的「任意形状可入图」机制,这是本项目唯一的阻断性风险;</a:t>
+            </a:r>
+          </a:p>
+          <a:p>
+            <a:pPr algn="l">
+              <a:spcBef>
+                <a:spcPts val="300"/>
+              </a:spcBef>
+              <a:spcAft>
+                <a:spcPts val="0"/>
+              </a:spcAft>
+            </a:pPr>
+            <a:r>
+              <a:rPr sz="850" b="0">
+                <a:solidFill>
+                  <a:srgbClr val="1B222E"/>
+                </a:solidFill>
+                <a:latin typeface="微软雅黑"/>
+                <a:ea typeface="微软雅黑"/>
+              </a:rPr>
+              <a:t>· 上游为 NVIDIA 后端加了 ALWAYS 声明,昇腾需自建等价能力;</a:t>
+            </a:r>
+          </a:p>
+          <a:p>
+            <a:pPr algn="l">
+              <a:spcBef>
+                <a:spcPts val="300"/>
+              </a:spcBef>
+              <a:spcAft>
+                <a:spcPts val="0"/>
+              </a:spcAft>
+            </a:pPr>
+            <a:r>
+              <a:rPr sz="850" b="0">
+                <a:solidFill>
+                  <a:srgbClr val="C00000"/>
+                </a:solidFill>
+                <a:latin typeface="微软雅黑"/>
+                <a:ea typeface="微软雅黑"/>
+              </a:rPr>
+              <a:t>· 若不可行,保留 eager 路径成果,并把图支持作为独立议题提交上游。</a:t>
+            </a:r>
+          </a:p>
+        </p:txBody>
+      </p:sp>
+      <p:sp>
+        <p:nvSpPr>
+          <p:cNvPr id="45" name="Rectangle 44"/>
+          <p:cNvSpPr/>
+          <p:nvPr/>
+        </p:nvSpPr>
+        <p:spPr>
+          <a:xfrm>
+            <a:off x="2834640" y="6327648"/>
+            <a:ext cx="6565392" cy="274320"/>
+          </a:xfrm>
+          <a:prstGeom prst="rect">
+            <a:avLst/>
+          </a:prstGeom>
+          <a:solidFill>
+            <a:srgbClr val="FDF0E4"/>
+          </a:solidFill>
+          <a:ln>
+            <a:noFill/>
+          </a:ln>
+          <a:effectLst/>
+        </p:spPr>
+        <p:style>
+          <a:lnRef idx="1">
+            <a:schemeClr val="accent1"/>
+          </a:lnRef>
+          <a:fillRef idx="3">
+            <a:schemeClr val="accent1"/>
+          </a:fillRef>
+          <a:effectRef idx="2">
+            <a:schemeClr val="accent1"/>
+          </a:effectRef>
+          <a:fontRef idx="minor">
+            <a:schemeClr val="lt1"/>
+          </a:fontRef>
+        </p:style>
+        <p:txBody>
+          <a:bodyPr rtlCol="0" anchor="ctr" wrap="square" lIns="45720" rIns="45720" tIns="18288" bIns="18288"/>
+          <a:lstStyle/>
+          <a:p>
+            <a:pPr algn="ctr">
+              <a:spcBef>
+                <a:spcPts val="0"/>
+              </a:spcBef>
+              <a:spcAft>
+                <a:spcPts val="0"/>
+              </a:spcAft>
+            </a:pPr>
+            <a:r>
+              <a:rPr sz="950" b="1">
+                <a:solidFill>
+                  <a:srgbClr val="D3620B"/>
+                </a:solidFill>
+                <a:latin typeface="微软雅黑"/>
+                <a:ea typeface="微软雅黑"/>
+              </a:rPr>
+              <a:t>交付:变长 decode 图实现  |  Shape 配置  |  三模式(无投机 / 固定 K / 动态 K)对比实测包</a:t>
+            </a:r>
+          </a:p>
+        </p:txBody>
+      </p:sp>
+      <p:sp>
+        <p:nvSpPr>
+          <p:cNvPr id="46" name="Rectangle 45"/>
+          <p:cNvSpPr/>
+          <p:nvPr/>
+        </p:nvSpPr>
+        <p:spPr>
+          <a:xfrm>
+            <a:off x="9637776" y="1700784"/>
+            <a:ext cx="2231136" cy="310896"/>
+          </a:xfrm>
+          <a:prstGeom prst="rect">
+            <a:avLst/>
+          </a:prstGeom>
+          <a:solidFill>
+            <a:srgbClr val="C00000"/>
+          </a:solidFill>
+          <a:ln>
+            <a:noFill/>
+          </a:ln>
+          <a:effectLst/>
+        </p:spPr>
+        <p:style>
+          <a:lnRef idx="1">
+            <a:schemeClr val="accent1"/>
+          </a:lnRef>
+          <a:fillRef idx="3">
+            <a:schemeClr val="accent1"/>
+          </a:fillRef>
+          <a:effectRef idx="2">
+            <a:schemeClr val="accent1"/>
+          </a:effectRef>
+          <a:fontRef idx="minor">
+            <a:schemeClr val="lt1"/>
+          </a:fontRef>
+        </p:style>
+        <p:txBody>
+          <a:bodyPr rtlCol="0" anchor="ctr" wrap="square" lIns="45720" rIns="45720" tIns="18288" bIns="18288"/>
+          <a:lstStyle/>
+          <a:p>
+            <a:pPr algn="ctr">
+              <a:spcBef>
+                <a:spcPts val="0"/>
+              </a:spcBef>
+              <a:spcAft>
+                <a:spcPts val="0"/>
+              </a:spcAft>
+            </a:pPr>
+            <a:r>
+              <a:rPr sz="1200" b="1">
+                <a:solidFill>
+                  <a:srgbClr val="FFFFFF"/>
+                </a:solidFill>
+                <a:latin typeface="微软雅黑"/>
+                <a:ea typeface="微软雅黑"/>
+              </a:rPr>
+              <a:t>里 程 碑</a:t>
+            </a:r>
+          </a:p>
+        </p:txBody>
+      </p:sp>
+      <p:sp>
+        <p:nvSpPr>
+          <p:cNvPr id="47" name="Rectangle 46"/>
+          <p:cNvSpPr/>
+          <p:nvPr/>
+        </p:nvSpPr>
+        <p:spPr>
+          <a:xfrm>
+            <a:off x="9838944" y="2212848"/>
+            <a:ext cx="25603" cy="4160520"/>
+          </a:xfrm>
+          <a:prstGeom prst="rect">
+            <a:avLst/>
+          </a:prstGeom>
+          <a:solidFill>
+            <a:srgbClr val="C00000"/>
+          </a:solidFill>
+          <a:ln>
+            <a:noFill/>
+          </a:ln>
+          <a:effectLst/>
+        </p:spPr>
+        <p:style>
+          <a:lnRef idx="1">
+            <a:schemeClr val="accent1"/>
+          </a:lnRef>
+          <a:fillRef idx="3">
+            <a:schemeClr val="accent1"/>
+          </a:fillRef>
+          <a:effectRef idx="2">
+            <a:schemeClr val="accent1"/>
+          </a:effectRef>
+          <a:fontRef idx="minor">
+            <a:schemeClr val="lt1"/>
+          </a:fontRef>
+        </p:style>
+        <p:txBody>
+          <a:bodyPr rtlCol="0" anchor="ctr"/>
+          <a:lstStyle/>
+          <a:p>
+            <a:pPr algn="ctr"/>
+          </a:p>
+        </p:txBody>
+      </p:sp>
+      <p:sp>
+        <p:nvSpPr>
+          <p:cNvPr id="48" name="Oval 47"/>
+          <p:cNvSpPr/>
+          <p:nvPr/>
+        </p:nvSpPr>
+        <p:spPr>
+          <a:xfrm>
+            <a:off x="9720072" y="2249424"/>
+            <a:ext cx="274320" cy="274320"/>
+          </a:xfrm>
+          <a:prstGeom prst="ellipse">
+            <a:avLst/>
+          </a:prstGeom>
+          <a:solidFill>
+            <a:srgbClr val="FFFFFF"/>
+          </a:solidFill>
+          <a:ln w="15875">
+            <a:solidFill>
+              <a:srgbClr val="C00000"/>
+            </a:solidFill>
+          </a:ln>
+          <a:effectLst/>
+        </p:spPr>
+        <p:style>
+          <a:lnRef idx="1">
+            <a:schemeClr val="accent1"/>
+          </a:lnRef>
+          <a:fillRef idx="3">
+            <a:schemeClr val="accent1"/>
+          </a:fillRef>
+          <a:effectRef idx="2">
+            <a:schemeClr val="accent1"/>
+          </a:effectRef>
+          <a:fontRef idx="minor">
+            <a:schemeClr val="lt1"/>
+          </a:fontRef>
+        </p:style>
+        <p:txBody>
+          <a:bodyPr rtlCol="0" anchor="ctr" wrap="square" lIns="45720" rIns="45720" tIns="18288" bIns="18288"/>
+          <a:lstStyle/>
+          <a:p>
+            <a:pPr algn="ctr">
+              <a:spcBef>
+                <a:spcPts val="0"/>
+              </a:spcBef>
+              <a:spcAft>
+                <a:spcPts val="0"/>
+              </a:spcAft>
+            </a:pPr>
+            <a:r>
+              <a:rPr sz="1000" b="1">
+                <a:solidFill>
+                  <a:srgbClr val="C00000"/>
+                </a:solidFill>
+                <a:latin typeface="微软雅黑"/>
+                <a:ea typeface="微软雅黑"/>
+              </a:rPr>
+              <a:t>1</a:t>
+            </a:r>
+          </a:p>
+        </p:txBody>
+      </p:sp>
+      <p:sp>
+        <p:nvSpPr>
+          <p:cNvPr id="49" name="TextBox 48"/>
+          <p:cNvSpPr txBox="1"/>
+          <p:nvPr/>
+        </p:nvSpPr>
+        <p:spPr>
+          <a:xfrm>
+            <a:off x="10058400" y="2194560"/>
+            <a:ext cx="1773936" cy="1005840"/>
+          </a:xfrm>
+          <a:prstGeom prst="rect">
+            <a:avLst/>
+          </a:prstGeom>
+          <a:noFill/>
+        </p:spPr>
+        <p:txBody>
+          <a:bodyPr wrap="square">
+            <a:spAutoFit/>
+          </a:bodyPr>
+          <a:lstStyle/>
+          <a:p>
+            <a:pPr algn="l">
+              <a:spcBef>
+                <a:spcPts val="0"/>
+              </a:spcBef>
+              <a:spcAft>
+                <a:spcPts val="0"/>
+              </a:spcAft>
+            </a:pPr>
+            <a:r>
+              <a:rPr sz="1150" b="1">
+                <a:solidFill>
+                  <a:srgbClr val="C00000"/>
+                </a:solidFill>
+                <a:latin typeface="微软雅黑"/>
+                <a:ea typeface="微软雅黑"/>
+              </a:rPr>
+              <a:t>T+1 天</a:t>
+            </a:r>
+          </a:p>
+          <a:p>
+            <a:pPr algn="l">
+              <a:spcBef>
+                <a:spcPts val="100"/>
+              </a:spcBef>
+              <a:spcAft>
+                <a:spcPts val="0"/>
+              </a:spcAft>
+            </a:pPr>
+            <a:r>
+              <a:rPr sz="1000" b="1">
+                <a:solidFill>
+                  <a:srgbClr val="1B222E"/>
+                </a:solidFill>
+                <a:latin typeface="微软雅黑"/>
+                <a:ea typeface="微软雅黑"/>
+              </a:rPr>
+              <a:t>G1 · 判定</a:t>
+            </a:r>
+          </a:p>
+          <a:p>
+            <a:pPr algn="l">
+              <a:spcBef>
+                <a:spcPts val="100"/>
+              </a:spcBef>
+              <a:spcAft>
+                <a:spcPts val="0"/>
+              </a:spcAft>
+            </a:pPr>
+            <a:r>
+              <a:rPr sz="800" b="0">
+                <a:solidFill>
+                  <a:srgbClr val="5B6677"/>
+                </a:solidFill>
+                <a:latin typeface="微软雅黑"/>
+                <a:ea typeface="微软雅黑"/>
+              </a:rPr>
+              <a:t>把加速比从 c=48 补测到</a:t>
+            </a:r>
+          </a:p>
+          <a:p>
+            <a:pPr algn="l">
+              <a:spcBef>
+                <a:spcPts val="100"/>
+              </a:spcBef>
+              <a:spcAft>
+                <a:spcPts val="0"/>
+              </a:spcAft>
+            </a:pPr>
+            <a:r>
+              <a:rPr sz="800" b="0">
+                <a:solidFill>
+                  <a:srgbClr val="5B6677"/>
+                </a:solidFill>
+                <a:latin typeface="微软雅黑"/>
+                <a:ea typeface="微软雅黑"/>
+              </a:rPr>
+              <a:t>c=128 / c=256</a:t>
+            </a:r>
+          </a:p>
+          <a:p>
+            <a:pPr algn="l">
+              <a:spcBef>
+                <a:spcPts val="100"/>
+              </a:spcBef>
+              <a:spcAft>
+                <a:spcPts val="0"/>
+              </a:spcAft>
+            </a:pPr>
+            <a:r>
+              <a:rPr sz="800" b="0">
+                <a:solidFill>
+                  <a:srgbClr val="5B6677"/>
+                </a:solidFill>
+                <a:latin typeface="微软雅黑"/>
+                <a:ea typeface="微软雅黑"/>
+              </a:rPr>
+              <a:t>看固定 K 是否收益衰减</a:t>
+            </a:r>
+          </a:p>
+          <a:p>
+            <a:pPr algn="l">
+              <a:spcBef>
+                <a:spcPts val="100"/>
+              </a:spcBef>
+              <a:spcAft>
+                <a:spcPts val="0"/>
+              </a:spcAft>
+            </a:pPr>
+            <a:r>
+              <a:rPr sz="800" b="0">
+                <a:solidFill>
+                  <a:srgbClr val="5B6677"/>
+                </a:solidFill>
+                <a:latin typeface="微软雅黑"/>
+                <a:ea typeface="微软雅黑"/>
+              </a:rPr>
+              <a:t>不达标即停,不进入开发</a:t>
+            </a:r>
+          </a:p>
+        </p:txBody>
+      </p:sp>
+      <p:sp>
+        <p:nvSpPr>
+          <p:cNvPr id="50" name="Oval 49"/>
+          <p:cNvSpPr/>
+          <p:nvPr/>
+        </p:nvSpPr>
+        <p:spPr>
+          <a:xfrm>
+            <a:off x="9720072" y="3310128"/>
+            <a:ext cx="274320" cy="274320"/>
+          </a:xfrm>
+          <a:prstGeom prst="ellipse">
+            <a:avLst/>
+          </a:prstGeom>
+          <a:solidFill>
+            <a:srgbClr val="FFFFFF"/>
+          </a:solidFill>
+          <a:ln w="15875">
+            <a:solidFill>
+              <a:srgbClr val="C00000"/>
+            </a:solidFill>
+          </a:ln>
+          <a:effectLst/>
+        </p:spPr>
+        <p:style>
+          <a:lnRef idx="1">
+            <a:schemeClr val="accent1"/>
+          </a:lnRef>
+          <a:fillRef idx="3">
+            <a:schemeClr val="accent1"/>
+          </a:fillRef>
+          <a:effectRef idx="2">
+            <a:schemeClr val="accent1"/>
+          </a:effectRef>
+          <a:fontRef idx="minor">
+            <a:schemeClr val="lt1"/>
+          </a:fontRef>
+        </p:style>
+        <p:txBody>
+          <a:bodyPr rtlCol="0" anchor="ctr" wrap="square" lIns="45720" rIns="45720" tIns="18288" bIns="18288"/>
+          <a:lstStyle/>
+          <a:p>
+            <a:pPr algn="ctr">
+              <a:spcBef>
+                <a:spcPts val="0"/>
+              </a:spcBef>
+              <a:spcAft>
+                <a:spcPts val="0"/>
+              </a:spcAft>
+            </a:pPr>
+            <a:r>
+              <a:rPr sz="1000" b="1">
+                <a:solidFill>
+                  <a:srgbClr val="C00000"/>
+                </a:solidFill>
+                <a:latin typeface="微软雅黑"/>
+                <a:ea typeface="微软雅黑"/>
+              </a:rPr>
+              <a:t>2</a:t>
+            </a:r>
+          </a:p>
+        </p:txBody>
+      </p:sp>
+      <p:sp>
+        <p:nvSpPr>
+          <p:cNvPr id="51" name="TextBox 50"/>
+          <p:cNvSpPr txBox="1"/>
+          <p:nvPr/>
+        </p:nvSpPr>
+        <p:spPr>
+          <a:xfrm>
+            <a:off x="10058400" y="3255264"/>
+            <a:ext cx="1773936" cy="1005840"/>
+          </a:xfrm>
+          <a:prstGeom prst="rect">
+            <a:avLst/>
+          </a:prstGeom>
+          <a:noFill/>
+        </p:spPr>
+        <p:txBody>
+          <a:bodyPr wrap="square">
+            <a:spAutoFit/>
+          </a:bodyPr>
+          <a:lstStyle/>
+          <a:p>
+            <a:pPr algn="l">
+              <a:spcBef>
+                <a:spcPts val="0"/>
+              </a:spcBef>
+              <a:spcAft>
+                <a:spcPts val="0"/>
+              </a:spcAft>
+            </a:pPr>
+            <a:r>
+              <a:rPr sz="1150" b="1">
+                <a:solidFill>
+                  <a:srgbClr val="C00000"/>
+                </a:solidFill>
+                <a:latin typeface="微软雅黑"/>
+                <a:ea typeface="微软雅黑"/>
+              </a:rPr>
+              <a:t>T+3 周</a:t>
+            </a:r>
+          </a:p>
+          <a:p>
+            <a:pPr algn="l">
+              <a:spcBef>
+                <a:spcPts val="100"/>
+              </a:spcBef>
+              <a:spcAft>
+                <a:spcPts val="0"/>
+              </a:spcAft>
+            </a:pPr>
+            <a:r>
+              <a:rPr sz="1000" b="1">
+                <a:solidFill>
+                  <a:srgbClr val="1B222E"/>
+                </a:solidFill>
+                <a:latin typeface="微软雅黑"/>
+                <a:ea typeface="微软雅黑"/>
+              </a:rPr>
+              <a:t>G2 · 打通信号</a:t>
+            </a:r>
+          </a:p>
+          <a:p>
+            <a:pPr algn="l">
+              <a:spcBef>
+                <a:spcPts val="100"/>
+              </a:spcBef>
+              <a:spcAft>
+                <a:spcPts val="0"/>
+              </a:spcAft>
+            </a:pPr>
+            <a:r>
+              <a:rPr sz="800" b="0">
+                <a:solidFill>
+                  <a:srgbClr val="5B6677"/>
+                </a:solidFill>
+                <a:latin typeface="微软雅黑"/>
+                <a:ea typeface="微软雅黑"/>
+              </a:rPr>
+              <a:t>vllm-ascend 加载置信度头</a:t>
+            </a:r>
+          </a:p>
+          <a:p>
+            <a:pPr algn="l">
+              <a:spcBef>
+                <a:spcPts val="100"/>
+              </a:spcBef>
+              <a:spcAft>
+                <a:spcPts val="0"/>
+              </a:spcAft>
+            </a:pPr>
+            <a:r>
+              <a:rPr sz="800" b="0">
+                <a:solidFill>
+                  <a:srgbClr val="5B6677"/>
+                </a:solidFill>
+                <a:latin typeface="微软雅黑"/>
+                <a:ea typeface="微软雅黑"/>
+              </a:rPr>
+              <a:t>端到端读出逐位置信度</a:t>
+            </a:r>
+          </a:p>
+          <a:p>
+            <a:pPr algn="l">
+              <a:spcBef>
+                <a:spcPts val="100"/>
+              </a:spcBef>
+              <a:spcAft>
+                <a:spcPts val="0"/>
+              </a:spcAft>
+            </a:pPr>
+            <a:r>
+              <a:rPr sz="800" b="0">
+                <a:solidFill>
+                  <a:srgbClr val="5B6677"/>
+                </a:solidFill>
+                <a:latin typeface="微软雅黑"/>
+                <a:ea typeface="微软雅黑"/>
+              </a:rPr>
+              <a:t>与实测接受率做相关性验证</a:t>
+            </a:r>
+          </a:p>
+        </p:txBody>
+      </p:sp>
+      <p:sp>
+        <p:nvSpPr>
+          <p:cNvPr id="52" name="Oval 51"/>
+          <p:cNvSpPr/>
+          <p:nvPr/>
+        </p:nvSpPr>
+        <p:spPr>
+          <a:xfrm>
+            <a:off x="9720072" y="4370831"/>
+            <a:ext cx="274320" cy="274320"/>
+          </a:xfrm>
+          <a:prstGeom prst="ellipse">
+            <a:avLst/>
+          </a:prstGeom>
+          <a:solidFill>
+            <a:srgbClr val="FFFFFF"/>
+          </a:solidFill>
+          <a:ln w="15875">
+            <a:solidFill>
+              <a:srgbClr val="C00000"/>
+            </a:solidFill>
+          </a:ln>
+          <a:effectLst/>
+        </p:spPr>
+        <p:style>
+          <a:lnRef idx="1">
+            <a:schemeClr val="accent1"/>
+          </a:lnRef>
+          <a:fillRef idx="3">
+            <a:schemeClr val="accent1"/>
+          </a:fillRef>
+          <a:effectRef idx="2">
+            <a:schemeClr val="accent1"/>
+          </a:effectRef>
+          <a:fontRef idx="minor">
+            <a:schemeClr val="lt1"/>
+          </a:fontRef>
+        </p:style>
+        <p:txBody>
+          <a:bodyPr rtlCol="0" anchor="ctr" wrap="square" lIns="45720" rIns="45720" tIns="18288" bIns="18288"/>
+          <a:lstStyle/>
+          <a:p>
+            <a:pPr algn="ctr">
+              <a:spcBef>
+                <a:spcPts val="0"/>
+              </a:spcBef>
+              <a:spcAft>
+                <a:spcPts val="0"/>
+              </a:spcAft>
+            </a:pPr>
+            <a:r>
+              <a:rPr sz="1000" b="1">
+                <a:solidFill>
+                  <a:srgbClr val="C00000"/>
+                </a:solidFill>
+                <a:latin typeface="微软雅黑"/>
+                <a:ea typeface="微软雅黑"/>
+              </a:rPr>
+              <a:t>3</a:t>
+            </a:r>
+          </a:p>
+        </p:txBody>
+      </p:sp>
+      <p:sp>
+        <p:nvSpPr>
+          <p:cNvPr id="53" name="TextBox 52"/>
+          <p:cNvSpPr txBox="1"/>
+          <p:nvPr/>
+        </p:nvSpPr>
+        <p:spPr>
+          <a:xfrm>
+            <a:off x="10058400" y="4315968"/>
+            <a:ext cx="1773936" cy="1005840"/>
+          </a:xfrm>
+          <a:prstGeom prst="rect">
+            <a:avLst/>
+          </a:prstGeom>
+          <a:noFill/>
+        </p:spPr>
+        <p:txBody>
+          <a:bodyPr wrap="square">
+            <a:spAutoFit/>
+          </a:bodyPr>
+          <a:lstStyle/>
+          <a:p>
+            <a:pPr algn="l">
+              <a:spcBef>
+                <a:spcPts val="0"/>
+              </a:spcBef>
+              <a:spcAft>
+                <a:spcPts val="0"/>
+              </a:spcAft>
+            </a:pPr>
+            <a:r>
+              <a:rPr sz="1150" b="1">
+                <a:solidFill>
+                  <a:srgbClr val="C00000"/>
+                </a:solidFill>
+                <a:latin typeface="微软雅黑"/>
+                <a:ea typeface="微软雅黑"/>
+              </a:rPr>
+              <a:t>T+11 周</a:t>
+            </a:r>
+          </a:p>
+          <a:p>
+            <a:pPr algn="l">
+              <a:spcBef>
+                <a:spcPts val="100"/>
+              </a:spcBef>
+              <a:spcAft>
+                <a:spcPts val="0"/>
+              </a:spcAft>
+            </a:pPr>
+            <a:r>
+              <a:rPr sz="1000" b="1">
+                <a:solidFill>
+                  <a:srgbClr val="1B222E"/>
+                </a:solidFill>
+                <a:latin typeface="微软雅黑"/>
+                <a:ea typeface="微软雅黑"/>
+              </a:rPr>
+              <a:t>G3 · 图模式 ★</a:t>
+            </a:r>
+          </a:p>
+          <a:p>
+            <a:pPr algn="l">
+              <a:spcBef>
+                <a:spcPts val="100"/>
+              </a:spcBef>
+              <a:spcAft>
+                <a:spcPts val="0"/>
+              </a:spcAft>
+            </a:pPr>
+            <a:r>
+              <a:rPr sz="800" b="0">
+                <a:solidFill>
+                  <a:srgbClr val="5B6677"/>
+                </a:solidFill>
+                <a:latin typeface="微软雅黑"/>
+                <a:ea typeface="微软雅黑"/>
+              </a:rPr>
+              <a:t>动态 K 在图模式下运行</a:t>
+            </a:r>
+          </a:p>
+          <a:p>
+            <a:pPr algn="l">
+              <a:spcBef>
+                <a:spcPts val="100"/>
+              </a:spcBef>
+              <a:spcAft>
+                <a:spcPts val="0"/>
+              </a:spcAft>
+            </a:pPr>
+            <a:r>
+              <a:rPr sz="800" b="0">
+                <a:solidFill>
+                  <a:srgbClr val="5B6677"/>
+                </a:solidFill>
+                <a:latin typeface="微软雅黑"/>
+                <a:ea typeface="微软雅黑"/>
+              </a:rPr>
+              <a:t>端到端不劣于同预算固定 K</a:t>
+            </a:r>
+          </a:p>
+          <a:p>
+            <a:pPr algn="l">
+              <a:spcBef>
+                <a:spcPts val="100"/>
+              </a:spcBef>
+              <a:spcAft>
+                <a:spcPts val="0"/>
+              </a:spcAft>
+            </a:pPr>
+            <a:r>
+              <a:rPr sz="800" b="0">
+                <a:solidFill>
+                  <a:srgbClr val="5B6677"/>
+                </a:solidFill>
+                <a:latin typeface="微软雅黑"/>
+                <a:ea typeface="微软雅黑"/>
+              </a:rPr>
+              <a:t>本项目主要技术风险所在</a:t>
+            </a:r>
+          </a:p>
+        </p:txBody>
+      </p:sp>
+      <p:sp>
+        <p:nvSpPr>
+          <p:cNvPr id="54" name="Oval 53"/>
+          <p:cNvSpPr/>
+          <p:nvPr/>
+        </p:nvSpPr>
+        <p:spPr>
+          <a:xfrm>
+            <a:off x="9720072" y="5431536"/>
+            <a:ext cx="274320" cy="274320"/>
+          </a:xfrm>
+          <a:prstGeom prst="ellipse">
+            <a:avLst/>
+          </a:prstGeom>
+          <a:solidFill>
+            <a:srgbClr val="FFFFFF"/>
+          </a:solidFill>
+          <a:ln w="15875">
+            <a:solidFill>
+              <a:srgbClr val="C00000"/>
+            </a:solidFill>
+          </a:ln>
+          <a:effectLst/>
+        </p:spPr>
+        <p:style>
+          <a:lnRef idx="1">
+            <a:schemeClr val="accent1"/>
+          </a:lnRef>
+          <a:fillRef idx="3">
+            <a:schemeClr val="accent1"/>
+          </a:fillRef>
+          <a:effectRef idx="2">
+            <a:schemeClr val="accent1"/>
+          </a:effectRef>
+          <a:fontRef idx="minor">
+            <a:schemeClr val="lt1"/>
+          </a:fontRef>
+        </p:style>
+        <p:txBody>
+          <a:bodyPr rtlCol="0" anchor="ctr" wrap="square" lIns="45720" rIns="45720" tIns="18288" bIns="18288"/>
+          <a:lstStyle/>
+          <a:p>
+            <a:pPr algn="ctr">
+              <a:spcBef>
+                <a:spcPts val="0"/>
+              </a:spcBef>
+              <a:spcAft>
+                <a:spcPts val="0"/>
+              </a:spcAft>
+            </a:pPr>
+            <a:r>
+              <a:rPr sz="1000" b="1">
+                <a:solidFill>
+                  <a:srgbClr val="C00000"/>
+                </a:solidFill>
+                <a:latin typeface="微软雅黑"/>
+                <a:ea typeface="微软雅黑"/>
+              </a:rPr>
+              <a:t>4</a:t>
+            </a:r>
+          </a:p>
+        </p:txBody>
+      </p:sp>
+      <p:sp>
+        <p:nvSpPr>
+          <p:cNvPr id="55" name="TextBox 54"/>
+          <p:cNvSpPr txBox="1"/>
+          <p:nvPr/>
+        </p:nvSpPr>
+        <p:spPr>
+          <a:xfrm>
+            <a:off x="10058400" y="5376672"/>
+            <a:ext cx="1773936" cy="1005840"/>
+          </a:xfrm>
+          <a:prstGeom prst="rect">
+            <a:avLst/>
+          </a:prstGeom>
+          <a:noFill/>
+        </p:spPr>
+        <p:txBody>
+          <a:bodyPr wrap="square">
+            <a:spAutoFit/>
+          </a:bodyPr>
+          <a:lstStyle/>
+          <a:p>
+            <a:pPr algn="l">
+              <a:spcBef>
+                <a:spcPts val="0"/>
+              </a:spcBef>
+              <a:spcAft>
+                <a:spcPts val="0"/>
+              </a:spcAft>
+            </a:pPr>
+            <a:r>
+              <a:rPr sz="1150" b="1">
+                <a:solidFill>
+                  <a:srgbClr val="C00000"/>
+                </a:solidFill>
+                <a:latin typeface="微软雅黑"/>
+                <a:ea typeface="微软雅黑"/>
+              </a:rPr>
+              <a:t>T+15 周</a:t>
+            </a:r>
+          </a:p>
+          <a:p>
+            <a:pPr algn="l">
+              <a:spcBef>
+                <a:spcPts val="100"/>
+              </a:spcBef>
+              <a:spcAft>
+                <a:spcPts val="0"/>
+              </a:spcAft>
+            </a:pPr>
+            <a:r>
+              <a:rPr sz="1000" b="1">
+                <a:solidFill>
+                  <a:srgbClr val="1B222E"/>
+                </a:solidFill>
+                <a:latin typeface="微软雅黑"/>
+                <a:ea typeface="微软雅黑"/>
+              </a:rPr>
+              <a:t>合入与扩展</a:t>
+            </a:r>
+          </a:p>
+          <a:p>
+            <a:pPr algn="l">
+              <a:spcBef>
+                <a:spcPts val="100"/>
+              </a:spcBef>
+              <a:spcAft>
+                <a:spcPts val="0"/>
+              </a:spcAft>
+            </a:pPr>
+            <a:r>
+              <a:rPr sz="800" b="0">
+                <a:solidFill>
+                  <a:srgbClr val="5B6677"/>
+                </a:solidFill>
+                <a:latin typeface="微软雅黑"/>
+                <a:ea typeface="微软雅黑"/>
+              </a:rPr>
+              <a:t>推广到通用模型路径</a:t>
+            </a:r>
+          </a:p>
+          <a:p>
+            <a:pPr algn="l">
+              <a:spcBef>
+                <a:spcPts val="100"/>
+              </a:spcBef>
+              <a:spcAft>
+                <a:spcPts val="0"/>
+              </a:spcAft>
+            </a:pPr>
+            <a:r>
+              <a:rPr sz="800" b="0">
+                <a:solidFill>
+                  <a:srgbClr val="5B6677"/>
+                </a:solidFill>
+                <a:latin typeface="微软雅黑"/>
+                <a:ea typeface="微软雅黑"/>
+              </a:rPr>
+              <a:t>补齐限制项 + 复现文档</a:t>
+            </a:r>
+          </a:p>
+        </p:txBody>
+      </p:sp>
+      <p:sp>
+        <p:nvSpPr>
+          <p:cNvPr id="56" name="TextBox 55"/>
+          <p:cNvSpPr txBox="1"/>
+          <p:nvPr/>
+        </p:nvSpPr>
+        <p:spPr>
+          <a:xfrm>
+            <a:off x="9637776" y="6455664"/>
+            <a:ext cx="2231136" cy="310896"/>
+          </a:xfrm>
+          <a:prstGeom prst="rect">
+            <a:avLst/>
+          </a:prstGeom>
+          <a:noFill/>
+        </p:spPr>
+        <p:txBody>
+          <a:bodyPr wrap="square">
+            <a:spAutoFit/>
+          </a:bodyPr>
+          <a:lstStyle/>
+          <a:p>
+            <a:pPr algn="l">
+              <a:spcBef>
+                <a:spcPts val="0"/>
+              </a:spcBef>
+              <a:spcAft>
+                <a:spcPts val="0"/>
+              </a:spcAft>
+            </a:pPr>
+            <a:r>
+              <a:rPr sz="750" b="0">
+                <a:solidFill>
+                  <a:srgbClr val="5B6677"/>
+                </a:solidFill>
+                <a:latin typeface="微软雅黑"/>
+                <a:ea typeface="微软雅黑"/>
+              </a:rPr>
+              <a:t>T = 立项批准日;绝对日期待排期确定后填入</a:t>
+            </a:r>
+          </a:p>
+        </p:txBody>
+      </p:sp>
+    </p:spTree>
+  </p:cSld>
+  <p:clrMapOvr>
+    <a:masterClrMapping/>
+  </p:clrMapOvr>
+</p:sld>
+</file>
+
+<file path=ppt/slides/slide3.xml><?xml version="1.0" encoding="utf-8"?>
+<p:sld xmlns:a="http://schemas.openxmlformats.org/drawingml/2006/main" xmlns:p="http://schemas.openxmlformats.org/presentationml/2006/main" xmlns:r="http://schemas.openxmlformats.org/officeDocument/2006/relationships">
+  <p:cSld>
+    <p:bg>
+      <p:bgPr>
+        <a:solidFill>
+          <a:srgbClr val="FFFFFF"/>
+        </a:solidFill>
+        <a:effectLst/>
+      </p:bgPr>
+    </p:bg>
+    <p:spTree>
+      <p:nvGrpSpPr>
+        <p:cNvPr id="1" name=""/>
+        <p:cNvGrpSpPr/>
+        <p:nvPr/>
+      </p:nvGrpSpPr>
+      <p:grpSpPr/>
+      <p:sp>
+        <p:nvSpPr>
+          <p:cNvPr id="2" name="TextBox 1"/>
+          <p:cNvSpPr txBox="1"/>
+          <p:nvPr/>
+        </p:nvSpPr>
+        <p:spPr>
+          <a:xfrm>
             <a:off x="502920" y="256032"/>
             <a:ext cx="11247120" cy="868680"/>
           </a:xfrm>
@@ -4101,7 +7779,7 @@
 </p:sld>
 </file>
 
-<file path=ppt/slides/slide3.xml><?xml version="1.0" encoding="utf-8"?>
+<file path=ppt/slides/slide4.xml><?xml version="1.0" encoding="utf-8"?>
 <p:sld xmlns:a="http://schemas.openxmlformats.org/drawingml/2006/main" xmlns:p="http://schemas.openxmlformats.org/presentationml/2006/main" xmlns:r="http://schemas.openxmlformats.org/officeDocument/2006/relationships">
   <p:cSld>
     <p:bg>
@@ -4979,7 +8657,7 @@
 </p:sld>
 </file>
 
-<file path=ppt/slides/slide4.xml><?xml version="1.0" encoding="utf-8"?>
+<file path=ppt/slides/slide5.xml><?xml version="1.0" encoding="utf-8"?>
 <p:sld xmlns:a="http://schemas.openxmlformats.org/drawingml/2006/main" xmlns:p="http://schemas.openxmlformats.org/presentationml/2006/main" xmlns:r="http://schemas.openxmlformats.org/officeDocument/2006/relationships">
   <p:cSld>
     <p:bg>
@@ -5907,7 +9585,7 @@
 </p:sld>
 </file>
 
-<file path=ppt/slides/slide5.xml><?xml version="1.0" encoding="utf-8"?>
+<file path=ppt/slides/slide6.xml><?xml version="1.0" encoding="utf-8"?>
 <p:sld xmlns:a="http://schemas.openxmlformats.org/drawingml/2006/main" xmlns:p="http://schemas.openxmlformats.org/presentationml/2006/main" xmlns:r="http://schemas.openxmlformats.org/officeDocument/2006/relationships">
   <p:cSld>
     <p:bg>
@@ -6961,7 +10639,7 @@
 </p:sld>
 </file>
 
-<file path=ppt/slides/slide6.xml><?xml version="1.0" encoding="utf-8"?>
+<file path=ppt/slides/slide7.xml><?xml version="1.0" encoding="utf-8"?>
 <p:sld xmlns:a="http://schemas.openxmlformats.org/drawingml/2006/main" xmlns:p="http://schemas.openxmlformats.org/presentationml/2006/main" xmlns:r="http://schemas.openxmlformats.org/officeDocument/2006/relationships">
   <p:cSld>
     <p:bg>
@@ -7756,7 +11434,7 @@
 </p:sld>
 </file>
 
-<file path=ppt/slides/slide7.xml><?xml version="1.0" encoding="utf-8"?>
+<file path=ppt/slides/slide8.xml><?xml version="1.0" encoding="utf-8"?>
 <p:sld xmlns:a="http://schemas.openxmlformats.org/drawingml/2006/main" xmlns:p="http://schemas.openxmlformats.org/presentationml/2006/main" xmlns:r="http://schemas.openxmlformats.org/officeDocument/2006/relationships">
   <p:cSld>
     <p:bg>

--- a/docs/memos/adaptive-spec-project-proposal-v3.pptx
+++ b/docs/memos/adaptive-spec-project-proposal-v3.pptx
@@ -3427,12 +3427,12 @@
             <a:r>
               <a:rPr sz="1050" b="0">
                 <a:solidFill>
-                  <a:srgbClr val="1B222E"/>
+                  <a:srgbClr val="C00000"/>
                 </a:solidFill>
                 <a:latin typeface="微软雅黑"/>
                 <a:ea typeface="微软雅黑"/>
               </a:rPr>
-              <a:t>· 变长 K_i 与设备图「形状固定」天然冲突,昇腾当前按固定形状捕获</a:t>
+              <a:t>★ 变长 K_i 与设备图「形状固定」冲突 —— 若进不了图,即便自适应实现了,性能仍可能不如固定 K</a:t>
             </a:r>
           </a:p>
           <a:p>
@@ -3447,12 +3447,12 @@
             <a:r>
               <a:rPr sz="1050" b="0">
                 <a:solidFill>
-                  <a:srgbClr val="C00000"/>
+                  <a:srgbClr val="5B6677"/>
                 </a:solidFill>
                 <a:latin typeface="微软雅黑"/>
                 <a:ea typeface="微软雅黑"/>
               </a:rPr>
-              <a:t>· 昇腾侧 confidence head 根本未被加载,调度所需的信号拿不到</a:t>
+              <a:t>· confidence head 在昇腾侧尚未加载(短期缺项,移植上游改法即可,非难点)</a:t>
             </a:r>
           </a:p>
         </p:txBody>
@@ -4634,8 +4634,8 @@
         </p:nvSpPr>
         <p:spPr>
           <a:xfrm>
-            <a:off x="274320" y="6291072"/>
-            <a:ext cx="2395728" cy="457200"/>
+            <a:off x="274320" y="6254496"/>
+            <a:ext cx="2395728" cy="512064"/>
           </a:xfrm>
           <a:prstGeom prst="rect">
             <a:avLst/>
@@ -4659,12 +4659,32 @@
             <a:r>
               <a:rPr sz="800" b="0">
                 <a:solidFill>
-                  <a:srgbClr val="C00000"/>
+                  <a:srgbClr val="5B6677"/>
                 </a:solidFill>
                 <a:latin typeface="微软雅黑"/>
                 <a:ea typeface="微软雅黑"/>
               </a:rPr>
-              <a:t>信号不可用 → 回草稿侧重拟合置信度头</a:t>
+              <a:t>① 信号不可用 → 回草稿侧重拟合置信度头</a:t>
+            </a:r>
+          </a:p>
+          <a:p>
+            <a:pPr algn="l">
+              <a:spcBef>
+                <a:spcPts val="100"/>
+              </a:spcBef>
+              <a:spcAft>
+                <a:spcPts val="0"/>
+              </a:spcAft>
+            </a:pPr>
+            <a:r>
+              <a:rPr sz="800" b="0">
+                <a:solidFill>
+                  <a:srgbClr val="C00000"/>
+                </a:solidFill>
+                <a:latin typeface="微软雅黑"/>
+                <a:ea typeface="微软雅黑"/>
+              </a:rPr>
+              <a:t>② 进不了图 → 退回 eager,收益打折</a:t>
             </a:r>
           </a:p>
         </p:txBody>
@@ -9005,7 +9025,7 @@
                           <a:latin typeface="微软雅黑"/>
                           <a:ea typeface="微软雅黑"/>
                         </a:rPr>
-                        <a:t>根本没有被加载</a:t>
+                        <a:t>尚未加载(短期缺项)</a:t>
                       </a:r>
                     </a:p>
                   </a:txBody>
@@ -9127,7 +9147,7 @@
                           <a:latin typeface="微软雅黑"/>
                           <a:ea typeface="微软雅黑"/>
                         </a:rPr>
-                        <a:t>小 —— 移植上游改法即可。</a:t>
+                        <a:t>小 —— 非难点。上游改动仅为解除一行</a:t>
                       </a:r>
                     </a:p>
                     <a:p>
@@ -9147,7 +9167,7 @@
                           <a:latin typeface="微软雅黑"/>
                           <a:ea typeface="微软雅黑"/>
                         </a:rPr>
-                        <a:t>草稿侧我们已就位:训练已产出该头,</a:t>
+                        <a:t>丢弃逻辑 + 一个线性头。草稿侧我们已就位:</a:t>
                       </a:r>
                     </a:p>
                     <a:p>
@@ -9167,7 +9187,7 @@
                           <a:latin typeface="微软雅黑"/>
                           <a:ea typeface="微软雅黑"/>
                         </a:rPr>
-                        <a:t>且已按上游区分 bias(DSV4 无 / Qwen3 有)</a:t>
+                        <a:t>训练已产出该头,且已按上游区分 bias</a:t>
                       </a:r>
                     </a:p>
                   </a:txBody>

--- a/docs/memos/adaptive-spec-project-proposal-v3.pptx
+++ b/docs/memos/adaptive-spec-project-proposal-v3.pptx
@@ -13,6 +13,7 @@
     <p:sldId id="261" r:id="rId12"/>
     <p:sldId id="262" r:id="rId13"/>
     <p:sldId id="263" r:id="rId14"/>
+    <p:sldId id="264" r:id="rId15"/>
   </p:sldIdLst>
   <p:sldSz cx="12191695" cy="6858000" type="screen4x3"/>
   <p:notesSz cx="6858000" cy="9144000"/>
@@ -4785,7 +4786,7 @@
         <p:spPr>
           <a:xfrm>
             <a:off x="2834640" y="2139696"/>
-            <a:ext cx="3520440" cy="1737360"/>
+            <a:ext cx="3520440" cy="1481328"/>
           </a:xfrm>
           <a:prstGeom prst="rect">
             <a:avLst/>
@@ -5875,8 +5876,8 @@
         </p:nvSpPr>
         <p:spPr>
           <a:xfrm>
-            <a:off x="6437375" y="4626864"/>
-            <a:ext cx="2962656" cy="1737360"/>
+            <a:off x="6437375" y="4590288"/>
+            <a:ext cx="2962656" cy="1828800"/>
           </a:xfrm>
           <a:prstGeom prst="rect">
             <a:avLst/>
@@ -5905,13 +5906,13 @@
                 <a:latin typeface="微软雅黑"/>
                 <a:ea typeface="微软雅黑"/>
               </a:rPr>
-              <a:t>· 昇腾无对应的「任意形状可入图」机制,这是本项目唯一的阻断性风险;</a:t>
+              <a:t>· 通用 FIA 路径的序列长度是 host 侧 list,捕获即固化 → 变长必须重捕;</a:t>
             </a:r>
           </a:p>
           <a:p>
             <a:pPr algn="l">
               <a:spcBef>
-                <a:spcPts val="300"/>
+                <a:spcPts val="200"/>
               </a:spcBef>
               <a:spcAft>
                 <a:spcPts val="0"/>
@@ -5925,13 +5926,13 @@
                 <a:latin typeface="微软雅黑"/>
                 <a:ea typeface="微软雅黑"/>
               </a:rPr>
-              <a:t>· 上游为 NVIDIA 后端加了 ALWAYS 声明,昇腾需自建等价能力;</a:t>
+              <a:t>· ★ DSV4 走的 DSA 路径长度在 device tensor 上,结构上无需重捕 —— 有利条件;</a:t>
             </a:r>
           </a:p>
           <a:p>
             <a:pPr algn="l">
               <a:spcBef>
-                <a:spcPts val="300"/>
+                <a:spcPts val="200"/>
               </a:spcBef>
               <a:spcAft>
                 <a:spcPts val="0"/>
@@ -5945,7 +5946,27 @@
                 <a:latin typeface="微软雅黑"/>
                 <a:ea typeface="微软雅黑"/>
               </a:rPr>
-              <a:t>· 若不可行,保留 eager 路径成果,并把图支持作为独立议题提交上游。</a:t>
+              <a:t>· 真正的未知量是 workspace / 图数量随 K 组合膨胀(workspace 按 num_tokens 做键);</a:t>
+            </a:r>
+          </a:p>
+          <a:p>
+            <a:pPr algn="l">
+              <a:spcBef>
+                <a:spcPts val="200"/>
+              </a:spcBef>
+              <a:spcAft>
+                <a:spcPts val="0"/>
+              </a:spcAft>
+            </a:pPr>
+            <a:r>
+              <a:rPr sz="850" b="0">
+                <a:solidFill>
+                  <a:srgbClr val="5B6677"/>
+                </a:solidFill>
+                <a:latin typeface="微软雅黑"/>
+                <a:ea typeface="微软雅黑"/>
+              </a:rPr>
+              <a:t>· 若确不可行,保留 eager 成果,把图支持作为独立议题提交上游。</a:t>
             </a:r>
           </a:p>
         </p:txBody>
@@ -9661,7 +9682,7 @@
                 <a:latin typeface="微软雅黑"/>
                 <a:ea typeface="微软雅黑"/>
               </a:rPr>
-              <a:t>四、实施方案与里程碑</a:t>
+              <a:t>三(补充)、「变长入图」在昇腾究竟难在哪</a:t>
             </a:r>
           </a:p>
           <a:p>
@@ -9681,7 +9702,7 @@
                 <a:latin typeface="微软雅黑"/>
                 <a:ea typeface="微软雅黑"/>
               </a:rPr>
-              <a:t>阶段 0 由“两周量化”缩为“一天判定”—— 上游数据已给出大部分答案</a:t>
+              <a:t>四条结论均出自 vllm-ascend 现网代码,标注文件与行号,可自行核对</a:t>
             </a:r>
           </a:p>
         </p:txBody>
@@ -9739,8 +9760,8 @@
           <p:nvPr/>
         </p:nvGraphicFramePr>
         <p:xfrm>
-          <a:off x="502920" y="1481328"/>
-          <a:ext cx="11247118" cy="3931920"/>
+          <a:off x="502920" y="1444752"/>
+          <a:ext cx="11247119" cy="3931920"/>
         </p:xfrm>
         <a:graphic>
           <a:graphicData uri="http://schemas.openxmlformats.org/drawingml/2006/table">
@@ -9749,10 +9770,10 @@
                 <a:tableStyleId>{5C22544A-7EE6-4342-B048-85BDC9FD1C3A}</a:tableStyleId>
               </a:tblPr>
               <a:tblGrid>
-                <a:gridCol w="787298"/>
-                <a:gridCol w="899769"/>
-                <a:gridCol w="5286146"/>
-                <a:gridCol w="4273905"/>
+                <a:gridCol w="1124712"/>
+                <a:gridCol w="1687068"/>
+                <a:gridCol w="4386376"/>
+                <a:gridCol w="4048963"/>
               </a:tblGrid>
               <a:tr h="786384">
                 <a:tc>
@@ -9769,14 +9790,14 @@
                         </a:spcAft>
                       </a:pPr>
                       <a:r>
-                        <a:rPr sz="1150" b="1">
-                          <a:solidFill>
-                            <a:srgbClr val="1B222E"/>
-                          </a:solidFill>
-                          <a:latin typeface="微软雅黑"/>
-                          <a:ea typeface="微软雅黑"/>
-                        </a:rPr>
-                        <a:t>阶段</a:t>
+                        <a:rPr sz="1000" b="1">
+                          <a:solidFill>
+                            <a:srgbClr val="1B222E"/>
+                          </a:solidFill>
+                          <a:latin typeface="微软雅黑"/>
+                          <a:ea typeface="微软雅黑"/>
+                        </a:rPr>
+                        <a:t>路径 / 部件</a:t>
                       </a:r>
                     </a:p>
                   </a:txBody>
@@ -9800,14 +9821,14 @@
                         </a:spcAft>
                       </a:pPr>
                       <a:r>
-                        <a:rPr sz="1150" b="1">
-                          <a:solidFill>
-                            <a:srgbClr val="1B222E"/>
-                          </a:solidFill>
-                          <a:latin typeface="微软雅黑"/>
-                          <a:ea typeface="微软雅黑"/>
-                        </a:rPr>
-                        <a:t>周期</a:t>
+                        <a:rPr sz="1000" b="1">
+                          <a:solidFill>
+                            <a:srgbClr val="1B222E"/>
+                          </a:solidFill>
+                          <a:latin typeface="微软雅黑"/>
+                          <a:ea typeface="微软雅黑"/>
+                        </a:rPr>
+                        <a:t>机制</a:t>
                       </a:r>
                     </a:p>
                   </a:txBody>
@@ -9831,14 +9852,14 @@
                         </a:spcAft>
                       </a:pPr>
                       <a:r>
-                        <a:rPr sz="1150" b="1">
-                          <a:solidFill>
-                            <a:srgbClr val="1B222E"/>
-                          </a:solidFill>
-                          <a:latin typeface="微软雅黑"/>
-                          <a:ea typeface="微软雅黑"/>
-                        </a:rPr>
-                        <a:t>主要工作</a:t>
+                        <a:rPr sz="1000" b="1">
+                          <a:solidFill>
+                            <a:srgbClr val="1B222E"/>
+                          </a:solidFill>
+                          <a:latin typeface="微软雅黑"/>
+                          <a:ea typeface="微软雅黑"/>
+                        </a:rPr>
+                        <a:t>代码出处(vllm-ascend)</a:t>
                       </a:r>
                     </a:p>
                   </a:txBody>
@@ -9862,14 +9883,14 @@
                         </a:spcAft>
                       </a:pPr>
                       <a:r>
-                        <a:rPr sz="1150" b="1">
-                          <a:solidFill>
-                            <a:srgbClr val="1B222E"/>
-                          </a:solidFill>
-                          <a:latin typeface="微软雅黑"/>
-                          <a:ea typeface="微软雅黑"/>
-                        </a:rPr>
-                        <a:t>交付物 / 决策门</a:t>
+                        <a:rPr sz="1000" b="1">
+                          <a:solidFill>
+                            <a:srgbClr val="1B222E"/>
+                          </a:solidFill>
+                          <a:latin typeface="微软雅黑"/>
+                          <a:ea typeface="微软雅黑"/>
+                        </a:rPr>
+                        <a:t>对变长 K 的影响</a:t>
                       </a:r>
                     </a:p>
                   </a:txBody>
@@ -9895,34 +9916,34 @@
                         </a:spcAft>
                       </a:pPr>
                       <a:r>
-                        <a:rPr sz="1150" b="0">
-                          <a:solidFill>
-                            <a:srgbClr val="1B222E"/>
-                          </a:solidFill>
-                          <a:latin typeface="微软雅黑"/>
-                          <a:ea typeface="微软雅黑"/>
-                        </a:rPr>
-                        <a:t>0</a:t>
-                      </a:r>
-                    </a:p>
-                    <a:p>
-                      <a:pPr>
-                        <a:spcBef>
-                          <a:spcPts val="0"/>
-                        </a:spcBef>
-                        <a:spcAft>
-                          <a:spcPts val="0"/>
-                        </a:spcAft>
-                      </a:pPr>
-                      <a:r>
-                        <a:rPr sz="1150" b="0">
-                          <a:solidFill>
-                            <a:srgbClr val="1B222E"/>
-                          </a:solidFill>
-                          <a:latin typeface="微软雅黑"/>
-                          <a:ea typeface="微软雅黑"/>
-                        </a:rPr>
-                        <a:t>判定</a:t>
+                        <a:rPr sz="1000" b="0">
+                          <a:solidFill>
+                            <a:srgbClr val="1B222E"/>
+                          </a:solidFill>
+                          <a:latin typeface="微软雅黑"/>
+                          <a:ea typeface="微软雅黑"/>
+                        </a:rPr>
+                        <a:t>通用路径</a:t>
+                      </a:r>
+                    </a:p>
+                    <a:p>
+                      <a:pPr>
+                        <a:spcBef>
+                          <a:spcPts val="0"/>
+                        </a:spcBef>
+                        <a:spcAft>
+                          <a:spcPts val="0"/>
+                        </a:spcAft>
+                      </a:pPr>
+                      <a:r>
+                        <a:rPr sz="1000" b="0">
+                          <a:solidFill>
+                            <a:srgbClr val="1B222E"/>
+                          </a:solidFill>
+                          <a:latin typeface="微软雅黑"/>
+                          <a:ea typeface="微软雅黑"/>
+                        </a:rPr>
+                        <a:t>FIA v2</a:t>
                       </a:r>
                     </a:p>
                   </a:txBody>
@@ -9946,14 +9967,34 @@
                         </a:spcAft>
                       </a:pPr>
                       <a:r>
-                        <a:rPr sz="1150" b="0">
-                          <a:solidFill>
-                            <a:srgbClr val="1B222E"/>
-                          </a:solidFill>
-                          <a:latin typeface="微软雅黑"/>
-                          <a:ea typeface="微软雅黑"/>
-                        </a:rPr>
-                        <a:t>1 天</a:t>
+                        <a:rPr sz="1000" b="0">
+                          <a:solidFill>
+                            <a:srgbClr val="1B222E"/>
+                          </a:solidFill>
+                          <a:latin typeface="微软雅黑"/>
+                          <a:ea typeface="微软雅黑"/>
+                        </a:rPr>
+                        <a:t>序列长度是</a:t>
+                      </a:r>
+                    </a:p>
+                    <a:p>
+                      <a:pPr>
+                        <a:spcBef>
+                          <a:spcPts val="0"/>
+                        </a:spcBef>
+                        <a:spcAft>
+                          <a:spcPts val="0"/>
+                        </a:spcAft>
+                      </a:pPr>
+                      <a:r>
+                        <a:rPr sz="1000" b="0">
+                          <a:solidFill>
+                            <a:srgbClr val="1B222E"/>
+                          </a:solidFill>
+                          <a:latin typeface="微软雅黑"/>
+                          <a:ea typeface="微软雅黑"/>
+                        </a:rPr>
+                        <a:t>host 侧 Python list</a:t>
                       </a:r>
                     </a:p>
                   </a:txBody>
@@ -9977,34 +10018,74 @@
                         </a:spcAft>
                       </a:pPr>
                       <a:r>
-                        <a:rPr sz="1150" b="0">
-                          <a:solidFill>
-                            <a:srgbClr val="1B222E"/>
-                          </a:solidFill>
-                          <a:latin typeface="微软雅黑"/>
-                          <a:ea typeface="微软雅黑"/>
-                        </a:rPr>
-                        <a:t>在昇腾现有固定 K 链路上,把加速比从 c=48 补测到</a:t>
-                      </a:r>
-                    </a:p>
-                    <a:p>
-                      <a:pPr>
-                        <a:spcBef>
-                          <a:spcPts val="0"/>
-                        </a:spcBef>
-                        <a:spcAft>
-                          <a:spcPts val="0"/>
-                        </a:spcAft>
-                      </a:pPr>
-                      <a:r>
-                        <a:rPr sz="1150" b="0">
-                          <a:solidFill>
-                            <a:srgbClr val="1B222E"/>
-                          </a:solidFill>
-                          <a:latin typeface="微软雅黑"/>
-                          <a:ea typeface="微软雅黑"/>
-                        </a:rPr>
-                        <a:t>c=128 / c=256,看是否出现上游那样的收益衰减</a:t>
+                        <a:rPr sz="1000" b="0">
+                          <a:solidFill>
+                            <a:srgbClr val="1B222E"/>
+                          </a:solidFill>
+                          <a:latin typeface="微软雅黑"/>
+                          <a:ea typeface="微软雅黑"/>
+                        </a:rPr>
+                        <a:t>attention_v1.py:183</a:t>
+                      </a:r>
+                    </a:p>
+                    <a:p>
+                      <a:pPr>
+                        <a:spcBef>
+                          <a:spcPts val="0"/>
+                        </a:spcBef>
+                        <a:spcAft>
+                          <a:spcPts val="0"/>
+                        </a:spcAft>
+                      </a:pPr>
+                      <a:r>
+                        <a:rPr sz="1000" b="0">
+                          <a:solidFill>
+                            <a:srgbClr val="1B222E"/>
+                          </a:solidFill>
+                          <a:latin typeface="微软雅黑"/>
+                          <a:ea typeface="微软雅黑"/>
+                        </a:rPr>
+                        <a:t>  actual_seq_lengths_q: list[int]</a:t>
+                      </a:r>
+                    </a:p>
+                    <a:p>
+                      <a:pPr>
+                        <a:spcBef>
+                          <a:spcPts val="0"/>
+                        </a:spcBef>
+                        <a:spcAft>
+                          <a:spcPts val="0"/>
+                        </a:spcAft>
+                      </a:pPr>
+                      <a:r>
+                        <a:rPr sz="1000" b="0">
+                          <a:solidFill>
+                            <a:srgbClr val="1B222E"/>
+                          </a:solidFill>
+                          <a:latin typeface="微软雅黑"/>
+                          <a:ea typeface="微软雅黑"/>
+                        </a:rPr>
+                        <a:t>attention_v1.py:314  由</a:t>
+                      </a:r>
+                    </a:p>
+                    <a:p>
+                      <a:pPr>
+                        <a:spcBef>
+                          <a:spcPts val="0"/>
+                        </a:spcBef>
+                        <a:spcAft>
+                          <a:spcPts val="0"/>
+                        </a:spcAft>
+                      </a:pPr>
+                      <a:r>
+                        <a:rPr sz="1000" b="0">
+                          <a:solidFill>
+                            <a:srgbClr val="1B222E"/>
+                          </a:solidFill>
+                          <a:latin typeface="微软雅黑"/>
+                          <a:ea typeface="微软雅黑"/>
+                        </a:rPr>
+                        <a:t>  query_start_loc_cpu[1:].tolist() 构造</a:t>
                       </a:r>
                     </a:p>
                   </a:txBody>
@@ -10028,34 +10109,54 @@
                         </a:spcAft>
                       </a:pPr>
                       <a:r>
-                        <a:rPr sz="1150" b="0">
-                          <a:solidFill>
-                            <a:srgbClr val="1B222E"/>
-                          </a:solidFill>
-                          <a:latin typeface="微软雅黑"/>
-                          <a:ea typeface="微软雅黑"/>
-                        </a:rPr>
-                        <a:t>一张并发-加速比曲线</a:t>
-                      </a:r>
-                    </a:p>
-                    <a:p>
-                      <a:pPr>
-                        <a:spcBef>
-                          <a:spcPts val="0"/>
-                        </a:spcBef>
-                        <a:spcAft>
-                          <a:spcPts val="0"/>
-                        </a:spcAft>
-                      </a:pPr>
-                      <a:r>
-                        <a:rPr sz="1150" b="0">
-                          <a:solidFill>
-                            <a:srgbClr val="1B222E"/>
-                          </a:solidFill>
-                          <a:latin typeface="微软雅黑"/>
-                          <a:ea typeface="微软雅黑"/>
-                        </a:rPr>
-                        <a:t>G1:是否值得继续</a:t>
+                        <a:rPr sz="1000" b="0">
+                          <a:solidFill>
+                            <a:srgbClr val="1B222E"/>
+                          </a:solidFill>
+                          <a:latin typeface="微软雅黑"/>
+                          <a:ea typeface="微软雅黑"/>
+                        </a:rPr>
+                        <a:t>值在捕获时被烘进图 —— K 一变图里的长度就是错的,</a:t>
+                      </a:r>
+                    </a:p>
+                    <a:p>
+                      <a:pPr>
+                        <a:spcBef>
+                          <a:spcPts val="0"/>
+                        </a:spcBef>
+                        <a:spcAft>
+                          <a:spcPts val="0"/>
+                        </a:spcAft>
+                      </a:pPr>
+                      <a:r>
+                        <a:rPr sz="1000" b="0">
+                          <a:solidFill>
+                            <a:srgbClr val="1B222E"/>
+                          </a:solidFill>
+                          <a:latin typeface="微软雅黑"/>
+                          <a:ea typeface="微软雅黑"/>
+                        </a:rPr>
+                        <a:t>必须为每个形状重新捕获。这就是「任意形状</a:t>
+                      </a:r>
+                    </a:p>
+                    <a:p>
+                      <a:pPr>
+                        <a:spcBef>
+                          <a:spcPts val="0"/>
+                        </a:spcBef>
+                        <a:spcAft>
+                          <a:spcPts val="0"/>
+                        </a:spcAft>
+                      </a:pPr>
+                      <a:r>
+                        <a:rPr sz="1000" b="0">
+                          <a:solidFill>
+                            <a:srgbClr val="1B222E"/>
+                          </a:solidFill>
+                          <a:latin typeface="微软雅黑"/>
+                          <a:ea typeface="微软雅黑"/>
+                        </a:rPr>
+                        <a:t>不可入图」的机械原因</a:t>
                       </a:r>
                     </a:p>
                   </a:txBody>
@@ -10081,34 +10182,34 @@
                         </a:spcAft>
                       </a:pPr>
                       <a:r>
-                        <a:rPr sz="1150" b="0">
-                          <a:solidFill>
-                            <a:srgbClr val="1B222E"/>
-                          </a:solidFill>
-                          <a:latin typeface="微软雅黑"/>
-                          <a:ea typeface="微软雅黑"/>
-                        </a:rPr>
-                        <a:t>1</a:t>
-                      </a:r>
-                    </a:p>
-                    <a:p>
-                      <a:pPr>
-                        <a:spcBef>
-                          <a:spcPts val="0"/>
-                        </a:spcBef>
-                        <a:spcAft>
-                          <a:spcPts val="0"/>
-                        </a:spcAft>
-                      </a:pPr>
-                      <a:r>
-                        <a:rPr sz="1150" b="0">
-                          <a:solidFill>
-                            <a:srgbClr val="1B222E"/>
-                          </a:solidFill>
-                          <a:latin typeface="微软雅黑"/>
-                          <a:ea typeface="微软雅黑"/>
-                        </a:rPr>
-                        <a:t>打通</a:t>
+                        <a:rPr sz="1000" b="0">
+                          <a:solidFill>
+                            <a:srgbClr val="1B222E"/>
+                          </a:solidFill>
+                          <a:latin typeface="微软雅黑"/>
+                          <a:ea typeface="微软雅黑"/>
+                        </a:rPr>
+                        <a:t>★ DSV4 路径</a:t>
+                      </a:r>
+                    </a:p>
+                    <a:p>
+                      <a:pPr>
+                        <a:spcBef>
+                          <a:spcPts val="0"/>
+                        </a:spcBef>
+                        <a:spcAft>
+                          <a:spcPts val="0"/>
+                        </a:spcAft>
+                      </a:pPr>
+                      <a:r>
+                        <a:rPr sz="1000" b="0">
+                          <a:solidFill>
+                            <a:srgbClr val="1B222E"/>
+                          </a:solidFill>
+                          <a:latin typeface="微软雅黑"/>
+                          <a:ea typeface="微软雅黑"/>
+                        </a:rPr>
+                        <a:t>DSA / SFA</a:t>
                       </a:r>
                     </a:p>
                   </a:txBody>
@@ -10132,14 +10233,34 @@
                         </a:spcAft>
                       </a:pPr>
                       <a:r>
-                        <a:rPr sz="1150" b="0">
-                          <a:solidFill>
-                            <a:srgbClr val="1B222E"/>
-                          </a:solidFill>
-                          <a:latin typeface="微软雅黑"/>
-                          <a:ea typeface="微软雅黑"/>
-                        </a:rPr>
-                        <a:t>2–3 周</a:t>
+                        <a:rPr sz="1000" b="0">
+                          <a:solidFill>
+                            <a:srgbClr val="1B222E"/>
+                          </a:solidFill>
+                          <a:latin typeface="微软雅黑"/>
+                          <a:ea typeface="微软雅黑"/>
+                        </a:rPr>
+                        <a:t>序列长度是</a:t>
+                      </a:r>
+                    </a:p>
+                    <a:p>
+                      <a:pPr>
+                        <a:spcBef>
+                          <a:spcPts val="0"/>
+                        </a:spcBef>
+                        <a:spcAft>
+                          <a:spcPts val="0"/>
+                        </a:spcAft>
+                      </a:pPr>
+                      <a:r>
+                        <a:rPr sz="1000" b="0">
+                          <a:solidFill>
+                            <a:srgbClr val="1B222E"/>
+                          </a:solidFill>
+                          <a:latin typeface="微软雅黑"/>
+                          <a:ea typeface="微软雅黑"/>
+                        </a:rPr>
+                        <a:t>device tensor</a:t>
                       </a:r>
                     </a:p>
                   </a:txBody>
@@ -10163,34 +10284,74 @@
                         </a:spcAft>
                       </a:pPr>
                       <a:r>
-                        <a:rPr sz="1150" b="0">
-                          <a:solidFill>
-                            <a:srgbClr val="1B222E"/>
-                          </a:solidFill>
-                          <a:latin typeface="微软雅黑"/>
-                          <a:ea typeface="微软雅黑"/>
-                        </a:rPr>
-                        <a:t>vllm-ascend 加载 confidence head(移植上游改法);</a:t>
-                      </a:r>
-                    </a:p>
-                    <a:p>
-                      <a:pPr>
-                        <a:spcBef>
-                          <a:spcPts val="0"/>
-                        </a:spcBef>
-                        <a:spcAft>
-                          <a:spcPts val="0"/>
-                        </a:spcAft>
-                      </a:pPr>
-                      <a:r>
-                        <a:rPr sz="1150" b="0">
-                          <a:solidFill>
-                            <a:srgbClr val="1B222E"/>
-                          </a:solidFill>
-                          <a:latin typeface="微软雅黑"/>
-                          <a:ea typeface="微软雅黑"/>
-                        </a:rPr>
-                        <a:t>草稿侧供给并校验 confidence 数值合理性</a:t>
+                        <a:rPr sz="1000" b="0">
+                          <a:solidFill>
+                            <a:srgbClr val="1B222E"/>
+                          </a:solidFill>
+                          <a:latin typeface="微软雅黑"/>
+                          <a:ea typeface="微软雅黑"/>
+                        </a:rPr>
+                        <a:t>device_op.py:559</a:t>
+                      </a:r>
+                    </a:p>
+                    <a:p>
+                      <a:pPr>
+                        <a:spcBef>
+                          <a:spcPts val="0"/>
+                        </a:spcBef>
+                        <a:spcAft>
+                          <a:spcPts val="0"/>
+                        </a:spcAft>
+                      </a:pPr>
+                      <a:r>
+                        <a:rPr sz="1000" b="0">
+                          <a:solidFill>
+                            <a:srgbClr val="1B222E"/>
+                          </a:solidFill>
+                          <a:latin typeface="微软雅黑"/>
+                          <a:ea typeface="微软雅黑"/>
+                        </a:rPr>
+                        <a:t>  actual_seq_lengths_query: torch.Tensor</a:t>
+                      </a:r>
+                    </a:p>
+                    <a:p>
+                      <a:pPr>
+                        <a:spcBef>
+                          <a:spcPts val="0"/>
+                        </a:spcBef>
+                        <a:spcAft>
+                          <a:spcPts val="0"/>
+                        </a:spcAft>
+                      </a:pPr>
+                      <a:r>
+                        <a:rPr sz="1000" b="0">
+                          <a:solidFill>
+                            <a:srgbClr val="1B222E"/>
+                          </a:solidFill>
+                          <a:latin typeface="微软雅黑"/>
+                          <a:ea typeface="微软雅黑"/>
+                        </a:rPr>
+                        <a:t>dsa_v1.py:1061  传入</a:t>
+                      </a:r>
+                    </a:p>
+                    <a:p>
+                      <a:pPr>
+                        <a:spcBef>
+                          <a:spcPts val="0"/>
+                        </a:spcBef>
+                        <a:spcAft>
+                          <a:spcPts val="0"/>
+                        </a:spcAft>
+                      </a:pPr>
+                      <a:r>
+                        <a:rPr sz="1000" b="0">
+                          <a:solidFill>
+                            <a:srgbClr val="1B222E"/>
+                          </a:solidFill>
+                          <a:latin typeface="微软雅黑"/>
+                          <a:ea typeface="微软雅黑"/>
+                        </a:rPr>
+                        <a:t>  query_start_loc[1:].clone()</a:t>
                       </a:r>
                     </a:p>
                   </a:txBody>
@@ -10214,34 +10375,34 @@
                         </a:spcAft>
                       </a:pPr>
                       <a:r>
-                        <a:rPr sz="1150" b="0">
-                          <a:solidFill>
-                            <a:srgbClr val="1B222E"/>
-                          </a:solidFill>
-                          <a:latin typeface="微软雅黑"/>
-                          <a:ea typeface="微软雅黑"/>
-                        </a:rPr>
-                        <a:t>端到端可读出逐位置信度</a:t>
-                      </a:r>
-                    </a:p>
-                    <a:p>
-                      <a:pPr>
-                        <a:spcBef>
-                          <a:spcPts val="0"/>
-                        </a:spcBef>
-                        <a:spcAft>
-                          <a:spcPts val="0"/>
-                        </a:spcAft>
-                      </a:pPr>
-                      <a:r>
-                        <a:rPr sz="1150" b="0">
-                          <a:solidFill>
-                            <a:srgbClr val="1B222E"/>
-                          </a:solidFill>
-                          <a:latin typeface="微软雅黑"/>
-                          <a:ea typeface="微软雅黑"/>
-                        </a:rPr>
-                        <a:t>G2:置信度与实际接受率相关</a:t>
+                        <a:rPr sz="1000" b="0">
+                          <a:solidFill>
+                            <a:srgbClr val="1B222E"/>
+                          </a:solidFill>
+                          <a:latin typeface="微软雅黑"/>
+                          <a:ea typeface="微软雅黑"/>
+                        </a:rPr>
+                        <a:t>图捕获的是指针不是值 —— 改张量内容即可,结构上</a:t>
+                      </a:r>
+                    </a:p>
+                    <a:p>
+                      <a:pPr>
+                        <a:spcBef>
+                          <a:spcPts val="0"/>
+                        </a:spcBef>
+                        <a:spcAft>
+                          <a:spcPts val="0"/>
+                        </a:spcAft>
+                      </a:pPr>
+                      <a:r>
+                        <a:rPr sz="1000" b="0">
+                          <a:solidFill>
+                            <a:srgbClr val="1B222E"/>
+                          </a:solidFill>
+                          <a:latin typeface="微软雅黑"/>
+                          <a:ea typeface="微软雅黑"/>
+                        </a:rPr>
+                        <a:t>不需要重捕。★ 我们主攻的路径恰好在更有利的一侧</a:t>
                       </a:r>
                     </a:p>
                   </a:txBody>
@@ -10267,34 +10428,14 @@
                         </a:spcAft>
                       </a:pPr>
                       <a:r>
-                        <a:rPr sz="1150" b="0">
-                          <a:solidFill>
-                            <a:srgbClr val="1B222E"/>
-                          </a:solidFill>
-                          <a:latin typeface="微软雅黑"/>
-                          <a:ea typeface="微软雅黑"/>
-                        </a:rPr>
-                        <a:t>2</a:t>
-                      </a:r>
-                    </a:p>
-                    <a:p>
-                      <a:pPr>
-                        <a:spcBef>
-                          <a:spcPts val="0"/>
-                        </a:spcBef>
-                        <a:spcAft>
-                          <a:spcPts val="0"/>
-                        </a:spcAft>
-                      </a:pPr>
-                      <a:r>
-                        <a:rPr sz="1150" b="0">
-                          <a:solidFill>
-                            <a:srgbClr val="1B222E"/>
-                          </a:solidFill>
-                          <a:latin typeface="微软雅黑"/>
-                          <a:ea typeface="微软雅黑"/>
-                        </a:rPr>
-                        <a:t>图支持</a:t>
+                        <a:rPr sz="1000" b="0">
+                          <a:solidFill>
+                            <a:srgbClr val="1B222E"/>
+                          </a:solidFill>
+                          <a:latin typeface="微软雅黑"/>
+                          <a:ea typeface="微软雅黑"/>
+                        </a:rPr>
+                        <a:t>workspace</a:t>
                       </a:r>
                     </a:p>
                   </a:txBody>
@@ -10318,14 +10459,14 @@
                         </a:spcAft>
                       </a:pPr>
                       <a:r>
-                        <a:rPr sz="1150" b="0">
-                          <a:solidFill>
-                            <a:srgbClr val="1B222E"/>
-                          </a:solidFill>
-                          <a:latin typeface="微软雅黑"/>
-                          <a:ea typeface="微软雅黑"/>
-                        </a:rPr>
-                        <a:t>6–8 周</a:t>
+                        <a:rPr sz="1000" b="0">
+                          <a:solidFill>
+                            <a:srgbClr val="1B222E"/>
+                          </a:solidFill>
+                          <a:latin typeface="微软雅黑"/>
+                          <a:ea typeface="微软雅黑"/>
+                        </a:rPr>
+                        <a:t>按 token 数做缓存键</a:t>
                       </a:r>
                     </a:p>
                   </a:txBody>
@@ -10349,34 +10490,74 @@
                         </a:spcAft>
                       </a:pPr>
                       <a:r>
-                        <a:rPr sz="1150" b="0">
-                          <a:solidFill>
-                            <a:srgbClr val="1B222E"/>
-                          </a:solidFill>
-                          <a:latin typeface="微软雅黑"/>
-                          <a:ea typeface="微软雅黑"/>
-                        </a:rPr>
-                        <a:t>★ 变长 decode 图:对齐 ALWAYS 语义或采用 SGLang</a:t>
-                      </a:r>
-                    </a:p>
-                    <a:p>
-                      <a:pPr>
-                        <a:spcBef>
-                          <a:spcPts val="0"/>
-                        </a:spcBef>
-                        <a:spcAft>
-                          <a:spcPts val="0"/>
-                        </a:spcAft>
-                      </a:pPr>
-                      <a:r>
-                        <a:rPr sz="1150" b="0">
-                          <a:solidFill>
-                            <a:srgbClr val="1B222E"/>
-                          </a:solidFill>
-                          <a:latin typeface="微软雅黑"/>
-                          <a:ea typeface="微软雅黑"/>
-                        </a:rPr>
-                        <a:t>的 packed varlen;预算 kernel 昇腾实现 + 成本曲线标定</a:t>
+                        <a:rPr sz="1000" b="0">
+                          <a:solidFill>
+                            <a:srgbClr val="1B222E"/>
+                          </a:solidFill>
+                          <a:latin typeface="微软雅黑"/>
+                          <a:ea typeface="微软雅黑"/>
+                        </a:rPr>
+                        <a:t>attention_v1.py:490/636/812/953</a:t>
+                      </a:r>
+                    </a:p>
+                    <a:p>
+                      <a:pPr>
+                        <a:spcBef>
+                          <a:spcPts val="0"/>
+                        </a:spcBef>
+                        <a:spcAft>
+                          <a:spcPts val="0"/>
+                        </a:spcAft>
+                      </a:pPr>
+                      <a:r>
+                        <a:rPr sz="1000" b="0">
+                          <a:solidFill>
+                            <a:srgbClr val="1B222E"/>
+                          </a:solidFill>
+                          <a:latin typeface="微软雅黑"/>
+                          <a:ea typeface="微软雅黑"/>
+                        </a:rPr>
+                        <a:t>  workspaces.get(num_tokens)</a:t>
+                      </a:r>
+                    </a:p>
+                    <a:p>
+                      <a:pPr>
+                        <a:spcBef>
+                          <a:spcPts val="0"/>
+                        </a:spcBef>
+                        <a:spcAft>
+                          <a:spcPts val="0"/>
+                        </a:spcAft>
+                      </a:pPr>
+                      <a:r>
+                        <a:rPr sz="1000" b="0">
+                          <a:solidFill>
+                            <a:srgbClr val="1B222E"/>
+                          </a:solidFill>
+                          <a:latin typeface="微软雅黑"/>
+                          <a:ea typeface="微软雅黑"/>
+                        </a:rPr>
+                        <a:t>attention_v1.py:774</a:t>
+                      </a:r>
+                    </a:p>
+                    <a:p>
+                      <a:pPr>
+                        <a:spcBef>
+                          <a:spcPts val="0"/>
+                        </a:spcBef>
+                        <a:spcAft>
+                          <a:spcPts val="0"/>
+                        </a:spcAft>
+                      </a:pPr>
+                      <a:r>
+                        <a:rPr sz="1000" b="0">
+                          <a:solidFill>
+                            <a:srgbClr val="1B222E"/>
+                          </a:solidFill>
+                          <a:latin typeface="微软雅黑"/>
+                          <a:ea typeface="微软雅黑"/>
+                        </a:rPr>
+                        <a:t>  num_tokens = actual_seq_lengths_q[-1]</a:t>
                       </a:r>
                     </a:p>
                   </a:txBody>
@@ -10400,34 +10581,54 @@
                         </a:spcAft>
                       </a:pPr>
                       <a:r>
-                        <a:rPr sz="1150" b="0">
-                          <a:solidFill>
-                            <a:srgbClr val="1B222E"/>
-                          </a:solidFill>
-                          <a:latin typeface="微软雅黑"/>
-                          <a:ea typeface="微软雅黑"/>
-                        </a:rPr>
-                        <a:t>动态 K 在图模式下可运行</a:t>
-                      </a:r>
-                    </a:p>
-                    <a:p>
-                      <a:pPr>
-                        <a:spcBef>
-                          <a:spcPts val="0"/>
-                        </a:spcBef>
-                        <a:spcAft>
-                          <a:spcPts val="0"/>
-                        </a:spcAft>
-                      </a:pPr>
-                      <a:r>
-                        <a:rPr sz="1150" b="0">
-                          <a:solidFill>
-                            <a:srgbClr val="1B222E"/>
-                          </a:solidFill>
-                          <a:latin typeface="微软雅黑"/>
-                          <a:ea typeface="微软雅黑"/>
-                        </a:rPr>
-                        <a:t>G3:相对固定 K 不劣化</a:t>
+                        <a:rPr sz="1000" b="0">
+                          <a:solidFill>
+                            <a:srgbClr val="1B222E"/>
+                          </a:solidFill>
+                          <a:latin typeface="微软雅黑"/>
+                          <a:ea typeface="微软雅黑"/>
+                        </a:rPr>
+                        <a:t>K 变 → num_tokens 变 → 缓存未命中、重新分配;</a:t>
+                      </a:r>
+                    </a:p>
+                    <a:p>
+                      <a:pPr>
+                        <a:spcBef>
+                          <a:spcPts val="0"/>
+                        </a:spcBef>
+                        <a:spcAft>
+                          <a:spcPts val="0"/>
+                        </a:spcAft>
+                      </a:pPr>
+                      <a:r>
+                        <a:rPr sz="1000" b="0">
+                          <a:solidFill>
+                            <a:srgbClr val="1B222E"/>
+                          </a:solidFill>
+                          <a:latin typeface="微软雅黑"/>
+                          <a:ea typeface="微软雅黑"/>
+                        </a:rPr>
+                        <a:t>不同 K 组合一多,图与 workspace 数量一起膨胀。</a:t>
+                      </a:r>
+                    </a:p>
+                    <a:p>
+                      <a:pPr>
+                        <a:spcBef>
+                          <a:spcPts val="0"/>
+                        </a:spcBef>
+                        <a:spcAft>
+                          <a:spcPts val="0"/>
+                        </a:spcAft>
+                      </a:pPr>
+                      <a:r>
+                        <a:rPr sz="1000" b="0">
+                          <a:solidFill>
+                            <a:srgbClr val="1B222E"/>
+                          </a:solidFill>
+                          <a:latin typeface="微软雅黑"/>
+                          <a:ea typeface="微软雅黑"/>
+                        </a:rPr>
+                        <a:t>★ 真正的成本在这里</a:t>
                       </a:r>
                     </a:p>
                   </a:txBody>
@@ -10453,34 +10654,34 @@
                         </a:spcAft>
                       </a:pPr>
                       <a:r>
-                        <a:rPr sz="1150" b="0">
-                          <a:solidFill>
-                            <a:srgbClr val="1B222E"/>
-                          </a:solidFill>
-                          <a:latin typeface="微软雅黑"/>
-                          <a:ea typeface="微软雅黑"/>
-                        </a:rPr>
-                        <a:t>3</a:t>
-                      </a:r>
-                    </a:p>
-                    <a:p>
-                      <a:pPr>
-                        <a:spcBef>
-                          <a:spcPts val="0"/>
-                        </a:spcBef>
-                        <a:spcAft>
-                          <a:spcPts val="0"/>
-                        </a:spcAft>
-                      </a:pPr>
-                      <a:r>
-                        <a:rPr sz="1150" b="0">
-                          <a:solidFill>
-                            <a:srgbClr val="1B222E"/>
-                          </a:solidFill>
-                          <a:latin typeface="微软雅黑"/>
-                          <a:ea typeface="微软雅黑"/>
-                        </a:rPr>
-                        <a:t>扩展</a:t>
+                        <a:rPr sz="1000" b="0">
+                          <a:solidFill>
+                            <a:srgbClr val="1B222E"/>
+                          </a:solidFill>
+                          <a:latin typeface="微软雅黑"/>
+                          <a:ea typeface="微软雅黑"/>
+                        </a:rPr>
+                        <a:t>图内元数据</a:t>
+                      </a:r>
+                    </a:p>
+                    <a:p>
+                      <a:pPr>
+                        <a:spcBef>
+                          <a:spcPts val="0"/>
+                        </a:spcBef>
+                        <a:spcAft>
+                          <a:spcPts val="0"/>
+                        </a:spcAft>
+                      </a:pPr>
+                      <a:r>
+                        <a:rPr sz="1000" b="0">
+                          <a:solidFill>
+                            <a:srgbClr val="1B222E"/>
+                          </a:solidFill>
+                          <a:latin typeface="微软雅黑"/>
+                          <a:ea typeface="微软雅黑"/>
+                        </a:rPr>
+                        <a:t>更新</a:t>
                       </a:r>
                     </a:p>
                   </a:txBody>
@@ -10504,14 +10705,34 @@
                         </a:spcAft>
                       </a:pPr>
                       <a:r>
-                        <a:rPr sz="1150" b="0">
-                          <a:solidFill>
-                            <a:srgbClr val="1B222E"/>
-                          </a:solidFill>
-                          <a:latin typeface="微软雅黑"/>
-                          <a:ea typeface="微软雅黑"/>
-                        </a:rPr>
-                        <a:t>3–4 周</a:t>
+                        <a:rPr sz="1000" b="0">
+                          <a:solidFill>
+                            <a:srgbClr val="1B222E"/>
+                          </a:solidFill>
+                          <a:latin typeface="微软雅黑"/>
+                          <a:ea typeface="微软雅黑"/>
+                        </a:rPr>
+                        <a:t>机制已存在</a:t>
+                      </a:r>
+                    </a:p>
+                    <a:p>
+                      <a:pPr>
+                        <a:spcBef>
+                          <a:spcPts val="0"/>
+                        </a:spcBef>
+                        <a:spcAft>
+                          <a:spcPts val="0"/>
+                        </a:spcAft>
+                      </a:pPr>
+                      <a:r>
+                        <a:rPr sz="1000" b="0">
+                          <a:solidFill>
+                            <a:srgbClr val="1B222E"/>
+                          </a:solidFill>
+                          <a:latin typeface="微软雅黑"/>
+                          <a:ea typeface="微软雅黑"/>
+                        </a:rPr>
+                        <a:t>(固定 K 已在用)</a:t>
                       </a:r>
                     </a:p>
                   </a:txBody>
@@ -10535,14 +10756,74 @@
                         </a:spcAft>
                       </a:pPr>
                       <a:r>
-                        <a:rPr sz="1150" b="0">
-                          <a:solidFill>
-                            <a:srgbClr val="1B222E"/>
-                          </a:solidFill>
-                          <a:latin typeface="微软雅黑"/>
-                          <a:ea typeface="微软雅黑"/>
-                        </a:rPr>
-                        <a:t>推广到通用模型路径;补齐限制项;文档与复现脚本</a:t>
+                        <a:rPr sz="1000" b="0">
+                          <a:solidFill>
+                            <a:srgbClr val="1B222E"/>
+                          </a:solidFill>
+                          <a:latin typeface="微软雅黑"/>
+                          <a:ea typeface="微软雅黑"/>
+                        </a:rPr>
+                        <a:t>attention_v1.py:530-565</a:t>
+                      </a:r>
+                    </a:p>
+                    <a:p>
+                      <a:pPr>
+                        <a:spcBef>
+                          <a:spcPts val="0"/>
+                        </a:spcBef>
+                        <a:spcAft>
+                          <a:spcPts val="0"/>
+                        </a:spcAft>
+                      </a:pPr>
+                      <a:r>
+                        <a:rPr sz="1000" b="0">
+                          <a:solidFill>
+                            <a:srgbClr val="1B222E"/>
+                          </a:solidFill>
+                          <a:latin typeface="微软雅黑"/>
+                          <a:ea typeface="微软雅黑"/>
+                        </a:rPr>
+                        <a:t>  graph_task_update_begin/end 块内已有</a:t>
+                      </a:r>
+                    </a:p>
+                    <a:p>
+                      <a:pPr>
+                        <a:spcBef>
+                          <a:spcPts val="0"/>
+                        </a:spcBef>
+                        <a:spcAft>
+                          <a:spcPts val="0"/>
+                        </a:spcAft>
+                      </a:pPr>
+                      <a:r>
+                        <a:rPr sz="1000" b="0">
+                          <a:solidFill>
+                            <a:srgbClr val="1B222E"/>
+                          </a:solidFill>
+                          <a:latin typeface="微软雅黑"/>
+                          <a:ea typeface="微软雅黑"/>
+                        </a:rPr>
+                        <a:t>  _EXTRA_CTX.is_draft_model 与</a:t>
+                      </a:r>
+                    </a:p>
+                    <a:p>
+                      <a:pPr>
+                        <a:spcBef>
+                          <a:spcPts val="0"/>
+                        </a:spcBef>
+                        <a:spcAft>
+                          <a:spcPts val="0"/>
+                        </a:spcAft>
+                      </a:pPr>
+                      <a:r>
+                        <a:rPr sz="1000" b="0">
+                          <a:solidFill>
+                            <a:srgbClr val="1B222E"/>
+                          </a:solidFill>
+                          <a:latin typeface="微软雅黑"/>
+                          <a:ea typeface="微软雅黑"/>
+                        </a:rPr>
+                        <a:t>  attn_metadata[draft_step][key]</a:t>
                       </a:r>
                     </a:p>
                   </a:txBody>
@@ -10566,14 +10847,54 @@
                         </a:spcAft>
                       </a:pPr>
                       <a:r>
-                        <a:rPr sz="1150" b="0">
-                          <a:solidFill>
-                            <a:srgbClr val="1B222E"/>
-                          </a:solidFill>
-                          <a:latin typeface="微软雅黑"/>
-                          <a:ea typeface="微软雅黑"/>
-                        </a:rPr>
-                        <a:t>可合入的实现 + 对比数据</a:t>
+                        <a:rPr sz="1000" b="0">
+                          <a:solidFill>
+                            <a:srgbClr val="1B222E"/>
+                          </a:solidFill>
+                          <a:latin typeface="微软雅黑"/>
+                          <a:ea typeface="微软雅黑"/>
+                        </a:rPr>
+                        <a:t>固定 K 投机已经在图里跑,逐 draft step 更新图内</a:t>
+                      </a:r>
+                    </a:p>
+                    <a:p>
+                      <a:pPr>
+                        <a:spcBef>
+                          <a:spcPts val="0"/>
+                        </a:spcBef>
+                        <a:spcAft>
+                          <a:spcPts val="0"/>
+                        </a:spcAft>
+                      </a:pPr>
+                      <a:r>
+                        <a:rPr sz="1000" b="0">
+                          <a:solidFill>
+                            <a:srgbClr val="1B222E"/>
+                          </a:solidFill>
+                          <a:latin typeface="微软雅黑"/>
+                          <a:ea typeface="微软雅黑"/>
+                        </a:rPr>
+                        <a:t>元数据的机制与开销已经付过 —— 自适应不是从零</a:t>
+                      </a:r>
+                    </a:p>
+                    <a:p>
+                      <a:pPr>
+                        <a:spcBef>
+                          <a:spcPts val="0"/>
+                        </a:spcBef>
+                        <a:spcAft>
+                          <a:spcPts val="0"/>
+                        </a:spcAft>
+                      </a:pPr>
+                      <a:r>
+                        <a:rPr sz="1000" b="0">
+                          <a:solidFill>
+                            <a:srgbClr val="1B222E"/>
+                          </a:solidFill>
+                          <a:latin typeface="微软雅黑"/>
+                          <a:ea typeface="微软雅黑"/>
+                        </a:rPr>
+                        <a:t>造图内变长,而是让这套机制吃变化的长度</a:t>
                       </a:r>
                     </a:p>
                   </a:txBody>
@@ -10596,8 +10917,8 @@
         </p:nvSpPr>
         <p:spPr>
           <a:xfrm>
-            <a:off x="502920" y="4892040"/>
-            <a:ext cx="11247120" cy="1737360"/>
+            <a:off x="502920" y="5541264"/>
+            <a:ext cx="11247120" cy="1188720"/>
           </a:xfrm>
           <a:prstGeom prst="rect">
             <a:avLst/>
@@ -10619,20 +10940,20 @@
               </a:spcAft>
             </a:pPr>
             <a:r>
-              <a:rPr sz="1600" b="1">
+              <a:rPr sz="1550" b="1">
                 <a:solidFill>
                   <a:srgbClr val="1F6FEB"/>
                 </a:solidFill>
                 <a:latin typeface="微软雅黑"/>
                 <a:ea typeface="微软雅黑"/>
               </a:rPr>
-              <a:t>总周期约 2.5–3.5 个月(v2 为 3–4 个月;算法设计部分由上游承担后收缩)</a:t>
+              <a:t>⟹ 准确的风险表述不是「昇腾不能变长入图」</a:t>
             </a:r>
           </a:p>
           <a:p>
             <a:pPr algn="l">
               <a:spcBef>
-                <a:spcPts val="800"/>
+                <a:spcPts val="700"/>
               </a:spcBef>
               <a:spcAft>
                 <a:spcPts val="0"/>
@@ -10646,7 +10967,27 @@
                 <a:latin typeface="微软雅黑"/>
                 <a:ea typeface="微软雅黑"/>
               </a:rPr>
-              <a:t>阶段 0 只要一天:我们已有无投机基线和固定 K 的完整评测链路,只需把并发点补齐。主要不确定性已从“收益幅度”转移到“昇腾图模式能否支持变长”—— 前者上游已用数据回答,后者是阶段 2 的核心。</a:t>
+              <a:t>而是:DSA 路径在设备侧持有长度、图内元数据更新机制已存在,两项结构性条件都已具备;未知量集中在 workspace 与图数量随 K 组合的膨胀,以及随之而来的显存占用与捕获耗时。</a:t>
+            </a:r>
+          </a:p>
+          <a:p>
+            <a:pPr algn="l">
+              <a:spcBef>
+                <a:spcPts val="500"/>
+              </a:spcBef>
+              <a:spcAft>
+                <a:spcPts val="0"/>
+              </a:spcAft>
+            </a:pPr>
+            <a:r>
+              <a:rPr sz="1300" b="1">
+                <a:solidFill>
+                  <a:srgbClr val="1B222E"/>
+                </a:solidFill>
+                <a:latin typeface="微软雅黑"/>
+                <a:ea typeface="微软雅黑"/>
+              </a:rPr>
+              <a:t>这把阶段 2 的第一件事定死了:先量形状数量与 workspace 膨胀,再决定走「对齐上游 ALWAYS 语义」还是「SGLang 式 packed varlen(graph key 只按总 token 数,天然压制形状数量)」—— 而不是先写实现。</a:t>
             </a:r>
           </a:p>
         </p:txBody>
@@ -10715,6 +11056,1060 @@
                 <a:latin typeface="微软雅黑"/>
                 <a:ea typeface="微软雅黑"/>
               </a:rPr>
+              <a:t>四、实施方案与里程碑</a:t>
+            </a:r>
+          </a:p>
+          <a:p>
+            <a:pPr algn="l">
+              <a:spcBef>
+                <a:spcPts val="300"/>
+              </a:spcBef>
+              <a:spcAft>
+                <a:spcPts val="0"/>
+              </a:spcAft>
+            </a:pPr>
+            <a:r>
+              <a:rPr sz="1200" b="0">
+                <a:solidFill>
+                  <a:srgbClr val="5B6677"/>
+                </a:solidFill>
+                <a:latin typeface="微软雅黑"/>
+                <a:ea typeface="微软雅黑"/>
+              </a:rPr>
+              <a:t>阶段 0 由“两周量化”缩为“一天判定”—— 上游数据已给出大部分答案</a:t>
+            </a:r>
+          </a:p>
+        </p:txBody>
+      </p:sp>
+      <p:sp>
+        <p:nvSpPr>
+          <p:cNvPr id="3" name="Rectangle 2"/>
+          <p:cNvSpPr/>
+          <p:nvPr/>
+        </p:nvSpPr>
+        <p:spPr>
+          <a:xfrm>
+            <a:off x="502920" y="1097280"/>
+            <a:ext cx="1188720" cy="24000"/>
+          </a:xfrm>
+          <a:prstGeom prst="rect">
+            <a:avLst/>
+          </a:prstGeom>
+          <a:solidFill>
+            <a:srgbClr val="1F6FEB"/>
+          </a:solidFill>
+          <a:ln>
+            <a:noFill/>
+          </a:ln>
+          <a:effectLst/>
+        </p:spPr>
+        <p:style>
+          <a:lnRef idx="1">
+            <a:schemeClr val="accent1"/>
+          </a:lnRef>
+          <a:fillRef idx="3">
+            <a:schemeClr val="accent1"/>
+          </a:fillRef>
+          <a:effectRef idx="2">
+            <a:schemeClr val="accent1"/>
+          </a:effectRef>
+          <a:fontRef idx="minor">
+            <a:schemeClr val="lt1"/>
+          </a:fontRef>
+        </p:style>
+        <p:txBody>
+          <a:bodyPr rtlCol="0" anchor="ctr"/>
+          <a:lstStyle/>
+          <a:p>
+            <a:pPr algn="ctr"/>
+          </a:p>
+        </p:txBody>
+      </p:sp>
+      <p:graphicFrame>
+        <p:nvGraphicFramePr>
+          <p:cNvPr id="4" name="Table 3"/>
+          <p:cNvGraphicFramePr>
+            <a:graphicFrameLocks noGrp="1"/>
+          </p:cNvGraphicFramePr>
+          <p:nvPr/>
+        </p:nvGraphicFramePr>
+        <p:xfrm>
+          <a:off x="502920" y="1481328"/>
+          <a:ext cx="11247118" cy="3931920"/>
+        </p:xfrm>
+        <a:graphic>
+          <a:graphicData uri="http://schemas.openxmlformats.org/drawingml/2006/table">
+            <a:tbl>
+              <a:tblPr firstRow="1" bandRow="1">
+                <a:tableStyleId>{5C22544A-7EE6-4342-B048-85BDC9FD1C3A}</a:tableStyleId>
+              </a:tblPr>
+              <a:tblGrid>
+                <a:gridCol w="787298"/>
+                <a:gridCol w="899769"/>
+                <a:gridCol w="5286146"/>
+                <a:gridCol w="4273905"/>
+              </a:tblGrid>
+              <a:tr h="786384">
+                <a:tc>
+                  <a:txBody>
+                    <a:bodyPr wrap="square"/>
+                    <a:lstStyle/>
+                    <a:p>
+                      <a:pPr>
+                        <a:spcBef>
+                          <a:spcPts val="0"/>
+                        </a:spcBef>
+                        <a:spcAft>
+                          <a:spcPts val="0"/>
+                        </a:spcAft>
+                      </a:pPr>
+                      <a:r>
+                        <a:rPr sz="1150" b="1">
+                          <a:solidFill>
+                            <a:srgbClr val="1B222E"/>
+                          </a:solidFill>
+                          <a:latin typeface="微软雅黑"/>
+                          <a:ea typeface="微软雅黑"/>
+                        </a:rPr>
+                        <a:t>阶段</a:t>
+                      </a:r>
+                    </a:p>
+                  </a:txBody>
+                  <a:tcPr marL="64008" marR="64008" marT="18288" marB="18288">
+                    <a:solidFill>
+                      <a:srgbClr val="F2F5F9"/>
+                    </a:solidFill>
+                  </a:tcPr>
+                </a:tc>
+                <a:tc>
+                  <a:txBody>
+                    <a:bodyPr wrap="square"/>
+                    <a:lstStyle/>
+                    <a:p>
+                      <a:pPr>
+                        <a:spcBef>
+                          <a:spcPts val="0"/>
+                        </a:spcBef>
+                        <a:spcAft>
+                          <a:spcPts val="0"/>
+                        </a:spcAft>
+                      </a:pPr>
+                      <a:r>
+                        <a:rPr sz="1150" b="1">
+                          <a:solidFill>
+                            <a:srgbClr val="1B222E"/>
+                          </a:solidFill>
+                          <a:latin typeface="微软雅黑"/>
+                          <a:ea typeface="微软雅黑"/>
+                        </a:rPr>
+                        <a:t>周期</a:t>
+                      </a:r>
+                    </a:p>
+                  </a:txBody>
+                  <a:tcPr marL="64008" marR="64008" marT="18288" marB="18288">
+                    <a:solidFill>
+                      <a:srgbClr val="F2F5F9"/>
+                    </a:solidFill>
+                  </a:tcPr>
+                </a:tc>
+                <a:tc>
+                  <a:txBody>
+                    <a:bodyPr wrap="square"/>
+                    <a:lstStyle/>
+                    <a:p>
+                      <a:pPr>
+                        <a:spcBef>
+                          <a:spcPts val="0"/>
+                        </a:spcBef>
+                        <a:spcAft>
+                          <a:spcPts val="0"/>
+                        </a:spcAft>
+                      </a:pPr>
+                      <a:r>
+                        <a:rPr sz="1150" b="1">
+                          <a:solidFill>
+                            <a:srgbClr val="1B222E"/>
+                          </a:solidFill>
+                          <a:latin typeface="微软雅黑"/>
+                          <a:ea typeface="微软雅黑"/>
+                        </a:rPr>
+                        <a:t>主要工作</a:t>
+                      </a:r>
+                    </a:p>
+                  </a:txBody>
+                  <a:tcPr marL="64008" marR="64008" marT="18288" marB="18288">
+                    <a:solidFill>
+                      <a:srgbClr val="F2F5F9"/>
+                    </a:solidFill>
+                  </a:tcPr>
+                </a:tc>
+                <a:tc>
+                  <a:txBody>
+                    <a:bodyPr wrap="square"/>
+                    <a:lstStyle/>
+                    <a:p>
+                      <a:pPr>
+                        <a:spcBef>
+                          <a:spcPts val="0"/>
+                        </a:spcBef>
+                        <a:spcAft>
+                          <a:spcPts val="0"/>
+                        </a:spcAft>
+                      </a:pPr>
+                      <a:r>
+                        <a:rPr sz="1150" b="1">
+                          <a:solidFill>
+                            <a:srgbClr val="1B222E"/>
+                          </a:solidFill>
+                          <a:latin typeface="微软雅黑"/>
+                          <a:ea typeface="微软雅黑"/>
+                        </a:rPr>
+                        <a:t>交付物 / 决策门</a:t>
+                      </a:r>
+                    </a:p>
+                  </a:txBody>
+                  <a:tcPr marL="64008" marR="64008" marT="18288" marB="18288">
+                    <a:solidFill>
+                      <a:srgbClr val="F2F5F9"/>
+                    </a:solidFill>
+                  </a:tcPr>
+                </a:tc>
+              </a:tr>
+              <a:tr h="786384">
+                <a:tc>
+                  <a:txBody>
+                    <a:bodyPr wrap="square"/>
+                    <a:lstStyle/>
+                    <a:p>
+                      <a:pPr>
+                        <a:spcBef>
+                          <a:spcPts val="0"/>
+                        </a:spcBef>
+                        <a:spcAft>
+                          <a:spcPts val="0"/>
+                        </a:spcAft>
+                      </a:pPr>
+                      <a:r>
+                        <a:rPr sz="1150" b="0">
+                          <a:solidFill>
+                            <a:srgbClr val="1B222E"/>
+                          </a:solidFill>
+                          <a:latin typeface="微软雅黑"/>
+                          <a:ea typeface="微软雅黑"/>
+                        </a:rPr>
+                        <a:t>0</a:t>
+                      </a:r>
+                    </a:p>
+                    <a:p>
+                      <a:pPr>
+                        <a:spcBef>
+                          <a:spcPts val="0"/>
+                        </a:spcBef>
+                        <a:spcAft>
+                          <a:spcPts val="0"/>
+                        </a:spcAft>
+                      </a:pPr>
+                      <a:r>
+                        <a:rPr sz="1150" b="0">
+                          <a:solidFill>
+                            <a:srgbClr val="1B222E"/>
+                          </a:solidFill>
+                          <a:latin typeface="微软雅黑"/>
+                          <a:ea typeface="微软雅黑"/>
+                        </a:rPr>
+                        <a:t>判定</a:t>
+                      </a:r>
+                    </a:p>
+                  </a:txBody>
+                  <a:tcPr marL="64008" marR="64008" marT="18288" marB="18288">
+                    <a:solidFill>
+                      <a:srgbClr val="FFFFFF"/>
+                    </a:solidFill>
+                  </a:tcPr>
+                </a:tc>
+                <a:tc>
+                  <a:txBody>
+                    <a:bodyPr wrap="square"/>
+                    <a:lstStyle/>
+                    <a:p>
+                      <a:pPr>
+                        <a:spcBef>
+                          <a:spcPts val="0"/>
+                        </a:spcBef>
+                        <a:spcAft>
+                          <a:spcPts val="0"/>
+                        </a:spcAft>
+                      </a:pPr>
+                      <a:r>
+                        <a:rPr sz="1150" b="0">
+                          <a:solidFill>
+                            <a:srgbClr val="1B222E"/>
+                          </a:solidFill>
+                          <a:latin typeface="微软雅黑"/>
+                          <a:ea typeface="微软雅黑"/>
+                        </a:rPr>
+                        <a:t>1 天</a:t>
+                      </a:r>
+                    </a:p>
+                  </a:txBody>
+                  <a:tcPr marL="64008" marR="64008" marT="18288" marB="18288">
+                    <a:solidFill>
+                      <a:srgbClr val="FFFFFF"/>
+                    </a:solidFill>
+                  </a:tcPr>
+                </a:tc>
+                <a:tc>
+                  <a:txBody>
+                    <a:bodyPr wrap="square"/>
+                    <a:lstStyle/>
+                    <a:p>
+                      <a:pPr>
+                        <a:spcBef>
+                          <a:spcPts val="0"/>
+                        </a:spcBef>
+                        <a:spcAft>
+                          <a:spcPts val="0"/>
+                        </a:spcAft>
+                      </a:pPr>
+                      <a:r>
+                        <a:rPr sz="1150" b="0">
+                          <a:solidFill>
+                            <a:srgbClr val="1B222E"/>
+                          </a:solidFill>
+                          <a:latin typeface="微软雅黑"/>
+                          <a:ea typeface="微软雅黑"/>
+                        </a:rPr>
+                        <a:t>在昇腾现有固定 K 链路上,把加速比从 c=48 补测到</a:t>
+                      </a:r>
+                    </a:p>
+                    <a:p>
+                      <a:pPr>
+                        <a:spcBef>
+                          <a:spcPts val="0"/>
+                        </a:spcBef>
+                        <a:spcAft>
+                          <a:spcPts val="0"/>
+                        </a:spcAft>
+                      </a:pPr>
+                      <a:r>
+                        <a:rPr sz="1150" b="0">
+                          <a:solidFill>
+                            <a:srgbClr val="1B222E"/>
+                          </a:solidFill>
+                          <a:latin typeface="微软雅黑"/>
+                          <a:ea typeface="微软雅黑"/>
+                        </a:rPr>
+                        <a:t>c=128 / c=256,看是否出现上游那样的收益衰减</a:t>
+                      </a:r>
+                    </a:p>
+                  </a:txBody>
+                  <a:tcPr marL="64008" marR="64008" marT="18288" marB="18288">
+                    <a:solidFill>
+                      <a:srgbClr val="FFFFFF"/>
+                    </a:solidFill>
+                  </a:tcPr>
+                </a:tc>
+                <a:tc>
+                  <a:txBody>
+                    <a:bodyPr wrap="square"/>
+                    <a:lstStyle/>
+                    <a:p>
+                      <a:pPr>
+                        <a:spcBef>
+                          <a:spcPts val="0"/>
+                        </a:spcBef>
+                        <a:spcAft>
+                          <a:spcPts val="0"/>
+                        </a:spcAft>
+                      </a:pPr>
+                      <a:r>
+                        <a:rPr sz="1150" b="0">
+                          <a:solidFill>
+                            <a:srgbClr val="1B222E"/>
+                          </a:solidFill>
+                          <a:latin typeface="微软雅黑"/>
+                          <a:ea typeface="微软雅黑"/>
+                        </a:rPr>
+                        <a:t>一张并发-加速比曲线</a:t>
+                      </a:r>
+                    </a:p>
+                    <a:p>
+                      <a:pPr>
+                        <a:spcBef>
+                          <a:spcPts val="0"/>
+                        </a:spcBef>
+                        <a:spcAft>
+                          <a:spcPts val="0"/>
+                        </a:spcAft>
+                      </a:pPr>
+                      <a:r>
+                        <a:rPr sz="1150" b="0">
+                          <a:solidFill>
+                            <a:srgbClr val="1B222E"/>
+                          </a:solidFill>
+                          <a:latin typeface="微软雅黑"/>
+                          <a:ea typeface="微软雅黑"/>
+                        </a:rPr>
+                        <a:t>G1:是否值得继续</a:t>
+                      </a:r>
+                    </a:p>
+                  </a:txBody>
+                  <a:tcPr marL="64008" marR="64008" marT="18288" marB="18288">
+                    <a:solidFill>
+                      <a:srgbClr val="FFFFFF"/>
+                    </a:solidFill>
+                  </a:tcPr>
+                </a:tc>
+              </a:tr>
+              <a:tr h="786384">
+                <a:tc>
+                  <a:txBody>
+                    <a:bodyPr wrap="square"/>
+                    <a:lstStyle/>
+                    <a:p>
+                      <a:pPr>
+                        <a:spcBef>
+                          <a:spcPts val="0"/>
+                        </a:spcBef>
+                        <a:spcAft>
+                          <a:spcPts val="0"/>
+                        </a:spcAft>
+                      </a:pPr>
+                      <a:r>
+                        <a:rPr sz="1150" b="0">
+                          <a:solidFill>
+                            <a:srgbClr val="1B222E"/>
+                          </a:solidFill>
+                          <a:latin typeface="微软雅黑"/>
+                          <a:ea typeface="微软雅黑"/>
+                        </a:rPr>
+                        <a:t>1</a:t>
+                      </a:r>
+                    </a:p>
+                    <a:p>
+                      <a:pPr>
+                        <a:spcBef>
+                          <a:spcPts val="0"/>
+                        </a:spcBef>
+                        <a:spcAft>
+                          <a:spcPts val="0"/>
+                        </a:spcAft>
+                      </a:pPr>
+                      <a:r>
+                        <a:rPr sz="1150" b="0">
+                          <a:solidFill>
+                            <a:srgbClr val="1B222E"/>
+                          </a:solidFill>
+                          <a:latin typeface="微软雅黑"/>
+                          <a:ea typeface="微软雅黑"/>
+                        </a:rPr>
+                        <a:t>打通</a:t>
+                      </a:r>
+                    </a:p>
+                  </a:txBody>
+                  <a:tcPr marL="64008" marR="64008" marT="18288" marB="18288">
+                    <a:solidFill>
+                      <a:srgbClr val="FFFFFF"/>
+                    </a:solidFill>
+                  </a:tcPr>
+                </a:tc>
+                <a:tc>
+                  <a:txBody>
+                    <a:bodyPr wrap="square"/>
+                    <a:lstStyle/>
+                    <a:p>
+                      <a:pPr>
+                        <a:spcBef>
+                          <a:spcPts val="0"/>
+                        </a:spcBef>
+                        <a:spcAft>
+                          <a:spcPts val="0"/>
+                        </a:spcAft>
+                      </a:pPr>
+                      <a:r>
+                        <a:rPr sz="1150" b="0">
+                          <a:solidFill>
+                            <a:srgbClr val="1B222E"/>
+                          </a:solidFill>
+                          <a:latin typeface="微软雅黑"/>
+                          <a:ea typeface="微软雅黑"/>
+                        </a:rPr>
+                        <a:t>2–3 周</a:t>
+                      </a:r>
+                    </a:p>
+                  </a:txBody>
+                  <a:tcPr marL="64008" marR="64008" marT="18288" marB="18288">
+                    <a:solidFill>
+                      <a:srgbClr val="FFFFFF"/>
+                    </a:solidFill>
+                  </a:tcPr>
+                </a:tc>
+                <a:tc>
+                  <a:txBody>
+                    <a:bodyPr wrap="square"/>
+                    <a:lstStyle/>
+                    <a:p>
+                      <a:pPr>
+                        <a:spcBef>
+                          <a:spcPts val="0"/>
+                        </a:spcBef>
+                        <a:spcAft>
+                          <a:spcPts val="0"/>
+                        </a:spcAft>
+                      </a:pPr>
+                      <a:r>
+                        <a:rPr sz="1150" b="0">
+                          <a:solidFill>
+                            <a:srgbClr val="1B222E"/>
+                          </a:solidFill>
+                          <a:latin typeface="微软雅黑"/>
+                          <a:ea typeface="微软雅黑"/>
+                        </a:rPr>
+                        <a:t>vllm-ascend 加载 confidence head(移植上游改法);</a:t>
+                      </a:r>
+                    </a:p>
+                    <a:p>
+                      <a:pPr>
+                        <a:spcBef>
+                          <a:spcPts val="0"/>
+                        </a:spcBef>
+                        <a:spcAft>
+                          <a:spcPts val="0"/>
+                        </a:spcAft>
+                      </a:pPr>
+                      <a:r>
+                        <a:rPr sz="1150" b="0">
+                          <a:solidFill>
+                            <a:srgbClr val="1B222E"/>
+                          </a:solidFill>
+                          <a:latin typeface="微软雅黑"/>
+                          <a:ea typeface="微软雅黑"/>
+                        </a:rPr>
+                        <a:t>草稿侧供给并校验 confidence 数值合理性</a:t>
+                      </a:r>
+                    </a:p>
+                  </a:txBody>
+                  <a:tcPr marL="64008" marR="64008" marT="18288" marB="18288">
+                    <a:solidFill>
+                      <a:srgbClr val="FFFFFF"/>
+                    </a:solidFill>
+                  </a:tcPr>
+                </a:tc>
+                <a:tc>
+                  <a:txBody>
+                    <a:bodyPr wrap="square"/>
+                    <a:lstStyle/>
+                    <a:p>
+                      <a:pPr>
+                        <a:spcBef>
+                          <a:spcPts val="0"/>
+                        </a:spcBef>
+                        <a:spcAft>
+                          <a:spcPts val="0"/>
+                        </a:spcAft>
+                      </a:pPr>
+                      <a:r>
+                        <a:rPr sz="1150" b="0">
+                          <a:solidFill>
+                            <a:srgbClr val="1B222E"/>
+                          </a:solidFill>
+                          <a:latin typeface="微软雅黑"/>
+                          <a:ea typeface="微软雅黑"/>
+                        </a:rPr>
+                        <a:t>端到端可读出逐位置信度</a:t>
+                      </a:r>
+                    </a:p>
+                    <a:p>
+                      <a:pPr>
+                        <a:spcBef>
+                          <a:spcPts val="0"/>
+                        </a:spcBef>
+                        <a:spcAft>
+                          <a:spcPts val="0"/>
+                        </a:spcAft>
+                      </a:pPr>
+                      <a:r>
+                        <a:rPr sz="1150" b="0">
+                          <a:solidFill>
+                            <a:srgbClr val="1B222E"/>
+                          </a:solidFill>
+                          <a:latin typeface="微软雅黑"/>
+                          <a:ea typeface="微软雅黑"/>
+                        </a:rPr>
+                        <a:t>G2:置信度与实际接受率相关</a:t>
+                      </a:r>
+                    </a:p>
+                  </a:txBody>
+                  <a:tcPr marL="64008" marR="64008" marT="18288" marB="18288">
+                    <a:solidFill>
+                      <a:srgbClr val="FFFFFF"/>
+                    </a:solidFill>
+                  </a:tcPr>
+                </a:tc>
+              </a:tr>
+              <a:tr h="786384">
+                <a:tc>
+                  <a:txBody>
+                    <a:bodyPr wrap="square"/>
+                    <a:lstStyle/>
+                    <a:p>
+                      <a:pPr>
+                        <a:spcBef>
+                          <a:spcPts val="0"/>
+                        </a:spcBef>
+                        <a:spcAft>
+                          <a:spcPts val="0"/>
+                        </a:spcAft>
+                      </a:pPr>
+                      <a:r>
+                        <a:rPr sz="1150" b="0">
+                          <a:solidFill>
+                            <a:srgbClr val="1B222E"/>
+                          </a:solidFill>
+                          <a:latin typeface="微软雅黑"/>
+                          <a:ea typeface="微软雅黑"/>
+                        </a:rPr>
+                        <a:t>2</a:t>
+                      </a:r>
+                    </a:p>
+                    <a:p>
+                      <a:pPr>
+                        <a:spcBef>
+                          <a:spcPts val="0"/>
+                        </a:spcBef>
+                        <a:spcAft>
+                          <a:spcPts val="0"/>
+                        </a:spcAft>
+                      </a:pPr>
+                      <a:r>
+                        <a:rPr sz="1150" b="0">
+                          <a:solidFill>
+                            <a:srgbClr val="1B222E"/>
+                          </a:solidFill>
+                          <a:latin typeface="微软雅黑"/>
+                          <a:ea typeface="微软雅黑"/>
+                        </a:rPr>
+                        <a:t>图支持</a:t>
+                      </a:r>
+                    </a:p>
+                  </a:txBody>
+                  <a:tcPr marL="64008" marR="64008" marT="18288" marB="18288">
+                    <a:solidFill>
+                      <a:srgbClr val="FFFFFF"/>
+                    </a:solidFill>
+                  </a:tcPr>
+                </a:tc>
+                <a:tc>
+                  <a:txBody>
+                    <a:bodyPr wrap="square"/>
+                    <a:lstStyle/>
+                    <a:p>
+                      <a:pPr>
+                        <a:spcBef>
+                          <a:spcPts val="0"/>
+                        </a:spcBef>
+                        <a:spcAft>
+                          <a:spcPts val="0"/>
+                        </a:spcAft>
+                      </a:pPr>
+                      <a:r>
+                        <a:rPr sz="1150" b="0">
+                          <a:solidFill>
+                            <a:srgbClr val="1B222E"/>
+                          </a:solidFill>
+                          <a:latin typeface="微软雅黑"/>
+                          <a:ea typeface="微软雅黑"/>
+                        </a:rPr>
+                        <a:t>6–8 周</a:t>
+                      </a:r>
+                    </a:p>
+                  </a:txBody>
+                  <a:tcPr marL="64008" marR="64008" marT="18288" marB="18288">
+                    <a:solidFill>
+                      <a:srgbClr val="FFFFFF"/>
+                    </a:solidFill>
+                  </a:tcPr>
+                </a:tc>
+                <a:tc>
+                  <a:txBody>
+                    <a:bodyPr wrap="square"/>
+                    <a:lstStyle/>
+                    <a:p>
+                      <a:pPr>
+                        <a:spcBef>
+                          <a:spcPts val="0"/>
+                        </a:spcBef>
+                        <a:spcAft>
+                          <a:spcPts val="0"/>
+                        </a:spcAft>
+                      </a:pPr>
+                      <a:r>
+                        <a:rPr sz="1150" b="0">
+                          <a:solidFill>
+                            <a:srgbClr val="1B222E"/>
+                          </a:solidFill>
+                          <a:latin typeface="微软雅黑"/>
+                          <a:ea typeface="微软雅黑"/>
+                        </a:rPr>
+                        <a:t>★ 变长 decode 图:对齐 ALWAYS 语义或采用 SGLang</a:t>
+                      </a:r>
+                    </a:p>
+                    <a:p>
+                      <a:pPr>
+                        <a:spcBef>
+                          <a:spcPts val="0"/>
+                        </a:spcBef>
+                        <a:spcAft>
+                          <a:spcPts val="0"/>
+                        </a:spcAft>
+                      </a:pPr>
+                      <a:r>
+                        <a:rPr sz="1150" b="0">
+                          <a:solidFill>
+                            <a:srgbClr val="1B222E"/>
+                          </a:solidFill>
+                          <a:latin typeface="微软雅黑"/>
+                          <a:ea typeface="微软雅黑"/>
+                        </a:rPr>
+                        <a:t>的 packed varlen;预算 kernel 昇腾实现 + 成本曲线标定</a:t>
+                      </a:r>
+                    </a:p>
+                  </a:txBody>
+                  <a:tcPr marL="64008" marR="64008" marT="18288" marB="18288">
+                    <a:solidFill>
+                      <a:srgbClr val="FFFFFF"/>
+                    </a:solidFill>
+                  </a:tcPr>
+                </a:tc>
+                <a:tc>
+                  <a:txBody>
+                    <a:bodyPr wrap="square"/>
+                    <a:lstStyle/>
+                    <a:p>
+                      <a:pPr>
+                        <a:spcBef>
+                          <a:spcPts val="0"/>
+                        </a:spcBef>
+                        <a:spcAft>
+                          <a:spcPts val="0"/>
+                        </a:spcAft>
+                      </a:pPr>
+                      <a:r>
+                        <a:rPr sz="1150" b="0">
+                          <a:solidFill>
+                            <a:srgbClr val="1B222E"/>
+                          </a:solidFill>
+                          <a:latin typeface="微软雅黑"/>
+                          <a:ea typeface="微软雅黑"/>
+                        </a:rPr>
+                        <a:t>动态 K 在图模式下可运行</a:t>
+                      </a:r>
+                    </a:p>
+                    <a:p>
+                      <a:pPr>
+                        <a:spcBef>
+                          <a:spcPts val="0"/>
+                        </a:spcBef>
+                        <a:spcAft>
+                          <a:spcPts val="0"/>
+                        </a:spcAft>
+                      </a:pPr>
+                      <a:r>
+                        <a:rPr sz="1150" b="0">
+                          <a:solidFill>
+                            <a:srgbClr val="1B222E"/>
+                          </a:solidFill>
+                          <a:latin typeface="微软雅黑"/>
+                          <a:ea typeface="微软雅黑"/>
+                        </a:rPr>
+                        <a:t>G3:相对固定 K 不劣化</a:t>
+                      </a:r>
+                    </a:p>
+                  </a:txBody>
+                  <a:tcPr marL="64008" marR="64008" marT="18288" marB="18288">
+                    <a:solidFill>
+                      <a:srgbClr val="FFFFFF"/>
+                    </a:solidFill>
+                  </a:tcPr>
+                </a:tc>
+              </a:tr>
+              <a:tr h="786384">
+                <a:tc>
+                  <a:txBody>
+                    <a:bodyPr wrap="square"/>
+                    <a:lstStyle/>
+                    <a:p>
+                      <a:pPr>
+                        <a:spcBef>
+                          <a:spcPts val="0"/>
+                        </a:spcBef>
+                        <a:spcAft>
+                          <a:spcPts val="0"/>
+                        </a:spcAft>
+                      </a:pPr>
+                      <a:r>
+                        <a:rPr sz="1150" b="0">
+                          <a:solidFill>
+                            <a:srgbClr val="1B222E"/>
+                          </a:solidFill>
+                          <a:latin typeface="微软雅黑"/>
+                          <a:ea typeface="微软雅黑"/>
+                        </a:rPr>
+                        <a:t>3</a:t>
+                      </a:r>
+                    </a:p>
+                    <a:p>
+                      <a:pPr>
+                        <a:spcBef>
+                          <a:spcPts val="0"/>
+                        </a:spcBef>
+                        <a:spcAft>
+                          <a:spcPts val="0"/>
+                        </a:spcAft>
+                      </a:pPr>
+                      <a:r>
+                        <a:rPr sz="1150" b="0">
+                          <a:solidFill>
+                            <a:srgbClr val="1B222E"/>
+                          </a:solidFill>
+                          <a:latin typeface="微软雅黑"/>
+                          <a:ea typeface="微软雅黑"/>
+                        </a:rPr>
+                        <a:t>扩展</a:t>
+                      </a:r>
+                    </a:p>
+                  </a:txBody>
+                  <a:tcPr marL="64008" marR="64008" marT="18288" marB="18288">
+                    <a:solidFill>
+                      <a:srgbClr val="FFFFFF"/>
+                    </a:solidFill>
+                  </a:tcPr>
+                </a:tc>
+                <a:tc>
+                  <a:txBody>
+                    <a:bodyPr wrap="square"/>
+                    <a:lstStyle/>
+                    <a:p>
+                      <a:pPr>
+                        <a:spcBef>
+                          <a:spcPts val="0"/>
+                        </a:spcBef>
+                        <a:spcAft>
+                          <a:spcPts val="0"/>
+                        </a:spcAft>
+                      </a:pPr>
+                      <a:r>
+                        <a:rPr sz="1150" b="0">
+                          <a:solidFill>
+                            <a:srgbClr val="1B222E"/>
+                          </a:solidFill>
+                          <a:latin typeface="微软雅黑"/>
+                          <a:ea typeface="微软雅黑"/>
+                        </a:rPr>
+                        <a:t>3–4 周</a:t>
+                      </a:r>
+                    </a:p>
+                  </a:txBody>
+                  <a:tcPr marL="64008" marR="64008" marT="18288" marB="18288">
+                    <a:solidFill>
+                      <a:srgbClr val="FFFFFF"/>
+                    </a:solidFill>
+                  </a:tcPr>
+                </a:tc>
+                <a:tc>
+                  <a:txBody>
+                    <a:bodyPr wrap="square"/>
+                    <a:lstStyle/>
+                    <a:p>
+                      <a:pPr>
+                        <a:spcBef>
+                          <a:spcPts val="0"/>
+                        </a:spcBef>
+                        <a:spcAft>
+                          <a:spcPts val="0"/>
+                        </a:spcAft>
+                      </a:pPr>
+                      <a:r>
+                        <a:rPr sz="1150" b="0">
+                          <a:solidFill>
+                            <a:srgbClr val="1B222E"/>
+                          </a:solidFill>
+                          <a:latin typeface="微软雅黑"/>
+                          <a:ea typeface="微软雅黑"/>
+                        </a:rPr>
+                        <a:t>推广到通用模型路径;补齐限制项;文档与复现脚本</a:t>
+                      </a:r>
+                    </a:p>
+                  </a:txBody>
+                  <a:tcPr marL="64008" marR="64008" marT="18288" marB="18288">
+                    <a:solidFill>
+                      <a:srgbClr val="FFFFFF"/>
+                    </a:solidFill>
+                  </a:tcPr>
+                </a:tc>
+                <a:tc>
+                  <a:txBody>
+                    <a:bodyPr wrap="square"/>
+                    <a:lstStyle/>
+                    <a:p>
+                      <a:pPr>
+                        <a:spcBef>
+                          <a:spcPts val="0"/>
+                        </a:spcBef>
+                        <a:spcAft>
+                          <a:spcPts val="0"/>
+                        </a:spcAft>
+                      </a:pPr>
+                      <a:r>
+                        <a:rPr sz="1150" b="0">
+                          <a:solidFill>
+                            <a:srgbClr val="1B222E"/>
+                          </a:solidFill>
+                          <a:latin typeface="微软雅黑"/>
+                          <a:ea typeface="微软雅黑"/>
+                        </a:rPr>
+                        <a:t>可合入的实现 + 对比数据</a:t>
+                      </a:r>
+                    </a:p>
+                  </a:txBody>
+                  <a:tcPr marL="64008" marR="64008" marT="18288" marB="18288">
+                    <a:solidFill>
+                      <a:srgbClr val="FFFFFF"/>
+                    </a:solidFill>
+                  </a:tcPr>
+                </a:tc>
+              </a:tr>
+            </a:tbl>
+          </a:graphicData>
+        </a:graphic>
+      </p:graphicFrame>
+      <p:sp>
+        <p:nvSpPr>
+          <p:cNvPr id="5" name="TextBox 4"/>
+          <p:cNvSpPr txBox="1"/>
+          <p:nvPr/>
+        </p:nvSpPr>
+        <p:spPr>
+          <a:xfrm>
+            <a:off x="502920" y="5486400"/>
+            <a:ext cx="11247120" cy="1280160"/>
+          </a:xfrm>
+          <a:prstGeom prst="rect">
+            <a:avLst/>
+          </a:prstGeom>
+          <a:noFill/>
+        </p:spPr>
+        <p:txBody>
+          <a:bodyPr wrap="square">
+            <a:spAutoFit/>
+          </a:bodyPr>
+          <a:lstStyle/>
+          <a:p>
+            <a:pPr algn="l">
+              <a:spcBef>
+                <a:spcPts val="0"/>
+              </a:spcBef>
+              <a:spcAft>
+                <a:spcPts val="0"/>
+              </a:spcAft>
+            </a:pPr>
+            <a:r>
+              <a:rPr sz="1600" b="1">
+                <a:solidFill>
+                  <a:srgbClr val="1F6FEB"/>
+                </a:solidFill>
+                <a:latin typeface="微软雅黑"/>
+                <a:ea typeface="微软雅黑"/>
+              </a:rPr>
+              <a:t>总周期约 2.5–3.5 个月(v2 为 3–4 个月;算法设计部分由上游承担后收缩)</a:t>
+            </a:r>
+          </a:p>
+          <a:p>
+            <a:pPr algn="l">
+              <a:spcBef>
+                <a:spcPts val="800"/>
+              </a:spcBef>
+              <a:spcAft>
+                <a:spcPts val="0"/>
+              </a:spcAft>
+            </a:pPr>
+            <a:r>
+              <a:rPr sz="1300" b="0">
+                <a:solidFill>
+                  <a:srgbClr val="1B222E"/>
+                </a:solidFill>
+                <a:latin typeface="微软雅黑"/>
+                <a:ea typeface="微软雅黑"/>
+              </a:rPr>
+              <a:t>阶段 0 只要一天:我们已有无投机基线和固定 K 的完整评测链路,只需把并发点补齐。主要不确定性已从“收益幅度”转移到“昇腾图模式能否支持变长”—— 前者上游已用数据回答,后者是阶段 2 的核心。</a:t>
+            </a:r>
+          </a:p>
+        </p:txBody>
+      </p:sp>
+    </p:spTree>
+  </p:cSld>
+  <p:clrMapOvr>
+    <a:masterClrMapping/>
+  </p:clrMapOvr>
+</p:sld>
+</file>
+
+<file path=ppt/slides/slide8.xml><?xml version="1.0" encoding="utf-8"?>
+<p:sld xmlns:a="http://schemas.openxmlformats.org/drawingml/2006/main" xmlns:p="http://schemas.openxmlformats.org/presentationml/2006/main" xmlns:r="http://schemas.openxmlformats.org/officeDocument/2006/relationships">
+  <p:cSld>
+    <p:bg>
+      <p:bgPr>
+        <a:solidFill>
+          <a:srgbClr val="FFFFFF"/>
+        </a:solidFill>
+        <a:effectLst/>
+      </p:bgPr>
+    </p:bg>
+    <p:spTree>
+      <p:nvGrpSpPr>
+        <p:cNvPr id="1" name=""/>
+        <p:cNvGrpSpPr/>
+        <p:nvPr/>
+      </p:nvGrpSpPr>
+      <p:grpSpPr/>
+      <p:sp>
+        <p:nvSpPr>
+          <p:cNvPr id="2" name="TextBox 1"/>
+          <p:cNvSpPr txBox="1"/>
+          <p:nvPr/>
+        </p:nvSpPr>
+        <p:spPr>
+          <a:xfrm>
+            <a:off x="502920" y="256032"/>
+            <a:ext cx="11247120" cy="868680"/>
+          </a:xfrm>
+          <a:prstGeom prst="rect">
+            <a:avLst/>
+          </a:prstGeom>
+          <a:noFill/>
+        </p:spPr>
+        <p:txBody>
+          <a:bodyPr wrap="square">
+            <a:spAutoFit/>
+          </a:bodyPr>
+          <a:lstStyle/>
+          <a:p>
+            <a:pPr algn="l">
+              <a:spcBef>
+                <a:spcPts val="0"/>
+              </a:spcBef>
+              <a:spcAft>
+                <a:spcPts val="0"/>
+              </a:spcAft>
+            </a:pPr>
+            <a:r>
+              <a:rPr sz="2500" b="1">
+                <a:solidFill>
+                  <a:srgbClr val="1B222E"/>
+                </a:solidFill>
+                <a:latin typeface="微软雅黑"/>
+                <a:ea typeface="微软雅黑"/>
+              </a:rPr>
               <a:t>五、风险与依赖</a:t>
             </a:r>
           </a:p>
@@ -11454,7 +12849,7 @@
 </p:sld>
 </file>
 
-<file path=ppt/slides/slide8.xml><?xml version="1.0" encoding="utf-8"?>
+<file path=ppt/slides/slide9.xml><?xml version="1.0" encoding="utf-8"?>
 <p:sld xmlns:a="http://schemas.openxmlformats.org/drawingml/2006/main" xmlns:p="http://schemas.openxmlformats.org/presentationml/2006/main" xmlns:r="http://schemas.openxmlformats.org/officeDocument/2006/relationships">
   <p:cSld>
     <p:bg>

--- a/docs/memos/adaptive-spec-project-proposal-v3.pptx
+++ b/docs/memos/adaptive-spec-project-proposal-v3.pptx
@@ -14,6 +14,7 @@
     <p:sldId id="262" r:id="rId13"/>
     <p:sldId id="263" r:id="rId14"/>
     <p:sldId id="264" r:id="rId15"/>
+    <p:sldId id="265" r:id="rId16"/>
   </p:sldIdLst>
   <p:sldSz cx="12191695" cy="6858000" type="screen4x3"/>
   <p:notesSz cx="6858000" cy="9144000"/>
@@ -3215,6 +3216,914 @@
 </p:sld>
 </file>
 
+<file path=ppt/slides/slide10.xml><?xml version="1.0" encoding="utf-8"?>
+<p:sld xmlns:a="http://schemas.openxmlformats.org/drawingml/2006/main" xmlns:p="http://schemas.openxmlformats.org/presentationml/2006/main" xmlns:r="http://schemas.openxmlformats.org/officeDocument/2006/relationships">
+  <p:cSld>
+    <p:bg>
+      <p:bgPr>
+        <a:solidFill>
+          <a:srgbClr val="FFFFFF"/>
+        </a:solidFill>
+        <a:effectLst/>
+      </p:bgPr>
+    </p:bg>
+    <p:spTree>
+      <p:nvGrpSpPr>
+        <p:cNvPr id="1" name=""/>
+        <p:cNvGrpSpPr/>
+        <p:nvPr/>
+      </p:nvGrpSpPr>
+      <p:grpSpPr/>
+      <p:sp>
+        <p:nvSpPr>
+          <p:cNvPr id="2" name="TextBox 1"/>
+          <p:cNvSpPr txBox="1"/>
+          <p:nvPr/>
+        </p:nvSpPr>
+        <p:spPr>
+          <a:xfrm>
+            <a:off x="502920" y="256032"/>
+            <a:ext cx="11247120" cy="868680"/>
+          </a:xfrm>
+          <a:prstGeom prst="rect">
+            <a:avLst/>
+          </a:prstGeom>
+          <a:noFill/>
+        </p:spPr>
+        <p:txBody>
+          <a:bodyPr wrap="square">
+            <a:spAutoFit/>
+          </a:bodyPr>
+          <a:lstStyle/>
+          <a:p>
+            <a:pPr algn="l">
+              <a:spcBef>
+                <a:spcPts val="0"/>
+              </a:spcBef>
+              <a:spcAft>
+                <a:spcPts val="0"/>
+              </a:spcAft>
+            </a:pPr>
+            <a:r>
+              <a:rPr sz="2500" b="1">
+                <a:solidFill>
+                  <a:srgbClr val="1B222E"/>
+                </a:solidFill>
+                <a:latin typeface="微软雅黑"/>
+                <a:ea typeface="微软雅黑"/>
+              </a:rPr>
+              <a:t>六、决策门与验收标准</a:t>
+            </a:r>
+          </a:p>
+          <a:p>
+            <a:pPr algn="l">
+              <a:spcBef>
+                <a:spcPts val="300"/>
+              </a:spcBef>
+              <a:spcAft>
+                <a:spcPts val="0"/>
+              </a:spcAft>
+            </a:pPr>
+            <a:r>
+              <a:rPr sz="1200" b="0">
+                <a:solidFill>
+                  <a:srgbClr val="5B6677"/>
+                </a:solidFill>
+                <a:latin typeface="微软雅黑"/>
+                <a:ea typeface="微软雅黑"/>
+              </a:rPr>
+              <a:t>每个门都是可量化的,不靠主观判断</a:t>
+            </a:r>
+          </a:p>
+        </p:txBody>
+      </p:sp>
+      <p:sp>
+        <p:nvSpPr>
+          <p:cNvPr id="3" name="Rectangle 2"/>
+          <p:cNvSpPr/>
+          <p:nvPr/>
+        </p:nvSpPr>
+        <p:spPr>
+          <a:xfrm>
+            <a:off x="502920" y="1097280"/>
+            <a:ext cx="1188720" cy="24000"/>
+          </a:xfrm>
+          <a:prstGeom prst="rect">
+            <a:avLst/>
+          </a:prstGeom>
+          <a:solidFill>
+            <a:srgbClr val="1F6FEB"/>
+          </a:solidFill>
+          <a:ln>
+            <a:noFill/>
+          </a:ln>
+          <a:effectLst/>
+        </p:spPr>
+        <p:style>
+          <a:lnRef idx="1">
+            <a:schemeClr val="accent1"/>
+          </a:lnRef>
+          <a:fillRef idx="3">
+            <a:schemeClr val="accent1"/>
+          </a:fillRef>
+          <a:effectRef idx="2">
+            <a:schemeClr val="accent1"/>
+          </a:effectRef>
+          <a:fontRef idx="minor">
+            <a:schemeClr val="lt1"/>
+          </a:fontRef>
+        </p:style>
+        <p:txBody>
+          <a:bodyPr rtlCol="0" anchor="ctr"/>
+          <a:lstStyle/>
+          <a:p>
+            <a:pPr algn="ctr"/>
+          </a:p>
+        </p:txBody>
+      </p:sp>
+      <p:graphicFrame>
+        <p:nvGraphicFramePr>
+          <p:cNvPr id="4" name="Table 3"/>
+          <p:cNvGraphicFramePr>
+            <a:graphicFrameLocks noGrp="1"/>
+          </p:cNvGraphicFramePr>
+          <p:nvPr/>
+        </p:nvGraphicFramePr>
+        <p:xfrm>
+          <a:off x="502920" y="1481328"/>
+          <a:ext cx="11247119" cy="3584448"/>
+        </p:xfrm>
+        <a:graphic>
+          <a:graphicData uri="http://schemas.openxmlformats.org/drawingml/2006/table">
+            <a:tbl>
+              <a:tblPr firstRow="1" bandRow="1">
+                <a:tableStyleId>{5C22544A-7EE6-4342-B048-85BDC9FD1C3A}</a:tableStyleId>
+              </a:tblPr>
+              <a:tblGrid>
+                <a:gridCol w="562356"/>
+                <a:gridCol w="1237183"/>
+                <a:gridCol w="5173675"/>
+                <a:gridCol w="4273905"/>
+              </a:tblGrid>
+              <a:tr h="896112">
+                <a:tc>
+                  <a:txBody>
+                    <a:bodyPr wrap="square"/>
+                    <a:lstStyle/>
+                    <a:p>
+                      <a:pPr>
+                        <a:spcBef>
+                          <a:spcPts val="0"/>
+                        </a:spcBef>
+                        <a:spcAft>
+                          <a:spcPts val="0"/>
+                        </a:spcAft>
+                      </a:pPr>
+                      <a:r>
+                        <a:rPr sz="1150" b="1">
+                          <a:solidFill>
+                            <a:srgbClr val="1B222E"/>
+                          </a:solidFill>
+                          <a:latin typeface="微软雅黑"/>
+                          <a:ea typeface="微软雅黑"/>
+                        </a:rPr>
+                        <a:t>门</a:t>
+                      </a:r>
+                    </a:p>
+                  </a:txBody>
+                  <a:tcPr marL="64008" marR="64008" marT="18288" marB="18288">
+                    <a:solidFill>
+                      <a:srgbClr val="F2F5F9"/>
+                    </a:solidFill>
+                  </a:tcPr>
+                </a:tc>
+                <a:tc>
+                  <a:txBody>
+                    <a:bodyPr wrap="square"/>
+                    <a:lstStyle/>
+                    <a:p>
+                      <a:pPr>
+                        <a:spcBef>
+                          <a:spcPts val="0"/>
+                        </a:spcBef>
+                        <a:spcAft>
+                          <a:spcPts val="0"/>
+                        </a:spcAft>
+                      </a:pPr>
+                      <a:r>
+                        <a:rPr sz="1150" b="1">
+                          <a:solidFill>
+                            <a:srgbClr val="1B222E"/>
+                          </a:solidFill>
+                          <a:latin typeface="微软雅黑"/>
+                          <a:ea typeface="微软雅黑"/>
+                        </a:rPr>
+                        <a:t>时点</a:t>
+                      </a:r>
+                    </a:p>
+                  </a:txBody>
+                  <a:tcPr marL="64008" marR="64008" marT="18288" marB="18288">
+                    <a:solidFill>
+                      <a:srgbClr val="F2F5F9"/>
+                    </a:solidFill>
+                  </a:tcPr>
+                </a:tc>
+                <a:tc>
+                  <a:txBody>
+                    <a:bodyPr wrap="square"/>
+                    <a:lstStyle/>
+                    <a:p>
+                      <a:pPr>
+                        <a:spcBef>
+                          <a:spcPts val="0"/>
+                        </a:spcBef>
+                        <a:spcAft>
+                          <a:spcPts val="0"/>
+                        </a:spcAft>
+                      </a:pPr>
+                      <a:r>
+                        <a:rPr sz="1150" b="1">
+                          <a:solidFill>
+                            <a:srgbClr val="1B222E"/>
+                          </a:solidFill>
+                          <a:latin typeface="微软雅黑"/>
+                          <a:ea typeface="微软雅黑"/>
+                        </a:rPr>
+                        <a:t>通过标准</a:t>
+                      </a:r>
+                    </a:p>
+                  </a:txBody>
+                  <a:tcPr marL="64008" marR="64008" marT="18288" marB="18288">
+                    <a:solidFill>
+                      <a:srgbClr val="F2F5F9"/>
+                    </a:solidFill>
+                  </a:tcPr>
+                </a:tc>
+                <a:tc>
+                  <a:txBody>
+                    <a:bodyPr wrap="square"/>
+                    <a:lstStyle/>
+                    <a:p>
+                      <a:pPr>
+                        <a:spcBef>
+                          <a:spcPts val="0"/>
+                        </a:spcBef>
+                        <a:spcAft>
+                          <a:spcPts val="0"/>
+                        </a:spcAft>
+                      </a:pPr>
+                      <a:r>
+                        <a:rPr sz="1150" b="1">
+                          <a:solidFill>
+                            <a:srgbClr val="1B222E"/>
+                          </a:solidFill>
+                          <a:latin typeface="微软雅黑"/>
+                          <a:ea typeface="微软雅黑"/>
+                        </a:rPr>
+                        <a:t>不通过怎么办</a:t>
+                      </a:r>
+                    </a:p>
+                  </a:txBody>
+                  <a:tcPr marL="64008" marR="64008" marT="18288" marB="18288">
+                    <a:solidFill>
+                      <a:srgbClr val="F2F5F9"/>
+                    </a:solidFill>
+                  </a:tcPr>
+                </a:tc>
+              </a:tr>
+              <a:tr h="896112">
+                <a:tc>
+                  <a:txBody>
+                    <a:bodyPr wrap="square"/>
+                    <a:lstStyle/>
+                    <a:p>
+                      <a:pPr>
+                        <a:spcBef>
+                          <a:spcPts val="0"/>
+                        </a:spcBef>
+                        <a:spcAft>
+                          <a:spcPts val="0"/>
+                        </a:spcAft>
+                      </a:pPr>
+                      <a:r>
+                        <a:rPr sz="1150" b="0">
+                          <a:solidFill>
+                            <a:srgbClr val="1B222E"/>
+                          </a:solidFill>
+                          <a:latin typeface="微软雅黑"/>
+                          <a:ea typeface="微软雅黑"/>
+                        </a:rPr>
+                        <a:t>G1</a:t>
+                      </a:r>
+                    </a:p>
+                  </a:txBody>
+                  <a:tcPr marL="64008" marR="64008" marT="18288" marB="18288">
+                    <a:solidFill>
+                      <a:srgbClr val="FFFFFF"/>
+                    </a:solidFill>
+                  </a:tcPr>
+                </a:tc>
+                <a:tc>
+                  <a:txBody>
+                    <a:bodyPr wrap="square"/>
+                    <a:lstStyle/>
+                    <a:p>
+                      <a:pPr>
+                        <a:spcBef>
+                          <a:spcPts val="0"/>
+                        </a:spcBef>
+                        <a:spcAft>
+                          <a:spcPts val="0"/>
+                        </a:spcAft>
+                      </a:pPr>
+                      <a:r>
+                        <a:rPr sz="1150" b="0">
+                          <a:solidFill>
+                            <a:srgbClr val="1B222E"/>
+                          </a:solidFill>
+                          <a:latin typeface="微软雅黑"/>
+                          <a:ea typeface="微软雅黑"/>
+                        </a:rPr>
+                        <a:t>第 1 天末</a:t>
+                      </a:r>
+                    </a:p>
+                  </a:txBody>
+                  <a:tcPr marL="64008" marR="64008" marT="18288" marB="18288">
+                    <a:solidFill>
+                      <a:srgbClr val="FFFFFF"/>
+                    </a:solidFill>
+                  </a:tcPr>
+                </a:tc>
+                <a:tc>
+                  <a:txBody>
+                    <a:bodyPr wrap="square"/>
+                    <a:lstStyle/>
+                    <a:p>
+                      <a:pPr>
+                        <a:spcBef>
+                          <a:spcPts val="0"/>
+                        </a:spcBef>
+                        <a:spcAft>
+                          <a:spcPts val="0"/>
+                        </a:spcAft>
+                      </a:pPr>
+                      <a:r>
+                        <a:rPr sz="1150" b="0">
+                          <a:solidFill>
+                            <a:srgbClr val="1B222E"/>
+                          </a:solidFill>
+                          <a:latin typeface="微软雅黑"/>
+                          <a:ea typeface="微软雅黑"/>
+                        </a:rPr>
+                        <a:t>在某个并发点上,固定 K 的加速比相对 c=48</a:t>
+                      </a:r>
+                    </a:p>
+                    <a:p>
+                      <a:pPr>
+                        <a:spcBef>
+                          <a:spcPts val="0"/>
+                        </a:spcBef>
+                        <a:spcAft>
+                          <a:spcPts val="0"/>
+                        </a:spcAft>
+                      </a:pPr>
+                      <a:r>
+                        <a:rPr sz="1150" b="0">
+                          <a:solidFill>
+                            <a:srgbClr val="1B222E"/>
+                          </a:solidFill>
+                          <a:latin typeface="微软雅黑"/>
+                          <a:ea typeface="微软雅黑"/>
+                        </a:rPr>
+                        <a:t>出现明显衰减(或已低于无投机)</a:t>
+                      </a:r>
+                    </a:p>
+                  </a:txBody>
+                  <a:tcPr marL="64008" marR="64008" marT="18288" marB="18288">
+                    <a:solidFill>
+                      <a:srgbClr val="FFFFFF"/>
+                    </a:solidFill>
+                  </a:tcPr>
+                </a:tc>
+                <a:tc>
+                  <a:txBody>
+                    <a:bodyPr wrap="square"/>
+                    <a:lstStyle/>
+                    <a:p>
+                      <a:pPr>
+                        <a:spcBef>
+                          <a:spcPts val="0"/>
+                        </a:spcBef>
+                        <a:spcAft>
+                          <a:spcPts val="0"/>
+                        </a:spcAft>
+                      </a:pPr>
+                      <a:r>
+                        <a:rPr sz="1150" b="0">
+                          <a:solidFill>
+                            <a:srgbClr val="1B222E"/>
+                          </a:solidFill>
+                          <a:latin typeface="微软雅黑"/>
+                          <a:ea typeface="微软雅黑"/>
+                        </a:rPr>
+                        <a:t>停止立项。结论本身有价值:</a:t>
+                      </a:r>
+                    </a:p>
+                    <a:p>
+                      <a:pPr>
+                        <a:spcBef>
+                          <a:spcPts val="0"/>
+                        </a:spcBef>
+                        <a:spcAft>
+                          <a:spcPts val="0"/>
+                        </a:spcAft>
+                      </a:pPr>
+                      <a:r>
+                        <a:rPr sz="1150" b="0">
+                          <a:solidFill>
+                            <a:srgbClr val="1B222E"/>
+                          </a:solidFill>
+                          <a:latin typeface="微软雅黑"/>
+                          <a:ea typeface="微软雅黑"/>
+                        </a:rPr>
+                        <a:t>说明昇腾当前运行点无需自适应</a:t>
+                      </a:r>
+                    </a:p>
+                  </a:txBody>
+                  <a:tcPr marL="64008" marR="64008" marT="18288" marB="18288">
+                    <a:solidFill>
+                      <a:srgbClr val="FFFFFF"/>
+                    </a:solidFill>
+                  </a:tcPr>
+                </a:tc>
+              </a:tr>
+              <a:tr h="896112">
+                <a:tc>
+                  <a:txBody>
+                    <a:bodyPr wrap="square"/>
+                    <a:lstStyle/>
+                    <a:p>
+                      <a:pPr>
+                        <a:spcBef>
+                          <a:spcPts val="0"/>
+                        </a:spcBef>
+                        <a:spcAft>
+                          <a:spcPts val="0"/>
+                        </a:spcAft>
+                      </a:pPr>
+                      <a:r>
+                        <a:rPr sz="1150" b="0">
+                          <a:solidFill>
+                            <a:srgbClr val="1B222E"/>
+                          </a:solidFill>
+                          <a:latin typeface="微软雅黑"/>
+                          <a:ea typeface="微软雅黑"/>
+                        </a:rPr>
+                        <a:t>G2</a:t>
+                      </a:r>
+                    </a:p>
+                  </a:txBody>
+                  <a:tcPr marL="64008" marR="64008" marT="18288" marB="18288">
+                    <a:solidFill>
+                      <a:srgbClr val="FFFFFF"/>
+                    </a:solidFill>
+                  </a:tcPr>
+                </a:tc>
+                <a:tc>
+                  <a:txBody>
+                    <a:bodyPr wrap="square"/>
+                    <a:lstStyle/>
+                    <a:p>
+                      <a:pPr>
+                        <a:spcBef>
+                          <a:spcPts val="0"/>
+                        </a:spcBef>
+                        <a:spcAft>
+                          <a:spcPts val="0"/>
+                        </a:spcAft>
+                      </a:pPr>
+                      <a:r>
+                        <a:rPr sz="1150" b="0">
+                          <a:solidFill>
+                            <a:srgbClr val="1B222E"/>
+                          </a:solidFill>
+                          <a:latin typeface="微软雅黑"/>
+                          <a:ea typeface="微软雅黑"/>
+                        </a:rPr>
+                        <a:t>第 3 周末</a:t>
+                      </a:r>
+                    </a:p>
+                  </a:txBody>
+                  <a:tcPr marL="64008" marR="64008" marT="18288" marB="18288">
+                    <a:solidFill>
+                      <a:srgbClr val="FFFFFF"/>
+                    </a:solidFill>
+                  </a:tcPr>
+                </a:tc>
+                <a:tc>
+                  <a:txBody>
+                    <a:bodyPr wrap="square"/>
+                    <a:lstStyle/>
+                    <a:p>
+                      <a:pPr>
+                        <a:spcBef>
+                          <a:spcPts val="0"/>
+                        </a:spcBef>
+                        <a:spcAft>
+                          <a:spcPts val="0"/>
+                        </a:spcAft>
+                      </a:pPr>
+                      <a:r>
+                        <a:rPr sz="1150" b="0">
+                          <a:solidFill>
+                            <a:srgbClr val="1B222E"/>
+                          </a:solidFill>
+                          <a:latin typeface="微软雅黑"/>
+                          <a:ea typeface="微软雅黑"/>
+                        </a:rPr>
+                        <a:t>端到端读出逐位置信度,且与实测逐位</a:t>
+                      </a:r>
+                    </a:p>
+                    <a:p>
+                      <a:pPr>
+                        <a:spcBef>
+                          <a:spcPts val="0"/>
+                        </a:spcBef>
+                        <a:spcAft>
+                          <a:spcPts val="0"/>
+                        </a:spcAft>
+                      </a:pPr>
+                      <a:r>
+                        <a:rPr sz="1150" b="0">
+                          <a:solidFill>
+                            <a:srgbClr val="1B222E"/>
+                          </a:solidFill>
+                          <a:latin typeface="微软雅黑"/>
+                          <a:ea typeface="微软雅黑"/>
+                        </a:rPr>
+                        <a:t>接受率单调相关</a:t>
+                      </a:r>
+                    </a:p>
+                  </a:txBody>
+                  <a:tcPr marL="64008" marR="64008" marT="18288" marB="18288">
+                    <a:solidFill>
+                      <a:srgbClr val="FFFFFF"/>
+                    </a:solidFill>
+                  </a:tcPr>
+                </a:tc>
+                <a:tc>
+                  <a:txBody>
+                    <a:bodyPr wrap="square"/>
+                    <a:lstStyle/>
+                    <a:p>
+                      <a:pPr>
+                        <a:spcBef>
+                          <a:spcPts val="0"/>
+                        </a:spcBef>
+                        <a:spcAft>
+                          <a:spcPts val="0"/>
+                        </a:spcAft>
+                      </a:pPr>
+                      <a:r>
+                        <a:rPr sz="1150" b="0">
+                          <a:solidFill>
+                            <a:srgbClr val="1B222E"/>
+                          </a:solidFill>
+                          <a:latin typeface="微软雅黑"/>
+                          <a:ea typeface="微软雅黑"/>
+                        </a:rPr>
+                        <a:t>回到草稿侧重新拟合 confidence head</a:t>
+                      </a:r>
+                    </a:p>
+                    <a:p>
+                      <a:pPr>
+                        <a:spcBef>
+                          <a:spcPts val="0"/>
+                        </a:spcBef>
+                        <a:spcAft>
+                          <a:spcPts val="0"/>
+                        </a:spcAft>
+                      </a:pPr>
+                      <a:r>
+                        <a:rPr sz="1150" b="0">
+                          <a:solidFill>
+                            <a:srgbClr val="1B222E"/>
+                          </a:solidFill>
+                          <a:latin typeface="微软雅黑"/>
+                          <a:ea typeface="微软雅黑"/>
+                        </a:rPr>
+                        <a:t>(代价分钟级),不影响主线</a:t>
+                      </a:r>
+                    </a:p>
+                  </a:txBody>
+                  <a:tcPr marL="64008" marR="64008" marT="18288" marB="18288">
+                    <a:solidFill>
+                      <a:srgbClr val="FFFFFF"/>
+                    </a:solidFill>
+                  </a:tcPr>
+                </a:tc>
+              </a:tr>
+              <a:tr h="896112">
+                <a:tc>
+                  <a:txBody>
+                    <a:bodyPr wrap="square"/>
+                    <a:lstStyle/>
+                    <a:p>
+                      <a:pPr>
+                        <a:spcBef>
+                          <a:spcPts val="0"/>
+                        </a:spcBef>
+                        <a:spcAft>
+                          <a:spcPts val="0"/>
+                        </a:spcAft>
+                      </a:pPr>
+                      <a:r>
+                        <a:rPr sz="1150" b="0">
+                          <a:solidFill>
+                            <a:srgbClr val="1B222E"/>
+                          </a:solidFill>
+                          <a:latin typeface="微软雅黑"/>
+                          <a:ea typeface="微软雅黑"/>
+                        </a:rPr>
+                        <a:t>G3</a:t>
+                      </a:r>
+                    </a:p>
+                  </a:txBody>
+                  <a:tcPr marL="64008" marR="64008" marT="18288" marB="18288">
+                    <a:solidFill>
+                      <a:srgbClr val="FFFFFF"/>
+                    </a:solidFill>
+                  </a:tcPr>
+                </a:tc>
+                <a:tc>
+                  <a:txBody>
+                    <a:bodyPr wrap="square"/>
+                    <a:lstStyle/>
+                    <a:p>
+                      <a:pPr>
+                        <a:spcBef>
+                          <a:spcPts val="0"/>
+                        </a:spcBef>
+                        <a:spcAft>
+                          <a:spcPts val="0"/>
+                        </a:spcAft>
+                      </a:pPr>
+                      <a:r>
+                        <a:rPr sz="1150" b="0">
+                          <a:solidFill>
+                            <a:srgbClr val="1B222E"/>
+                          </a:solidFill>
+                          <a:latin typeface="微软雅黑"/>
+                          <a:ea typeface="微软雅黑"/>
+                        </a:rPr>
+                        <a:t>第 11 周末</a:t>
+                      </a:r>
+                    </a:p>
+                  </a:txBody>
+                  <a:tcPr marL="64008" marR="64008" marT="18288" marB="18288">
+                    <a:solidFill>
+                      <a:srgbClr val="FFFFFF"/>
+                    </a:solidFill>
+                  </a:tcPr>
+                </a:tc>
+                <a:tc>
+                  <a:txBody>
+                    <a:bodyPr wrap="square"/>
+                    <a:lstStyle/>
+                    <a:p>
+                      <a:pPr>
+                        <a:spcBef>
+                          <a:spcPts val="0"/>
+                        </a:spcBef>
+                        <a:spcAft>
+                          <a:spcPts val="0"/>
+                        </a:spcAft>
+                      </a:pPr>
+                      <a:r>
+                        <a:rPr sz="1150" b="0">
+                          <a:solidFill>
+                            <a:srgbClr val="1B222E"/>
+                          </a:solidFill>
+                          <a:latin typeface="微软雅黑"/>
+                          <a:ea typeface="微软雅黑"/>
+                        </a:rPr>
+                        <a:t>动态 K 在图模式下运行,端到端不劣于</a:t>
+                      </a:r>
+                    </a:p>
+                    <a:p>
+                      <a:pPr>
+                        <a:spcBef>
+                          <a:spcPts val="0"/>
+                        </a:spcBef>
+                        <a:spcAft>
+                          <a:spcPts val="0"/>
+                        </a:spcAft>
+                      </a:pPr>
+                      <a:r>
+                        <a:rPr sz="1150" b="0">
+                          <a:solidFill>
+                            <a:srgbClr val="1B222E"/>
+                          </a:solidFill>
+                          <a:latin typeface="微软雅黑"/>
+                          <a:ea typeface="微软雅黑"/>
+                        </a:rPr>
+                        <a:t>同预算的固定 K</a:t>
+                      </a:r>
+                    </a:p>
+                  </a:txBody>
+                  <a:tcPr marL="64008" marR="64008" marT="18288" marB="18288">
+                    <a:solidFill>
+                      <a:srgbClr val="FFFFFF"/>
+                    </a:solidFill>
+                  </a:tcPr>
+                </a:tc>
+                <a:tc>
+                  <a:txBody>
+                    <a:bodyPr wrap="square"/>
+                    <a:lstStyle/>
+                    <a:p>
+                      <a:pPr>
+                        <a:spcBef>
+                          <a:spcPts val="0"/>
+                        </a:spcBef>
+                        <a:spcAft>
+                          <a:spcPts val="0"/>
+                        </a:spcAft>
+                      </a:pPr>
+                      <a:r>
+                        <a:rPr sz="1150" b="0">
+                          <a:solidFill>
+                            <a:srgbClr val="1B222E"/>
+                          </a:solidFill>
+                          <a:latin typeface="微软雅黑"/>
+                          <a:ea typeface="微软雅黑"/>
+                        </a:rPr>
+                        <a:t>保留 eager 路径成果并如实上报;</a:t>
+                      </a:r>
+                    </a:p>
+                    <a:p>
+                      <a:pPr>
+                        <a:spcBef>
+                          <a:spcPts val="0"/>
+                        </a:spcBef>
+                        <a:spcAft>
+                          <a:spcPts val="0"/>
+                        </a:spcAft>
+                      </a:pPr>
+                      <a:r>
+                        <a:rPr sz="1150" b="0">
+                          <a:solidFill>
+                            <a:srgbClr val="1B222E"/>
+                          </a:solidFill>
+                          <a:latin typeface="微软雅黑"/>
+                          <a:ea typeface="微软雅黑"/>
+                        </a:rPr>
+                        <a:t>将图支持作为独立议题提交上游</a:t>
+                      </a:r>
+                    </a:p>
+                  </a:txBody>
+                  <a:tcPr marL="64008" marR="64008" marT="18288" marB="18288">
+                    <a:solidFill>
+                      <a:srgbClr val="FFFFFF"/>
+                    </a:solidFill>
+                  </a:tcPr>
+                </a:tc>
+              </a:tr>
+            </a:tbl>
+          </a:graphicData>
+        </a:graphic>
+      </p:graphicFrame>
+      <p:sp>
+        <p:nvSpPr>
+          <p:cNvPr id="5" name="TextBox 4"/>
+          <p:cNvSpPr txBox="1"/>
+          <p:nvPr/>
+        </p:nvSpPr>
+        <p:spPr>
+          <a:xfrm>
+            <a:off x="502920" y="4754880"/>
+            <a:ext cx="11247120" cy="1828800"/>
+          </a:xfrm>
+          <a:prstGeom prst="rect">
+            <a:avLst/>
+          </a:prstGeom>
+          <a:noFill/>
+        </p:spPr>
+        <p:txBody>
+          <a:bodyPr wrap="square">
+            <a:spAutoFit/>
+          </a:bodyPr>
+          <a:lstStyle/>
+          <a:p>
+            <a:pPr algn="l">
+              <a:spcBef>
+                <a:spcPts val="0"/>
+              </a:spcBef>
+              <a:spcAft>
+                <a:spcPts val="0"/>
+              </a:spcAft>
+            </a:pPr>
+            <a:r>
+              <a:rPr sz="1600" b="1">
+                <a:solidFill>
+                  <a:srgbClr val="1B222E"/>
+                </a:solidFill>
+                <a:latin typeface="微软雅黑"/>
+                <a:ea typeface="微软雅黑"/>
+              </a:rPr>
+              <a:t>最终验收</a:t>
+            </a:r>
+          </a:p>
+          <a:p>
+            <a:pPr algn="l">
+              <a:spcBef>
+                <a:spcPts val="600"/>
+              </a:spcBef>
+              <a:spcAft>
+                <a:spcPts val="0"/>
+              </a:spcAft>
+            </a:pPr>
+            <a:r>
+              <a:rPr sz="1350" b="0">
+                <a:solidFill>
+                  <a:srgbClr val="1B222E"/>
+                </a:solidFill>
+                <a:latin typeface="微软雅黑"/>
+                <a:ea typeface="微软雅黑"/>
+              </a:rPr>
+              <a:t>· 昇腾侧可用实现,与固定 K、无投机三者的对比数据齐备,复现文档可被他人独立执行;</a:t>
+            </a:r>
+          </a:p>
+          <a:p>
+            <a:pPr algn="l">
+              <a:spcBef>
+                <a:spcPts val="400"/>
+              </a:spcBef>
+              <a:spcAft>
+                <a:spcPts val="0"/>
+              </a:spcAft>
+            </a:pPr>
+            <a:r>
+              <a:rPr sz="1350" b="0">
+                <a:solidFill>
+                  <a:srgbClr val="1B222E"/>
+                </a:solidFill>
+                <a:latin typeface="微软雅黑"/>
+                <a:ea typeface="微软雅黑"/>
+              </a:rPr>
+              <a:t>· DSV4-Flash 在动态 K 下取得不劣于固定 K 的端到端表现,并在高并发点显示优势;</a:t>
+            </a:r>
+          </a:p>
+          <a:p>
+            <a:pPr algn="l">
+              <a:spcBef>
+                <a:spcPts val="400"/>
+              </a:spcBef>
+              <a:spcAft>
+                <a:spcPts val="0"/>
+              </a:spcAft>
+            </a:pPr>
+            <a:r>
+              <a:rPr sz="1350" b="0">
+                <a:solidFill>
+                  <a:srgbClr val="1B222E"/>
+                </a:solidFill>
+                <a:latin typeface="微软雅黑"/>
+                <a:ea typeface="微软雅黑"/>
+              </a:rPr>
+              <a:t>· 通用模型路线给出明确结论:可行方案,或阻断原因与所需外部支持。</a:t>
+            </a:r>
+          </a:p>
+          <a:p>
+            <a:pPr algn="l">
+              <a:spcBef>
+                <a:spcPts val="1200"/>
+              </a:spcBef>
+              <a:spcAft>
+                <a:spcPts val="0"/>
+              </a:spcAft>
+            </a:pPr>
+            <a:r>
+              <a:rPr sz="1600" b="1">
+                <a:solidFill>
+                  <a:srgbClr val="1F6FEB"/>
+                </a:solidFill>
+                <a:latin typeface="微软雅黑"/>
+                <a:ea typeface="微软雅黑"/>
+              </a:rPr>
+              <a:t>建议:先做阶段 0。一天即可拿到 G1 数据,再决定是否投入后续 2.5–3.5 个月。</a:t>
+            </a:r>
+          </a:p>
+        </p:txBody>
+      </p:sp>
+    </p:spTree>
+  </p:cSld>
+  <p:clrMapOvr>
+    <a:masterClrMapping/>
+  </p:clrMapOvr>
+</p:sld>
+</file>
+
 <file path=ppt/slides/slide2.xml><?xml version="1.0" encoding="utf-8"?>
 <p:sld xmlns:a="http://schemas.openxmlformats.org/drawingml/2006/main" xmlns:p="http://schemas.openxmlformats.org/presentationml/2006/main" xmlns:r="http://schemas.openxmlformats.org/officeDocument/2006/relationships">
   <p:cSld>
@@ -5876,8 +6785,8 @@
         </p:nvSpPr>
         <p:spPr>
           <a:xfrm>
-            <a:off x="6437375" y="4590288"/>
-            <a:ext cx="2962656" cy="1828800"/>
+            <a:off x="6437375" y="4553712"/>
+            <a:ext cx="2962656" cy="1920240"/>
           </a:xfrm>
           <a:prstGeom prst="rect">
             <a:avLst/>
@@ -5893,6 +6802,26 @@
             <a:pPr algn="l">
               <a:spcBef>
                 <a:spcPts val="0"/>
+              </a:spcBef>
+              <a:spcAft>
+                <a:spcPts val="0"/>
+              </a:spcAft>
+            </a:pPr>
+            <a:r>
+              <a:rPr sz="950" b="1">
+                <a:solidFill>
+                  <a:srgbClr val="1B222E"/>
+                </a:solidFill>
+                <a:latin typeface="微软雅黑"/>
+                <a:ea typeface="微软雅黑"/>
+              </a:rPr>
+              <a:t>为什么变长会掉出设备图</a:t>
+            </a:r>
+          </a:p>
+          <a:p>
+            <a:pPr algn="l">
+              <a:spcBef>
+                <a:spcPts val="200"/>
               </a:spcBef>
               <a:spcAft>
                 <a:spcPts val="0"/>
@@ -5906,7 +6835,7 @@
                 <a:latin typeface="微软雅黑"/>
                 <a:ea typeface="微软雅黑"/>
               </a:rPr>
-              <a:t>· 通用 FIA 路径的序列长度是 host 侧 list,捕获即固化 → 变长必须重捕;</a:t>
+              <a:t>· 设备图 = 把一串算子按固定的张量形状录制下来直接重放,省掉逐算子下发开销;录制的前提就是形状固定;</a:t>
             </a:r>
           </a:p>
           <a:p>
@@ -5926,7 +6855,7 @@
                 <a:latin typeface="微软雅黑"/>
                 <a:ea typeface="微软雅黑"/>
               </a:rPr>
-              <a:t>· ★ DSV4 走的 DSA 路径长度在 device tensor 上,结构上无需重捕 —— 有利条件;</a:t>
+              <a:t>· 固定 K 每步形状一致 → 能入图;自适应下每请求 K_i 每步不同 → 形状参差且逐步变化 → 默认出图;</a:t>
             </a:r>
           </a:p>
           <a:p>
@@ -5946,27 +6875,7 @@
                 <a:latin typeface="微软雅黑"/>
                 <a:ea typeface="微软雅黑"/>
               </a:rPr>
-              <a:t>· 真正的未知量是 workspace / 图数量随 K 组合膨胀(workspace 按 num_tokens 做键);</a:t>
-            </a:r>
-          </a:p>
-          <a:p>
-            <a:pPr algn="l">
-              <a:spcBef>
-                <a:spcPts val="200"/>
-              </a:spcBef>
-              <a:spcAft>
-                <a:spcPts val="0"/>
-              </a:spcAft>
-            </a:pPr>
-            <a:r>
-              <a:rPr sz="850" b="0">
-                <a:solidFill>
-                  <a:srgbClr val="5B6677"/>
-                </a:solidFill>
-                <a:latin typeface="微软雅黑"/>
-                <a:ea typeface="微软雅黑"/>
-              </a:rPr>
-              <a:t>· 若确不可行,保留 eager 成果,把图支持作为独立议题提交上游。</a:t>
+              <a:t>· 能否留在图内,取决于图里的长度参数是「录制时固化的常量」还是「运行时可改的设备张量」 —— DSV4 属于后者(有利)。详见「三(补充)」两页。</a:t>
             </a:r>
           </a:p>
         </p:txBody>
@@ -9682,7 +10591,7 @@
                 <a:latin typeface="微软雅黑"/>
                 <a:ea typeface="微软雅黑"/>
               </a:rPr>
-              <a:t>三(补充)、「变长入图」在昇腾究竟难在哪</a:t>
+              <a:t>三(补充 1)、为什么「变长」会掉出设备图</a:t>
             </a:r>
           </a:p>
           <a:p>
@@ -9702,7 +10611,7 @@
                 <a:latin typeface="微软雅黑"/>
                 <a:ea typeface="微软雅黑"/>
               </a:rPr>
-              <a:t>四条结论均出自 vllm-ascend 现网代码,标注文件与行号,可自行核对</a:t>
+              <a:t>先讲清楚机制,再落到算子 —— 这是本项目最大技术风险的来源</a:t>
             </a:r>
           </a:p>
         </p:txBody>
@@ -9751,6 +10660,2945 @@
           </a:p>
         </p:txBody>
       </p:sp>
+      <p:sp>
+        <p:nvSpPr>
+          <p:cNvPr id="4" name="TextBox 3"/>
+          <p:cNvSpPr txBox="1"/>
+          <p:nvPr/>
+        </p:nvSpPr>
+        <p:spPr>
+          <a:xfrm>
+            <a:off x="502920" y="1426464"/>
+            <a:ext cx="11247120" cy="914400"/>
+          </a:xfrm>
+          <a:prstGeom prst="rect">
+            <a:avLst/>
+          </a:prstGeom>
+          <a:noFill/>
+        </p:spPr>
+        <p:txBody>
+          <a:bodyPr wrap="square">
+            <a:spAutoFit/>
+          </a:bodyPr>
+          <a:lstStyle/>
+          <a:p>
+            <a:pPr algn="l">
+              <a:spcBef>
+                <a:spcPts val="0"/>
+              </a:spcBef>
+              <a:spcAft>
+                <a:spcPts val="0"/>
+              </a:spcAft>
+            </a:pPr>
+            <a:r>
+              <a:rPr sz="1350" b="0">
+                <a:solidFill>
+                  <a:srgbClr val="1B222E"/>
+                </a:solidFill>
+                <a:latin typeface="微软雅黑"/>
+                <a:ea typeface="微软雅黑"/>
+              </a:rPr>
+              <a:t>设备图(昇腾 ACL Graph,对应 GPU 侧的 CUDA Graph)是把一串算子按【固定的张量形状与地址】预先录制下来,推理时直接重放整段,省掉逐算子下发的开销。解码是「算子小、次数多」的场景,这部分开销占比很高,所以能否入图直接决定性能。</a:t>
+            </a:r>
+          </a:p>
+          <a:p>
+            <a:pPr algn="l">
+              <a:spcBef>
+                <a:spcPts val="500"/>
+              </a:spcBef>
+              <a:spcAft>
+                <a:spcPts val="0"/>
+              </a:spcAft>
+            </a:pPr>
+            <a:r>
+              <a:rPr sz="1350" b="1">
+                <a:solidFill>
+                  <a:srgbClr val="1F6FEB"/>
+                </a:solidFill>
+                <a:latin typeface="微软雅黑"/>
+                <a:ea typeface="微软雅黑"/>
+              </a:rPr>
+              <a:t>而录制的前提,是每一步的形状都一样。</a:t>
+            </a:r>
+          </a:p>
+        </p:txBody>
+      </p:sp>
+      <p:sp>
+        <p:nvSpPr>
+          <p:cNvPr id="5" name="Rectangle 4"/>
+          <p:cNvSpPr/>
+          <p:nvPr/>
+        </p:nvSpPr>
+        <p:spPr>
+          <a:xfrm>
+            <a:off x="502920" y="2468880"/>
+            <a:ext cx="5504688" cy="2615184"/>
+          </a:xfrm>
+          <a:prstGeom prst="rect">
+            <a:avLst/>
+          </a:prstGeom>
+          <a:noFill/>
+          <a:ln w="19050">
+            <a:solidFill>
+              <a:srgbClr val="0E7A4B"/>
+            </a:solidFill>
+          </a:ln>
+          <a:effectLst/>
+        </p:spPr>
+        <p:style>
+          <a:lnRef idx="1">
+            <a:schemeClr val="accent1"/>
+          </a:lnRef>
+          <a:fillRef idx="3">
+            <a:schemeClr val="accent1"/>
+          </a:fillRef>
+          <a:effectRef idx="2">
+            <a:schemeClr val="accent1"/>
+          </a:effectRef>
+          <a:fontRef idx="minor">
+            <a:schemeClr val="lt1"/>
+          </a:fontRef>
+        </p:style>
+        <p:txBody>
+          <a:bodyPr rtlCol="0" anchor="ctr"/>
+          <a:lstStyle/>
+          <a:p>
+            <a:pPr algn="ctr"/>
+          </a:p>
+        </p:txBody>
+      </p:sp>
+      <p:sp>
+        <p:nvSpPr>
+          <p:cNvPr id="6" name="TextBox 5"/>
+          <p:cNvSpPr txBox="1"/>
+          <p:nvPr/>
+        </p:nvSpPr>
+        <p:spPr>
+          <a:xfrm>
+            <a:off x="630936" y="2542032"/>
+            <a:ext cx="5248655" cy="292608"/>
+          </a:xfrm>
+          <a:prstGeom prst="rect">
+            <a:avLst/>
+          </a:prstGeom>
+          <a:noFill/>
+        </p:spPr>
+        <p:txBody>
+          <a:bodyPr wrap="square">
+            <a:spAutoFit/>
+          </a:bodyPr>
+          <a:lstStyle/>
+          <a:p>
+            <a:pPr algn="l">
+              <a:spcBef>
+                <a:spcPts val="0"/>
+              </a:spcBef>
+              <a:spcAft>
+                <a:spcPts val="0"/>
+              </a:spcAft>
+            </a:pPr>
+            <a:r>
+              <a:rPr sz="1250" b="1">
+                <a:solidFill>
+                  <a:srgbClr val="0E7A4B"/>
+                </a:solidFill>
+                <a:latin typeface="微软雅黑"/>
+                <a:ea typeface="微软雅黑"/>
+              </a:rPr>
+              <a:t>固定 K = 5   →   形状固定,可入图</a:t>
+            </a:r>
+          </a:p>
+        </p:txBody>
+      </p:sp>
+      <p:sp>
+        <p:nvSpPr>
+          <p:cNvPr id="7" name="TextBox 6"/>
+          <p:cNvSpPr txBox="1"/>
+          <p:nvPr/>
+        </p:nvSpPr>
+        <p:spPr>
+          <a:xfrm>
+            <a:off x="630936" y="2907792"/>
+            <a:ext cx="768096" cy="256032"/>
+          </a:xfrm>
+          <a:prstGeom prst="rect">
+            <a:avLst/>
+          </a:prstGeom>
+          <a:noFill/>
+        </p:spPr>
+        <p:txBody>
+          <a:bodyPr wrap="square">
+            <a:spAutoFit/>
+          </a:bodyPr>
+          <a:lstStyle/>
+          <a:p>
+            <a:pPr algn="l">
+              <a:spcBef>
+                <a:spcPts val="0"/>
+              </a:spcBef>
+              <a:spcAft>
+                <a:spcPts val="0"/>
+              </a:spcAft>
+            </a:pPr>
+            <a:r>
+              <a:rPr sz="900" b="0">
+                <a:solidFill>
+                  <a:srgbClr val="5B6677"/>
+                </a:solidFill>
+                <a:latin typeface="微软雅黑"/>
+                <a:ea typeface="微软雅黑"/>
+              </a:rPr>
+              <a:t>请求 1</a:t>
+            </a:r>
+          </a:p>
+        </p:txBody>
+      </p:sp>
+      <p:sp>
+        <p:nvSpPr>
+          <p:cNvPr id="8" name="Rectangle 7"/>
+          <p:cNvSpPr/>
+          <p:nvPr/>
+        </p:nvSpPr>
+        <p:spPr>
+          <a:xfrm>
+            <a:off x="1435608" y="2944368"/>
+            <a:ext cx="237744" cy="201168"/>
+          </a:xfrm>
+          <a:prstGeom prst="rect">
+            <a:avLst/>
+          </a:prstGeom>
+          <a:solidFill>
+            <a:srgbClr val="0E7A4B"/>
+          </a:solidFill>
+          <a:ln w="6350">
+            <a:solidFill>
+              <a:srgbClr val="FFFFFF"/>
+            </a:solidFill>
+          </a:ln>
+          <a:effectLst/>
+        </p:spPr>
+        <p:style>
+          <a:lnRef idx="1">
+            <a:schemeClr val="accent1"/>
+          </a:lnRef>
+          <a:fillRef idx="3">
+            <a:schemeClr val="accent1"/>
+          </a:fillRef>
+          <a:effectRef idx="2">
+            <a:schemeClr val="accent1"/>
+          </a:effectRef>
+          <a:fontRef idx="minor">
+            <a:schemeClr val="lt1"/>
+          </a:fontRef>
+        </p:style>
+        <p:txBody>
+          <a:bodyPr rtlCol="0" anchor="ctr"/>
+          <a:lstStyle/>
+          <a:p>
+            <a:pPr algn="ctr"/>
+          </a:p>
+        </p:txBody>
+      </p:sp>
+      <p:sp>
+        <p:nvSpPr>
+          <p:cNvPr id="9" name="Rectangle 8"/>
+          <p:cNvSpPr/>
+          <p:nvPr/>
+        </p:nvSpPr>
+        <p:spPr>
+          <a:xfrm>
+            <a:off x="1728216" y="2944368"/>
+            <a:ext cx="237744" cy="201168"/>
+          </a:xfrm>
+          <a:prstGeom prst="rect">
+            <a:avLst/>
+          </a:prstGeom>
+          <a:solidFill>
+            <a:srgbClr val="0E7A4B"/>
+          </a:solidFill>
+          <a:ln w="6350">
+            <a:solidFill>
+              <a:srgbClr val="FFFFFF"/>
+            </a:solidFill>
+          </a:ln>
+          <a:effectLst/>
+        </p:spPr>
+        <p:style>
+          <a:lnRef idx="1">
+            <a:schemeClr val="accent1"/>
+          </a:lnRef>
+          <a:fillRef idx="3">
+            <a:schemeClr val="accent1"/>
+          </a:fillRef>
+          <a:effectRef idx="2">
+            <a:schemeClr val="accent1"/>
+          </a:effectRef>
+          <a:fontRef idx="minor">
+            <a:schemeClr val="lt1"/>
+          </a:fontRef>
+        </p:style>
+        <p:txBody>
+          <a:bodyPr rtlCol="0" anchor="ctr"/>
+          <a:lstStyle/>
+          <a:p>
+            <a:pPr algn="ctr"/>
+          </a:p>
+        </p:txBody>
+      </p:sp>
+      <p:sp>
+        <p:nvSpPr>
+          <p:cNvPr id="10" name="Rectangle 9"/>
+          <p:cNvSpPr/>
+          <p:nvPr/>
+        </p:nvSpPr>
+        <p:spPr>
+          <a:xfrm>
+            <a:off x="2020824" y="2944368"/>
+            <a:ext cx="237744" cy="201168"/>
+          </a:xfrm>
+          <a:prstGeom prst="rect">
+            <a:avLst/>
+          </a:prstGeom>
+          <a:solidFill>
+            <a:srgbClr val="0E7A4B"/>
+          </a:solidFill>
+          <a:ln w="6350">
+            <a:solidFill>
+              <a:srgbClr val="FFFFFF"/>
+            </a:solidFill>
+          </a:ln>
+          <a:effectLst/>
+        </p:spPr>
+        <p:style>
+          <a:lnRef idx="1">
+            <a:schemeClr val="accent1"/>
+          </a:lnRef>
+          <a:fillRef idx="3">
+            <a:schemeClr val="accent1"/>
+          </a:fillRef>
+          <a:effectRef idx="2">
+            <a:schemeClr val="accent1"/>
+          </a:effectRef>
+          <a:fontRef idx="minor">
+            <a:schemeClr val="lt1"/>
+          </a:fontRef>
+        </p:style>
+        <p:txBody>
+          <a:bodyPr rtlCol="0" anchor="ctr"/>
+          <a:lstStyle/>
+          <a:p>
+            <a:pPr algn="ctr"/>
+          </a:p>
+        </p:txBody>
+      </p:sp>
+      <p:sp>
+        <p:nvSpPr>
+          <p:cNvPr id="11" name="Rectangle 10"/>
+          <p:cNvSpPr/>
+          <p:nvPr/>
+        </p:nvSpPr>
+        <p:spPr>
+          <a:xfrm>
+            <a:off x="2313432" y="2944368"/>
+            <a:ext cx="237744" cy="201168"/>
+          </a:xfrm>
+          <a:prstGeom prst="rect">
+            <a:avLst/>
+          </a:prstGeom>
+          <a:solidFill>
+            <a:srgbClr val="0E7A4B"/>
+          </a:solidFill>
+          <a:ln w="6350">
+            <a:solidFill>
+              <a:srgbClr val="FFFFFF"/>
+            </a:solidFill>
+          </a:ln>
+          <a:effectLst/>
+        </p:spPr>
+        <p:style>
+          <a:lnRef idx="1">
+            <a:schemeClr val="accent1"/>
+          </a:lnRef>
+          <a:fillRef idx="3">
+            <a:schemeClr val="accent1"/>
+          </a:fillRef>
+          <a:effectRef idx="2">
+            <a:schemeClr val="accent1"/>
+          </a:effectRef>
+          <a:fontRef idx="minor">
+            <a:schemeClr val="lt1"/>
+          </a:fontRef>
+        </p:style>
+        <p:txBody>
+          <a:bodyPr rtlCol="0" anchor="ctr"/>
+          <a:lstStyle/>
+          <a:p>
+            <a:pPr algn="ctr"/>
+          </a:p>
+        </p:txBody>
+      </p:sp>
+      <p:sp>
+        <p:nvSpPr>
+          <p:cNvPr id="12" name="Rectangle 11"/>
+          <p:cNvSpPr/>
+          <p:nvPr/>
+        </p:nvSpPr>
+        <p:spPr>
+          <a:xfrm>
+            <a:off x="2606040" y="2944368"/>
+            <a:ext cx="237744" cy="201168"/>
+          </a:xfrm>
+          <a:prstGeom prst="rect">
+            <a:avLst/>
+          </a:prstGeom>
+          <a:solidFill>
+            <a:srgbClr val="0E7A4B"/>
+          </a:solidFill>
+          <a:ln w="6350">
+            <a:solidFill>
+              <a:srgbClr val="FFFFFF"/>
+            </a:solidFill>
+          </a:ln>
+          <a:effectLst/>
+        </p:spPr>
+        <p:style>
+          <a:lnRef idx="1">
+            <a:schemeClr val="accent1"/>
+          </a:lnRef>
+          <a:fillRef idx="3">
+            <a:schemeClr val="accent1"/>
+          </a:fillRef>
+          <a:effectRef idx="2">
+            <a:schemeClr val="accent1"/>
+          </a:effectRef>
+          <a:fontRef idx="minor">
+            <a:schemeClr val="lt1"/>
+          </a:fontRef>
+        </p:style>
+        <p:txBody>
+          <a:bodyPr rtlCol="0" anchor="ctr"/>
+          <a:lstStyle/>
+          <a:p>
+            <a:pPr algn="ctr"/>
+          </a:p>
+        </p:txBody>
+      </p:sp>
+      <p:sp>
+        <p:nvSpPr>
+          <p:cNvPr id="13" name="TextBox 12"/>
+          <p:cNvSpPr txBox="1"/>
+          <p:nvPr/>
+        </p:nvSpPr>
+        <p:spPr>
+          <a:xfrm>
+            <a:off x="3593592" y="2907792"/>
+            <a:ext cx="822960" cy="256032"/>
+          </a:xfrm>
+          <a:prstGeom prst="rect">
+            <a:avLst/>
+          </a:prstGeom>
+          <a:noFill/>
+        </p:spPr>
+        <p:txBody>
+          <a:bodyPr wrap="square">
+            <a:spAutoFit/>
+          </a:bodyPr>
+          <a:lstStyle/>
+          <a:p>
+            <a:pPr algn="l">
+              <a:spcBef>
+                <a:spcPts val="0"/>
+              </a:spcBef>
+              <a:spcAft>
+                <a:spcPts val="0"/>
+              </a:spcAft>
+            </a:pPr>
+            <a:r>
+              <a:rPr sz="900" b="0">
+                <a:solidFill>
+                  <a:srgbClr val="0E7A4B"/>
+                </a:solidFill>
+                <a:latin typeface="微软雅黑"/>
+                <a:ea typeface="微软雅黑"/>
+              </a:rPr>
+              <a:t>K=5</a:t>
+            </a:r>
+          </a:p>
+        </p:txBody>
+      </p:sp>
+      <p:sp>
+        <p:nvSpPr>
+          <p:cNvPr id="14" name="TextBox 13"/>
+          <p:cNvSpPr txBox="1"/>
+          <p:nvPr/>
+        </p:nvSpPr>
+        <p:spPr>
+          <a:xfrm>
+            <a:off x="630936" y="3255264"/>
+            <a:ext cx="768096" cy="256032"/>
+          </a:xfrm>
+          <a:prstGeom prst="rect">
+            <a:avLst/>
+          </a:prstGeom>
+          <a:noFill/>
+        </p:spPr>
+        <p:txBody>
+          <a:bodyPr wrap="square">
+            <a:spAutoFit/>
+          </a:bodyPr>
+          <a:lstStyle/>
+          <a:p>
+            <a:pPr algn="l">
+              <a:spcBef>
+                <a:spcPts val="0"/>
+              </a:spcBef>
+              <a:spcAft>
+                <a:spcPts val="0"/>
+              </a:spcAft>
+            </a:pPr>
+            <a:r>
+              <a:rPr sz="900" b="0">
+                <a:solidFill>
+                  <a:srgbClr val="5B6677"/>
+                </a:solidFill>
+                <a:latin typeface="微软雅黑"/>
+                <a:ea typeface="微软雅黑"/>
+              </a:rPr>
+              <a:t>请求 2</a:t>
+            </a:r>
+          </a:p>
+        </p:txBody>
+      </p:sp>
+      <p:sp>
+        <p:nvSpPr>
+          <p:cNvPr id="15" name="Rectangle 14"/>
+          <p:cNvSpPr/>
+          <p:nvPr/>
+        </p:nvSpPr>
+        <p:spPr>
+          <a:xfrm>
+            <a:off x="1435608" y="3291840"/>
+            <a:ext cx="237744" cy="201168"/>
+          </a:xfrm>
+          <a:prstGeom prst="rect">
+            <a:avLst/>
+          </a:prstGeom>
+          <a:solidFill>
+            <a:srgbClr val="0E7A4B"/>
+          </a:solidFill>
+          <a:ln w="6350">
+            <a:solidFill>
+              <a:srgbClr val="FFFFFF"/>
+            </a:solidFill>
+          </a:ln>
+          <a:effectLst/>
+        </p:spPr>
+        <p:style>
+          <a:lnRef idx="1">
+            <a:schemeClr val="accent1"/>
+          </a:lnRef>
+          <a:fillRef idx="3">
+            <a:schemeClr val="accent1"/>
+          </a:fillRef>
+          <a:effectRef idx="2">
+            <a:schemeClr val="accent1"/>
+          </a:effectRef>
+          <a:fontRef idx="minor">
+            <a:schemeClr val="lt1"/>
+          </a:fontRef>
+        </p:style>
+        <p:txBody>
+          <a:bodyPr rtlCol="0" anchor="ctr"/>
+          <a:lstStyle/>
+          <a:p>
+            <a:pPr algn="ctr"/>
+          </a:p>
+        </p:txBody>
+      </p:sp>
+      <p:sp>
+        <p:nvSpPr>
+          <p:cNvPr id="16" name="Rectangle 15"/>
+          <p:cNvSpPr/>
+          <p:nvPr/>
+        </p:nvSpPr>
+        <p:spPr>
+          <a:xfrm>
+            <a:off x="1728216" y="3291840"/>
+            <a:ext cx="237744" cy="201168"/>
+          </a:xfrm>
+          <a:prstGeom prst="rect">
+            <a:avLst/>
+          </a:prstGeom>
+          <a:solidFill>
+            <a:srgbClr val="0E7A4B"/>
+          </a:solidFill>
+          <a:ln w="6350">
+            <a:solidFill>
+              <a:srgbClr val="FFFFFF"/>
+            </a:solidFill>
+          </a:ln>
+          <a:effectLst/>
+        </p:spPr>
+        <p:style>
+          <a:lnRef idx="1">
+            <a:schemeClr val="accent1"/>
+          </a:lnRef>
+          <a:fillRef idx="3">
+            <a:schemeClr val="accent1"/>
+          </a:fillRef>
+          <a:effectRef idx="2">
+            <a:schemeClr val="accent1"/>
+          </a:effectRef>
+          <a:fontRef idx="minor">
+            <a:schemeClr val="lt1"/>
+          </a:fontRef>
+        </p:style>
+        <p:txBody>
+          <a:bodyPr rtlCol="0" anchor="ctr"/>
+          <a:lstStyle/>
+          <a:p>
+            <a:pPr algn="ctr"/>
+          </a:p>
+        </p:txBody>
+      </p:sp>
+      <p:sp>
+        <p:nvSpPr>
+          <p:cNvPr id="17" name="Rectangle 16"/>
+          <p:cNvSpPr/>
+          <p:nvPr/>
+        </p:nvSpPr>
+        <p:spPr>
+          <a:xfrm>
+            <a:off x="2020824" y="3291840"/>
+            <a:ext cx="237744" cy="201168"/>
+          </a:xfrm>
+          <a:prstGeom prst="rect">
+            <a:avLst/>
+          </a:prstGeom>
+          <a:solidFill>
+            <a:srgbClr val="0E7A4B"/>
+          </a:solidFill>
+          <a:ln w="6350">
+            <a:solidFill>
+              <a:srgbClr val="FFFFFF"/>
+            </a:solidFill>
+          </a:ln>
+          <a:effectLst/>
+        </p:spPr>
+        <p:style>
+          <a:lnRef idx="1">
+            <a:schemeClr val="accent1"/>
+          </a:lnRef>
+          <a:fillRef idx="3">
+            <a:schemeClr val="accent1"/>
+          </a:fillRef>
+          <a:effectRef idx="2">
+            <a:schemeClr val="accent1"/>
+          </a:effectRef>
+          <a:fontRef idx="minor">
+            <a:schemeClr val="lt1"/>
+          </a:fontRef>
+        </p:style>
+        <p:txBody>
+          <a:bodyPr rtlCol="0" anchor="ctr"/>
+          <a:lstStyle/>
+          <a:p>
+            <a:pPr algn="ctr"/>
+          </a:p>
+        </p:txBody>
+      </p:sp>
+      <p:sp>
+        <p:nvSpPr>
+          <p:cNvPr id="18" name="Rectangle 17"/>
+          <p:cNvSpPr/>
+          <p:nvPr/>
+        </p:nvSpPr>
+        <p:spPr>
+          <a:xfrm>
+            <a:off x="2313432" y="3291840"/>
+            <a:ext cx="237744" cy="201168"/>
+          </a:xfrm>
+          <a:prstGeom prst="rect">
+            <a:avLst/>
+          </a:prstGeom>
+          <a:solidFill>
+            <a:srgbClr val="0E7A4B"/>
+          </a:solidFill>
+          <a:ln w="6350">
+            <a:solidFill>
+              <a:srgbClr val="FFFFFF"/>
+            </a:solidFill>
+          </a:ln>
+          <a:effectLst/>
+        </p:spPr>
+        <p:style>
+          <a:lnRef idx="1">
+            <a:schemeClr val="accent1"/>
+          </a:lnRef>
+          <a:fillRef idx="3">
+            <a:schemeClr val="accent1"/>
+          </a:fillRef>
+          <a:effectRef idx="2">
+            <a:schemeClr val="accent1"/>
+          </a:effectRef>
+          <a:fontRef idx="minor">
+            <a:schemeClr val="lt1"/>
+          </a:fontRef>
+        </p:style>
+        <p:txBody>
+          <a:bodyPr rtlCol="0" anchor="ctr"/>
+          <a:lstStyle/>
+          <a:p>
+            <a:pPr algn="ctr"/>
+          </a:p>
+        </p:txBody>
+      </p:sp>
+      <p:sp>
+        <p:nvSpPr>
+          <p:cNvPr id="19" name="Rectangle 18"/>
+          <p:cNvSpPr/>
+          <p:nvPr/>
+        </p:nvSpPr>
+        <p:spPr>
+          <a:xfrm>
+            <a:off x="2606040" y="3291840"/>
+            <a:ext cx="237744" cy="201168"/>
+          </a:xfrm>
+          <a:prstGeom prst="rect">
+            <a:avLst/>
+          </a:prstGeom>
+          <a:solidFill>
+            <a:srgbClr val="0E7A4B"/>
+          </a:solidFill>
+          <a:ln w="6350">
+            <a:solidFill>
+              <a:srgbClr val="FFFFFF"/>
+            </a:solidFill>
+          </a:ln>
+          <a:effectLst/>
+        </p:spPr>
+        <p:style>
+          <a:lnRef idx="1">
+            <a:schemeClr val="accent1"/>
+          </a:lnRef>
+          <a:fillRef idx="3">
+            <a:schemeClr val="accent1"/>
+          </a:fillRef>
+          <a:effectRef idx="2">
+            <a:schemeClr val="accent1"/>
+          </a:effectRef>
+          <a:fontRef idx="minor">
+            <a:schemeClr val="lt1"/>
+          </a:fontRef>
+        </p:style>
+        <p:txBody>
+          <a:bodyPr rtlCol="0" anchor="ctr"/>
+          <a:lstStyle/>
+          <a:p>
+            <a:pPr algn="ctr"/>
+          </a:p>
+        </p:txBody>
+      </p:sp>
+      <p:sp>
+        <p:nvSpPr>
+          <p:cNvPr id="20" name="TextBox 19"/>
+          <p:cNvSpPr txBox="1"/>
+          <p:nvPr/>
+        </p:nvSpPr>
+        <p:spPr>
+          <a:xfrm>
+            <a:off x="3593592" y="3255264"/>
+            <a:ext cx="822960" cy="256032"/>
+          </a:xfrm>
+          <a:prstGeom prst="rect">
+            <a:avLst/>
+          </a:prstGeom>
+          <a:noFill/>
+        </p:spPr>
+        <p:txBody>
+          <a:bodyPr wrap="square">
+            <a:spAutoFit/>
+          </a:bodyPr>
+          <a:lstStyle/>
+          <a:p>
+            <a:pPr algn="l">
+              <a:spcBef>
+                <a:spcPts val="0"/>
+              </a:spcBef>
+              <a:spcAft>
+                <a:spcPts val="0"/>
+              </a:spcAft>
+            </a:pPr>
+            <a:r>
+              <a:rPr sz="900" b="0">
+                <a:solidFill>
+                  <a:srgbClr val="0E7A4B"/>
+                </a:solidFill>
+                <a:latin typeface="微软雅黑"/>
+                <a:ea typeface="微软雅黑"/>
+              </a:rPr>
+              <a:t>K=5</a:t>
+            </a:r>
+          </a:p>
+        </p:txBody>
+      </p:sp>
+      <p:sp>
+        <p:nvSpPr>
+          <p:cNvPr id="21" name="TextBox 20"/>
+          <p:cNvSpPr txBox="1"/>
+          <p:nvPr/>
+        </p:nvSpPr>
+        <p:spPr>
+          <a:xfrm>
+            <a:off x="630936" y="3602736"/>
+            <a:ext cx="768096" cy="256032"/>
+          </a:xfrm>
+          <a:prstGeom prst="rect">
+            <a:avLst/>
+          </a:prstGeom>
+          <a:noFill/>
+        </p:spPr>
+        <p:txBody>
+          <a:bodyPr wrap="square">
+            <a:spAutoFit/>
+          </a:bodyPr>
+          <a:lstStyle/>
+          <a:p>
+            <a:pPr algn="l">
+              <a:spcBef>
+                <a:spcPts val="0"/>
+              </a:spcBef>
+              <a:spcAft>
+                <a:spcPts val="0"/>
+              </a:spcAft>
+            </a:pPr>
+            <a:r>
+              <a:rPr sz="900" b="0">
+                <a:solidFill>
+                  <a:srgbClr val="5B6677"/>
+                </a:solidFill>
+                <a:latin typeface="微软雅黑"/>
+                <a:ea typeface="微软雅黑"/>
+              </a:rPr>
+              <a:t>请求 3</a:t>
+            </a:r>
+          </a:p>
+        </p:txBody>
+      </p:sp>
+      <p:sp>
+        <p:nvSpPr>
+          <p:cNvPr id="22" name="Rectangle 21"/>
+          <p:cNvSpPr/>
+          <p:nvPr/>
+        </p:nvSpPr>
+        <p:spPr>
+          <a:xfrm>
+            <a:off x="1435608" y="3639312"/>
+            <a:ext cx="237744" cy="201168"/>
+          </a:xfrm>
+          <a:prstGeom prst="rect">
+            <a:avLst/>
+          </a:prstGeom>
+          <a:solidFill>
+            <a:srgbClr val="0E7A4B"/>
+          </a:solidFill>
+          <a:ln w="6350">
+            <a:solidFill>
+              <a:srgbClr val="FFFFFF"/>
+            </a:solidFill>
+          </a:ln>
+          <a:effectLst/>
+        </p:spPr>
+        <p:style>
+          <a:lnRef idx="1">
+            <a:schemeClr val="accent1"/>
+          </a:lnRef>
+          <a:fillRef idx="3">
+            <a:schemeClr val="accent1"/>
+          </a:fillRef>
+          <a:effectRef idx="2">
+            <a:schemeClr val="accent1"/>
+          </a:effectRef>
+          <a:fontRef idx="minor">
+            <a:schemeClr val="lt1"/>
+          </a:fontRef>
+        </p:style>
+        <p:txBody>
+          <a:bodyPr rtlCol="0" anchor="ctr"/>
+          <a:lstStyle/>
+          <a:p>
+            <a:pPr algn="ctr"/>
+          </a:p>
+        </p:txBody>
+      </p:sp>
+      <p:sp>
+        <p:nvSpPr>
+          <p:cNvPr id="23" name="Rectangle 22"/>
+          <p:cNvSpPr/>
+          <p:nvPr/>
+        </p:nvSpPr>
+        <p:spPr>
+          <a:xfrm>
+            <a:off x="1728216" y="3639312"/>
+            <a:ext cx="237744" cy="201168"/>
+          </a:xfrm>
+          <a:prstGeom prst="rect">
+            <a:avLst/>
+          </a:prstGeom>
+          <a:solidFill>
+            <a:srgbClr val="0E7A4B"/>
+          </a:solidFill>
+          <a:ln w="6350">
+            <a:solidFill>
+              <a:srgbClr val="FFFFFF"/>
+            </a:solidFill>
+          </a:ln>
+          <a:effectLst/>
+        </p:spPr>
+        <p:style>
+          <a:lnRef idx="1">
+            <a:schemeClr val="accent1"/>
+          </a:lnRef>
+          <a:fillRef idx="3">
+            <a:schemeClr val="accent1"/>
+          </a:fillRef>
+          <a:effectRef idx="2">
+            <a:schemeClr val="accent1"/>
+          </a:effectRef>
+          <a:fontRef idx="minor">
+            <a:schemeClr val="lt1"/>
+          </a:fontRef>
+        </p:style>
+        <p:txBody>
+          <a:bodyPr rtlCol="0" anchor="ctr"/>
+          <a:lstStyle/>
+          <a:p>
+            <a:pPr algn="ctr"/>
+          </a:p>
+        </p:txBody>
+      </p:sp>
+      <p:sp>
+        <p:nvSpPr>
+          <p:cNvPr id="24" name="Rectangle 23"/>
+          <p:cNvSpPr/>
+          <p:nvPr/>
+        </p:nvSpPr>
+        <p:spPr>
+          <a:xfrm>
+            <a:off x="2020824" y="3639312"/>
+            <a:ext cx="237744" cy="201168"/>
+          </a:xfrm>
+          <a:prstGeom prst="rect">
+            <a:avLst/>
+          </a:prstGeom>
+          <a:solidFill>
+            <a:srgbClr val="0E7A4B"/>
+          </a:solidFill>
+          <a:ln w="6350">
+            <a:solidFill>
+              <a:srgbClr val="FFFFFF"/>
+            </a:solidFill>
+          </a:ln>
+          <a:effectLst/>
+        </p:spPr>
+        <p:style>
+          <a:lnRef idx="1">
+            <a:schemeClr val="accent1"/>
+          </a:lnRef>
+          <a:fillRef idx="3">
+            <a:schemeClr val="accent1"/>
+          </a:fillRef>
+          <a:effectRef idx="2">
+            <a:schemeClr val="accent1"/>
+          </a:effectRef>
+          <a:fontRef idx="minor">
+            <a:schemeClr val="lt1"/>
+          </a:fontRef>
+        </p:style>
+        <p:txBody>
+          <a:bodyPr rtlCol="0" anchor="ctr"/>
+          <a:lstStyle/>
+          <a:p>
+            <a:pPr algn="ctr"/>
+          </a:p>
+        </p:txBody>
+      </p:sp>
+      <p:sp>
+        <p:nvSpPr>
+          <p:cNvPr id="25" name="Rectangle 24"/>
+          <p:cNvSpPr/>
+          <p:nvPr/>
+        </p:nvSpPr>
+        <p:spPr>
+          <a:xfrm>
+            <a:off x="2313432" y="3639312"/>
+            <a:ext cx="237744" cy="201168"/>
+          </a:xfrm>
+          <a:prstGeom prst="rect">
+            <a:avLst/>
+          </a:prstGeom>
+          <a:solidFill>
+            <a:srgbClr val="0E7A4B"/>
+          </a:solidFill>
+          <a:ln w="6350">
+            <a:solidFill>
+              <a:srgbClr val="FFFFFF"/>
+            </a:solidFill>
+          </a:ln>
+          <a:effectLst/>
+        </p:spPr>
+        <p:style>
+          <a:lnRef idx="1">
+            <a:schemeClr val="accent1"/>
+          </a:lnRef>
+          <a:fillRef idx="3">
+            <a:schemeClr val="accent1"/>
+          </a:fillRef>
+          <a:effectRef idx="2">
+            <a:schemeClr val="accent1"/>
+          </a:effectRef>
+          <a:fontRef idx="minor">
+            <a:schemeClr val="lt1"/>
+          </a:fontRef>
+        </p:style>
+        <p:txBody>
+          <a:bodyPr rtlCol="0" anchor="ctr"/>
+          <a:lstStyle/>
+          <a:p>
+            <a:pPr algn="ctr"/>
+          </a:p>
+        </p:txBody>
+      </p:sp>
+      <p:sp>
+        <p:nvSpPr>
+          <p:cNvPr id="26" name="Rectangle 25"/>
+          <p:cNvSpPr/>
+          <p:nvPr/>
+        </p:nvSpPr>
+        <p:spPr>
+          <a:xfrm>
+            <a:off x="2606040" y="3639312"/>
+            <a:ext cx="237744" cy="201168"/>
+          </a:xfrm>
+          <a:prstGeom prst="rect">
+            <a:avLst/>
+          </a:prstGeom>
+          <a:solidFill>
+            <a:srgbClr val="0E7A4B"/>
+          </a:solidFill>
+          <a:ln w="6350">
+            <a:solidFill>
+              <a:srgbClr val="FFFFFF"/>
+            </a:solidFill>
+          </a:ln>
+          <a:effectLst/>
+        </p:spPr>
+        <p:style>
+          <a:lnRef idx="1">
+            <a:schemeClr val="accent1"/>
+          </a:lnRef>
+          <a:fillRef idx="3">
+            <a:schemeClr val="accent1"/>
+          </a:fillRef>
+          <a:effectRef idx="2">
+            <a:schemeClr val="accent1"/>
+          </a:effectRef>
+          <a:fontRef idx="minor">
+            <a:schemeClr val="lt1"/>
+          </a:fontRef>
+        </p:style>
+        <p:txBody>
+          <a:bodyPr rtlCol="0" anchor="ctr"/>
+          <a:lstStyle/>
+          <a:p>
+            <a:pPr algn="ctr"/>
+          </a:p>
+        </p:txBody>
+      </p:sp>
+      <p:sp>
+        <p:nvSpPr>
+          <p:cNvPr id="27" name="TextBox 26"/>
+          <p:cNvSpPr txBox="1"/>
+          <p:nvPr/>
+        </p:nvSpPr>
+        <p:spPr>
+          <a:xfrm>
+            <a:off x="3593592" y="3602736"/>
+            <a:ext cx="822960" cy="256032"/>
+          </a:xfrm>
+          <a:prstGeom prst="rect">
+            <a:avLst/>
+          </a:prstGeom>
+          <a:noFill/>
+        </p:spPr>
+        <p:txBody>
+          <a:bodyPr wrap="square">
+            <a:spAutoFit/>
+          </a:bodyPr>
+          <a:lstStyle/>
+          <a:p>
+            <a:pPr algn="l">
+              <a:spcBef>
+                <a:spcPts val="0"/>
+              </a:spcBef>
+              <a:spcAft>
+                <a:spcPts val="0"/>
+              </a:spcAft>
+            </a:pPr>
+            <a:r>
+              <a:rPr sz="900" b="0">
+                <a:solidFill>
+                  <a:srgbClr val="0E7A4B"/>
+                </a:solidFill>
+                <a:latin typeface="微软雅黑"/>
+                <a:ea typeface="微软雅黑"/>
+              </a:rPr>
+              <a:t>K=5</a:t>
+            </a:r>
+          </a:p>
+        </p:txBody>
+      </p:sp>
+      <p:sp>
+        <p:nvSpPr>
+          <p:cNvPr id="28" name="TextBox 27"/>
+          <p:cNvSpPr txBox="1"/>
+          <p:nvPr/>
+        </p:nvSpPr>
+        <p:spPr>
+          <a:xfrm>
+            <a:off x="630936" y="3950208"/>
+            <a:ext cx="768096" cy="256032"/>
+          </a:xfrm>
+          <a:prstGeom prst="rect">
+            <a:avLst/>
+          </a:prstGeom>
+          <a:noFill/>
+        </p:spPr>
+        <p:txBody>
+          <a:bodyPr wrap="square">
+            <a:spAutoFit/>
+          </a:bodyPr>
+          <a:lstStyle/>
+          <a:p>
+            <a:pPr algn="l">
+              <a:spcBef>
+                <a:spcPts val="0"/>
+              </a:spcBef>
+              <a:spcAft>
+                <a:spcPts val="0"/>
+              </a:spcAft>
+            </a:pPr>
+            <a:r>
+              <a:rPr sz="900" b="0">
+                <a:solidFill>
+                  <a:srgbClr val="5B6677"/>
+                </a:solidFill>
+                <a:latin typeface="微软雅黑"/>
+                <a:ea typeface="微软雅黑"/>
+              </a:rPr>
+              <a:t>请求 4</a:t>
+            </a:r>
+          </a:p>
+        </p:txBody>
+      </p:sp>
+      <p:sp>
+        <p:nvSpPr>
+          <p:cNvPr id="29" name="Rectangle 28"/>
+          <p:cNvSpPr/>
+          <p:nvPr/>
+        </p:nvSpPr>
+        <p:spPr>
+          <a:xfrm>
+            <a:off x="1435608" y="3986784"/>
+            <a:ext cx="237744" cy="201168"/>
+          </a:xfrm>
+          <a:prstGeom prst="rect">
+            <a:avLst/>
+          </a:prstGeom>
+          <a:solidFill>
+            <a:srgbClr val="0E7A4B"/>
+          </a:solidFill>
+          <a:ln w="6350">
+            <a:solidFill>
+              <a:srgbClr val="FFFFFF"/>
+            </a:solidFill>
+          </a:ln>
+          <a:effectLst/>
+        </p:spPr>
+        <p:style>
+          <a:lnRef idx="1">
+            <a:schemeClr val="accent1"/>
+          </a:lnRef>
+          <a:fillRef idx="3">
+            <a:schemeClr val="accent1"/>
+          </a:fillRef>
+          <a:effectRef idx="2">
+            <a:schemeClr val="accent1"/>
+          </a:effectRef>
+          <a:fontRef idx="minor">
+            <a:schemeClr val="lt1"/>
+          </a:fontRef>
+        </p:style>
+        <p:txBody>
+          <a:bodyPr rtlCol="0" anchor="ctr"/>
+          <a:lstStyle/>
+          <a:p>
+            <a:pPr algn="ctr"/>
+          </a:p>
+        </p:txBody>
+      </p:sp>
+      <p:sp>
+        <p:nvSpPr>
+          <p:cNvPr id="30" name="Rectangle 29"/>
+          <p:cNvSpPr/>
+          <p:nvPr/>
+        </p:nvSpPr>
+        <p:spPr>
+          <a:xfrm>
+            <a:off x="1728216" y="3986784"/>
+            <a:ext cx="237744" cy="201168"/>
+          </a:xfrm>
+          <a:prstGeom prst="rect">
+            <a:avLst/>
+          </a:prstGeom>
+          <a:solidFill>
+            <a:srgbClr val="0E7A4B"/>
+          </a:solidFill>
+          <a:ln w="6350">
+            <a:solidFill>
+              <a:srgbClr val="FFFFFF"/>
+            </a:solidFill>
+          </a:ln>
+          <a:effectLst/>
+        </p:spPr>
+        <p:style>
+          <a:lnRef idx="1">
+            <a:schemeClr val="accent1"/>
+          </a:lnRef>
+          <a:fillRef idx="3">
+            <a:schemeClr val="accent1"/>
+          </a:fillRef>
+          <a:effectRef idx="2">
+            <a:schemeClr val="accent1"/>
+          </a:effectRef>
+          <a:fontRef idx="minor">
+            <a:schemeClr val="lt1"/>
+          </a:fontRef>
+        </p:style>
+        <p:txBody>
+          <a:bodyPr rtlCol="0" anchor="ctr"/>
+          <a:lstStyle/>
+          <a:p>
+            <a:pPr algn="ctr"/>
+          </a:p>
+        </p:txBody>
+      </p:sp>
+      <p:sp>
+        <p:nvSpPr>
+          <p:cNvPr id="31" name="Rectangle 30"/>
+          <p:cNvSpPr/>
+          <p:nvPr/>
+        </p:nvSpPr>
+        <p:spPr>
+          <a:xfrm>
+            <a:off x="2020824" y="3986784"/>
+            <a:ext cx="237744" cy="201168"/>
+          </a:xfrm>
+          <a:prstGeom prst="rect">
+            <a:avLst/>
+          </a:prstGeom>
+          <a:solidFill>
+            <a:srgbClr val="0E7A4B"/>
+          </a:solidFill>
+          <a:ln w="6350">
+            <a:solidFill>
+              <a:srgbClr val="FFFFFF"/>
+            </a:solidFill>
+          </a:ln>
+          <a:effectLst/>
+        </p:spPr>
+        <p:style>
+          <a:lnRef idx="1">
+            <a:schemeClr val="accent1"/>
+          </a:lnRef>
+          <a:fillRef idx="3">
+            <a:schemeClr val="accent1"/>
+          </a:fillRef>
+          <a:effectRef idx="2">
+            <a:schemeClr val="accent1"/>
+          </a:effectRef>
+          <a:fontRef idx="minor">
+            <a:schemeClr val="lt1"/>
+          </a:fontRef>
+        </p:style>
+        <p:txBody>
+          <a:bodyPr rtlCol="0" anchor="ctr"/>
+          <a:lstStyle/>
+          <a:p>
+            <a:pPr algn="ctr"/>
+          </a:p>
+        </p:txBody>
+      </p:sp>
+      <p:sp>
+        <p:nvSpPr>
+          <p:cNvPr id="32" name="Rectangle 31"/>
+          <p:cNvSpPr/>
+          <p:nvPr/>
+        </p:nvSpPr>
+        <p:spPr>
+          <a:xfrm>
+            <a:off x="2313432" y="3986784"/>
+            <a:ext cx="237744" cy="201168"/>
+          </a:xfrm>
+          <a:prstGeom prst="rect">
+            <a:avLst/>
+          </a:prstGeom>
+          <a:solidFill>
+            <a:srgbClr val="0E7A4B"/>
+          </a:solidFill>
+          <a:ln w="6350">
+            <a:solidFill>
+              <a:srgbClr val="FFFFFF"/>
+            </a:solidFill>
+          </a:ln>
+          <a:effectLst/>
+        </p:spPr>
+        <p:style>
+          <a:lnRef idx="1">
+            <a:schemeClr val="accent1"/>
+          </a:lnRef>
+          <a:fillRef idx="3">
+            <a:schemeClr val="accent1"/>
+          </a:fillRef>
+          <a:effectRef idx="2">
+            <a:schemeClr val="accent1"/>
+          </a:effectRef>
+          <a:fontRef idx="minor">
+            <a:schemeClr val="lt1"/>
+          </a:fontRef>
+        </p:style>
+        <p:txBody>
+          <a:bodyPr rtlCol="0" anchor="ctr"/>
+          <a:lstStyle/>
+          <a:p>
+            <a:pPr algn="ctr"/>
+          </a:p>
+        </p:txBody>
+      </p:sp>
+      <p:sp>
+        <p:nvSpPr>
+          <p:cNvPr id="33" name="Rectangle 32"/>
+          <p:cNvSpPr/>
+          <p:nvPr/>
+        </p:nvSpPr>
+        <p:spPr>
+          <a:xfrm>
+            <a:off x="2606040" y="3986784"/>
+            <a:ext cx="237744" cy="201168"/>
+          </a:xfrm>
+          <a:prstGeom prst="rect">
+            <a:avLst/>
+          </a:prstGeom>
+          <a:solidFill>
+            <a:srgbClr val="0E7A4B"/>
+          </a:solidFill>
+          <a:ln w="6350">
+            <a:solidFill>
+              <a:srgbClr val="FFFFFF"/>
+            </a:solidFill>
+          </a:ln>
+          <a:effectLst/>
+        </p:spPr>
+        <p:style>
+          <a:lnRef idx="1">
+            <a:schemeClr val="accent1"/>
+          </a:lnRef>
+          <a:fillRef idx="3">
+            <a:schemeClr val="accent1"/>
+          </a:fillRef>
+          <a:effectRef idx="2">
+            <a:schemeClr val="accent1"/>
+          </a:effectRef>
+          <a:fontRef idx="minor">
+            <a:schemeClr val="lt1"/>
+          </a:fontRef>
+        </p:style>
+        <p:txBody>
+          <a:bodyPr rtlCol="0" anchor="ctr"/>
+          <a:lstStyle/>
+          <a:p>
+            <a:pPr algn="ctr"/>
+          </a:p>
+        </p:txBody>
+      </p:sp>
+      <p:sp>
+        <p:nvSpPr>
+          <p:cNvPr id="34" name="TextBox 33"/>
+          <p:cNvSpPr txBox="1"/>
+          <p:nvPr/>
+        </p:nvSpPr>
+        <p:spPr>
+          <a:xfrm>
+            <a:off x="3593592" y="3950208"/>
+            <a:ext cx="822960" cy="256032"/>
+          </a:xfrm>
+          <a:prstGeom prst="rect">
+            <a:avLst/>
+          </a:prstGeom>
+          <a:noFill/>
+        </p:spPr>
+        <p:txBody>
+          <a:bodyPr wrap="square">
+            <a:spAutoFit/>
+          </a:bodyPr>
+          <a:lstStyle/>
+          <a:p>
+            <a:pPr algn="l">
+              <a:spcBef>
+                <a:spcPts val="0"/>
+              </a:spcBef>
+              <a:spcAft>
+                <a:spcPts val="0"/>
+              </a:spcAft>
+            </a:pPr>
+            <a:r>
+              <a:rPr sz="900" b="0">
+                <a:solidFill>
+                  <a:srgbClr val="0E7A4B"/>
+                </a:solidFill>
+                <a:latin typeface="微软雅黑"/>
+                <a:ea typeface="微软雅黑"/>
+              </a:rPr>
+              <a:t>K=5</a:t>
+            </a:r>
+          </a:p>
+        </p:txBody>
+      </p:sp>
+      <p:sp>
+        <p:nvSpPr>
+          <p:cNvPr id="35" name="TextBox 34"/>
+          <p:cNvSpPr txBox="1"/>
+          <p:nvPr/>
+        </p:nvSpPr>
+        <p:spPr>
+          <a:xfrm>
+            <a:off x="649224" y="4370832"/>
+            <a:ext cx="5193792" cy="329184"/>
+          </a:xfrm>
+          <a:prstGeom prst="rect">
+            <a:avLst/>
+          </a:prstGeom>
+          <a:noFill/>
+        </p:spPr>
+        <p:txBody>
+          <a:bodyPr wrap="square">
+            <a:spAutoFit/>
+          </a:bodyPr>
+          <a:lstStyle/>
+          <a:p>
+            <a:pPr algn="l">
+              <a:spcBef>
+                <a:spcPts val="0"/>
+              </a:spcBef>
+              <a:spcAft>
+                <a:spcPts val="0"/>
+              </a:spcAft>
+            </a:pPr>
+            <a:r>
+              <a:rPr sz="1000" b="0">
+                <a:solidFill>
+                  <a:srgbClr val="1B222E"/>
+                </a:solidFill>
+                <a:latin typeface="微软雅黑"/>
+                <a:ea typeface="微软雅黑"/>
+              </a:rPr>
+              <a:t>每个请求每步都验证 5 个 token。batch 内 query 长度一致、总 token 数每步相同,录制一次即可一直重放。</a:t>
+            </a:r>
+          </a:p>
+        </p:txBody>
+      </p:sp>
+      <p:sp>
+        <p:nvSpPr>
+          <p:cNvPr id="36" name="Rectangle 35"/>
+          <p:cNvSpPr/>
+          <p:nvPr/>
+        </p:nvSpPr>
+        <p:spPr>
+          <a:xfrm>
+            <a:off x="630936" y="4718304"/>
+            <a:ext cx="5248655" cy="274320"/>
+          </a:xfrm>
+          <a:prstGeom prst="rect">
+            <a:avLst/>
+          </a:prstGeom>
+          <a:solidFill>
+            <a:srgbClr val="E9EEF5"/>
+          </a:solidFill>
+          <a:ln>
+            <a:noFill/>
+          </a:ln>
+          <a:effectLst/>
+        </p:spPr>
+        <p:style>
+          <a:lnRef idx="1">
+            <a:schemeClr val="accent1"/>
+          </a:lnRef>
+          <a:fillRef idx="3">
+            <a:schemeClr val="accent1"/>
+          </a:fillRef>
+          <a:effectRef idx="2">
+            <a:schemeClr val="accent1"/>
+          </a:effectRef>
+          <a:fontRef idx="minor">
+            <a:schemeClr val="lt1"/>
+          </a:fontRef>
+        </p:style>
+        <p:txBody>
+          <a:bodyPr rtlCol="0" anchor="ctr" wrap="square" lIns="45720" rIns="45720" tIns="18288" bIns="18288"/>
+          <a:lstStyle/>
+          <a:p>
+            <a:pPr algn="ctr">
+              <a:spcBef>
+                <a:spcPts val="0"/>
+              </a:spcBef>
+              <a:spcAft>
+                <a:spcPts val="0"/>
+              </a:spcAft>
+            </a:pPr>
+            <a:r>
+              <a:rPr sz="1000" b="1">
+                <a:solidFill>
+                  <a:srgbClr val="0E7A4B"/>
+                </a:solidFill>
+                <a:latin typeface="微软雅黑"/>
+                <a:ea typeface="微软雅黑"/>
+              </a:rPr>
+              <a:t>总 token 数 = 4 × 5 = 20,每一步都是这个数</a:t>
+            </a:r>
+          </a:p>
+        </p:txBody>
+      </p:sp>
+      <p:sp>
+        <p:nvSpPr>
+          <p:cNvPr id="37" name="Rectangle 36"/>
+          <p:cNvSpPr/>
+          <p:nvPr/>
+        </p:nvSpPr>
+        <p:spPr>
+          <a:xfrm>
+            <a:off x="6181344" y="2468880"/>
+            <a:ext cx="5504688" cy="2615184"/>
+          </a:xfrm>
+          <a:prstGeom prst="rect">
+            <a:avLst/>
+          </a:prstGeom>
+          <a:noFill/>
+          <a:ln w="19050">
+            <a:solidFill>
+              <a:srgbClr val="A31D2A"/>
+            </a:solidFill>
+          </a:ln>
+          <a:effectLst/>
+        </p:spPr>
+        <p:style>
+          <a:lnRef idx="1">
+            <a:schemeClr val="accent1"/>
+          </a:lnRef>
+          <a:fillRef idx="3">
+            <a:schemeClr val="accent1"/>
+          </a:fillRef>
+          <a:effectRef idx="2">
+            <a:schemeClr val="accent1"/>
+          </a:effectRef>
+          <a:fontRef idx="minor">
+            <a:schemeClr val="lt1"/>
+          </a:fontRef>
+        </p:style>
+        <p:txBody>
+          <a:bodyPr rtlCol="0" anchor="ctr"/>
+          <a:lstStyle/>
+          <a:p>
+            <a:pPr algn="ctr"/>
+          </a:p>
+        </p:txBody>
+      </p:sp>
+      <p:sp>
+        <p:nvSpPr>
+          <p:cNvPr id="38" name="TextBox 37"/>
+          <p:cNvSpPr txBox="1"/>
+          <p:nvPr/>
+        </p:nvSpPr>
+        <p:spPr>
+          <a:xfrm>
+            <a:off x="6309359" y="2542032"/>
+            <a:ext cx="5248655" cy="292608"/>
+          </a:xfrm>
+          <a:prstGeom prst="rect">
+            <a:avLst/>
+          </a:prstGeom>
+          <a:noFill/>
+        </p:spPr>
+        <p:txBody>
+          <a:bodyPr wrap="square">
+            <a:spAutoFit/>
+          </a:bodyPr>
+          <a:lstStyle/>
+          <a:p>
+            <a:pPr algn="l">
+              <a:spcBef>
+                <a:spcPts val="0"/>
+              </a:spcBef>
+              <a:spcAft>
+                <a:spcPts val="0"/>
+              </a:spcAft>
+            </a:pPr>
+            <a:r>
+              <a:rPr sz="1250" b="1">
+                <a:solidFill>
+                  <a:srgbClr val="A31D2A"/>
+                </a:solidFill>
+                <a:latin typeface="微软雅黑"/>
+                <a:ea typeface="微软雅黑"/>
+              </a:rPr>
+              <a:t>自适应 K_i   →   形状逐步变化,默认出图</a:t>
+            </a:r>
+          </a:p>
+        </p:txBody>
+      </p:sp>
+      <p:sp>
+        <p:nvSpPr>
+          <p:cNvPr id="39" name="TextBox 38"/>
+          <p:cNvSpPr txBox="1"/>
+          <p:nvPr/>
+        </p:nvSpPr>
+        <p:spPr>
+          <a:xfrm>
+            <a:off x="6309359" y="2907792"/>
+            <a:ext cx="768096" cy="256032"/>
+          </a:xfrm>
+          <a:prstGeom prst="rect">
+            <a:avLst/>
+          </a:prstGeom>
+          <a:noFill/>
+        </p:spPr>
+        <p:txBody>
+          <a:bodyPr wrap="square">
+            <a:spAutoFit/>
+          </a:bodyPr>
+          <a:lstStyle/>
+          <a:p>
+            <a:pPr algn="l">
+              <a:spcBef>
+                <a:spcPts val="0"/>
+              </a:spcBef>
+              <a:spcAft>
+                <a:spcPts val="0"/>
+              </a:spcAft>
+            </a:pPr>
+            <a:r>
+              <a:rPr sz="900" b="0">
+                <a:solidFill>
+                  <a:srgbClr val="5B6677"/>
+                </a:solidFill>
+                <a:latin typeface="微软雅黑"/>
+                <a:ea typeface="微软雅黑"/>
+              </a:rPr>
+              <a:t>请求 1</a:t>
+            </a:r>
+          </a:p>
+        </p:txBody>
+      </p:sp>
+      <p:sp>
+        <p:nvSpPr>
+          <p:cNvPr id="40" name="Rectangle 39"/>
+          <p:cNvSpPr/>
+          <p:nvPr/>
+        </p:nvSpPr>
+        <p:spPr>
+          <a:xfrm>
+            <a:off x="7114031" y="2944368"/>
+            <a:ext cx="237744" cy="201168"/>
+          </a:xfrm>
+          <a:prstGeom prst="rect">
+            <a:avLst/>
+          </a:prstGeom>
+          <a:solidFill>
+            <a:srgbClr val="A31D2A"/>
+          </a:solidFill>
+          <a:ln w="6350">
+            <a:solidFill>
+              <a:srgbClr val="FFFFFF"/>
+            </a:solidFill>
+          </a:ln>
+          <a:effectLst/>
+        </p:spPr>
+        <p:style>
+          <a:lnRef idx="1">
+            <a:schemeClr val="accent1"/>
+          </a:lnRef>
+          <a:fillRef idx="3">
+            <a:schemeClr val="accent1"/>
+          </a:fillRef>
+          <a:effectRef idx="2">
+            <a:schemeClr val="accent1"/>
+          </a:effectRef>
+          <a:fontRef idx="minor">
+            <a:schemeClr val="lt1"/>
+          </a:fontRef>
+        </p:style>
+        <p:txBody>
+          <a:bodyPr rtlCol="0" anchor="ctr"/>
+          <a:lstStyle/>
+          <a:p>
+            <a:pPr algn="ctr"/>
+          </a:p>
+        </p:txBody>
+      </p:sp>
+      <p:sp>
+        <p:nvSpPr>
+          <p:cNvPr id="41" name="Rectangle 40"/>
+          <p:cNvSpPr/>
+          <p:nvPr/>
+        </p:nvSpPr>
+        <p:spPr>
+          <a:xfrm>
+            <a:off x="7406640" y="2944368"/>
+            <a:ext cx="237744" cy="201168"/>
+          </a:xfrm>
+          <a:prstGeom prst="rect">
+            <a:avLst/>
+          </a:prstGeom>
+          <a:solidFill>
+            <a:srgbClr val="A31D2A"/>
+          </a:solidFill>
+          <a:ln w="6350">
+            <a:solidFill>
+              <a:srgbClr val="FFFFFF"/>
+            </a:solidFill>
+          </a:ln>
+          <a:effectLst/>
+        </p:spPr>
+        <p:style>
+          <a:lnRef idx="1">
+            <a:schemeClr val="accent1"/>
+          </a:lnRef>
+          <a:fillRef idx="3">
+            <a:schemeClr val="accent1"/>
+          </a:fillRef>
+          <a:effectRef idx="2">
+            <a:schemeClr val="accent1"/>
+          </a:effectRef>
+          <a:fontRef idx="minor">
+            <a:schemeClr val="lt1"/>
+          </a:fontRef>
+        </p:style>
+        <p:txBody>
+          <a:bodyPr rtlCol="0" anchor="ctr"/>
+          <a:lstStyle/>
+          <a:p>
+            <a:pPr algn="ctr"/>
+          </a:p>
+        </p:txBody>
+      </p:sp>
+      <p:sp>
+        <p:nvSpPr>
+          <p:cNvPr id="42" name="Rectangle 41"/>
+          <p:cNvSpPr/>
+          <p:nvPr/>
+        </p:nvSpPr>
+        <p:spPr>
+          <a:xfrm>
+            <a:off x="7699248" y="2944368"/>
+            <a:ext cx="237744" cy="201168"/>
+          </a:xfrm>
+          <a:prstGeom prst="rect">
+            <a:avLst/>
+          </a:prstGeom>
+          <a:solidFill>
+            <a:srgbClr val="A31D2A"/>
+          </a:solidFill>
+          <a:ln w="6350">
+            <a:solidFill>
+              <a:srgbClr val="FFFFFF"/>
+            </a:solidFill>
+          </a:ln>
+          <a:effectLst/>
+        </p:spPr>
+        <p:style>
+          <a:lnRef idx="1">
+            <a:schemeClr val="accent1"/>
+          </a:lnRef>
+          <a:fillRef idx="3">
+            <a:schemeClr val="accent1"/>
+          </a:fillRef>
+          <a:effectRef idx="2">
+            <a:schemeClr val="accent1"/>
+          </a:effectRef>
+          <a:fontRef idx="minor">
+            <a:schemeClr val="lt1"/>
+          </a:fontRef>
+        </p:style>
+        <p:txBody>
+          <a:bodyPr rtlCol="0" anchor="ctr"/>
+          <a:lstStyle/>
+          <a:p>
+            <a:pPr algn="ctr"/>
+          </a:p>
+        </p:txBody>
+      </p:sp>
+      <p:sp>
+        <p:nvSpPr>
+          <p:cNvPr id="43" name="Rectangle 42"/>
+          <p:cNvSpPr/>
+          <p:nvPr/>
+        </p:nvSpPr>
+        <p:spPr>
+          <a:xfrm>
+            <a:off x="7991855" y="2944368"/>
+            <a:ext cx="237744" cy="201168"/>
+          </a:xfrm>
+          <a:prstGeom prst="rect">
+            <a:avLst/>
+          </a:prstGeom>
+          <a:solidFill>
+            <a:srgbClr val="A31D2A"/>
+          </a:solidFill>
+          <a:ln w="6350">
+            <a:solidFill>
+              <a:srgbClr val="FFFFFF"/>
+            </a:solidFill>
+          </a:ln>
+          <a:effectLst/>
+        </p:spPr>
+        <p:style>
+          <a:lnRef idx="1">
+            <a:schemeClr val="accent1"/>
+          </a:lnRef>
+          <a:fillRef idx="3">
+            <a:schemeClr val="accent1"/>
+          </a:fillRef>
+          <a:effectRef idx="2">
+            <a:schemeClr val="accent1"/>
+          </a:effectRef>
+          <a:fontRef idx="minor">
+            <a:schemeClr val="lt1"/>
+          </a:fontRef>
+        </p:style>
+        <p:txBody>
+          <a:bodyPr rtlCol="0" anchor="ctr"/>
+          <a:lstStyle/>
+          <a:p>
+            <a:pPr algn="ctr"/>
+          </a:p>
+        </p:txBody>
+      </p:sp>
+      <p:sp>
+        <p:nvSpPr>
+          <p:cNvPr id="44" name="Rectangle 43"/>
+          <p:cNvSpPr/>
+          <p:nvPr/>
+        </p:nvSpPr>
+        <p:spPr>
+          <a:xfrm>
+            <a:off x="8284463" y="2944368"/>
+            <a:ext cx="237744" cy="201168"/>
+          </a:xfrm>
+          <a:prstGeom prst="rect">
+            <a:avLst/>
+          </a:prstGeom>
+          <a:solidFill>
+            <a:srgbClr val="A31D2A"/>
+          </a:solidFill>
+          <a:ln w="6350">
+            <a:solidFill>
+              <a:srgbClr val="FFFFFF"/>
+            </a:solidFill>
+          </a:ln>
+          <a:effectLst/>
+        </p:spPr>
+        <p:style>
+          <a:lnRef idx="1">
+            <a:schemeClr val="accent1"/>
+          </a:lnRef>
+          <a:fillRef idx="3">
+            <a:schemeClr val="accent1"/>
+          </a:fillRef>
+          <a:effectRef idx="2">
+            <a:schemeClr val="accent1"/>
+          </a:effectRef>
+          <a:fontRef idx="minor">
+            <a:schemeClr val="lt1"/>
+          </a:fontRef>
+        </p:style>
+        <p:txBody>
+          <a:bodyPr rtlCol="0" anchor="ctr"/>
+          <a:lstStyle/>
+          <a:p>
+            <a:pPr algn="ctr"/>
+          </a:p>
+        </p:txBody>
+      </p:sp>
+      <p:sp>
+        <p:nvSpPr>
+          <p:cNvPr id="45" name="TextBox 44"/>
+          <p:cNvSpPr txBox="1"/>
+          <p:nvPr/>
+        </p:nvSpPr>
+        <p:spPr>
+          <a:xfrm>
+            <a:off x="9272015" y="2907792"/>
+            <a:ext cx="822960" cy="256032"/>
+          </a:xfrm>
+          <a:prstGeom prst="rect">
+            <a:avLst/>
+          </a:prstGeom>
+          <a:noFill/>
+        </p:spPr>
+        <p:txBody>
+          <a:bodyPr wrap="square">
+            <a:spAutoFit/>
+          </a:bodyPr>
+          <a:lstStyle/>
+          <a:p>
+            <a:pPr algn="l">
+              <a:spcBef>
+                <a:spcPts val="0"/>
+              </a:spcBef>
+              <a:spcAft>
+                <a:spcPts val="0"/>
+              </a:spcAft>
+            </a:pPr>
+            <a:r>
+              <a:rPr sz="900" b="0">
+                <a:solidFill>
+                  <a:srgbClr val="A31D2A"/>
+                </a:solidFill>
+                <a:latin typeface="微软雅黑"/>
+                <a:ea typeface="微软雅黑"/>
+              </a:rPr>
+              <a:t>K=5</a:t>
+            </a:r>
+          </a:p>
+        </p:txBody>
+      </p:sp>
+      <p:sp>
+        <p:nvSpPr>
+          <p:cNvPr id="46" name="TextBox 45"/>
+          <p:cNvSpPr txBox="1"/>
+          <p:nvPr/>
+        </p:nvSpPr>
+        <p:spPr>
+          <a:xfrm>
+            <a:off x="6309359" y="3255264"/>
+            <a:ext cx="768096" cy="256032"/>
+          </a:xfrm>
+          <a:prstGeom prst="rect">
+            <a:avLst/>
+          </a:prstGeom>
+          <a:noFill/>
+        </p:spPr>
+        <p:txBody>
+          <a:bodyPr wrap="square">
+            <a:spAutoFit/>
+          </a:bodyPr>
+          <a:lstStyle/>
+          <a:p>
+            <a:pPr algn="l">
+              <a:spcBef>
+                <a:spcPts val="0"/>
+              </a:spcBef>
+              <a:spcAft>
+                <a:spcPts val="0"/>
+              </a:spcAft>
+            </a:pPr>
+            <a:r>
+              <a:rPr sz="900" b="0">
+                <a:solidFill>
+                  <a:srgbClr val="5B6677"/>
+                </a:solidFill>
+                <a:latin typeface="微软雅黑"/>
+                <a:ea typeface="微软雅黑"/>
+              </a:rPr>
+              <a:t>请求 2</a:t>
+            </a:r>
+          </a:p>
+        </p:txBody>
+      </p:sp>
+      <p:sp>
+        <p:nvSpPr>
+          <p:cNvPr id="47" name="Rectangle 46"/>
+          <p:cNvSpPr/>
+          <p:nvPr/>
+        </p:nvSpPr>
+        <p:spPr>
+          <a:xfrm>
+            <a:off x="7114031" y="3291840"/>
+            <a:ext cx="237744" cy="201168"/>
+          </a:xfrm>
+          <a:prstGeom prst="rect">
+            <a:avLst/>
+          </a:prstGeom>
+          <a:solidFill>
+            <a:srgbClr val="A31D2A"/>
+          </a:solidFill>
+          <a:ln w="6350">
+            <a:solidFill>
+              <a:srgbClr val="FFFFFF"/>
+            </a:solidFill>
+          </a:ln>
+          <a:effectLst/>
+        </p:spPr>
+        <p:style>
+          <a:lnRef idx="1">
+            <a:schemeClr val="accent1"/>
+          </a:lnRef>
+          <a:fillRef idx="3">
+            <a:schemeClr val="accent1"/>
+          </a:fillRef>
+          <a:effectRef idx="2">
+            <a:schemeClr val="accent1"/>
+          </a:effectRef>
+          <a:fontRef idx="minor">
+            <a:schemeClr val="lt1"/>
+          </a:fontRef>
+        </p:style>
+        <p:txBody>
+          <a:bodyPr rtlCol="0" anchor="ctr"/>
+          <a:lstStyle/>
+          <a:p>
+            <a:pPr algn="ctr"/>
+          </a:p>
+        </p:txBody>
+      </p:sp>
+      <p:sp>
+        <p:nvSpPr>
+          <p:cNvPr id="48" name="Rectangle 47"/>
+          <p:cNvSpPr/>
+          <p:nvPr/>
+        </p:nvSpPr>
+        <p:spPr>
+          <a:xfrm>
+            <a:off x="7406640" y="3291840"/>
+            <a:ext cx="237744" cy="201168"/>
+          </a:xfrm>
+          <a:prstGeom prst="rect">
+            <a:avLst/>
+          </a:prstGeom>
+          <a:solidFill>
+            <a:srgbClr val="A31D2A"/>
+          </a:solidFill>
+          <a:ln w="6350">
+            <a:solidFill>
+              <a:srgbClr val="FFFFFF"/>
+            </a:solidFill>
+          </a:ln>
+          <a:effectLst/>
+        </p:spPr>
+        <p:style>
+          <a:lnRef idx="1">
+            <a:schemeClr val="accent1"/>
+          </a:lnRef>
+          <a:fillRef idx="3">
+            <a:schemeClr val="accent1"/>
+          </a:fillRef>
+          <a:effectRef idx="2">
+            <a:schemeClr val="accent1"/>
+          </a:effectRef>
+          <a:fontRef idx="minor">
+            <a:schemeClr val="lt1"/>
+          </a:fontRef>
+        </p:style>
+        <p:txBody>
+          <a:bodyPr rtlCol="0" anchor="ctr"/>
+          <a:lstStyle/>
+          <a:p>
+            <a:pPr algn="ctr"/>
+          </a:p>
+        </p:txBody>
+      </p:sp>
+      <p:sp>
+        <p:nvSpPr>
+          <p:cNvPr id="49" name="TextBox 48"/>
+          <p:cNvSpPr txBox="1"/>
+          <p:nvPr/>
+        </p:nvSpPr>
+        <p:spPr>
+          <a:xfrm>
+            <a:off x="9272015" y="3255264"/>
+            <a:ext cx="822960" cy="256032"/>
+          </a:xfrm>
+          <a:prstGeom prst="rect">
+            <a:avLst/>
+          </a:prstGeom>
+          <a:noFill/>
+        </p:spPr>
+        <p:txBody>
+          <a:bodyPr wrap="square">
+            <a:spAutoFit/>
+          </a:bodyPr>
+          <a:lstStyle/>
+          <a:p>
+            <a:pPr algn="l">
+              <a:spcBef>
+                <a:spcPts val="0"/>
+              </a:spcBef>
+              <a:spcAft>
+                <a:spcPts val="0"/>
+              </a:spcAft>
+            </a:pPr>
+            <a:r>
+              <a:rPr sz="900" b="0">
+                <a:solidFill>
+                  <a:srgbClr val="A31D2A"/>
+                </a:solidFill>
+                <a:latin typeface="微软雅黑"/>
+                <a:ea typeface="微软雅黑"/>
+              </a:rPr>
+              <a:t>K=2</a:t>
+            </a:r>
+          </a:p>
+        </p:txBody>
+      </p:sp>
+      <p:sp>
+        <p:nvSpPr>
+          <p:cNvPr id="50" name="TextBox 49"/>
+          <p:cNvSpPr txBox="1"/>
+          <p:nvPr/>
+        </p:nvSpPr>
+        <p:spPr>
+          <a:xfrm>
+            <a:off x="6309359" y="3602736"/>
+            <a:ext cx="768096" cy="256032"/>
+          </a:xfrm>
+          <a:prstGeom prst="rect">
+            <a:avLst/>
+          </a:prstGeom>
+          <a:noFill/>
+        </p:spPr>
+        <p:txBody>
+          <a:bodyPr wrap="square">
+            <a:spAutoFit/>
+          </a:bodyPr>
+          <a:lstStyle/>
+          <a:p>
+            <a:pPr algn="l">
+              <a:spcBef>
+                <a:spcPts val="0"/>
+              </a:spcBef>
+              <a:spcAft>
+                <a:spcPts val="0"/>
+              </a:spcAft>
+            </a:pPr>
+            <a:r>
+              <a:rPr sz="900" b="0">
+                <a:solidFill>
+                  <a:srgbClr val="5B6677"/>
+                </a:solidFill>
+                <a:latin typeface="微软雅黑"/>
+                <a:ea typeface="微软雅黑"/>
+              </a:rPr>
+              <a:t>请求 3</a:t>
+            </a:r>
+          </a:p>
+        </p:txBody>
+      </p:sp>
+      <p:sp>
+        <p:nvSpPr>
+          <p:cNvPr id="51" name="Rectangle 50"/>
+          <p:cNvSpPr/>
+          <p:nvPr/>
+        </p:nvSpPr>
+        <p:spPr>
+          <a:xfrm>
+            <a:off x="7114031" y="3639312"/>
+            <a:ext cx="237744" cy="201168"/>
+          </a:xfrm>
+          <a:prstGeom prst="rect">
+            <a:avLst/>
+          </a:prstGeom>
+          <a:solidFill>
+            <a:srgbClr val="A31D2A"/>
+          </a:solidFill>
+          <a:ln w="6350">
+            <a:solidFill>
+              <a:srgbClr val="FFFFFF"/>
+            </a:solidFill>
+          </a:ln>
+          <a:effectLst/>
+        </p:spPr>
+        <p:style>
+          <a:lnRef idx="1">
+            <a:schemeClr val="accent1"/>
+          </a:lnRef>
+          <a:fillRef idx="3">
+            <a:schemeClr val="accent1"/>
+          </a:fillRef>
+          <a:effectRef idx="2">
+            <a:schemeClr val="accent1"/>
+          </a:effectRef>
+          <a:fontRef idx="minor">
+            <a:schemeClr val="lt1"/>
+          </a:fontRef>
+        </p:style>
+        <p:txBody>
+          <a:bodyPr rtlCol="0" anchor="ctr"/>
+          <a:lstStyle/>
+          <a:p>
+            <a:pPr algn="ctr"/>
+          </a:p>
+        </p:txBody>
+      </p:sp>
+      <p:sp>
+        <p:nvSpPr>
+          <p:cNvPr id="52" name="Rectangle 51"/>
+          <p:cNvSpPr/>
+          <p:nvPr/>
+        </p:nvSpPr>
+        <p:spPr>
+          <a:xfrm>
+            <a:off x="7406640" y="3639312"/>
+            <a:ext cx="237744" cy="201168"/>
+          </a:xfrm>
+          <a:prstGeom prst="rect">
+            <a:avLst/>
+          </a:prstGeom>
+          <a:solidFill>
+            <a:srgbClr val="A31D2A"/>
+          </a:solidFill>
+          <a:ln w="6350">
+            <a:solidFill>
+              <a:srgbClr val="FFFFFF"/>
+            </a:solidFill>
+          </a:ln>
+          <a:effectLst/>
+        </p:spPr>
+        <p:style>
+          <a:lnRef idx="1">
+            <a:schemeClr val="accent1"/>
+          </a:lnRef>
+          <a:fillRef idx="3">
+            <a:schemeClr val="accent1"/>
+          </a:fillRef>
+          <a:effectRef idx="2">
+            <a:schemeClr val="accent1"/>
+          </a:effectRef>
+          <a:fontRef idx="minor">
+            <a:schemeClr val="lt1"/>
+          </a:fontRef>
+        </p:style>
+        <p:txBody>
+          <a:bodyPr rtlCol="0" anchor="ctr"/>
+          <a:lstStyle/>
+          <a:p>
+            <a:pPr algn="ctr"/>
+          </a:p>
+        </p:txBody>
+      </p:sp>
+      <p:sp>
+        <p:nvSpPr>
+          <p:cNvPr id="53" name="Rectangle 52"/>
+          <p:cNvSpPr/>
+          <p:nvPr/>
+        </p:nvSpPr>
+        <p:spPr>
+          <a:xfrm>
+            <a:off x="7699248" y="3639312"/>
+            <a:ext cx="237744" cy="201168"/>
+          </a:xfrm>
+          <a:prstGeom prst="rect">
+            <a:avLst/>
+          </a:prstGeom>
+          <a:solidFill>
+            <a:srgbClr val="A31D2A"/>
+          </a:solidFill>
+          <a:ln w="6350">
+            <a:solidFill>
+              <a:srgbClr val="FFFFFF"/>
+            </a:solidFill>
+          </a:ln>
+          <a:effectLst/>
+        </p:spPr>
+        <p:style>
+          <a:lnRef idx="1">
+            <a:schemeClr val="accent1"/>
+          </a:lnRef>
+          <a:fillRef idx="3">
+            <a:schemeClr val="accent1"/>
+          </a:fillRef>
+          <a:effectRef idx="2">
+            <a:schemeClr val="accent1"/>
+          </a:effectRef>
+          <a:fontRef idx="minor">
+            <a:schemeClr val="lt1"/>
+          </a:fontRef>
+        </p:style>
+        <p:txBody>
+          <a:bodyPr rtlCol="0" anchor="ctr"/>
+          <a:lstStyle/>
+          <a:p>
+            <a:pPr algn="ctr"/>
+          </a:p>
+        </p:txBody>
+      </p:sp>
+      <p:sp>
+        <p:nvSpPr>
+          <p:cNvPr id="54" name="Rectangle 53"/>
+          <p:cNvSpPr/>
+          <p:nvPr/>
+        </p:nvSpPr>
+        <p:spPr>
+          <a:xfrm>
+            <a:off x="7991855" y="3639312"/>
+            <a:ext cx="237744" cy="201168"/>
+          </a:xfrm>
+          <a:prstGeom prst="rect">
+            <a:avLst/>
+          </a:prstGeom>
+          <a:solidFill>
+            <a:srgbClr val="A31D2A"/>
+          </a:solidFill>
+          <a:ln w="6350">
+            <a:solidFill>
+              <a:srgbClr val="FFFFFF"/>
+            </a:solidFill>
+          </a:ln>
+          <a:effectLst/>
+        </p:spPr>
+        <p:style>
+          <a:lnRef idx="1">
+            <a:schemeClr val="accent1"/>
+          </a:lnRef>
+          <a:fillRef idx="3">
+            <a:schemeClr val="accent1"/>
+          </a:fillRef>
+          <a:effectRef idx="2">
+            <a:schemeClr val="accent1"/>
+          </a:effectRef>
+          <a:fontRef idx="minor">
+            <a:schemeClr val="lt1"/>
+          </a:fontRef>
+        </p:style>
+        <p:txBody>
+          <a:bodyPr rtlCol="0" anchor="ctr"/>
+          <a:lstStyle/>
+          <a:p>
+            <a:pPr algn="ctr"/>
+          </a:p>
+        </p:txBody>
+      </p:sp>
+      <p:sp>
+        <p:nvSpPr>
+          <p:cNvPr id="55" name="Rectangle 54"/>
+          <p:cNvSpPr/>
+          <p:nvPr/>
+        </p:nvSpPr>
+        <p:spPr>
+          <a:xfrm>
+            <a:off x="8284463" y="3639312"/>
+            <a:ext cx="237744" cy="201168"/>
+          </a:xfrm>
+          <a:prstGeom prst="rect">
+            <a:avLst/>
+          </a:prstGeom>
+          <a:solidFill>
+            <a:srgbClr val="A31D2A"/>
+          </a:solidFill>
+          <a:ln w="6350">
+            <a:solidFill>
+              <a:srgbClr val="FFFFFF"/>
+            </a:solidFill>
+          </a:ln>
+          <a:effectLst/>
+        </p:spPr>
+        <p:style>
+          <a:lnRef idx="1">
+            <a:schemeClr val="accent1"/>
+          </a:lnRef>
+          <a:fillRef idx="3">
+            <a:schemeClr val="accent1"/>
+          </a:fillRef>
+          <a:effectRef idx="2">
+            <a:schemeClr val="accent1"/>
+          </a:effectRef>
+          <a:fontRef idx="minor">
+            <a:schemeClr val="lt1"/>
+          </a:fontRef>
+        </p:style>
+        <p:txBody>
+          <a:bodyPr rtlCol="0" anchor="ctr"/>
+          <a:lstStyle/>
+          <a:p>
+            <a:pPr algn="ctr"/>
+          </a:p>
+        </p:txBody>
+      </p:sp>
+      <p:sp>
+        <p:nvSpPr>
+          <p:cNvPr id="56" name="Rectangle 55"/>
+          <p:cNvSpPr/>
+          <p:nvPr/>
+        </p:nvSpPr>
+        <p:spPr>
+          <a:xfrm>
+            <a:off x="8577072" y="3639312"/>
+            <a:ext cx="237744" cy="201168"/>
+          </a:xfrm>
+          <a:prstGeom prst="rect">
+            <a:avLst/>
+          </a:prstGeom>
+          <a:solidFill>
+            <a:srgbClr val="A31D2A"/>
+          </a:solidFill>
+          <a:ln w="6350">
+            <a:solidFill>
+              <a:srgbClr val="FFFFFF"/>
+            </a:solidFill>
+          </a:ln>
+          <a:effectLst/>
+        </p:spPr>
+        <p:style>
+          <a:lnRef idx="1">
+            <a:schemeClr val="accent1"/>
+          </a:lnRef>
+          <a:fillRef idx="3">
+            <a:schemeClr val="accent1"/>
+          </a:fillRef>
+          <a:effectRef idx="2">
+            <a:schemeClr val="accent1"/>
+          </a:effectRef>
+          <a:fontRef idx="minor">
+            <a:schemeClr val="lt1"/>
+          </a:fontRef>
+        </p:style>
+        <p:txBody>
+          <a:bodyPr rtlCol="0" anchor="ctr"/>
+          <a:lstStyle/>
+          <a:p>
+            <a:pPr algn="ctr"/>
+          </a:p>
+        </p:txBody>
+      </p:sp>
+      <p:sp>
+        <p:nvSpPr>
+          <p:cNvPr id="57" name="Rectangle 56"/>
+          <p:cNvSpPr/>
+          <p:nvPr/>
+        </p:nvSpPr>
+        <p:spPr>
+          <a:xfrm>
+            <a:off x="8869680" y="3639312"/>
+            <a:ext cx="237744" cy="201168"/>
+          </a:xfrm>
+          <a:prstGeom prst="rect">
+            <a:avLst/>
+          </a:prstGeom>
+          <a:solidFill>
+            <a:srgbClr val="A31D2A"/>
+          </a:solidFill>
+          <a:ln w="6350">
+            <a:solidFill>
+              <a:srgbClr val="FFFFFF"/>
+            </a:solidFill>
+          </a:ln>
+          <a:effectLst/>
+        </p:spPr>
+        <p:style>
+          <a:lnRef idx="1">
+            <a:schemeClr val="accent1"/>
+          </a:lnRef>
+          <a:fillRef idx="3">
+            <a:schemeClr val="accent1"/>
+          </a:fillRef>
+          <a:effectRef idx="2">
+            <a:schemeClr val="accent1"/>
+          </a:effectRef>
+          <a:fontRef idx="minor">
+            <a:schemeClr val="lt1"/>
+          </a:fontRef>
+        </p:style>
+        <p:txBody>
+          <a:bodyPr rtlCol="0" anchor="ctr"/>
+          <a:lstStyle/>
+          <a:p>
+            <a:pPr algn="ctr"/>
+          </a:p>
+        </p:txBody>
+      </p:sp>
+      <p:sp>
+        <p:nvSpPr>
+          <p:cNvPr id="58" name="TextBox 57"/>
+          <p:cNvSpPr txBox="1"/>
+          <p:nvPr/>
+        </p:nvSpPr>
+        <p:spPr>
+          <a:xfrm>
+            <a:off x="9272015" y="3602736"/>
+            <a:ext cx="822960" cy="256032"/>
+          </a:xfrm>
+          <a:prstGeom prst="rect">
+            <a:avLst/>
+          </a:prstGeom>
+          <a:noFill/>
+        </p:spPr>
+        <p:txBody>
+          <a:bodyPr wrap="square">
+            <a:spAutoFit/>
+          </a:bodyPr>
+          <a:lstStyle/>
+          <a:p>
+            <a:pPr algn="l">
+              <a:spcBef>
+                <a:spcPts val="0"/>
+              </a:spcBef>
+              <a:spcAft>
+                <a:spcPts val="0"/>
+              </a:spcAft>
+            </a:pPr>
+            <a:r>
+              <a:rPr sz="900" b="0">
+                <a:solidFill>
+                  <a:srgbClr val="A31D2A"/>
+                </a:solidFill>
+                <a:latin typeface="微软雅黑"/>
+                <a:ea typeface="微软雅黑"/>
+              </a:rPr>
+              <a:t>K=7</a:t>
+            </a:r>
+          </a:p>
+        </p:txBody>
+      </p:sp>
+      <p:sp>
+        <p:nvSpPr>
+          <p:cNvPr id="59" name="TextBox 58"/>
+          <p:cNvSpPr txBox="1"/>
+          <p:nvPr/>
+        </p:nvSpPr>
+        <p:spPr>
+          <a:xfrm>
+            <a:off x="6309359" y="3950208"/>
+            <a:ext cx="768096" cy="256032"/>
+          </a:xfrm>
+          <a:prstGeom prst="rect">
+            <a:avLst/>
+          </a:prstGeom>
+          <a:noFill/>
+        </p:spPr>
+        <p:txBody>
+          <a:bodyPr wrap="square">
+            <a:spAutoFit/>
+          </a:bodyPr>
+          <a:lstStyle/>
+          <a:p>
+            <a:pPr algn="l">
+              <a:spcBef>
+                <a:spcPts val="0"/>
+              </a:spcBef>
+              <a:spcAft>
+                <a:spcPts val="0"/>
+              </a:spcAft>
+            </a:pPr>
+            <a:r>
+              <a:rPr sz="900" b="0">
+                <a:solidFill>
+                  <a:srgbClr val="5B6677"/>
+                </a:solidFill>
+                <a:latin typeface="微软雅黑"/>
+                <a:ea typeface="微软雅黑"/>
+              </a:rPr>
+              <a:t>请求 4</a:t>
+            </a:r>
+          </a:p>
+        </p:txBody>
+      </p:sp>
+      <p:sp>
+        <p:nvSpPr>
+          <p:cNvPr id="60" name="Rectangle 59"/>
+          <p:cNvSpPr/>
+          <p:nvPr/>
+        </p:nvSpPr>
+        <p:spPr>
+          <a:xfrm>
+            <a:off x="7114031" y="3986784"/>
+            <a:ext cx="237744" cy="201168"/>
+          </a:xfrm>
+          <a:prstGeom prst="rect">
+            <a:avLst/>
+          </a:prstGeom>
+          <a:solidFill>
+            <a:srgbClr val="A31D2A"/>
+          </a:solidFill>
+          <a:ln w="6350">
+            <a:solidFill>
+              <a:srgbClr val="FFFFFF"/>
+            </a:solidFill>
+          </a:ln>
+          <a:effectLst/>
+        </p:spPr>
+        <p:style>
+          <a:lnRef idx="1">
+            <a:schemeClr val="accent1"/>
+          </a:lnRef>
+          <a:fillRef idx="3">
+            <a:schemeClr val="accent1"/>
+          </a:fillRef>
+          <a:effectRef idx="2">
+            <a:schemeClr val="accent1"/>
+          </a:effectRef>
+          <a:fontRef idx="minor">
+            <a:schemeClr val="lt1"/>
+          </a:fontRef>
+        </p:style>
+        <p:txBody>
+          <a:bodyPr rtlCol="0" anchor="ctr"/>
+          <a:lstStyle/>
+          <a:p>
+            <a:pPr algn="ctr"/>
+          </a:p>
+        </p:txBody>
+      </p:sp>
+      <p:sp>
+        <p:nvSpPr>
+          <p:cNvPr id="61" name="TextBox 60"/>
+          <p:cNvSpPr txBox="1"/>
+          <p:nvPr/>
+        </p:nvSpPr>
+        <p:spPr>
+          <a:xfrm>
+            <a:off x="9272015" y="3950208"/>
+            <a:ext cx="822960" cy="256032"/>
+          </a:xfrm>
+          <a:prstGeom prst="rect">
+            <a:avLst/>
+          </a:prstGeom>
+          <a:noFill/>
+        </p:spPr>
+        <p:txBody>
+          <a:bodyPr wrap="square">
+            <a:spAutoFit/>
+          </a:bodyPr>
+          <a:lstStyle/>
+          <a:p>
+            <a:pPr algn="l">
+              <a:spcBef>
+                <a:spcPts val="0"/>
+              </a:spcBef>
+              <a:spcAft>
+                <a:spcPts val="0"/>
+              </a:spcAft>
+            </a:pPr>
+            <a:r>
+              <a:rPr sz="900" b="0">
+                <a:solidFill>
+                  <a:srgbClr val="A31D2A"/>
+                </a:solidFill>
+                <a:latin typeface="微软雅黑"/>
+                <a:ea typeface="微软雅黑"/>
+              </a:rPr>
+              <a:t>K=1</a:t>
+            </a:r>
+          </a:p>
+        </p:txBody>
+      </p:sp>
+      <p:sp>
+        <p:nvSpPr>
+          <p:cNvPr id="62" name="TextBox 61"/>
+          <p:cNvSpPr txBox="1"/>
+          <p:nvPr/>
+        </p:nvSpPr>
+        <p:spPr>
+          <a:xfrm>
+            <a:off x="6327648" y="4370832"/>
+            <a:ext cx="5193792" cy="329184"/>
+          </a:xfrm>
+          <a:prstGeom prst="rect">
+            <a:avLst/>
+          </a:prstGeom>
+          <a:noFill/>
+        </p:spPr>
+        <p:txBody>
+          <a:bodyPr wrap="square">
+            <a:spAutoFit/>
+          </a:bodyPr>
+          <a:lstStyle/>
+          <a:p>
+            <a:pPr algn="l">
+              <a:spcBef>
+                <a:spcPts val="0"/>
+              </a:spcBef>
+              <a:spcAft>
+                <a:spcPts val="0"/>
+              </a:spcAft>
+            </a:pPr>
+            <a:r>
+              <a:rPr sz="1000" b="0">
+                <a:solidFill>
+                  <a:srgbClr val="1B222E"/>
+                </a:solidFill>
+                <a:latin typeface="微软雅黑"/>
+                <a:ea typeface="微软雅黑"/>
+              </a:rPr>
+              <a:t>每个请求按自身置信度拿到不同的 K_i,下一步又是另一组。query 长度参差(ragged)、总 token 数每步都在变。</a:t>
+            </a:r>
+          </a:p>
+        </p:txBody>
+      </p:sp>
+      <p:sp>
+        <p:nvSpPr>
+          <p:cNvPr id="63" name="Rectangle 62"/>
+          <p:cNvSpPr/>
+          <p:nvPr/>
+        </p:nvSpPr>
+        <p:spPr>
+          <a:xfrm>
+            <a:off x="6309359" y="4718304"/>
+            <a:ext cx="5248655" cy="274320"/>
+          </a:xfrm>
+          <a:prstGeom prst="rect">
+            <a:avLst/>
+          </a:prstGeom>
+          <a:solidFill>
+            <a:srgbClr val="FDECEC"/>
+          </a:solidFill>
+          <a:ln>
+            <a:noFill/>
+          </a:ln>
+          <a:effectLst/>
+        </p:spPr>
+        <p:style>
+          <a:lnRef idx="1">
+            <a:schemeClr val="accent1"/>
+          </a:lnRef>
+          <a:fillRef idx="3">
+            <a:schemeClr val="accent1"/>
+          </a:fillRef>
+          <a:effectRef idx="2">
+            <a:schemeClr val="accent1"/>
+          </a:effectRef>
+          <a:fontRef idx="minor">
+            <a:schemeClr val="lt1"/>
+          </a:fontRef>
+        </p:style>
+        <p:txBody>
+          <a:bodyPr rtlCol="0" anchor="ctr" wrap="square" lIns="45720" rIns="45720" tIns="18288" bIns="18288"/>
+          <a:lstStyle/>
+          <a:p>
+            <a:pPr algn="ctr">
+              <a:spcBef>
+                <a:spcPts val="0"/>
+              </a:spcBef>
+              <a:spcAft>
+                <a:spcPts val="0"/>
+              </a:spcAft>
+            </a:pPr>
+            <a:r>
+              <a:rPr sz="1000" b="1">
+                <a:solidFill>
+                  <a:srgbClr val="A31D2A"/>
+                </a:solidFill>
+                <a:latin typeface="微软雅黑"/>
+                <a:ea typeface="微软雅黑"/>
+              </a:rPr>
+              <a:t>总 token 数 = 5+2+7+1 = 15,下一步又是别的数</a:t>
+            </a:r>
+          </a:p>
+        </p:txBody>
+      </p:sp>
+      <p:sp>
+        <p:nvSpPr>
+          <p:cNvPr id="64" name="TextBox 63"/>
+          <p:cNvSpPr txBox="1"/>
+          <p:nvPr/>
+        </p:nvSpPr>
+        <p:spPr>
+          <a:xfrm>
+            <a:off x="502920" y="5248656"/>
+            <a:ext cx="11247120" cy="1371600"/>
+          </a:xfrm>
+          <a:prstGeom prst="rect">
+            <a:avLst/>
+          </a:prstGeom>
+          <a:noFill/>
+        </p:spPr>
+        <p:txBody>
+          <a:bodyPr wrap="square">
+            <a:spAutoFit/>
+          </a:bodyPr>
+          <a:lstStyle/>
+          <a:p>
+            <a:pPr algn="l">
+              <a:spcBef>
+                <a:spcPts val="0"/>
+              </a:spcBef>
+              <a:spcAft>
+                <a:spcPts val="0"/>
+              </a:spcAft>
+            </a:pPr>
+            <a:r>
+              <a:rPr sz="1550" b="1">
+                <a:solidFill>
+                  <a:srgbClr val="1F6FEB"/>
+                </a:solidFill>
+                <a:latin typeface="微软雅黑"/>
+                <a:ea typeface="微软雅黑"/>
+              </a:rPr>
+              <a:t>⟹ 于是问题归结为一件很具体的事</a:t>
+            </a:r>
+          </a:p>
+          <a:p>
+            <a:pPr algn="l">
+              <a:spcBef>
+                <a:spcPts val="700"/>
+              </a:spcBef>
+              <a:spcAft>
+                <a:spcPts val="0"/>
+              </a:spcAft>
+            </a:pPr>
+            <a:r>
+              <a:rPr sz="1350" b="0">
+                <a:solidFill>
+                  <a:srgbClr val="1B222E"/>
+                </a:solidFill>
+                <a:latin typeface="微软雅黑"/>
+                <a:ea typeface="微软雅黑"/>
+              </a:rPr>
+              <a:t>图里那些【依赖序列长度】的参数,是在录制时就被固化成了常量,还是留成了运行时可以改内容的设备张量?前者一变就必须整张图重录,后者只改张量内容即可。答案因算子而异 —— 下一页逐个部件核对。</a:t>
+            </a:r>
+          </a:p>
+        </p:txBody>
+      </p:sp>
+    </p:spTree>
+  </p:cSld>
+  <p:clrMapOvr>
+    <a:masterClrMapping/>
+  </p:clrMapOvr>
+</p:sld>
+</file>
+
+<file path=ppt/slides/slide7.xml><?xml version="1.0" encoding="utf-8"?>
+<p:sld xmlns:a="http://schemas.openxmlformats.org/drawingml/2006/main" xmlns:p="http://schemas.openxmlformats.org/presentationml/2006/main" xmlns:r="http://schemas.openxmlformats.org/officeDocument/2006/relationships">
+  <p:cSld>
+    <p:bg>
+      <p:bgPr>
+        <a:solidFill>
+          <a:srgbClr val="FFFFFF"/>
+        </a:solidFill>
+        <a:effectLst/>
+      </p:bgPr>
+    </p:bg>
+    <p:spTree>
+      <p:nvGrpSpPr>
+        <p:cNvPr id="1" name=""/>
+        <p:cNvGrpSpPr/>
+        <p:nvPr/>
+      </p:nvGrpSpPr>
+      <p:grpSpPr/>
+      <p:sp>
+        <p:nvSpPr>
+          <p:cNvPr id="2" name="TextBox 1"/>
+          <p:cNvSpPr txBox="1"/>
+          <p:nvPr/>
+        </p:nvSpPr>
+        <p:spPr>
+          <a:xfrm>
+            <a:off x="502920" y="256032"/>
+            <a:ext cx="11247120" cy="868680"/>
+          </a:xfrm>
+          <a:prstGeom prst="rect">
+            <a:avLst/>
+          </a:prstGeom>
+          <a:noFill/>
+        </p:spPr>
+        <p:txBody>
+          <a:bodyPr wrap="square">
+            <a:spAutoFit/>
+          </a:bodyPr>
+          <a:lstStyle/>
+          <a:p>
+            <a:pPr algn="l">
+              <a:spcBef>
+                <a:spcPts val="0"/>
+              </a:spcBef>
+              <a:spcAft>
+                <a:spcPts val="0"/>
+              </a:spcAft>
+            </a:pPr>
+            <a:r>
+              <a:rPr sz="2500" b="1">
+                <a:solidFill>
+                  <a:srgbClr val="1B222E"/>
+                </a:solidFill>
+                <a:latin typeface="微软雅黑"/>
+                <a:ea typeface="微软雅黑"/>
+              </a:rPr>
+              <a:t>三(补充 2)、落到算子:逐个部件核对</a:t>
+            </a:r>
+          </a:p>
+          <a:p>
+            <a:pPr algn="l">
+              <a:spcBef>
+                <a:spcPts val="300"/>
+              </a:spcBef>
+              <a:spcAft>
+                <a:spcPts val="0"/>
+              </a:spcAft>
+            </a:pPr>
+            <a:r>
+              <a:rPr sz="1200" b="0">
+                <a:solidFill>
+                  <a:srgbClr val="5B6677"/>
+                </a:solidFill>
+                <a:latin typeface="微软雅黑"/>
+                <a:ea typeface="微软雅黑"/>
+              </a:rPr>
+              <a:t>四条结论均出自 vllm-ascend 现网代码,标注文件与行号,可自行核对</a:t>
+            </a:r>
+          </a:p>
+        </p:txBody>
+      </p:sp>
+      <p:sp>
+        <p:nvSpPr>
+          <p:cNvPr id="3" name="Rectangle 2"/>
+          <p:cNvSpPr/>
+          <p:nvPr/>
+        </p:nvSpPr>
+        <p:spPr>
+          <a:xfrm>
+            <a:off x="502920" y="1097280"/>
+            <a:ext cx="1188720" cy="24000"/>
+          </a:xfrm>
+          <a:prstGeom prst="rect">
+            <a:avLst/>
+          </a:prstGeom>
+          <a:solidFill>
+            <a:srgbClr val="1F6FEB"/>
+          </a:solidFill>
+          <a:ln>
+            <a:noFill/>
+          </a:ln>
+          <a:effectLst/>
+        </p:spPr>
+        <p:style>
+          <a:lnRef idx="1">
+            <a:schemeClr val="accent1"/>
+          </a:lnRef>
+          <a:fillRef idx="3">
+            <a:schemeClr val="accent1"/>
+          </a:fillRef>
+          <a:effectRef idx="2">
+            <a:schemeClr val="accent1"/>
+          </a:effectRef>
+          <a:fontRef idx="minor">
+            <a:schemeClr val="lt1"/>
+          </a:fontRef>
+        </p:style>
+        <p:txBody>
+          <a:bodyPr rtlCol="0" anchor="ctr"/>
+          <a:lstStyle/>
+          <a:p>
+            <a:pPr algn="ctr"/>
+          </a:p>
+        </p:txBody>
+      </p:sp>
       <p:graphicFrame>
         <p:nvGraphicFramePr>
           <p:cNvPr id="4" name="Table 3"/>
@@ -9760,8 +13608,8 @@
           <p:nvPr/>
         </p:nvGraphicFramePr>
         <p:xfrm>
-          <a:off x="502920" y="1444752"/>
-          <a:ext cx="11247119" cy="3931920"/>
+          <a:off x="502920" y="1426464"/>
+          <a:ext cx="11247119" cy="3657600"/>
         </p:xfrm>
         <a:graphic>
           <a:graphicData uri="http://schemas.openxmlformats.org/drawingml/2006/table">
@@ -9775,7 +13623,7 @@
                 <a:gridCol w="4386376"/>
                 <a:gridCol w="4048963"/>
               </a:tblGrid>
-              <a:tr h="786384">
+              <a:tr h="731520">
                 <a:tc>
                   <a:txBody>
                     <a:bodyPr wrap="square"/>
@@ -9901,7 +13749,7 @@
                   </a:tcPr>
                 </a:tc>
               </a:tr>
-              <a:tr h="786384">
+              <a:tr h="731520">
                 <a:tc>
                   <a:txBody>
                     <a:bodyPr wrap="square"/>
@@ -10167,7 +14015,7 @@
                   </a:tcPr>
                 </a:tc>
               </a:tr>
-              <a:tr h="786384">
+              <a:tr h="731520">
                 <a:tc>
                   <a:txBody>
                     <a:bodyPr wrap="square"/>
@@ -10413,7 +14261,7 @@
                   </a:tcPr>
                 </a:tc>
               </a:tr>
-              <a:tr h="786384">
+              <a:tr h="731520">
                 <a:tc>
                   <a:txBody>
                     <a:bodyPr wrap="square"/>
@@ -10639,7 +14487,7 @@
                   </a:tcPr>
                 </a:tc>
               </a:tr>
-              <a:tr h="786384">
+              <a:tr h="731520">
                 <a:tc>
                   <a:txBody>
                     <a:bodyPr wrap="square"/>
@@ -10917,7 +14765,50 @@
         </p:nvSpPr>
         <p:spPr>
           <a:xfrm>
-            <a:off x="502920" y="5541264"/>
+            <a:off x="502920" y="5138928"/>
+            <a:ext cx="11247120" cy="310896"/>
+          </a:xfrm>
+          <a:prstGeom prst="rect">
+            <a:avLst/>
+          </a:prstGeom>
+          <a:noFill/>
+        </p:spPr>
+        <p:txBody>
+          <a:bodyPr wrap="square">
+            <a:spAutoFit/>
+          </a:bodyPr>
+          <a:lstStyle/>
+          <a:p>
+            <a:pPr algn="l">
+              <a:spcBef>
+                <a:spcPts val="0"/>
+              </a:spcBef>
+              <a:spcAft>
+                <a:spcPts val="0"/>
+              </a:spcAft>
+            </a:pPr>
+            <a:r>
+              <a:rPr sz="900" b="0">
+                <a:solidFill>
+                  <a:srgbClr val="5B6677"/>
+                </a:solidFill>
+                <a:latin typeface="微软雅黑"/>
+                <a:ea typeface="微软雅黑"/>
+              </a:rPr>
+              <a:t>术语:FIA v2 = npu_fused_infer_attention_score_v2,昇腾融合注意力算子,通用模型走这条路径;DSA = DeepSeek Sparse Attention,SFA = 稀疏融合注意力,DeepSeek-V4-Flash 走这条;workspace = 算子运行所需的临时显存。</a:t>
+            </a:r>
+          </a:p>
+        </p:txBody>
+      </p:sp>
+      <p:sp>
+        <p:nvSpPr>
+          <p:cNvPr id="6" name="TextBox 5"/>
+          <p:cNvSpPr txBox="1"/>
+          <p:nvPr/>
+        </p:nvSpPr>
+        <p:spPr>
+          <a:xfrm>
+            <a:off x="502920" y="5504688"/>
             <a:ext cx="11247120" cy="1188720"/>
           </a:xfrm>
           <a:prstGeom prst="rect">
@@ -11000,7 +14891,7 @@
 </p:sld>
 </file>
 
-<file path=ppt/slides/slide7.xml><?xml version="1.0" encoding="utf-8"?>
+<file path=ppt/slides/slide8.xml><?xml version="1.0" encoding="utf-8"?>
 <p:sld xmlns:a="http://schemas.openxmlformats.org/drawingml/2006/main" xmlns:p="http://schemas.openxmlformats.org/presentationml/2006/main" xmlns:r="http://schemas.openxmlformats.org/officeDocument/2006/relationships">
   <p:cSld>
     <p:bg>
@@ -12054,7 +15945,7 @@
 </p:sld>
 </file>
 
-<file path=ppt/slides/slide8.xml><?xml version="1.0" encoding="utf-8"?>
+<file path=ppt/slides/slide9.xml><?xml version="1.0" encoding="utf-8"?>
 <p:sld xmlns:a="http://schemas.openxmlformats.org/drawingml/2006/main" xmlns:p="http://schemas.openxmlformats.org/presentationml/2006/main" xmlns:r="http://schemas.openxmlformats.org/officeDocument/2006/relationships">
   <p:cSld>
     <p:bg>
@@ -12841,914 +16732,6 @@
           </a:graphicData>
         </a:graphic>
       </p:graphicFrame>
-    </p:spTree>
-  </p:cSld>
-  <p:clrMapOvr>
-    <a:masterClrMapping/>
-  </p:clrMapOvr>
-</p:sld>
-</file>
-
-<file path=ppt/slides/slide9.xml><?xml version="1.0" encoding="utf-8"?>
-<p:sld xmlns:a="http://schemas.openxmlformats.org/drawingml/2006/main" xmlns:p="http://schemas.openxmlformats.org/presentationml/2006/main" xmlns:r="http://schemas.openxmlformats.org/officeDocument/2006/relationships">
-  <p:cSld>
-    <p:bg>
-      <p:bgPr>
-        <a:solidFill>
-          <a:srgbClr val="FFFFFF"/>
-        </a:solidFill>
-        <a:effectLst/>
-      </p:bgPr>
-    </p:bg>
-    <p:spTree>
-      <p:nvGrpSpPr>
-        <p:cNvPr id="1" name=""/>
-        <p:cNvGrpSpPr/>
-        <p:nvPr/>
-      </p:nvGrpSpPr>
-      <p:grpSpPr/>
-      <p:sp>
-        <p:nvSpPr>
-          <p:cNvPr id="2" name="TextBox 1"/>
-          <p:cNvSpPr txBox="1"/>
-          <p:nvPr/>
-        </p:nvSpPr>
-        <p:spPr>
-          <a:xfrm>
-            <a:off x="502920" y="256032"/>
-            <a:ext cx="11247120" cy="868680"/>
-          </a:xfrm>
-          <a:prstGeom prst="rect">
-            <a:avLst/>
-          </a:prstGeom>
-          <a:noFill/>
-        </p:spPr>
-        <p:txBody>
-          <a:bodyPr wrap="square">
-            <a:spAutoFit/>
-          </a:bodyPr>
-          <a:lstStyle/>
-          <a:p>
-            <a:pPr algn="l">
-              <a:spcBef>
-                <a:spcPts val="0"/>
-              </a:spcBef>
-              <a:spcAft>
-                <a:spcPts val="0"/>
-              </a:spcAft>
-            </a:pPr>
-            <a:r>
-              <a:rPr sz="2500" b="1">
-                <a:solidFill>
-                  <a:srgbClr val="1B222E"/>
-                </a:solidFill>
-                <a:latin typeface="微软雅黑"/>
-                <a:ea typeface="微软雅黑"/>
-              </a:rPr>
-              <a:t>六、决策门与验收标准</a:t>
-            </a:r>
-          </a:p>
-          <a:p>
-            <a:pPr algn="l">
-              <a:spcBef>
-                <a:spcPts val="300"/>
-              </a:spcBef>
-              <a:spcAft>
-                <a:spcPts val="0"/>
-              </a:spcAft>
-            </a:pPr>
-            <a:r>
-              <a:rPr sz="1200" b="0">
-                <a:solidFill>
-                  <a:srgbClr val="5B6677"/>
-                </a:solidFill>
-                <a:latin typeface="微软雅黑"/>
-                <a:ea typeface="微软雅黑"/>
-              </a:rPr>
-              <a:t>每个门都是可量化的,不靠主观判断</a:t>
-            </a:r>
-          </a:p>
-        </p:txBody>
-      </p:sp>
-      <p:sp>
-        <p:nvSpPr>
-          <p:cNvPr id="3" name="Rectangle 2"/>
-          <p:cNvSpPr/>
-          <p:nvPr/>
-        </p:nvSpPr>
-        <p:spPr>
-          <a:xfrm>
-            <a:off x="502920" y="1097280"/>
-            <a:ext cx="1188720" cy="24000"/>
-          </a:xfrm>
-          <a:prstGeom prst="rect">
-            <a:avLst/>
-          </a:prstGeom>
-          <a:solidFill>
-            <a:srgbClr val="1F6FEB"/>
-          </a:solidFill>
-          <a:ln>
-            <a:noFill/>
-          </a:ln>
-          <a:effectLst/>
-        </p:spPr>
-        <p:style>
-          <a:lnRef idx="1">
-            <a:schemeClr val="accent1"/>
-          </a:lnRef>
-          <a:fillRef idx="3">
-            <a:schemeClr val="accent1"/>
-          </a:fillRef>
-          <a:effectRef idx="2">
-            <a:schemeClr val="accent1"/>
-          </a:effectRef>
-          <a:fontRef idx="minor">
-            <a:schemeClr val="lt1"/>
-          </a:fontRef>
-        </p:style>
-        <p:txBody>
-          <a:bodyPr rtlCol="0" anchor="ctr"/>
-          <a:lstStyle/>
-          <a:p>
-            <a:pPr algn="ctr"/>
-          </a:p>
-        </p:txBody>
-      </p:sp>
-      <p:graphicFrame>
-        <p:nvGraphicFramePr>
-          <p:cNvPr id="4" name="Table 3"/>
-          <p:cNvGraphicFramePr>
-            <a:graphicFrameLocks noGrp="1"/>
-          </p:cNvGraphicFramePr>
-          <p:nvPr/>
-        </p:nvGraphicFramePr>
-        <p:xfrm>
-          <a:off x="502920" y="1481328"/>
-          <a:ext cx="11247119" cy="3584448"/>
-        </p:xfrm>
-        <a:graphic>
-          <a:graphicData uri="http://schemas.openxmlformats.org/drawingml/2006/table">
-            <a:tbl>
-              <a:tblPr firstRow="1" bandRow="1">
-                <a:tableStyleId>{5C22544A-7EE6-4342-B048-85BDC9FD1C3A}</a:tableStyleId>
-              </a:tblPr>
-              <a:tblGrid>
-                <a:gridCol w="562356"/>
-                <a:gridCol w="1237183"/>
-                <a:gridCol w="5173675"/>
-                <a:gridCol w="4273905"/>
-              </a:tblGrid>
-              <a:tr h="896112">
-                <a:tc>
-                  <a:txBody>
-                    <a:bodyPr wrap="square"/>
-                    <a:lstStyle/>
-                    <a:p>
-                      <a:pPr>
-                        <a:spcBef>
-                          <a:spcPts val="0"/>
-                        </a:spcBef>
-                        <a:spcAft>
-                          <a:spcPts val="0"/>
-                        </a:spcAft>
-                      </a:pPr>
-                      <a:r>
-                        <a:rPr sz="1150" b="1">
-                          <a:solidFill>
-                            <a:srgbClr val="1B222E"/>
-                          </a:solidFill>
-                          <a:latin typeface="微软雅黑"/>
-                          <a:ea typeface="微软雅黑"/>
-                        </a:rPr>
-                        <a:t>门</a:t>
-                      </a:r>
-                    </a:p>
-                  </a:txBody>
-                  <a:tcPr marL="64008" marR="64008" marT="18288" marB="18288">
-                    <a:solidFill>
-                      <a:srgbClr val="F2F5F9"/>
-                    </a:solidFill>
-                  </a:tcPr>
-                </a:tc>
-                <a:tc>
-                  <a:txBody>
-                    <a:bodyPr wrap="square"/>
-                    <a:lstStyle/>
-                    <a:p>
-                      <a:pPr>
-                        <a:spcBef>
-                          <a:spcPts val="0"/>
-                        </a:spcBef>
-                        <a:spcAft>
-                          <a:spcPts val="0"/>
-                        </a:spcAft>
-                      </a:pPr>
-                      <a:r>
-                        <a:rPr sz="1150" b="1">
-                          <a:solidFill>
-                            <a:srgbClr val="1B222E"/>
-                          </a:solidFill>
-                          <a:latin typeface="微软雅黑"/>
-                          <a:ea typeface="微软雅黑"/>
-                        </a:rPr>
-                        <a:t>时点</a:t>
-                      </a:r>
-                    </a:p>
-                  </a:txBody>
-                  <a:tcPr marL="64008" marR="64008" marT="18288" marB="18288">
-                    <a:solidFill>
-                      <a:srgbClr val="F2F5F9"/>
-                    </a:solidFill>
-                  </a:tcPr>
-                </a:tc>
-                <a:tc>
-                  <a:txBody>
-                    <a:bodyPr wrap="square"/>
-                    <a:lstStyle/>
-                    <a:p>
-                      <a:pPr>
-                        <a:spcBef>
-                          <a:spcPts val="0"/>
-                        </a:spcBef>
-                        <a:spcAft>
-                          <a:spcPts val="0"/>
-                        </a:spcAft>
-                      </a:pPr>
-                      <a:r>
-                        <a:rPr sz="1150" b="1">
-                          <a:solidFill>
-                            <a:srgbClr val="1B222E"/>
-                          </a:solidFill>
-                          <a:latin typeface="微软雅黑"/>
-                          <a:ea typeface="微软雅黑"/>
-                        </a:rPr>
-                        <a:t>通过标准</a:t>
-                      </a:r>
-                    </a:p>
-                  </a:txBody>
-                  <a:tcPr marL="64008" marR="64008" marT="18288" marB="18288">
-                    <a:solidFill>
-                      <a:srgbClr val="F2F5F9"/>
-                    </a:solidFill>
-                  </a:tcPr>
-                </a:tc>
-                <a:tc>
-                  <a:txBody>
-                    <a:bodyPr wrap="square"/>
-                    <a:lstStyle/>
-                    <a:p>
-                      <a:pPr>
-                        <a:spcBef>
-                          <a:spcPts val="0"/>
-                        </a:spcBef>
-                        <a:spcAft>
-                          <a:spcPts val="0"/>
-                        </a:spcAft>
-                      </a:pPr>
-                      <a:r>
-                        <a:rPr sz="1150" b="1">
-                          <a:solidFill>
-                            <a:srgbClr val="1B222E"/>
-                          </a:solidFill>
-                          <a:latin typeface="微软雅黑"/>
-                          <a:ea typeface="微软雅黑"/>
-                        </a:rPr>
-                        <a:t>不通过怎么办</a:t>
-                      </a:r>
-                    </a:p>
-                  </a:txBody>
-                  <a:tcPr marL="64008" marR="64008" marT="18288" marB="18288">
-                    <a:solidFill>
-                      <a:srgbClr val="F2F5F9"/>
-                    </a:solidFill>
-                  </a:tcPr>
-                </a:tc>
-              </a:tr>
-              <a:tr h="896112">
-                <a:tc>
-                  <a:txBody>
-                    <a:bodyPr wrap="square"/>
-                    <a:lstStyle/>
-                    <a:p>
-                      <a:pPr>
-                        <a:spcBef>
-                          <a:spcPts val="0"/>
-                        </a:spcBef>
-                        <a:spcAft>
-                          <a:spcPts val="0"/>
-                        </a:spcAft>
-                      </a:pPr>
-                      <a:r>
-                        <a:rPr sz="1150" b="0">
-                          <a:solidFill>
-                            <a:srgbClr val="1B222E"/>
-                          </a:solidFill>
-                          <a:latin typeface="微软雅黑"/>
-                          <a:ea typeface="微软雅黑"/>
-                        </a:rPr>
-                        <a:t>G1</a:t>
-                      </a:r>
-                    </a:p>
-                  </a:txBody>
-                  <a:tcPr marL="64008" marR="64008" marT="18288" marB="18288">
-                    <a:solidFill>
-                      <a:srgbClr val="FFFFFF"/>
-                    </a:solidFill>
-                  </a:tcPr>
-                </a:tc>
-                <a:tc>
-                  <a:txBody>
-                    <a:bodyPr wrap="square"/>
-                    <a:lstStyle/>
-                    <a:p>
-                      <a:pPr>
-                        <a:spcBef>
-                          <a:spcPts val="0"/>
-                        </a:spcBef>
-                        <a:spcAft>
-                          <a:spcPts val="0"/>
-                        </a:spcAft>
-                      </a:pPr>
-                      <a:r>
-                        <a:rPr sz="1150" b="0">
-                          <a:solidFill>
-                            <a:srgbClr val="1B222E"/>
-                          </a:solidFill>
-                          <a:latin typeface="微软雅黑"/>
-                          <a:ea typeface="微软雅黑"/>
-                        </a:rPr>
-                        <a:t>第 1 天末</a:t>
-                      </a:r>
-                    </a:p>
-                  </a:txBody>
-                  <a:tcPr marL="64008" marR="64008" marT="18288" marB="18288">
-                    <a:solidFill>
-                      <a:srgbClr val="FFFFFF"/>
-                    </a:solidFill>
-                  </a:tcPr>
-                </a:tc>
-                <a:tc>
-                  <a:txBody>
-                    <a:bodyPr wrap="square"/>
-                    <a:lstStyle/>
-                    <a:p>
-                      <a:pPr>
-                        <a:spcBef>
-                          <a:spcPts val="0"/>
-                        </a:spcBef>
-                        <a:spcAft>
-                          <a:spcPts val="0"/>
-                        </a:spcAft>
-                      </a:pPr>
-                      <a:r>
-                        <a:rPr sz="1150" b="0">
-                          <a:solidFill>
-                            <a:srgbClr val="1B222E"/>
-                          </a:solidFill>
-                          <a:latin typeface="微软雅黑"/>
-                          <a:ea typeface="微软雅黑"/>
-                        </a:rPr>
-                        <a:t>在某个并发点上,固定 K 的加速比相对 c=48</a:t>
-                      </a:r>
-                    </a:p>
-                    <a:p>
-                      <a:pPr>
-                        <a:spcBef>
-                          <a:spcPts val="0"/>
-                        </a:spcBef>
-                        <a:spcAft>
-                          <a:spcPts val="0"/>
-                        </a:spcAft>
-                      </a:pPr>
-                      <a:r>
-                        <a:rPr sz="1150" b="0">
-                          <a:solidFill>
-                            <a:srgbClr val="1B222E"/>
-                          </a:solidFill>
-                          <a:latin typeface="微软雅黑"/>
-                          <a:ea typeface="微软雅黑"/>
-                        </a:rPr>
-                        <a:t>出现明显衰减(或已低于无投机)</a:t>
-                      </a:r>
-                    </a:p>
-                  </a:txBody>
-                  <a:tcPr marL="64008" marR="64008" marT="18288" marB="18288">
-                    <a:solidFill>
-                      <a:srgbClr val="FFFFFF"/>
-                    </a:solidFill>
-                  </a:tcPr>
-                </a:tc>
-                <a:tc>
-                  <a:txBody>
-                    <a:bodyPr wrap="square"/>
-                    <a:lstStyle/>
-                    <a:p>
-                      <a:pPr>
-                        <a:spcBef>
-                          <a:spcPts val="0"/>
-                        </a:spcBef>
-                        <a:spcAft>
-                          <a:spcPts val="0"/>
-                        </a:spcAft>
-                      </a:pPr>
-                      <a:r>
-                        <a:rPr sz="1150" b="0">
-                          <a:solidFill>
-                            <a:srgbClr val="1B222E"/>
-                          </a:solidFill>
-                          <a:latin typeface="微软雅黑"/>
-                          <a:ea typeface="微软雅黑"/>
-                        </a:rPr>
-                        <a:t>停止立项。结论本身有价值:</a:t>
-                      </a:r>
-                    </a:p>
-                    <a:p>
-                      <a:pPr>
-                        <a:spcBef>
-                          <a:spcPts val="0"/>
-                        </a:spcBef>
-                        <a:spcAft>
-                          <a:spcPts val="0"/>
-                        </a:spcAft>
-                      </a:pPr>
-                      <a:r>
-                        <a:rPr sz="1150" b="0">
-                          <a:solidFill>
-                            <a:srgbClr val="1B222E"/>
-                          </a:solidFill>
-                          <a:latin typeface="微软雅黑"/>
-                          <a:ea typeface="微软雅黑"/>
-                        </a:rPr>
-                        <a:t>说明昇腾当前运行点无需自适应</a:t>
-                      </a:r>
-                    </a:p>
-                  </a:txBody>
-                  <a:tcPr marL="64008" marR="64008" marT="18288" marB="18288">
-                    <a:solidFill>
-                      <a:srgbClr val="FFFFFF"/>
-                    </a:solidFill>
-                  </a:tcPr>
-                </a:tc>
-              </a:tr>
-              <a:tr h="896112">
-                <a:tc>
-                  <a:txBody>
-                    <a:bodyPr wrap="square"/>
-                    <a:lstStyle/>
-                    <a:p>
-                      <a:pPr>
-                        <a:spcBef>
-                          <a:spcPts val="0"/>
-                        </a:spcBef>
-                        <a:spcAft>
-                          <a:spcPts val="0"/>
-                        </a:spcAft>
-                      </a:pPr>
-                      <a:r>
-                        <a:rPr sz="1150" b="0">
-                          <a:solidFill>
-                            <a:srgbClr val="1B222E"/>
-                          </a:solidFill>
-                          <a:latin typeface="微软雅黑"/>
-                          <a:ea typeface="微软雅黑"/>
-                        </a:rPr>
-                        <a:t>G2</a:t>
-                      </a:r>
-                    </a:p>
-                  </a:txBody>
-                  <a:tcPr marL="64008" marR="64008" marT="18288" marB="18288">
-                    <a:solidFill>
-                      <a:srgbClr val="FFFFFF"/>
-                    </a:solidFill>
-                  </a:tcPr>
-                </a:tc>
-                <a:tc>
-                  <a:txBody>
-                    <a:bodyPr wrap="square"/>
-                    <a:lstStyle/>
-                    <a:p>
-                      <a:pPr>
-                        <a:spcBef>
-                          <a:spcPts val="0"/>
-                        </a:spcBef>
-                        <a:spcAft>
-                          <a:spcPts val="0"/>
-                        </a:spcAft>
-                      </a:pPr>
-                      <a:r>
-                        <a:rPr sz="1150" b="0">
-                          <a:solidFill>
-                            <a:srgbClr val="1B222E"/>
-                          </a:solidFill>
-                          <a:latin typeface="微软雅黑"/>
-                          <a:ea typeface="微软雅黑"/>
-                        </a:rPr>
-                        <a:t>第 3 周末</a:t>
-                      </a:r>
-                    </a:p>
-                  </a:txBody>
-                  <a:tcPr marL="64008" marR="64008" marT="18288" marB="18288">
-                    <a:solidFill>
-                      <a:srgbClr val="FFFFFF"/>
-                    </a:solidFill>
-                  </a:tcPr>
-                </a:tc>
-                <a:tc>
-                  <a:txBody>
-                    <a:bodyPr wrap="square"/>
-                    <a:lstStyle/>
-                    <a:p>
-                      <a:pPr>
-                        <a:spcBef>
-                          <a:spcPts val="0"/>
-                        </a:spcBef>
-                        <a:spcAft>
-                          <a:spcPts val="0"/>
-                        </a:spcAft>
-                      </a:pPr>
-                      <a:r>
-                        <a:rPr sz="1150" b="0">
-                          <a:solidFill>
-                            <a:srgbClr val="1B222E"/>
-                          </a:solidFill>
-                          <a:latin typeface="微软雅黑"/>
-                          <a:ea typeface="微软雅黑"/>
-                        </a:rPr>
-                        <a:t>端到端读出逐位置信度,且与实测逐位</a:t>
-                      </a:r>
-                    </a:p>
-                    <a:p>
-                      <a:pPr>
-                        <a:spcBef>
-                          <a:spcPts val="0"/>
-                        </a:spcBef>
-                        <a:spcAft>
-                          <a:spcPts val="0"/>
-                        </a:spcAft>
-                      </a:pPr>
-                      <a:r>
-                        <a:rPr sz="1150" b="0">
-                          <a:solidFill>
-                            <a:srgbClr val="1B222E"/>
-                          </a:solidFill>
-                          <a:latin typeface="微软雅黑"/>
-                          <a:ea typeface="微软雅黑"/>
-                        </a:rPr>
-                        <a:t>接受率单调相关</a:t>
-                      </a:r>
-                    </a:p>
-                  </a:txBody>
-                  <a:tcPr marL="64008" marR="64008" marT="18288" marB="18288">
-                    <a:solidFill>
-                      <a:srgbClr val="FFFFFF"/>
-                    </a:solidFill>
-                  </a:tcPr>
-                </a:tc>
-                <a:tc>
-                  <a:txBody>
-                    <a:bodyPr wrap="square"/>
-                    <a:lstStyle/>
-                    <a:p>
-                      <a:pPr>
-                        <a:spcBef>
-                          <a:spcPts val="0"/>
-                        </a:spcBef>
-                        <a:spcAft>
-                          <a:spcPts val="0"/>
-                        </a:spcAft>
-                      </a:pPr>
-                      <a:r>
-                        <a:rPr sz="1150" b="0">
-                          <a:solidFill>
-                            <a:srgbClr val="1B222E"/>
-                          </a:solidFill>
-                          <a:latin typeface="微软雅黑"/>
-                          <a:ea typeface="微软雅黑"/>
-                        </a:rPr>
-                        <a:t>回到草稿侧重新拟合 confidence head</a:t>
-                      </a:r>
-                    </a:p>
-                    <a:p>
-                      <a:pPr>
-                        <a:spcBef>
-                          <a:spcPts val="0"/>
-                        </a:spcBef>
-                        <a:spcAft>
-                          <a:spcPts val="0"/>
-                        </a:spcAft>
-                      </a:pPr>
-                      <a:r>
-                        <a:rPr sz="1150" b="0">
-                          <a:solidFill>
-                            <a:srgbClr val="1B222E"/>
-                          </a:solidFill>
-                          <a:latin typeface="微软雅黑"/>
-                          <a:ea typeface="微软雅黑"/>
-                        </a:rPr>
-                        <a:t>(代价分钟级),不影响主线</a:t>
-                      </a:r>
-                    </a:p>
-                  </a:txBody>
-                  <a:tcPr marL="64008" marR="64008" marT="18288" marB="18288">
-                    <a:solidFill>
-                      <a:srgbClr val="FFFFFF"/>
-                    </a:solidFill>
-                  </a:tcPr>
-                </a:tc>
-              </a:tr>
-              <a:tr h="896112">
-                <a:tc>
-                  <a:txBody>
-                    <a:bodyPr wrap="square"/>
-                    <a:lstStyle/>
-                    <a:p>
-                      <a:pPr>
-                        <a:spcBef>
-                          <a:spcPts val="0"/>
-                        </a:spcBef>
-                        <a:spcAft>
-                          <a:spcPts val="0"/>
-                        </a:spcAft>
-                      </a:pPr>
-                      <a:r>
-                        <a:rPr sz="1150" b="0">
-                          <a:solidFill>
-                            <a:srgbClr val="1B222E"/>
-                          </a:solidFill>
-                          <a:latin typeface="微软雅黑"/>
-                          <a:ea typeface="微软雅黑"/>
-                        </a:rPr>
-                        <a:t>G3</a:t>
-                      </a:r>
-                    </a:p>
-                  </a:txBody>
-                  <a:tcPr marL="64008" marR="64008" marT="18288" marB="18288">
-                    <a:solidFill>
-                      <a:srgbClr val="FFFFFF"/>
-                    </a:solidFill>
-                  </a:tcPr>
-                </a:tc>
-                <a:tc>
-                  <a:txBody>
-                    <a:bodyPr wrap="square"/>
-                    <a:lstStyle/>
-                    <a:p>
-                      <a:pPr>
-                        <a:spcBef>
-                          <a:spcPts val="0"/>
-                        </a:spcBef>
-                        <a:spcAft>
-                          <a:spcPts val="0"/>
-                        </a:spcAft>
-                      </a:pPr>
-                      <a:r>
-                        <a:rPr sz="1150" b="0">
-                          <a:solidFill>
-                            <a:srgbClr val="1B222E"/>
-                          </a:solidFill>
-                          <a:latin typeface="微软雅黑"/>
-                          <a:ea typeface="微软雅黑"/>
-                        </a:rPr>
-                        <a:t>第 11 周末</a:t>
-                      </a:r>
-                    </a:p>
-                  </a:txBody>
-                  <a:tcPr marL="64008" marR="64008" marT="18288" marB="18288">
-                    <a:solidFill>
-                      <a:srgbClr val="FFFFFF"/>
-                    </a:solidFill>
-                  </a:tcPr>
-                </a:tc>
-                <a:tc>
-                  <a:txBody>
-                    <a:bodyPr wrap="square"/>
-                    <a:lstStyle/>
-                    <a:p>
-                      <a:pPr>
-                        <a:spcBef>
-                          <a:spcPts val="0"/>
-                        </a:spcBef>
-                        <a:spcAft>
-                          <a:spcPts val="0"/>
-                        </a:spcAft>
-                      </a:pPr>
-                      <a:r>
-                        <a:rPr sz="1150" b="0">
-                          <a:solidFill>
-                            <a:srgbClr val="1B222E"/>
-                          </a:solidFill>
-                          <a:latin typeface="微软雅黑"/>
-                          <a:ea typeface="微软雅黑"/>
-                        </a:rPr>
-                        <a:t>动态 K 在图模式下运行,端到端不劣于</a:t>
-                      </a:r>
-                    </a:p>
-                    <a:p>
-                      <a:pPr>
-                        <a:spcBef>
-                          <a:spcPts val="0"/>
-                        </a:spcBef>
-                        <a:spcAft>
-                          <a:spcPts val="0"/>
-                        </a:spcAft>
-                      </a:pPr>
-                      <a:r>
-                        <a:rPr sz="1150" b="0">
-                          <a:solidFill>
-                            <a:srgbClr val="1B222E"/>
-                          </a:solidFill>
-                          <a:latin typeface="微软雅黑"/>
-                          <a:ea typeface="微软雅黑"/>
-                        </a:rPr>
-                        <a:t>同预算的固定 K</a:t>
-                      </a:r>
-                    </a:p>
-                  </a:txBody>
-                  <a:tcPr marL="64008" marR="64008" marT="18288" marB="18288">
-                    <a:solidFill>
-                      <a:srgbClr val="FFFFFF"/>
-                    </a:solidFill>
-                  </a:tcPr>
-                </a:tc>
-                <a:tc>
-                  <a:txBody>
-                    <a:bodyPr wrap="square"/>
-                    <a:lstStyle/>
-                    <a:p>
-                      <a:pPr>
-                        <a:spcBef>
-                          <a:spcPts val="0"/>
-                        </a:spcBef>
-                        <a:spcAft>
-                          <a:spcPts val="0"/>
-                        </a:spcAft>
-                      </a:pPr>
-                      <a:r>
-                        <a:rPr sz="1150" b="0">
-                          <a:solidFill>
-                            <a:srgbClr val="1B222E"/>
-                          </a:solidFill>
-                          <a:latin typeface="微软雅黑"/>
-                          <a:ea typeface="微软雅黑"/>
-                        </a:rPr>
-                        <a:t>保留 eager 路径成果并如实上报;</a:t>
-                      </a:r>
-                    </a:p>
-                    <a:p>
-                      <a:pPr>
-                        <a:spcBef>
-                          <a:spcPts val="0"/>
-                        </a:spcBef>
-                        <a:spcAft>
-                          <a:spcPts val="0"/>
-                        </a:spcAft>
-                      </a:pPr>
-                      <a:r>
-                        <a:rPr sz="1150" b="0">
-                          <a:solidFill>
-                            <a:srgbClr val="1B222E"/>
-                          </a:solidFill>
-                          <a:latin typeface="微软雅黑"/>
-                          <a:ea typeface="微软雅黑"/>
-                        </a:rPr>
-                        <a:t>将图支持作为独立议题提交上游</a:t>
-                      </a:r>
-                    </a:p>
-                  </a:txBody>
-                  <a:tcPr marL="64008" marR="64008" marT="18288" marB="18288">
-                    <a:solidFill>
-                      <a:srgbClr val="FFFFFF"/>
-                    </a:solidFill>
-                  </a:tcPr>
-                </a:tc>
-              </a:tr>
-            </a:tbl>
-          </a:graphicData>
-        </a:graphic>
-      </p:graphicFrame>
-      <p:sp>
-        <p:nvSpPr>
-          <p:cNvPr id="5" name="TextBox 4"/>
-          <p:cNvSpPr txBox="1"/>
-          <p:nvPr/>
-        </p:nvSpPr>
-        <p:spPr>
-          <a:xfrm>
-            <a:off x="502920" y="4754880"/>
-            <a:ext cx="11247120" cy="1828800"/>
-          </a:xfrm>
-          <a:prstGeom prst="rect">
-            <a:avLst/>
-          </a:prstGeom>
-          <a:noFill/>
-        </p:spPr>
-        <p:txBody>
-          <a:bodyPr wrap="square">
-            <a:spAutoFit/>
-          </a:bodyPr>
-          <a:lstStyle/>
-          <a:p>
-            <a:pPr algn="l">
-              <a:spcBef>
-                <a:spcPts val="0"/>
-              </a:spcBef>
-              <a:spcAft>
-                <a:spcPts val="0"/>
-              </a:spcAft>
-            </a:pPr>
-            <a:r>
-              <a:rPr sz="1600" b="1">
-                <a:solidFill>
-                  <a:srgbClr val="1B222E"/>
-                </a:solidFill>
-                <a:latin typeface="微软雅黑"/>
-                <a:ea typeface="微软雅黑"/>
-              </a:rPr>
-              <a:t>最终验收</a:t>
-            </a:r>
-          </a:p>
-          <a:p>
-            <a:pPr algn="l">
-              <a:spcBef>
-                <a:spcPts val="600"/>
-              </a:spcBef>
-              <a:spcAft>
-                <a:spcPts val="0"/>
-              </a:spcAft>
-            </a:pPr>
-            <a:r>
-              <a:rPr sz="1350" b="0">
-                <a:solidFill>
-                  <a:srgbClr val="1B222E"/>
-                </a:solidFill>
-                <a:latin typeface="微软雅黑"/>
-                <a:ea typeface="微软雅黑"/>
-              </a:rPr>
-              <a:t>· 昇腾侧可用实现,与固定 K、无投机三者的对比数据齐备,复现文档可被他人独立执行;</a:t>
-            </a:r>
-          </a:p>
-          <a:p>
-            <a:pPr algn="l">
-              <a:spcBef>
-                <a:spcPts val="400"/>
-              </a:spcBef>
-              <a:spcAft>
-                <a:spcPts val="0"/>
-              </a:spcAft>
-            </a:pPr>
-            <a:r>
-              <a:rPr sz="1350" b="0">
-                <a:solidFill>
-                  <a:srgbClr val="1B222E"/>
-                </a:solidFill>
-                <a:latin typeface="微软雅黑"/>
-                <a:ea typeface="微软雅黑"/>
-              </a:rPr>
-              <a:t>· DSV4-Flash 在动态 K 下取得不劣于固定 K 的端到端表现,并在高并发点显示优势;</a:t>
-            </a:r>
-          </a:p>
-          <a:p>
-            <a:pPr algn="l">
-              <a:spcBef>
-                <a:spcPts val="400"/>
-              </a:spcBef>
-              <a:spcAft>
-                <a:spcPts val="0"/>
-              </a:spcAft>
-            </a:pPr>
-            <a:r>
-              <a:rPr sz="1350" b="0">
-                <a:solidFill>
-                  <a:srgbClr val="1B222E"/>
-                </a:solidFill>
-                <a:latin typeface="微软雅黑"/>
-                <a:ea typeface="微软雅黑"/>
-              </a:rPr>
-              <a:t>· 通用模型路线给出明确结论:可行方案,或阻断原因与所需外部支持。</a:t>
-            </a:r>
-          </a:p>
-          <a:p>
-            <a:pPr algn="l">
-              <a:spcBef>
-                <a:spcPts val="1200"/>
-              </a:spcBef>
-              <a:spcAft>
-                <a:spcPts val="0"/>
-              </a:spcAft>
-            </a:pPr>
-            <a:r>
-              <a:rPr sz="1600" b="1">
-                <a:solidFill>
-                  <a:srgbClr val="1F6FEB"/>
-                </a:solidFill>
-                <a:latin typeface="微软雅黑"/>
-                <a:ea typeface="微软雅黑"/>
-              </a:rPr>
-              <a:t>建议:先做阶段 0。一天即可拿到 G1 数据,再决定是否投入后续 2.5–3.5 个月。</a:t>
-            </a:r>
-          </a:p>
-        </p:txBody>
-      </p:sp>
     </p:spTree>
   </p:cSld>
   <p:clrMapOvr>

--- a/docs/memos/adaptive-spec-project-proposal-v3.pptx
+++ b/docs/memos/adaptive-spec-project-proposal-v3.pptx
@@ -6785,8 +6785,8 @@
         </p:nvSpPr>
         <p:spPr>
           <a:xfrm>
-            <a:off x="6437375" y="4553712"/>
-            <a:ext cx="2962656" cy="1920240"/>
+            <a:off x="6400800" y="4517136"/>
+            <a:ext cx="3017520" cy="1920240"/>
           </a:xfrm>
           <a:prstGeom prst="rect">
             <a:avLst/>
@@ -6808,47 +6808,7 @@
               </a:spcAft>
             </a:pPr>
             <a:r>
-              <a:rPr sz="950" b="1">
-                <a:solidFill>
-                  <a:srgbClr val="1B222E"/>
-                </a:solidFill>
-                <a:latin typeface="微软雅黑"/>
-                <a:ea typeface="微软雅黑"/>
-              </a:rPr>
-              <a:t>为什么变长会掉出设备图</a:t>
-            </a:r>
-          </a:p>
-          <a:p>
-            <a:pPr algn="l">
-              <a:spcBef>
-                <a:spcPts val="200"/>
-              </a:spcBef>
-              <a:spcAft>
-                <a:spcPts val="0"/>
-              </a:spcAft>
-            </a:pPr>
-            <a:r>
-              <a:rPr sz="850" b="0">
-                <a:solidFill>
-                  <a:srgbClr val="1B222E"/>
-                </a:solidFill>
-                <a:latin typeface="微软雅黑"/>
-                <a:ea typeface="微软雅黑"/>
-              </a:rPr>
-              <a:t>· 设备图 = 把一串算子按固定的张量形状录制下来直接重放,省掉逐算子下发开销;录制的前提就是形状固定;</a:t>
-            </a:r>
-          </a:p>
-          <a:p>
-            <a:pPr algn="l">
-              <a:spcBef>
-                <a:spcPts val="200"/>
-              </a:spcBef>
-              <a:spcAft>
-                <a:spcPts val="0"/>
-              </a:spcAft>
-            </a:pPr>
-            <a:r>
-              <a:rPr sz="850" b="0">
+              <a:rPr sz="800" b="0">
                 <a:solidFill>
                   <a:srgbClr val="1B222E"/>
                 </a:solidFill>
@@ -6868,14 +6828,74 @@
               </a:spcAft>
             </a:pPr>
             <a:r>
-              <a:rPr sz="850" b="0">
+              <a:rPr sz="800" b="0">
+                <a:solidFill>
+                  <a:srgbClr val="1B222E"/>
+                </a:solidFill>
+                <a:latin typeface="微软雅黑"/>
+                <a:ea typeface="微软雅黑"/>
+              </a:rPr>
+              <a:t>· 能否留在图内,取决于图里的长度参数是「录制时固化的常量」还是「运行时可改的设备张量」:</a:t>
+            </a:r>
+          </a:p>
+          <a:p>
+            <a:pPr algn="l">
+              <a:spcBef>
+                <a:spcPts val="200"/>
+              </a:spcBef>
+              <a:spcAft>
+                <a:spcPts val="0"/>
+              </a:spcAft>
+            </a:pPr>
+            <a:r>
+              <a:rPr sz="800" b="0">
+                <a:solidFill>
+                  <a:srgbClr val="1B222E"/>
+                </a:solidFill>
+                <a:latin typeface="微软雅黑"/>
+                <a:ea typeface="微软雅黑"/>
+              </a:rPr>
+              <a:t>  通用路径 FIA v2(npu_fused_infer_attention_score_v2)—— 长度是 host 侧 list,录制即固化 → K 一变必须整图重录;</a:t>
+            </a:r>
+          </a:p>
+          <a:p>
+            <a:pPr algn="l">
+              <a:spcBef>
+                <a:spcPts val="200"/>
+              </a:spcBef>
+              <a:spcAft>
+                <a:spcPts val="0"/>
+              </a:spcAft>
+            </a:pPr>
+            <a:r>
+              <a:rPr sz="800" b="0">
+                <a:solidFill>
+                  <a:srgbClr val="1B222E"/>
+                </a:solidFill>
+                <a:latin typeface="微软雅黑"/>
+                <a:ea typeface="微软雅黑"/>
+              </a:rPr>
+              <a:t>  ★ DSV4 路径 DSA / SFA —— 长度是 device tensor,图里存的是指针 → 改内容即可,结构上无需重录(有利条件);</a:t>
+            </a:r>
+          </a:p>
+          <a:p>
+            <a:pPr algn="l">
+              <a:spcBef>
+                <a:spcPts val="200"/>
+              </a:spcBef>
+              <a:spcAft>
+                <a:spcPts val="0"/>
+              </a:spcAft>
+            </a:pPr>
+            <a:r>
+              <a:rPr sz="800" b="0">
                 <a:solidFill>
                   <a:srgbClr val="C00000"/>
                 </a:solidFill>
                 <a:latin typeface="微软雅黑"/>
                 <a:ea typeface="微软雅黑"/>
               </a:rPr>
-              <a:t>· 能否留在图内,取决于图里的长度参数是「录制时固化的常量」还是「运行时可改的设备张量」 —— DSV4 属于后者(有利)。详见「三(补充)」两页。</a:t>
+              <a:t>· ★ 真正的未知量:workspace(算子临时显存)按 token 数做缓存键,K 一变即未命中、重新分配 → 图与 workspace 数量随 K 组合膨胀,显存与捕获耗时随之上升。</a:t>
             </a:r>
           </a:p>
         </p:txBody>

--- a/docs/memos/adaptive-spec-project-proposal-v3.pptx
+++ b/docs/memos/adaptive-spec-project-proposal-v3.pptx
@@ -4680,7 +4680,7 @@
         <p:spPr>
           <a:xfrm>
             <a:off x="292608" y="2487168"/>
-            <a:ext cx="2304288" cy="1572768"/>
+            <a:ext cx="2304288" cy="1755648"/>
           </a:xfrm>
           <a:prstGeom prst="rect">
             <a:avLst/>
@@ -5053,45 +5053,44 @@
       </p:sp>
       <p:sp>
         <p:nvSpPr>
-          <p:cNvPr id="16" name="Down Arrow 15"/>
-          <p:cNvSpPr/>
+          <p:cNvPr id="16" name="TextBox 15"/>
+          <p:cNvSpPr txBox="1"/>
           <p:nvPr/>
         </p:nvSpPr>
         <p:spPr>
           <a:xfrm>
-            <a:off x="1399032" y="4087368"/>
-            <a:ext cx="91440" cy="91440"/>
+            <a:off x="402336" y="3950208"/>
+            <a:ext cx="2084832" cy="256032"/>
           </a:xfrm>
-          <a:prstGeom prst="downArrow">
+          <a:prstGeom prst="rect">
             <a:avLst/>
           </a:prstGeom>
-          <a:solidFill>
-            <a:srgbClr val="1B222E"/>
-          </a:solidFill>
-          <a:ln>
-            <a:noFill/>
-          </a:ln>
-          <a:effectLst/>
+          <a:noFill/>
         </p:spPr>
-        <p:style>
-          <a:lnRef idx="1">
-            <a:schemeClr val="accent1"/>
-          </a:lnRef>
-          <a:fillRef idx="3">
-            <a:schemeClr val="accent1"/>
-          </a:fillRef>
-          <a:effectRef idx="2">
-            <a:schemeClr val="accent1"/>
-          </a:effectRef>
-          <a:fontRef idx="minor">
-            <a:schemeClr val="lt1"/>
-          </a:fontRef>
-        </p:style>
-        <p:txBody>
-          <a:bodyPr rtlCol="0" anchor="ctr"/>
-          <a:lstStyle/>
-          <a:p>
-            <a:pPr algn="ctr"/>
+        <p:txBody>
+          <a:bodyPr wrap="square">
+            <a:spAutoFit/>
+          </a:bodyPr>
+          <a:lstStyle/>
+          <a:p>
+            <a:pPr algn="l">
+              <a:spcBef>
+                <a:spcPts val="0"/>
+              </a:spcBef>
+              <a:spcAft>
+                <a:spcPts val="0"/>
+              </a:spcAft>
+            </a:pPr>
+            <a:r>
+              <a:rPr sz="750" b="0">
+                <a:solidFill>
+                  <a:srgbClr val="C00000"/>
+                </a:solidFill>
+                <a:latin typeface="微软雅黑"/>
+                <a:ea typeface="微软雅黑"/>
+              </a:rPr>
+              <a:t>⚠ 置信度与接受率不相关 → 回草稿侧重拟合(分钟级)</a:t>
+            </a:r>
           </a:p>
         </p:txBody>
       </p:sp>
@@ -5103,8 +5102,8 @@
         </p:nvSpPr>
         <p:spPr>
           <a:xfrm>
-            <a:off x="292608" y="4224528"/>
-            <a:ext cx="2304288" cy="1572768"/>
+            <a:off x="292608" y="4407408"/>
+            <a:ext cx="2304288" cy="1755648"/>
           </a:xfrm>
           <a:prstGeom prst="rect">
             <a:avLst/>
@@ -5147,7 +5146,7 @@
         </p:nvSpPr>
         <p:spPr>
           <a:xfrm>
-            <a:off x="347472" y="4279392"/>
+            <a:off x="347472" y="4462272"/>
             <a:ext cx="2194560" cy="256032"/>
           </a:xfrm>
           <a:prstGeom prst="rect">
@@ -5206,7 +5205,7 @@
         </p:nvSpPr>
         <p:spPr>
           <a:xfrm>
-            <a:off x="420624" y="4572000"/>
+            <a:off x="420624" y="4754880"/>
             <a:ext cx="2048256" cy="292608"/>
           </a:xfrm>
           <a:prstGeom prst="rect">
@@ -5269,7 +5268,7 @@
         </p:nvSpPr>
         <p:spPr>
           <a:xfrm>
-            <a:off x="1399032" y="4873752"/>
+            <a:off x="1399032" y="5056632"/>
             <a:ext cx="91440" cy="73152"/>
           </a:xfrm>
           <a:prstGeom prst="downArrow">
@@ -5313,7 +5312,7 @@
         </p:nvSpPr>
         <p:spPr>
           <a:xfrm>
-            <a:off x="420624" y="4956048"/>
+            <a:off x="420624" y="5138928"/>
             <a:ext cx="2048256" cy="292608"/>
           </a:xfrm>
           <a:prstGeom prst="rect">
@@ -5376,7 +5375,7 @@
         </p:nvSpPr>
         <p:spPr>
           <a:xfrm>
-            <a:off x="1399032" y="5257800"/>
+            <a:off x="1399032" y="5440680"/>
             <a:ext cx="91440" cy="73152"/>
           </a:xfrm>
           <a:prstGeom prst="downArrow">
@@ -5420,7 +5419,7 @@
         </p:nvSpPr>
         <p:spPr>
           <a:xfrm>
-            <a:off x="420624" y="5340096"/>
+            <a:off x="420624" y="5522976"/>
             <a:ext cx="2048256" cy="292608"/>
           </a:xfrm>
           <a:prstGeom prst="rect">
@@ -5477,14 +5476,101 @@
       </p:sp>
       <p:sp>
         <p:nvSpPr>
-          <p:cNvPr id="24" name="Rectangle 23"/>
+          <p:cNvPr id="24" name="TextBox 23"/>
+          <p:cNvSpPr txBox="1"/>
+          <p:nvPr/>
+        </p:nvSpPr>
+        <p:spPr>
+          <a:xfrm>
+            <a:off x="402336" y="5870448"/>
+            <a:ext cx="2084832" cy="256032"/>
+          </a:xfrm>
+          <a:prstGeom prst="rect">
+            <a:avLst/>
+          </a:prstGeom>
+          <a:noFill/>
+        </p:spPr>
+        <p:txBody>
+          <a:bodyPr wrap="square">
+            <a:spAutoFit/>
+          </a:bodyPr>
+          <a:lstStyle/>
+          <a:p>
+            <a:pPr algn="l">
+              <a:spcBef>
+                <a:spcPts val="0"/>
+              </a:spcBef>
+              <a:spcAft>
+                <a:spcPts val="0"/>
+              </a:spcAft>
+            </a:pPr>
+            <a:r>
+              <a:rPr sz="750" b="0">
+                <a:solidFill>
+                  <a:srgbClr val="C00000"/>
+                </a:solidFill>
+                <a:latin typeface="微软雅黑"/>
+                <a:ea typeface="微软雅黑"/>
+              </a:rPr>
+              <a:t>⚠ 变长进不了图 → 退回 eager,失去图重放收益</a:t>
+            </a:r>
+          </a:p>
+        </p:txBody>
+      </p:sp>
+      <p:sp>
+        <p:nvSpPr>
+          <p:cNvPr id="25" name="Down Arrow 24"/>
           <p:cNvSpPr/>
           <p:nvPr/>
         </p:nvSpPr>
         <p:spPr>
           <a:xfrm>
-            <a:off x="292608" y="5907024"/>
-            <a:ext cx="2304288" cy="329184"/>
+            <a:off x="1399032" y="4279392"/>
+            <a:ext cx="91440" cy="91440"/>
+          </a:xfrm>
+          <a:prstGeom prst="downArrow">
+            <a:avLst/>
+          </a:prstGeom>
+          <a:solidFill>
+            <a:srgbClr val="1B222E"/>
+          </a:solidFill>
+          <a:ln>
+            <a:noFill/>
+          </a:ln>
+          <a:effectLst/>
+        </p:spPr>
+        <p:style>
+          <a:lnRef idx="1">
+            <a:schemeClr val="accent1"/>
+          </a:lnRef>
+          <a:fillRef idx="3">
+            <a:schemeClr val="accent1"/>
+          </a:fillRef>
+          <a:effectRef idx="2">
+            <a:schemeClr val="accent1"/>
+          </a:effectRef>
+          <a:fontRef idx="minor">
+            <a:schemeClr val="lt1"/>
+          </a:fontRef>
+        </p:style>
+        <p:txBody>
+          <a:bodyPr rtlCol="0" anchor="ctr"/>
+          <a:lstStyle/>
+          <a:p>
+            <a:pPr algn="ctr"/>
+          </a:p>
+        </p:txBody>
+      </p:sp>
+      <p:sp>
+        <p:nvSpPr>
+          <p:cNvPr id="26" name="Rectangle 25"/>
+          <p:cNvSpPr/>
+          <p:nvPr/>
+        </p:nvSpPr>
+        <p:spPr>
+          <a:xfrm>
+            <a:off x="292608" y="6272784"/>
+            <a:ext cx="2304288" cy="310896"/>
           </a:xfrm>
           <a:prstGeom prst="rect">
             <a:avLst/>
@@ -5538,70 +5624,7 @@
       </p:sp>
       <p:sp>
         <p:nvSpPr>
-          <p:cNvPr id="25" name="TextBox 24"/>
-          <p:cNvSpPr txBox="1"/>
-          <p:nvPr/>
-        </p:nvSpPr>
-        <p:spPr>
-          <a:xfrm>
-            <a:off x="274320" y="6254496"/>
-            <a:ext cx="2395728" cy="512064"/>
-          </a:xfrm>
-          <a:prstGeom prst="rect">
-            <a:avLst/>
-          </a:prstGeom>
-          <a:noFill/>
-        </p:spPr>
-        <p:txBody>
-          <a:bodyPr wrap="square">
-            <a:spAutoFit/>
-          </a:bodyPr>
-          <a:lstStyle/>
-          <a:p>
-            <a:pPr algn="l">
-              <a:spcBef>
-                <a:spcPts val="0"/>
-              </a:spcBef>
-              <a:spcAft>
-                <a:spcPts val="0"/>
-              </a:spcAft>
-            </a:pPr>
-            <a:r>
-              <a:rPr sz="800" b="0">
-                <a:solidFill>
-                  <a:srgbClr val="5B6677"/>
-                </a:solidFill>
-                <a:latin typeface="微软雅黑"/>
-                <a:ea typeface="微软雅黑"/>
-              </a:rPr>
-              <a:t>① 信号不可用 → 回草稿侧重拟合置信度头</a:t>
-            </a:r>
-          </a:p>
-          <a:p>
-            <a:pPr algn="l">
-              <a:spcBef>
-                <a:spcPts val="100"/>
-              </a:spcBef>
-              <a:spcAft>
-                <a:spcPts val="0"/>
-              </a:spcAft>
-            </a:pPr>
-            <a:r>
-              <a:rPr sz="800" b="0">
-                <a:solidFill>
-                  <a:srgbClr val="C00000"/>
-                </a:solidFill>
-                <a:latin typeface="微软雅黑"/>
-                <a:ea typeface="微软雅黑"/>
-              </a:rPr>
-              <a:t>② 进不了图 → 退回 eager,收益打折</a:t>
-            </a:r>
-          </a:p>
-        </p:txBody>
-      </p:sp>
-      <p:sp>
-        <p:nvSpPr>
-          <p:cNvPr id="26" name="Rectangle 25"/>
+          <p:cNvPr id="27" name="Rectangle 26"/>
           <p:cNvSpPr/>
           <p:nvPr/>
         </p:nvSpPr>
@@ -5645,7 +5668,7 @@
       </p:sp>
       <p:sp>
         <p:nvSpPr>
-          <p:cNvPr id="27" name="TextBox 26"/>
+          <p:cNvPr id="28" name="TextBox 27"/>
           <p:cNvSpPr txBox="1"/>
           <p:nvPr/>
         </p:nvSpPr>
@@ -5688,7 +5711,7 @@
       </p:sp>
       <p:sp>
         <p:nvSpPr>
-          <p:cNvPr id="28" name="TextBox 27"/>
+          <p:cNvPr id="29" name="TextBox 28"/>
           <p:cNvSpPr txBox="1"/>
           <p:nvPr/>
         </p:nvSpPr>
@@ -5831,7 +5854,7 @@
       </p:sp>
       <p:sp>
         <p:nvSpPr>
-          <p:cNvPr id="29" name="Rectangle 28"/>
+          <p:cNvPr id="30" name="Rectangle 29"/>
           <p:cNvSpPr/>
           <p:nvPr/>
         </p:nvSpPr>
@@ -5914,7 +5937,7 @@
       </p:sp>
       <p:sp>
         <p:nvSpPr>
-          <p:cNvPr id="30" name="Right Arrow 29"/>
+          <p:cNvPr id="31" name="Right Arrow 30"/>
           <p:cNvSpPr/>
           <p:nvPr/>
         </p:nvSpPr>
@@ -5958,7 +5981,7 @@
       </p:sp>
       <p:sp>
         <p:nvSpPr>
-          <p:cNvPr id="31" name="Rectangle 30"/>
+          <p:cNvPr id="32" name="Rectangle 31"/>
           <p:cNvSpPr/>
           <p:nvPr/>
         </p:nvSpPr>
@@ -6041,7 +6064,7 @@
       </p:sp>
       <p:sp>
         <p:nvSpPr>
-          <p:cNvPr id="32" name="Right Arrow 31"/>
+          <p:cNvPr id="33" name="Right Arrow 32"/>
           <p:cNvSpPr/>
           <p:nvPr/>
         </p:nvSpPr>
@@ -6085,7 +6108,7 @@
       </p:sp>
       <p:sp>
         <p:nvSpPr>
-          <p:cNvPr id="33" name="Rectangle 32"/>
+          <p:cNvPr id="34" name="Rectangle 33"/>
           <p:cNvSpPr/>
           <p:nvPr/>
         </p:nvSpPr>
@@ -6168,7 +6191,7 @@
       </p:sp>
       <p:sp>
         <p:nvSpPr>
-          <p:cNvPr id="34" name="TextBox 33"/>
+          <p:cNvPr id="35" name="TextBox 34"/>
           <p:cNvSpPr txBox="1"/>
           <p:nvPr/>
         </p:nvSpPr>
@@ -6211,7 +6234,7 @@
       </p:sp>
       <p:sp>
         <p:nvSpPr>
-          <p:cNvPr id="35" name="Rectangle 34"/>
+          <p:cNvPr id="36" name="Rectangle 35"/>
           <p:cNvSpPr/>
           <p:nvPr/>
         </p:nvSpPr>
@@ -6272,7 +6295,7 @@
       </p:sp>
       <p:sp>
         <p:nvSpPr>
-          <p:cNvPr id="36" name="Rectangle 35"/>
+          <p:cNvPr id="37" name="Rectangle 36"/>
           <p:cNvSpPr/>
           <p:nvPr/>
         </p:nvSpPr>
@@ -6316,7 +6339,7 @@
       </p:sp>
       <p:sp>
         <p:nvSpPr>
-          <p:cNvPr id="37" name="TextBox 36"/>
+          <p:cNvPr id="38" name="TextBox 37"/>
           <p:cNvSpPr txBox="1"/>
           <p:nvPr/>
         </p:nvSpPr>
@@ -6359,7 +6382,7 @@
       </p:sp>
       <p:sp>
         <p:nvSpPr>
-          <p:cNvPr id="38" name="Rectangle 37"/>
+          <p:cNvPr id="39" name="Rectangle 38"/>
           <p:cNvSpPr/>
           <p:nvPr/>
         </p:nvSpPr>
@@ -6442,7 +6465,7 @@
       </p:sp>
       <p:sp>
         <p:nvSpPr>
-          <p:cNvPr id="39" name="Right Arrow 38"/>
+          <p:cNvPr id="40" name="Right Arrow 39"/>
           <p:cNvSpPr/>
           <p:nvPr/>
         </p:nvSpPr>
@@ -6486,7 +6509,7 @@
       </p:sp>
       <p:sp>
         <p:nvSpPr>
-          <p:cNvPr id="40" name="Rectangle 39"/>
+          <p:cNvPr id="41" name="Rectangle 40"/>
           <p:cNvSpPr/>
           <p:nvPr/>
         </p:nvSpPr>
@@ -6569,7 +6592,7 @@
       </p:sp>
       <p:sp>
         <p:nvSpPr>
-          <p:cNvPr id="41" name="Right Arrow 40"/>
+          <p:cNvPr id="42" name="Right Arrow 41"/>
           <p:cNvSpPr/>
           <p:nvPr/>
         </p:nvSpPr>
@@ -6613,7 +6636,7 @@
       </p:sp>
       <p:sp>
         <p:nvSpPr>
-          <p:cNvPr id="42" name="Rectangle 41"/>
+          <p:cNvPr id="43" name="Rectangle 42"/>
           <p:cNvSpPr/>
           <p:nvPr/>
         </p:nvSpPr>
@@ -6696,7 +6719,7 @@
       </p:sp>
       <p:sp>
         <p:nvSpPr>
-          <p:cNvPr id="43" name="TextBox 42"/>
+          <p:cNvPr id="44" name="TextBox 43"/>
           <p:cNvSpPr txBox="1"/>
           <p:nvPr/>
         </p:nvSpPr>
@@ -6779,7 +6802,7 @@
       </p:sp>
       <p:sp>
         <p:nvSpPr>
-          <p:cNvPr id="44" name="TextBox 43"/>
+          <p:cNvPr id="45" name="TextBox 44"/>
           <p:cNvSpPr txBox="1"/>
           <p:nvPr/>
         </p:nvSpPr>
@@ -6902,7 +6925,7 @@
       </p:sp>
       <p:sp>
         <p:nvSpPr>
-          <p:cNvPr id="45" name="Rectangle 44"/>
+          <p:cNvPr id="46" name="Rectangle 45"/>
           <p:cNvSpPr/>
           <p:nvPr/>
         </p:nvSpPr>
@@ -6963,7 +6986,7 @@
       </p:sp>
       <p:sp>
         <p:nvSpPr>
-          <p:cNvPr id="46" name="Rectangle 45"/>
+          <p:cNvPr id="47" name="Rectangle 46"/>
           <p:cNvSpPr/>
           <p:nvPr/>
         </p:nvSpPr>
@@ -7024,7 +7047,7 @@
       </p:sp>
       <p:sp>
         <p:nvSpPr>
-          <p:cNvPr id="47" name="Rectangle 46"/>
+          <p:cNvPr id="48" name="Rectangle 47"/>
           <p:cNvSpPr/>
           <p:nvPr/>
         </p:nvSpPr>
@@ -7068,7 +7091,7 @@
       </p:sp>
       <p:sp>
         <p:nvSpPr>
-          <p:cNvPr id="48" name="Oval 47"/>
+          <p:cNvPr id="49" name="Oval 48"/>
           <p:cNvSpPr/>
           <p:nvPr/>
         </p:nvSpPr>
@@ -7131,7 +7154,7 @@
       </p:sp>
       <p:sp>
         <p:nvSpPr>
-          <p:cNvPr id="49" name="TextBox 48"/>
+          <p:cNvPr id="50" name="TextBox 49"/>
           <p:cNvSpPr txBox="1"/>
           <p:nvPr/>
         </p:nvSpPr>
@@ -7274,7 +7297,7 @@
       </p:sp>
       <p:sp>
         <p:nvSpPr>
-          <p:cNvPr id="50" name="Oval 49"/>
+          <p:cNvPr id="51" name="Oval 50"/>
           <p:cNvSpPr/>
           <p:nvPr/>
         </p:nvSpPr>
@@ -7337,7 +7360,7 @@
       </p:sp>
       <p:sp>
         <p:nvSpPr>
-          <p:cNvPr id="51" name="TextBox 50"/>
+          <p:cNvPr id="52" name="TextBox 51"/>
           <p:cNvSpPr txBox="1"/>
           <p:nvPr/>
         </p:nvSpPr>
@@ -7460,7 +7483,7 @@
       </p:sp>
       <p:sp>
         <p:nvSpPr>
-          <p:cNvPr id="52" name="Oval 51"/>
+          <p:cNvPr id="53" name="Oval 52"/>
           <p:cNvSpPr/>
           <p:nvPr/>
         </p:nvSpPr>
@@ -7523,7 +7546,7 @@
       </p:sp>
       <p:sp>
         <p:nvSpPr>
-          <p:cNvPr id="53" name="TextBox 52"/>
+          <p:cNvPr id="54" name="TextBox 53"/>
           <p:cNvSpPr txBox="1"/>
           <p:nvPr/>
         </p:nvSpPr>
@@ -7646,7 +7669,7 @@
       </p:sp>
       <p:sp>
         <p:nvSpPr>
-          <p:cNvPr id="54" name="Oval 53"/>
+          <p:cNvPr id="55" name="Oval 54"/>
           <p:cNvSpPr/>
           <p:nvPr/>
         </p:nvSpPr>
@@ -7709,7 +7732,7 @@
       </p:sp>
       <p:sp>
         <p:nvSpPr>
-          <p:cNvPr id="55" name="TextBox 54"/>
+          <p:cNvPr id="56" name="TextBox 55"/>
           <p:cNvSpPr txBox="1"/>
           <p:nvPr/>
         </p:nvSpPr>
@@ -7812,7 +7835,7 @@
       </p:sp>
       <p:sp>
         <p:nvSpPr>
-          <p:cNvPr id="56" name="TextBox 55"/>
+          <p:cNvPr id="57" name="TextBox 56"/>
           <p:cNvSpPr txBox="1"/>
           <p:nvPr/>
         </p:nvSpPr>

--- a/docs/memos/adaptive-spec-project-proposal-v3.pptx
+++ b/docs/memos/adaptive-spec-project-proposal-v3.pptx
@@ -5053,50 +5053,7 @@
       </p:sp>
       <p:sp>
         <p:nvSpPr>
-          <p:cNvPr id="16" name="TextBox 15"/>
-          <p:cNvSpPr txBox="1"/>
-          <p:nvPr/>
-        </p:nvSpPr>
-        <p:spPr>
-          <a:xfrm>
-            <a:off x="402336" y="3950208"/>
-            <a:ext cx="2084832" cy="256032"/>
-          </a:xfrm>
-          <a:prstGeom prst="rect">
-            <a:avLst/>
-          </a:prstGeom>
-          <a:noFill/>
-        </p:spPr>
-        <p:txBody>
-          <a:bodyPr wrap="square">
-            <a:spAutoFit/>
-          </a:bodyPr>
-          <a:lstStyle/>
-          <a:p>
-            <a:pPr algn="l">
-              <a:spcBef>
-                <a:spcPts val="0"/>
-              </a:spcBef>
-              <a:spcAft>
-                <a:spcPts val="0"/>
-              </a:spcAft>
-            </a:pPr>
-            <a:r>
-              <a:rPr sz="750" b="0">
-                <a:solidFill>
-                  <a:srgbClr val="C00000"/>
-                </a:solidFill>
-                <a:latin typeface="微软雅黑"/>
-                <a:ea typeface="微软雅黑"/>
-              </a:rPr>
-              <a:t>⚠ 置信度与接受率不相关 → 回草稿侧重拟合(分钟级)</a:t>
-            </a:r>
-          </a:p>
-        </p:txBody>
-      </p:sp>
-      <p:sp>
-        <p:nvSpPr>
-          <p:cNvPr id="17" name="Rectangle 16"/>
+          <p:cNvPr id="16" name="Rectangle 15"/>
           <p:cNvSpPr/>
           <p:nvPr/>
         </p:nvSpPr>
@@ -5140,7 +5097,7 @@
       </p:sp>
       <p:sp>
         <p:nvSpPr>
-          <p:cNvPr id="18" name="Rectangle 17"/>
+          <p:cNvPr id="17" name="Rectangle 16"/>
           <p:cNvSpPr/>
           <p:nvPr/>
         </p:nvSpPr>
@@ -5199,7 +5156,7 @@
       </p:sp>
       <p:sp>
         <p:nvSpPr>
-          <p:cNvPr id="19" name="Rectangle 18"/>
+          <p:cNvPr id="18" name="Rectangle 17"/>
           <p:cNvSpPr/>
           <p:nvPr/>
         </p:nvSpPr>
@@ -5262,7 +5219,7 @@
       </p:sp>
       <p:sp>
         <p:nvSpPr>
-          <p:cNvPr id="20" name="Down Arrow 19"/>
+          <p:cNvPr id="19" name="Down Arrow 18"/>
           <p:cNvSpPr/>
           <p:nvPr/>
         </p:nvSpPr>
@@ -5306,7 +5263,7 @@
       </p:sp>
       <p:sp>
         <p:nvSpPr>
-          <p:cNvPr id="21" name="Rectangle 20"/>
+          <p:cNvPr id="20" name="Rectangle 19"/>
           <p:cNvSpPr/>
           <p:nvPr/>
         </p:nvSpPr>
@@ -5369,7 +5326,7 @@
       </p:sp>
       <p:sp>
         <p:nvSpPr>
-          <p:cNvPr id="22" name="Down Arrow 21"/>
+          <p:cNvPr id="21" name="Down Arrow 20"/>
           <p:cNvSpPr/>
           <p:nvPr/>
         </p:nvSpPr>
@@ -5413,7 +5370,7 @@
       </p:sp>
       <p:sp>
         <p:nvSpPr>
-          <p:cNvPr id="23" name="Rectangle 22"/>
+          <p:cNvPr id="22" name="Rectangle 21"/>
           <p:cNvSpPr/>
           <p:nvPr/>
         </p:nvSpPr>
@@ -5476,7 +5433,7 @@
       </p:sp>
       <p:sp>
         <p:nvSpPr>
-          <p:cNvPr id="24" name="TextBox 23"/>
+          <p:cNvPr id="23" name="TextBox 22"/>
           <p:cNvSpPr txBox="1"/>
           <p:nvPr/>
         </p:nvSpPr>
@@ -5519,7 +5476,7 @@
       </p:sp>
       <p:sp>
         <p:nvSpPr>
-          <p:cNvPr id="25" name="Down Arrow 24"/>
+          <p:cNvPr id="24" name="Down Arrow 23"/>
           <p:cNvSpPr/>
           <p:nvPr/>
         </p:nvSpPr>
@@ -5563,7 +5520,7 @@
       </p:sp>
       <p:sp>
         <p:nvSpPr>
-          <p:cNvPr id="26" name="Rectangle 25"/>
+          <p:cNvPr id="25" name="Rectangle 24"/>
           <p:cNvSpPr/>
           <p:nvPr/>
         </p:nvSpPr>
@@ -5624,7 +5581,7 @@
       </p:sp>
       <p:sp>
         <p:nvSpPr>
-          <p:cNvPr id="27" name="Rectangle 26"/>
+          <p:cNvPr id="26" name="Rectangle 25"/>
           <p:cNvSpPr/>
           <p:nvPr/>
         </p:nvSpPr>
@@ -5668,7 +5625,7 @@
       </p:sp>
       <p:sp>
         <p:nvSpPr>
-          <p:cNvPr id="28" name="TextBox 27"/>
+          <p:cNvPr id="27" name="TextBox 26"/>
           <p:cNvSpPr txBox="1"/>
           <p:nvPr/>
         </p:nvSpPr>
@@ -5711,7 +5668,7 @@
       </p:sp>
       <p:sp>
         <p:nvSpPr>
-          <p:cNvPr id="29" name="TextBox 28"/>
+          <p:cNvPr id="28" name="TextBox 27"/>
           <p:cNvSpPr txBox="1"/>
           <p:nvPr/>
         </p:nvSpPr>
@@ -5854,7 +5811,7 @@
       </p:sp>
       <p:sp>
         <p:nvSpPr>
-          <p:cNvPr id="30" name="Rectangle 29"/>
+          <p:cNvPr id="29" name="Rectangle 28"/>
           <p:cNvSpPr/>
           <p:nvPr/>
         </p:nvSpPr>
@@ -5937,7 +5894,7 @@
       </p:sp>
       <p:sp>
         <p:nvSpPr>
-          <p:cNvPr id="31" name="Right Arrow 30"/>
+          <p:cNvPr id="30" name="Right Arrow 29"/>
           <p:cNvSpPr/>
           <p:nvPr/>
         </p:nvSpPr>
@@ -5981,7 +5938,7 @@
       </p:sp>
       <p:sp>
         <p:nvSpPr>
-          <p:cNvPr id="32" name="Rectangle 31"/>
+          <p:cNvPr id="31" name="Rectangle 30"/>
           <p:cNvSpPr/>
           <p:nvPr/>
         </p:nvSpPr>
@@ -6064,7 +6021,7 @@
       </p:sp>
       <p:sp>
         <p:nvSpPr>
-          <p:cNvPr id="33" name="Right Arrow 32"/>
+          <p:cNvPr id="32" name="Right Arrow 31"/>
           <p:cNvSpPr/>
           <p:nvPr/>
         </p:nvSpPr>
@@ -6108,7 +6065,7 @@
       </p:sp>
       <p:sp>
         <p:nvSpPr>
-          <p:cNvPr id="34" name="Rectangle 33"/>
+          <p:cNvPr id="33" name="Rectangle 32"/>
           <p:cNvSpPr/>
           <p:nvPr/>
         </p:nvSpPr>
@@ -6191,7 +6148,7 @@
       </p:sp>
       <p:sp>
         <p:nvSpPr>
-          <p:cNvPr id="35" name="TextBox 34"/>
+          <p:cNvPr id="34" name="TextBox 33"/>
           <p:cNvSpPr txBox="1"/>
           <p:nvPr/>
         </p:nvSpPr>
@@ -6234,7 +6191,7 @@
       </p:sp>
       <p:sp>
         <p:nvSpPr>
-          <p:cNvPr id="36" name="Rectangle 35"/>
+          <p:cNvPr id="35" name="Rectangle 34"/>
           <p:cNvSpPr/>
           <p:nvPr/>
         </p:nvSpPr>
@@ -6295,7 +6252,7 @@
       </p:sp>
       <p:sp>
         <p:nvSpPr>
-          <p:cNvPr id="37" name="Rectangle 36"/>
+          <p:cNvPr id="36" name="Rectangle 35"/>
           <p:cNvSpPr/>
           <p:nvPr/>
         </p:nvSpPr>
@@ -6339,7 +6296,7 @@
       </p:sp>
       <p:sp>
         <p:nvSpPr>
-          <p:cNvPr id="38" name="TextBox 37"/>
+          <p:cNvPr id="37" name="TextBox 36"/>
           <p:cNvSpPr txBox="1"/>
           <p:nvPr/>
         </p:nvSpPr>
@@ -6382,7 +6339,7 @@
       </p:sp>
       <p:sp>
         <p:nvSpPr>
-          <p:cNvPr id="39" name="Rectangle 38"/>
+          <p:cNvPr id="38" name="Rectangle 37"/>
           <p:cNvSpPr/>
           <p:nvPr/>
         </p:nvSpPr>
@@ -6465,7 +6422,7 @@
       </p:sp>
       <p:sp>
         <p:nvSpPr>
-          <p:cNvPr id="40" name="Right Arrow 39"/>
+          <p:cNvPr id="39" name="Right Arrow 38"/>
           <p:cNvSpPr/>
           <p:nvPr/>
         </p:nvSpPr>
@@ -6509,7 +6466,7 @@
       </p:sp>
       <p:sp>
         <p:nvSpPr>
-          <p:cNvPr id="41" name="Rectangle 40"/>
+          <p:cNvPr id="40" name="Rectangle 39"/>
           <p:cNvSpPr/>
           <p:nvPr/>
         </p:nvSpPr>
@@ -6592,7 +6549,7 @@
       </p:sp>
       <p:sp>
         <p:nvSpPr>
-          <p:cNvPr id="42" name="Right Arrow 41"/>
+          <p:cNvPr id="41" name="Right Arrow 40"/>
           <p:cNvSpPr/>
           <p:nvPr/>
         </p:nvSpPr>
@@ -6636,7 +6593,7 @@
       </p:sp>
       <p:sp>
         <p:nvSpPr>
-          <p:cNvPr id="43" name="Rectangle 42"/>
+          <p:cNvPr id="42" name="Rectangle 41"/>
           <p:cNvSpPr/>
           <p:nvPr/>
         </p:nvSpPr>
@@ -6719,14 +6676,14 @@
       </p:sp>
       <p:sp>
         <p:nvSpPr>
-          <p:cNvPr id="44" name="TextBox 43"/>
+          <p:cNvPr id="43" name="TextBox 42"/>
           <p:cNvSpPr txBox="1"/>
           <p:nvPr/>
         </p:nvSpPr>
         <p:spPr>
           <a:xfrm>
-            <a:off x="2871216" y="5504688"/>
-            <a:ext cx="3383280" cy="822960"/>
+            <a:off x="2871216" y="5449824"/>
+            <a:ext cx="3419856" cy="841248"/>
           </a:xfrm>
           <a:prstGeom prst="rect">
             <a:avLst/>
@@ -6748,14 +6705,14 @@
               </a:spcAft>
             </a:pPr>
             <a:r>
-              <a:rPr sz="900" b="1">
+              <a:rPr sz="800" b="1">
                 <a:solidFill>
                   <a:srgbClr val="1B222E"/>
                 </a:solidFill>
                 <a:latin typeface="微软雅黑"/>
                 <a:ea typeface="微软雅黑"/>
               </a:rPr>
-              <a:t>两条候选路线,阶段 2 先验证可行性再投入:</a:t>
+              <a:t>让变长进图有两条路线,阶段 2 先验证可行性:</a:t>
             </a:r>
           </a:p>
           <a:p>
@@ -6768,14 +6725,14 @@
               </a:spcAft>
             </a:pPr>
             <a:r>
-              <a:rPr sz="850" b="0">
+              <a:rPr sz="700" b="0">
                 <a:solidFill>
                   <a:srgbClr val="1B222E"/>
                 </a:solidFill>
                 <a:latin typeface="微软雅黑"/>
                 <a:ea typeface="微软雅黑"/>
               </a:rPr>
-              <a:t>· 对齐上游语义 —— 后端上报 ALWAYS,按 max_query_len 派发;</a:t>
+              <a:t>· 对齐上游 —— 图按 token 总数分档捕获,运行时用批内最长请求的长度挑图、其余补齐;图数 = 档数 × 长度取值数,有补齐浪费;</a:t>
             </a:r>
           </a:p>
           <a:p>
@@ -6788,21 +6745,21 @@
               </a:spcAft>
             </a:pPr>
             <a:r>
-              <a:rPr sz="850" b="0">
+              <a:rPr sz="700" b="0">
                 <a:solidFill>
                   <a:srgbClr val="1B222E"/>
                 </a:solidFill>
                 <a:latin typeface="微软雅黑"/>
                 <a:ea typeface="微软雅黑"/>
               </a:rPr>
-              <a:t>· SGLang 式 packed varlen —— graph key 只按总 token 数,padding 更省。</a:t>
-            </a:r>
-          </a:p>
-        </p:txBody>
-      </p:sp>
-      <p:sp>
-        <p:nvSpPr>
-          <p:cNvPr id="45" name="TextBox 44"/>
+              <a:t>· SGLang 式 —— 各请求 token 紧挨着打包成一条,图只按总 token 数分档;图少且无补齐浪费,代价是改数据布局 + 算子须支持。</a:t>
+            </a:r>
+          </a:p>
+        </p:txBody>
+      </p:sp>
+      <p:sp>
+        <p:nvSpPr>
+          <p:cNvPr id="44" name="TextBox 43"/>
           <p:cNvSpPr txBox="1"/>
           <p:nvPr/>
         </p:nvSpPr>
@@ -6925,7 +6882,7 @@
       </p:sp>
       <p:sp>
         <p:nvSpPr>
-          <p:cNvPr id="46" name="Rectangle 45"/>
+          <p:cNvPr id="45" name="Rectangle 44"/>
           <p:cNvSpPr/>
           <p:nvPr/>
         </p:nvSpPr>
@@ -6986,7 +6943,7 @@
       </p:sp>
       <p:sp>
         <p:nvSpPr>
-          <p:cNvPr id="47" name="Rectangle 46"/>
+          <p:cNvPr id="46" name="Rectangle 45"/>
           <p:cNvSpPr/>
           <p:nvPr/>
         </p:nvSpPr>
@@ -7047,7 +7004,7 @@
       </p:sp>
       <p:sp>
         <p:nvSpPr>
-          <p:cNvPr id="48" name="Rectangle 47"/>
+          <p:cNvPr id="47" name="Rectangle 46"/>
           <p:cNvSpPr/>
           <p:nvPr/>
         </p:nvSpPr>
@@ -7091,7 +7048,7 @@
       </p:sp>
       <p:sp>
         <p:nvSpPr>
-          <p:cNvPr id="49" name="Oval 48"/>
+          <p:cNvPr id="48" name="Oval 47"/>
           <p:cNvSpPr/>
           <p:nvPr/>
         </p:nvSpPr>
@@ -7154,7 +7111,7 @@
       </p:sp>
       <p:sp>
         <p:nvSpPr>
-          <p:cNvPr id="50" name="TextBox 49"/>
+          <p:cNvPr id="49" name="TextBox 48"/>
           <p:cNvSpPr txBox="1"/>
           <p:nvPr/>
         </p:nvSpPr>
@@ -7297,7 +7254,7 @@
       </p:sp>
       <p:sp>
         <p:nvSpPr>
-          <p:cNvPr id="51" name="Oval 50"/>
+          <p:cNvPr id="50" name="Oval 49"/>
           <p:cNvSpPr/>
           <p:nvPr/>
         </p:nvSpPr>
@@ -7360,7 +7317,7 @@
       </p:sp>
       <p:sp>
         <p:nvSpPr>
-          <p:cNvPr id="52" name="TextBox 51"/>
+          <p:cNvPr id="51" name="TextBox 50"/>
           <p:cNvSpPr txBox="1"/>
           <p:nvPr/>
         </p:nvSpPr>
@@ -7483,7 +7440,7 @@
       </p:sp>
       <p:sp>
         <p:nvSpPr>
-          <p:cNvPr id="53" name="Oval 52"/>
+          <p:cNvPr id="52" name="Oval 51"/>
           <p:cNvSpPr/>
           <p:nvPr/>
         </p:nvSpPr>
@@ -7546,7 +7503,7 @@
       </p:sp>
       <p:sp>
         <p:nvSpPr>
-          <p:cNvPr id="54" name="TextBox 53"/>
+          <p:cNvPr id="53" name="TextBox 52"/>
           <p:cNvSpPr txBox="1"/>
           <p:nvPr/>
         </p:nvSpPr>
@@ -7669,7 +7626,7 @@
       </p:sp>
       <p:sp>
         <p:nvSpPr>
-          <p:cNvPr id="55" name="Oval 54"/>
+          <p:cNvPr id="54" name="Oval 53"/>
           <p:cNvSpPr/>
           <p:nvPr/>
         </p:nvSpPr>
@@ -7732,7 +7689,7 @@
       </p:sp>
       <p:sp>
         <p:nvSpPr>
-          <p:cNvPr id="56" name="TextBox 55"/>
+          <p:cNvPr id="55" name="TextBox 54"/>
           <p:cNvSpPr txBox="1"/>
           <p:nvPr/>
         </p:nvSpPr>
@@ -7835,7 +7792,7 @@
       </p:sp>
       <p:sp>
         <p:nvSpPr>
-          <p:cNvPr id="57" name="TextBox 56"/>
+          <p:cNvPr id="56" name="TextBox 55"/>
           <p:cNvSpPr txBox="1"/>
           <p:nvPr/>
         </p:nvSpPr>
@@ -14921,7 +14878,7 @@
                 <a:latin typeface="微软雅黑"/>
                 <a:ea typeface="微软雅黑"/>
               </a:rPr>
-              <a:t>这把阶段 2 的第一件事定死了:先量形状数量与 workspace 膨胀,再决定走「对齐上游 ALWAYS 语义」还是「SGLang 式 packed varlen(graph key 只按总 token 数,天然压制形状数量)」—— 而不是先写实现。</a:t>
+              <a:t>这把阶段 2 的第一件事定死了:先量形状数量与 workspace 膨胀,再在两条路线里选 —— 「对齐上游」按 token 总数分档捕获、运行时用批内最长请求的长度挑图并补齐(上游称后端上报 ALWAYS、按 max_query_len 派发);「SGLang 式」把各请求 token 紧挨着打包,图只按总 token 数分档,图少且无补齐浪费,但要改数据布局。先量再选,而不是先写实现。</a:t>
             </a:r>
           </a:p>
         </p:txBody>
